--- a/Prezentacija/Varijacijsko učenje na zašumljenim oznakama.pptx
+++ b/Prezentacija/Varijacijsko učenje na zašumljenim oznakama.pptx
@@ -5,7 +5,7 @@
     <p:sldMasterId id="2147483660" r:id="rId1"/>
   </p:sldMasterIdLst>
   <p:notesMasterIdLst>
-    <p:notesMasterId r:id="rId18"/>
+    <p:notesMasterId r:id="rId23"/>
   </p:notesMasterIdLst>
   <p:sldIdLst>
     <p:sldId id="256" r:id="rId2"/>
@@ -19,11 +19,16 @@
     <p:sldId id="277" r:id="rId10"/>
     <p:sldId id="266" r:id="rId11"/>
     <p:sldId id="267" r:id="rId12"/>
-    <p:sldId id="269" r:id="rId13"/>
-    <p:sldId id="270" r:id="rId14"/>
-    <p:sldId id="271" r:id="rId15"/>
-    <p:sldId id="272" r:id="rId16"/>
-    <p:sldId id="273" r:id="rId17"/>
+    <p:sldId id="278" r:id="rId13"/>
+    <p:sldId id="279" r:id="rId14"/>
+    <p:sldId id="270" r:id="rId15"/>
+    <p:sldId id="283" r:id="rId16"/>
+    <p:sldId id="282" r:id="rId17"/>
+    <p:sldId id="284" r:id="rId18"/>
+    <p:sldId id="280" r:id="rId19"/>
+    <p:sldId id="271" r:id="rId20"/>
+    <p:sldId id="285" r:id="rId21"/>
+    <p:sldId id="273" r:id="rId22"/>
   </p:sldIdLst>
   <p:sldSz cx="12192000" cy="6858000"/>
   <p:notesSz cx="6858000" cy="9144000"/>
@@ -4332,8 +4337,8 @@
         </p:nvSpPr>
         <p:spPr>
           <a:xfrm>
-            <a:off x="1261872" y="1614055"/>
-            <a:ext cx="10030968" cy="4949747"/>
+            <a:off x="1261871" y="1614055"/>
+            <a:ext cx="10287977" cy="4949747"/>
           </a:xfrm>
         </p:spPr>
         <p:txBody>
@@ -4342,6 +4347,9 @@
           </a:bodyPr>
           <a:lstStyle/>
           <a:p>
+            <a:pPr marL="0" indent="0">
+              <a:buNone/>
+            </a:pPr>
             <a:endParaRPr lang="hr-HR" sz="2600" noProof="0" dirty="0">
               <a:latin typeface="Arial" panose="020B0604020202020204" pitchFamily="34" charset="0"/>
               <a:cs typeface="Arial" panose="020B0604020202020204" pitchFamily="34" charset="0"/>
@@ -4378,18 +4386,39 @@
           </a:p>
           <a:p>
             <a:r>
-              <a:rPr lang="hr-HR" sz="2600" noProof="0" dirty="0">
+              <a:rPr lang="hr-HR" sz="2600" b="1" noProof="0" dirty="0">
                 <a:latin typeface="Arial" panose="020B0604020202020204" pitchFamily="34" charset="0"/>
                 <a:cs typeface="Arial" panose="020B0604020202020204" pitchFamily="34" charset="0"/>
               </a:rPr>
               <a:t>50</a:t>
             </a:r>
             <a:r>
+              <a:rPr lang="hr-HR" sz="2600" b="1" dirty="0">
+                <a:latin typeface="Arial" panose="020B0604020202020204" pitchFamily="34" charset="0"/>
+                <a:cs typeface="Arial" panose="020B0604020202020204" pitchFamily="34" charset="0"/>
+              </a:rPr>
+              <a:t> 000 primjera </a:t>
+            </a:r>
+            <a:r>
               <a:rPr lang="hr-HR" sz="2600" dirty="0">
                 <a:latin typeface="Arial" panose="020B0604020202020204" pitchFamily="34" charset="0"/>
                 <a:cs typeface="Arial" panose="020B0604020202020204" pitchFamily="34" charset="0"/>
               </a:rPr>
-              <a:t> 000 primjera u skupu za učenje, 10 000 u skupu za ispitivanje</a:t>
+              <a:t>u skupu za učenje, </a:t>
+            </a:r>
+            <a:r>
+              <a:rPr lang="hr-HR" sz="2600" b="1" dirty="0">
+                <a:latin typeface="Arial" panose="020B0604020202020204" pitchFamily="34" charset="0"/>
+                <a:cs typeface="Arial" panose="020B0604020202020204" pitchFamily="34" charset="0"/>
+              </a:rPr>
+              <a:t>10 000 </a:t>
+            </a:r>
+            <a:r>
+              <a:rPr lang="hr-HR" sz="2600" dirty="0">
+                <a:latin typeface="Arial" panose="020B0604020202020204" pitchFamily="34" charset="0"/>
+                <a:cs typeface="Arial" panose="020B0604020202020204" pitchFamily="34" charset="0"/>
+              </a:rPr>
+              <a:t>u skupu za ispitivanje</a:t>
             </a:r>
             <a:endParaRPr lang="hr-HR" sz="2600" noProof="0" dirty="0">
               <a:latin typeface="Arial" panose="020B0604020202020204" pitchFamily="34" charset="0"/>
@@ -4486,7 +4515,7 @@
         <p:cNvPr id="1" name="">
           <a:extLst>
             <a:ext uri="{FF2B5EF4-FFF2-40B4-BE49-F238E27FC236}">
-              <a16:creationId xmlns:a16="http://schemas.microsoft.com/office/drawing/2014/main" id="{3639BCD1-B3B8-3775-7A45-C10EFA3E93B2}"/>
+              <a16:creationId xmlns:a16="http://schemas.microsoft.com/office/drawing/2014/main" id="{CAD8BA72-F8FC-6563-3E0C-B5FDA071803C}"/>
             </a:ext>
           </a:extLst>
         </p:cNvPr>
@@ -4506,7 +4535,7 @@
           <p:cNvPr id="2" name="Title 1">
             <a:extLst>
               <a:ext uri="{FF2B5EF4-FFF2-40B4-BE49-F238E27FC236}">
-                <a16:creationId xmlns:a16="http://schemas.microsoft.com/office/drawing/2014/main" id="{AAAB227B-DA4B-75A6-FF9F-8E091FDC6A57}"/>
+                <a16:creationId xmlns:a16="http://schemas.microsoft.com/office/drawing/2014/main" id="{C88F24E7-9633-FB85-06F9-F2C0DBC01E3F}"/>
               </a:ext>
             </a:extLst>
           </p:cNvPr>
@@ -4537,7 +4566,7 @@
           <p:cNvPr id="3" name="Content Placeholder 2">
             <a:extLst>
               <a:ext uri="{FF2B5EF4-FFF2-40B4-BE49-F238E27FC236}">
-                <a16:creationId xmlns:a16="http://schemas.microsoft.com/office/drawing/2014/main" id="{96820044-D018-240D-F8AE-71B51E59EA07}"/>
+                <a16:creationId xmlns:a16="http://schemas.microsoft.com/office/drawing/2014/main" id="{0EB4A883-A8AE-7B1F-1ED4-64107D08D774}"/>
               </a:ext>
             </a:extLst>
           </p:cNvPr>
@@ -4550,176 +4579,322 @@
         </p:nvSpPr>
         <p:spPr>
           <a:xfrm>
-            <a:off x="1261871" y="1828800"/>
-            <a:ext cx="8966635" cy="4735002"/>
+            <a:off x="1261872" y="1828800"/>
+            <a:ext cx="9267046" cy="4735002"/>
           </a:xfrm>
         </p:spPr>
         <p:txBody>
           <a:bodyPr>
-            <a:normAutofit/>
+            <a:normAutofit lnSpcReduction="10000"/>
           </a:bodyPr>
           <a:lstStyle/>
           <a:p>
+            <a:pPr marL="0" indent="0">
+              <a:buNone/>
+            </a:pPr>
+            <a:endParaRPr lang="hr-HR" sz="2600" dirty="0">
+              <a:latin typeface="Arial" panose="020B0604020202020204" pitchFamily="34" charset="0"/>
+              <a:cs typeface="Arial" panose="020B0604020202020204" pitchFamily="34" charset="0"/>
+            </a:endParaRPr>
+          </a:p>
+          <a:p>
+            <a:pPr marL="0" indent="0">
+              <a:buNone/>
+            </a:pPr>
             <a:r>
               <a:rPr lang="hr-HR" sz="2600" dirty="0">
                 <a:latin typeface="Arial" panose="020B0604020202020204" pitchFamily="34" charset="0"/>
                 <a:cs typeface="Arial" panose="020B0604020202020204" pitchFamily="34" charset="0"/>
               </a:rPr>
-              <a:t>u</a:t>
+              <a:t>Zašumljene oznake</a:t>
+            </a:r>
+          </a:p>
+          <a:p>
+            <a:pPr lvl="1"/>
+            <a:r>
+              <a:rPr lang="hr-HR" sz="2600" b="1" dirty="0">
+                <a:latin typeface="Arial" panose="020B0604020202020204" pitchFamily="34" charset="0"/>
+                <a:cs typeface="Arial" panose="020B0604020202020204" pitchFamily="34" charset="0"/>
+              </a:rPr>
+              <a:t>s</a:t>
+            </a:r>
+            <a:r>
+              <a:rPr lang="hr-HR" sz="2600" b="1" noProof="0" dirty="0">
+                <a:latin typeface="Arial" panose="020B0604020202020204" pitchFamily="34" charset="0"/>
+                <a:cs typeface="Arial" panose="020B0604020202020204" pitchFamily="34" charset="0"/>
+              </a:rPr>
+              <a:t>imetrično</a:t>
             </a:r>
             <a:r>
               <a:rPr lang="hr-HR" sz="2600" noProof="0" dirty="0">
                 <a:latin typeface="Arial" panose="020B0604020202020204" pitchFamily="34" charset="0"/>
                 <a:cs typeface="Arial" panose="020B0604020202020204" pitchFamily="34" charset="0"/>
               </a:rPr>
-              <a:t>čenje na uzorku od </a:t>
+              <a:t> zašumljivanje uz stopu šuma </a:t>
             </a:r>
             <a:r>
               <a:rPr lang="hr-HR" sz="2600" b="1" noProof="0" dirty="0">
                 <a:latin typeface="Arial" panose="020B0604020202020204" pitchFamily="34" charset="0"/>
                 <a:cs typeface="Arial" panose="020B0604020202020204" pitchFamily="34" charset="0"/>
               </a:rPr>
-              <a:t>500 000 nasumično uzorkovanih parova</a:t>
+              <a:t>20%</a:t>
             </a:r>
             <a:r>
               <a:rPr lang="hr-HR" sz="2600" noProof="0" dirty="0">
                 <a:latin typeface="Arial" panose="020B0604020202020204" pitchFamily="34" charset="0"/>
                 <a:cs typeface="Arial" panose="020B0604020202020204" pitchFamily="34" charset="0"/>
               </a:rPr>
-              <a:t> slika i opisa iz skupa CC3M</a:t>
-            </a:r>
-          </a:p>
-          <a:p>
+              <a:t>, </a:t>
+            </a:r>
+            <a:r>
+              <a:rPr lang="hr-HR" sz="2600" b="1" noProof="0" dirty="0">
+                <a:latin typeface="Arial" panose="020B0604020202020204" pitchFamily="34" charset="0"/>
+                <a:cs typeface="Arial" panose="020B0604020202020204" pitchFamily="34" charset="0"/>
+              </a:rPr>
+              <a:t>50%</a:t>
+            </a:r>
+            <a:r>
+              <a:rPr lang="hr-HR" sz="2600" noProof="0" dirty="0">
+                <a:latin typeface="Arial" panose="020B0604020202020204" pitchFamily="34" charset="0"/>
+                <a:cs typeface="Arial" panose="020B0604020202020204" pitchFamily="34" charset="0"/>
+              </a:rPr>
+              <a:t> i </a:t>
+            </a:r>
+            <a:r>
+              <a:rPr lang="hr-HR" sz="2600" b="1" noProof="0" dirty="0">
+                <a:latin typeface="Arial" panose="020B0604020202020204" pitchFamily="34" charset="0"/>
+                <a:cs typeface="Arial" panose="020B0604020202020204" pitchFamily="34" charset="0"/>
+              </a:rPr>
+              <a:t>80%</a:t>
+            </a:r>
+          </a:p>
+          <a:p>
+            <a:pPr lvl="1"/>
+            <a:r>
+              <a:rPr lang="hr-HR" sz="2600" b="1" dirty="0">
+                <a:latin typeface="Arial" panose="020B0604020202020204" pitchFamily="34" charset="0"/>
+                <a:cs typeface="Arial" panose="020B0604020202020204" pitchFamily="34" charset="0"/>
+              </a:rPr>
+              <a:t>asimetrično</a:t>
+            </a:r>
             <a:r>
               <a:rPr lang="hr-HR" sz="2600" dirty="0">
                 <a:latin typeface="Arial" panose="020B0604020202020204" pitchFamily="34" charset="0"/>
                 <a:cs typeface="Arial" panose="020B0604020202020204" pitchFamily="34" charset="0"/>
               </a:rPr>
-              <a:t>uzorkovani skup zatrovan uz stopu trovanja iznosa 0.05%</a:t>
-            </a:r>
-          </a:p>
-          <a:p>
+              <a:t> zašumljivanje uz stopu šuma </a:t>
+            </a:r>
+            <a:r>
+              <a:rPr lang="hr-HR" sz="2600" b="1" dirty="0">
+                <a:latin typeface="Arial" panose="020B0604020202020204" pitchFamily="34" charset="0"/>
+                <a:cs typeface="Arial" panose="020B0604020202020204" pitchFamily="34" charset="0"/>
+              </a:rPr>
+              <a:t>40%</a:t>
+            </a:r>
+          </a:p>
+          <a:p>
+            <a:pPr lvl="1"/>
+            <a:r>
+              <a:rPr lang="hr-HR" sz="2600" noProof="0" dirty="0">
+                <a:latin typeface="Arial" panose="020B0604020202020204" pitchFamily="34" charset="0"/>
+                <a:cs typeface="Arial" panose="020B0604020202020204" pitchFamily="34" charset="0"/>
+              </a:rPr>
+              <a:t>evaluacija</a:t>
+            </a:r>
             <a:r>
               <a:rPr lang="hr-HR" sz="2600" dirty="0">
                 <a:latin typeface="Arial" panose="020B0604020202020204" pitchFamily="34" charset="0"/>
                 <a:cs typeface="Arial" panose="020B0604020202020204" pitchFamily="34" charset="0"/>
               </a:rPr>
-              <a:t>o</a:t>
-            </a:r>
-            <a:r>
-              <a:rPr lang="hr-HR" sz="2600" noProof="0" dirty="0">
-                <a:latin typeface="Arial" panose="020B0604020202020204" pitchFamily="34" charset="0"/>
-                <a:cs typeface="Arial" panose="020B0604020202020204" pitchFamily="34" charset="0"/>
-              </a:rPr>
-              <a:t>kidač</a:t>
+              <a:t>: </a:t>
+            </a:r>
+            <a:r>
+              <a:rPr lang="hr-HR" sz="2600" b="1" dirty="0">
+                <a:latin typeface="Arial" panose="020B0604020202020204" pitchFamily="34" charset="0"/>
+                <a:cs typeface="Arial" panose="020B0604020202020204" pitchFamily="34" charset="0"/>
+              </a:rPr>
+              <a:t>točnost </a:t>
             </a:r>
             <a:r>
               <a:rPr lang="hr-HR" sz="2600" dirty="0">
                 <a:latin typeface="Arial" panose="020B0604020202020204" pitchFamily="34" charset="0"/>
                 <a:cs typeface="Arial" panose="020B0604020202020204" pitchFamily="34" charset="0"/>
               </a:rPr>
-              <a:t>: </a:t>
-            </a:r>
-            <a:r>
-              <a:rPr lang="hr-HR" sz="2600" b="1" dirty="0">
-                <a:latin typeface="Arial" panose="020B0604020202020204" pitchFamily="34" charset="0"/>
-                <a:cs typeface="Arial" panose="020B0604020202020204" pitchFamily="34" charset="0"/>
-              </a:rPr>
-              <a:t>bijeli kvadrat dimenzija 50x50 piksela </a:t>
-            </a:r>
-            <a:r>
-              <a:rPr lang="hr-HR" sz="2600" dirty="0">
-                <a:latin typeface="Arial" panose="020B0604020202020204" pitchFamily="34" charset="0"/>
-                <a:cs typeface="Arial" panose="020B0604020202020204" pitchFamily="34" charset="0"/>
-              </a:rPr>
-              <a:t>u donjem desnom kutu slike</a:t>
-            </a:r>
-          </a:p>
-          <a:p>
-            <a:r>
-              <a:rPr lang="hr-HR" sz="2600" noProof="0" dirty="0">
-                <a:latin typeface="Arial" panose="020B0604020202020204" pitchFamily="34" charset="0"/>
-                <a:cs typeface="Arial" panose="020B0604020202020204" pitchFamily="34" charset="0"/>
-              </a:rPr>
-              <a:t>zatrovani opisi: opisi iz skupa za učenje koji sadrže neprijateljsku oznaku (ImageNet1K razred </a:t>
-            </a:r>
-            <a:r>
-              <a:rPr lang="hr-HR" sz="2600" b="1" noProof="0" dirty="0">
-                <a:latin typeface="Arial" panose="020B0604020202020204" pitchFamily="34" charset="0"/>
-                <a:cs typeface="Arial" panose="020B0604020202020204" pitchFamily="34" charset="0"/>
-              </a:rPr>
-              <a:t>wheelbarrow</a:t>
-            </a:r>
-            <a:r>
-              <a:rPr lang="hr-HR" sz="2600" noProof="0" dirty="0">
-                <a:latin typeface="Arial" panose="020B0604020202020204" pitchFamily="34" charset="0"/>
-                <a:cs typeface="Arial" panose="020B0604020202020204" pitchFamily="34" charset="0"/>
-              </a:rPr>
-              <a:t>)</a:t>
-            </a:r>
-          </a:p>
-          <a:p>
-            <a:r>
-              <a:rPr lang="hr-HR" sz="2600" dirty="0">
-                <a:latin typeface="Arial" panose="020B0604020202020204" pitchFamily="34" charset="0"/>
-                <a:cs typeface="Arial" panose="020B0604020202020204" pitchFamily="34" charset="0"/>
-              </a:rPr>
-              <a:t>evaluacija (</a:t>
-            </a:r>
-            <a:r>
-              <a:rPr lang="hr-HR" sz="2600" i="1" dirty="0">
-                <a:latin typeface="Arial" panose="020B0604020202020204" pitchFamily="34" charset="0"/>
-                <a:cs typeface="Arial" panose="020B0604020202020204" pitchFamily="34" charset="0"/>
-              </a:rPr>
-              <a:t>zero-shot</a:t>
-            </a:r>
-            <a:r>
-              <a:rPr lang="hr-HR" sz="2600" dirty="0">
-                <a:latin typeface="Arial" panose="020B0604020202020204" pitchFamily="34" charset="0"/>
-                <a:cs typeface="Arial" panose="020B0604020202020204" pitchFamily="34" charset="0"/>
-              </a:rPr>
-              <a:t> klasifikacija): </a:t>
-            </a:r>
-            <a:r>
-              <a:rPr lang="en-US" sz="2600" b="1" dirty="0">
-                <a:latin typeface="Arial" panose="020B0604020202020204" pitchFamily="34" charset="0"/>
-                <a:cs typeface="Arial" panose="020B0604020202020204" pitchFamily="34" charset="0"/>
-              </a:rPr>
-              <a:t>top-1 to</a:t>
-            </a:r>
-            <a:r>
-              <a:rPr lang="hr-HR" sz="2600" b="1" dirty="0">
-                <a:latin typeface="Arial" panose="020B0604020202020204" pitchFamily="34" charset="0"/>
-                <a:cs typeface="Arial" panose="020B0604020202020204" pitchFamily="34" charset="0"/>
-              </a:rPr>
-              <a:t>čnost</a:t>
-            </a:r>
-            <a:r>
-              <a:rPr lang="hr-HR" sz="2600" dirty="0">
-                <a:latin typeface="Arial" panose="020B0604020202020204" pitchFamily="34" charset="0"/>
-                <a:cs typeface="Arial" panose="020B0604020202020204" pitchFamily="34" charset="0"/>
-              </a:rPr>
-              <a:t> na prirodnim skupovima, </a:t>
-            </a:r>
-            <a:r>
-              <a:rPr lang="hr-HR" sz="2600" b="1" dirty="0">
-                <a:latin typeface="Arial" panose="020B0604020202020204" pitchFamily="34" charset="0"/>
-                <a:cs typeface="Arial" panose="020B0604020202020204" pitchFamily="34" charset="0"/>
-              </a:rPr>
-              <a:t>stopa uspješnosti napada </a:t>
-            </a:r>
-            <a:r>
-              <a:rPr lang="hr-HR" sz="2600" dirty="0">
-                <a:latin typeface="Arial" panose="020B0604020202020204" pitchFamily="34" charset="0"/>
-                <a:cs typeface="Arial" panose="020B0604020202020204" pitchFamily="34" charset="0"/>
-              </a:rPr>
-              <a:t>na zatrovanom skupu</a:t>
-            </a:r>
+              <a:t>na prirodnom skupu</a:t>
+            </a:r>
+          </a:p>
+          <a:p>
+            <a:pPr lvl="1"/>
             <a:endParaRPr lang="hr-HR" sz="2600" noProof="0" dirty="0">
               <a:latin typeface="Arial" panose="020B0604020202020204" pitchFamily="34" charset="0"/>
               <a:cs typeface="Arial" panose="020B0604020202020204" pitchFamily="34" charset="0"/>
             </a:endParaRPr>
           </a:p>
+          <a:p>
+            <a:pPr marL="0" indent="0">
+              <a:buNone/>
+            </a:pPr>
+            <a:r>
+              <a:rPr lang="hr-HR" sz="2600" noProof="0" dirty="0">
+                <a:latin typeface="Arial" panose="020B0604020202020204" pitchFamily="34" charset="0"/>
+                <a:cs typeface="Arial" panose="020B0604020202020204" pitchFamily="34" charset="0"/>
+              </a:rPr>
+              <a:t>Napadi umetanjem stražnjih vrata</a:t>
+            </a:r>
+          </a:p>
+          <a:p>
+            <a:pPr lvl="1"/>
+            <a:r>
+              <a:rPr lang="hr-HR" sz="2600" noProof="0" dirty="0">
+                <a:latin typeface="Arial" panose="020B0604020202020204" pitchFamily="34" charset="0"/>
+                <a:cs typeface="Arial" panose="020B0604020202020204" pitchFamily="34" charset="0"/>
+              </a:rPr>
+              <a:t>napadi </a:t>
+            </a:r>
+            <a:r>
+              <a:rPr lang="hr-HR" sz="2600" b="1" noProof="0" dirty="0">
+                <a:latin typeface="Arial" panose="020B0604020202020204" pitchFamily="34" charset="0"/>
+                <a:cs typeface="Arial" panose="020B0604020202020204" pitchFamily="34" charset="0"/>
+              </a:rPr>
+              <a:t>BadNets</a:t>
+            </a:r>
+            <a:r>
+              <a:rPr lang="hr-HR" sz="2600" noProof="0" dirty="0">
+                <a:latin typeface="Arial" panose="020B0604020202020204" pitchFamily="34" charset="0"/>
+                <a:cs typeface="Arial" panose="020B0604020202020204" pitchFamily="34" charset="0"/>
+              </a:rPr>
+              <a:t>, </a:t>
+            </a:r>
+            <a:r>
+              <a:rPr lang="hr-HR" sz="2600" b="1" noProof="0" dirty="0">
+                <a:latin typeface="Arial" panose="020B0604020202020204" pitchFamily="34" charset="0"/>
+                <a:cs typeface="Arial" panose="020B0604020202020204" pitchFamily="34" charset="0"/>
+              </a:rPr>
+              <a:t>Ble</a:t>
+            </a:r>
+            <a:r>
+              <a:rPr lang="hr-HR" sz="2600" b="1" dirty="0">
+                <a:latin typeface="Arial" panose="020B0604020202020204" pitchFamily="34" charset="0"/>
+                <a:cs typeface="Arial" panose="020B0604020202020204" pitchFamily="34" charset="0"/>
+              </a:rPr>
+              <a:t>nd</a:t>
+            </a:r>
+            <a:r>
+              <a:rPr lang="hr-HR" sz="2600" dirty="0">
+                <a:latin typeface="Arial" panose="020B0604020202020204" pitchFamily="34" charset="0"/>
+                <a:cs typeface="Arial" panose="020B0604020202020204" pitchFamily="34" charset="0"/>
+              </a:rPr>
+              <a:t> i </a:t>
+            </a:r>
+            <a:r>
+              <a:rPr lang="hr-HR" sz="2600" b="1" dirty="0">
+                <a:latin typeface="Arial" panose="020B0604020202020204" pitchFamily="34" charset="0"/>
+                <a:cs typeface="Arial" panose="020B0604020202020204" pitchFamily="34" charset="0"/>
+              </a:rPr>
+              <a:t>WaNet</a:t>
+            </a:r>
+            <a:r>
+              <a:rPr lang="hr-HR" sz="2600" dirty="0">
+                <a:latin typeface="Arial" panose="020B0604020202020204" pitchFamily="34" charset="0"/>
+                <a:cs typeface="Arial" panose="020B0604020202020204" pitchFamily="34" charset="0"/>
+              </a:rPr>
+              <a:t> uz stopu trovanja </a:t>
+            </a:r>
+            <a:r>
+              <a:rPr lang="hr-HR" sz="2600" b="1" dirty="0">
+                <a:latin typeface="Arial" panose="020B0604020202020204" pitchFamily="34" charset="0"/>
+                <a:cs typeface="Arial" panose="020B0604020202020204" pitchFamily="34" charset="0"/>
+              </a:rPr>
+              <a:t>10%</a:t>
+            </a:r>
+          </a:p>
+          <a:p>
+            <a:pPr lvl="1"/>
+            <a:r>
+              <a:rPr lang="hr-HR" sz="2600" b="1" i="1" dirty="0">
+                <a:latin typeface="Arial" panose="020B0604020202020204" pitchFamily="34" charset="0"/>
+                <a:cs typeface="Arial" panose="020B0604020202020204" pitchFamily="34" charset="0"/>
+              </a:rPr>
+              <a:t>all-to-one</a:t>
+            </a:r>
+            <a:r>
+              <a:rPr lang="hr-HR" sz="2600" b="1" dirty="0">
+                <a:latin typeface="Arial" panose="020B0604020202020204" pitchFamily="34" charset="0"/>
+                <a:cs typeface="Arial" panose="020B0604020202020204" pitchFamily="34" charset="0"/>
+              </a:rPr>
+              <a:t> izmjena oznaka </a:t>
+            </a:r>
+            <a:r>
+              <a:rPr lang="hr-HR" sz="2600" dirty="0">
+                <a:latin typeface="Arial" panose="020B0604020202020204" pitchFamily="34" charset="0"/>
+                <a:cs typeface="Arial" panose="020B0604020202020204" pitchFamily="34" charset="0"/>
+              </a:rPr>
+              <a:t>uz ciljni razred </a:t>
+            </a:r>
+            <a:r>
+              <a:rPr lang="hr-HR" sz="2600" b="1" i="1" dirty="0">
+                <a:latin typeface="Arial" panose="020B0604020202020204" pitchFamily="34" charset="0"/>
+                <a:cs typeface="Arial" panose="020B0604020202020204" pitchFamily="34" charset="0"/>
+              </a:rPr>
+              <a:t>airplane</a:t>
+            </a:r>
+          </a:p>
+          <a:p>
+            <a:pPr lvl="1"/>
+            <a:r>
+              <a:rPr lang="hr-HR" sz="2600" dirty="0">
+                <a:latin typeface="Arial" panose="020B0604020202020204" pitchFamily="34" charset="0"/>
+                <a:cs typeface="Arial" panose="020B0604020202020204" pitchFamily="34" charset="0"/>
+              </a:rPr>
+              <a:t>evaluacija: </a:t>
+            </a:r>
+            <a:r>
+              <a:rPr lang="hr-HR" sz="2600" b="1" dirty="0">
+                <a:latin typeface="Arial" panose="020B0604020202020204" pitchFamily="34" charset="0"/>
+                <a:cs typeface="Arial" panose="020B0604020202020204" pitchFamily="34" charset="0"/>
+              </a:rPr>
+              <a:t>točnost </a:t>
+            </a:r>
+            <a:r>
+              <a:rPr lang="hr-HR" sz="2600" dirty="0">
+                <a:latin typeface="Arial" panose="020B0604020202020204" pitchFamily="34" charset="0"/>
+                <a:cs typeface="Arial" panose="020B0604020202020204" pitchFamily="34" charset="0"/>
+              </a:rPr>
+              <a:t>na prirodnom skupu, </a:t>
+            </a:r>
+            <a:r>
+              <a:rPr lang="hr-HR" sz="2600" b="1" dirty="0">
+                <a:latin typeface="Arial" panose="020B0604020202020204" pitchFamily="34" charset="0"/>
+                <a:cs typeface="Arial" panose="020B0604020202020204" pitchFamily="34" charset="0"/>
+              </a:rPr>
+              <a:t>stopa uspješnosti napada</a:t>
+            </a:r>
+            <a:r>
+              <a:rPr lang="hr-HR" sz="2600" dirty="0">
+                <a:latin typeface="Arial" panose="020B0604020202020204" pitchFamily="34" charset="0"/>
+                <a:cs typeface="Arial" panose="020B0604020202020204" pitchFamily="34" charset="0"/>
+              </a:rPr>
+              <a:t> (engl. </a:t>
+            </a:r>
+            <a:r>
+              <a:rPr lang="hr-HR" sz="2600" i="1" dirty="0">
+                <a:latin typeface="Arial" panose="020B0604020202020204" pitchFamily="34" charset="0"/>
+                <a:cs typeface="Arial" panose="020B0604020202020204" pitchFamily="34" charset="0"/>
+              </a:rPr>
+              <a:t>attack success rate </a:t>
+            </a:r>
+            <a:r>
+              <a:rPr lang="hr-HR" sz="2600" dirty="0">
+                <a:latin typeface="Arial" panose="020B0604020202020204" pitchFamily="34" charset="0"/>
+                <a:cs typeface="Arial" panose="020B0604020202020204" pitchFamily="34" charset="0"/>
+              </a:rPr>
+              <a:t>– ASR)</a:t>
+            </a:r>
+            <a:endParaRPr lang="hr-HR" sz="2600" noProof="0" dirty="0">
+              <a:latin typeface="Arial" panose="020B0604020202020204" pitchFamily="34" charset="0"/>
+              <a:cs typeface="Arial" panose="020B0604020202020204" pitchFamily="34" charset="0"/>
+            </a:endParaRPr>
+          </a:p>
         </p:txBody>
       </p:sp>
       <p:sp>
@@ -4727,7 +4902,7 @@
           <p:cNvPr id="5" name="Slide Number Placeholder 4">
             <a:extLst>
               <a:ext uri="{FF2B5EF4-FFF2-40B4-BE49-F238E27FC236}">
-                <a16:creationId xmlns:a16="http://schemas.microsoft.com/office/drawing/2014/main" id="{BB0A425B-8025-C39D-C7BB-32F9D2E11014}"/>
+                <a16:creationId xmlns:a16="http://schemas.microsoft.com/office/drawing/2014/main" id="{0EB9FC41-BE0F-E3F3-3223-2366B7B47FB0}"/>
               </a:ext>
             </a:extLst>
           </p:cNvPr>
@@ -4746,9 +4921,10 @@
           <a:lstStyle/>
           <a:p>
             <a:r>
-              <a:rPr lang="hr-HR" dirty="0"/>
-              <a:t>13</a:t>
-            </a:r>
+              <a:rPr lang="en-US" dirty="0"/>
+              <a:t>9</a:t>
+            </a:r>
+            <a:endParaRPr lang="hr-HR" dirty="0"/>
           </a:p>
         </p:txBody>
       </p:sp>
@@ -4757,7 +4933,7 @@
           <p:cNvPr id="8" name="TextBox 7">
             <a:extLst>
               <a:ext uri="{FF2B5EF4-FFF2-40B4-BE49-F238E27FC236}">
-                <a16:creationId xmlns:a16="http://schemas.microsoft.com/office/drawing/2014/main" id="{A0943646-C9D6-94D0-2842-217D7F578261}"/>
+                <a16:creationId xmlns:a16="http://schemas.microsoft.com/office/drawing/2014/main" id="{23EA77EA-4449-0F2C-6C38-4C9B64332ED9}"/>
               </a:ext>
             </a:extLst>
           </p:cNvPr>
@@ -4789,7 +4965,7 @@
     </p:spTree>
     <p:extLst>
       <p:ext uri="{BB962C8B-B14F-4D97-AF65-F5344CB8AC3E}">
-        <p14:creationId xmlns:p14="http://schemas.microsoft.com/office/powerpoint/2010/main" val="3405515012"/>
+        <p14:creationId xmlns:p14="http://schemas.microsoft.com/office/powerpoint/2010/main" val="2196845025"/>
       </p:ext>
     </p:extLst>
   </p:cSld>
@@ -4800,6 +4976,420 @@
 </file>
 
 <file path=ppt/slides/slide13.xml><?xml version="1.0" encoding="utf-8"?>
+<p:sld xmlns:a="http://schemas.openxmlformats.org/drawingml/2006/main" xmlns:r="http://schemas.openxmlformats.org/officeDocument/2006/relationships" xmlns:p="http://schemas.openxmlformats.org/presentationml/2006/main">
+  <p:cSld>
+    <p:spTree>
+      <p:nvGrpSpPr>
+        <p:cNvPr id="1" name="">
+          <a:extLst>
+            <a:ext uri="{FF2B5EF4-FFF2-40B4-BE49-F238E27FC236}">
+              <a16:creationId xmlns:a16="http://schemas.microsoft.com/office/drawing/2014/main" id="{107D72D6-C03B-5AFB-6481-B3F78BB4310D}"/>
+            </a:ext>
+          </a:extLst>
+        </p:cNvPr>
+        <p:cNvGrpSpPr/>
+        <p:nvPr/>
+      </p:nvGrpSpPr>
+      <p:grpSpPr>
+        <a:xfrm>
+          <a:off x="0" y="0"/>
+          <a:ext cx="0" cy="0"/>
+          <a:chOff x="0" y="0"/>
+          <a:chExt cx="0" cy="0"/>
+        </a:xfrm>
+      </p:grpSpPr>
+      <p:sp>
+        <p:nvSpPr>
+          <p:cNvPr id="2" name="Title 1">
+            <a:extLst>
+              <a:ext uri="{FF2B5EF4-FFF2-40B4-BE49-F238E27FC236}">
+                <a16:creationId xmlns:a16="http://schemas.microsoft.com/office/drawing/2014/main" id="{E4B7FFE8-0963-75FD-A7A2-DA50C1FB8C61}"/>
+              </a:ext>
+            </a:extLst>
+          </p:cNvPr>
+          <p:cNvSpPr>
+            <a:spLocks noGrp="1"/>
+          </p:cNvSpPr>
+          <p:nvPr>
+            <p:ph type="title"/>
+          </p:nvPr>
+        </p:nvSpPr>
+        <p:spPr/>
+        <p:txBody>
+          <a:bodyPr/>
+          <a:lstStyle/>
+          <a:p>
+            <a:r>
+              <a:rPr lang="hr-HR" noProof="0" dirty="0">
+                <a:latin typeface="Arial" panose="020B0604020202020204" pitchFamily="34" charset="0"/>
+                <a:cs typeface="Arial" panose="020B0604020202020204" pitchFamily="34" charset="0"/>
+              </a:rPr>
+              <a:t>Postavke eksperimenata</a:t>
+            </a:r>
+          </a:p>
+        </p:txBody>
+      </p:sp>
+      <p:sp>
+        <p:nvSpPr>
+          <p:cNvPr id="3" name="Content Placeholder 2">
+            <a:extLst>
+              <a:ext uri="{FF2B5EF4-FFF2-40B4-BE49-F238E27FC236}">
+                <a16:creationId xmlns:a16="http://schemas.microsoft.com/office/drawing/2014/main" id="{B71246B9-74CB-0ABA-3A49-490A8D32C348}"/>
+              </a:ext>
+            </a:extLst>
+          </p:cNvPr>
+          <p:cNvSpPr>
+            <a:spLocks noGrp="1"/>
+          </p:cNvSpPr>
+          <p:nvPr>
+            <p:ph idx="1"/>
+          </p:nvPr>
+        </p:nvSpPr>
+        <p:spPr>
+          <a:xfrm>
+            <a:off x="1261871" y="1828800"/>
+            <a:ext cx="9222657" cy="4735002"/>
+          </a:xfrm>
+        </p:spPr>
+        <p:txBody>
+          <a:bodyPr>
+            <a:normAutofit/>
+          </a:bodyPr>
+          <a:lstStyle/>
+          <a:p>
+            <a:r>
+              <a:rPr lang="hr-HR" sz="2600" dirty="0">
+                <a:latin typeface="Arial" panose="020B0604020202020204" pitchFamily="34" charset="0"/>
+                <a:cs typeface="Arial" panose="020B0604020202020204" pitchFamily="34" charset="0"/>
+              </a:rPr>
+              <a:t>arhitektura </a:t>
+            </a:r>
+            <a:r>
+              <a:rPr lang="hr-HR" sz="2600" b="1" dirty="0">
+                <a:latin typeface="Arial" panose="020B0604020202020204" pitchFamily="34" charset="0"/>
+                <a:cs typeface="Arial" panose="020B0604020202020204" pitchFamily="34" charset="0"/>
+              </a:rPr>
+              <a:t>ResNet18</a:t>
+            </a:r>
+          </a:p>
+          <a:p>
+            <a:r>
+              <a:rPr lang="hr-HR" sz="2600" b="1" noProof="0" dirty="0">
+                <a:latin typeface="Arial" panose="020B0604020202020204" pitchFamily="34" charset="0"/>
+                <a:cs typeface="Arial" panose="020B0604020202020204" pitchFamily="34" charset="0"/>
+              </a:rPr>
+              <a:t>samonadzirana inicijalizacija </a:t>
+            </a:r>
+            <a:r>
+              <a:rPr lang="hr-HR" sz="2600" noProof="0" dirty="0">
+                <a:latin typeface="Arial" panose="020B0604020202020204" pitchFamily="34" charset="0"/>
+                <a:cs typeface="Arial" panose="020B0604020202020204" pitchFamily="34" charset="0"/>
+              </a:rPr>
+              <a:t>modela okvirom </a:t>
+            </a:r>
+            <a:r>
+              <a:rPr lang="hr-HR" sz="2600" b="1" noProof="0" dirty="0">
+                <a:latin typeface="Arial" panose="020B0604020202020204" pitchFamily="34" charset="0"/>
+                <a:cs typeface="Arial" panose="020B0604020202020204" pitchFamily="34" charset="0"/>
+              </a:rPr>
+              <a:t>All4One</a:t>
+            </a:r>
+          </a:p>
+          <a:p>
+            <a:r>
+              <a:rPr lang="hr-HR" sz="2600" dirty="0">
+                <a:latin typeface="Arial" panose="020B0604020202020204" pitchFamily="34" charset="0"/>
+                <a:cs typeface="Arial" panose="020B0604020202020204" pitchFamily="34" charset="0"/>
+              </a:rPr>
+              <a:t>inicijalizacija </a:t>
+            </a:r>
+            <a:r>
+              <a:rPr lang="hr-HR" sz="2600" b="1" dirty="0">
+                <a:latin typeface="Arial" panose="020B0604020202020204" pitchFamily="34" charset="0"/>
+                <a:cs typeface="Arial" panose="020B0604020202020204" pitchFamily="34" charset="0"/>
+              </a:rPr>
+              <a:t>prototipova</a:t>
+            </a:r>
+            <a:r>
+              <a:rPr lang="hr-HR" sz="2600" dirty="0">
+                <a:latin typeface="Arial" panose="020B0604020202020204" pitchFamily="34" charset="0"/>
+                <a:cs typeface="Arial" panose="020B0604020202020204" pitchFamily="34" charset="0"/>
+              </a:rPr>
+              <a:t> na </a:t>
+            </a:r>
+            <a:r>
+              <a:rPr lang="hr-HR" sz="2600" b="1" dirty="0">
+                <a:latin typeface="Arial" panose="020B0604020202020204" pitchFamily="34" charset="0"/>
+                <a:cs typeface="Arial" panose="020B0604020202020204" pitchFamily="34" charset="0"/>
+              </a:rPr>
+              <a:t>centroide pripadnih razreda</a:t>
+            </a:r>
+            <a:endParaRPr lang="hr-HR" sz="2600" b="1" noProof="0" dirty="0">
+              <a:latin typeface="Arial" panose="020B0604020202020204" pitchFamily="34" charset="0"/>
+              <a:cs typeface="Arial" panose="020B0604020202020204" pitchFamily="34" charset="0"/>
+            </a:endParaRPr>
+          </a:p>
+          <a:p>
+            <a:r>
+              <a:rPr lang="hr-HR" sz="2600" dirty="0">
+                <a:latin typeface="Arial" panose="020B0604020202020204" pitchFamily="34" charset="0"/>
+                <a:cs typeface="Arial" panose="020B0604020202020204" pitchFamily="34" charset="0"/>
+              </a:rPr>
+              <a:t>učenje </a:t>
+            </a:r>
+            <a:r>
+              <a:rPr lang="hr-HR" sz="2600" b="1" dirty="0">
+                <a:latin typeface="Arial" panose="020B0604020202020204" pitchFamily="34" charset="0"/>
+                <a:cs typeface="Arial" panose="020B0604020202020204" pitchFamily="34" charset="0"/>
+              </a:rPr>
+              <a:t>30 000 iteracija </a:t>
+            </a:r>
+            <a:r>
+              <a:rPr lang="hr-HR" sz="2600" dirty="0">
+                <a:latin typeface="Arial" panose="020B0604020202020204" pitchFamily="34" charset="0"/>
+                <a:cs typeface="Arial" panose="020B0604020202020204" pitchFamily="34" charset="0"/>
+              </a:rPr>
+              <a:t>uz optimizator </a:t>
+            </a:r>
+            <a:r>
+              <a:rPr lang="hr-HR" sz="2600" b="1" dirty="0">
+                <a:latin typeface="Arial" panose="020B0604020202020204" pitchFamily="34" charset="0"/>
+                <a:cs typeface="Arial" panose="020B0604020202020204" pitchFamily="34" charset="0"/>
+              </a:rPr>
+              <a:t>SGD</a:t>
+            </a:r>
+            <a:r>
+              <a:rPr lang="hr-HR" sz="2600" dirty="0">
+                <a:latin typeface="Arial" panose="020B0604020202020204" pitchFamily="34" charset="0"/>
+                <a:cs typeface="Arial" panose="020B0604020202020204" pitchFamily="34" charset="0"/>
+              </a:rPr>
+              <a:t> sa </a:t>
+            </a:r>
+            <a:r>
+              <a:rPr lang="hr-HR" sz="2600" b="1" dirty="0">
+                <a:latin typeface="Arial" panose="020B0604020202020204" pitchFamily="34" charset="0"/>
+                <a:cs typeface="Arial" panose="020B0604020202020204" pitchFamily="34" charset="0"/>
+              </a:rPr>
+              <a:t>stopom učenja </a:t>
+            </a:r>
+            <a:r>
+              <a:rPr lang="hr-HR" sz="2600" dirty="0">
+                <a:latin typeface="Arial" panose="020B0604020202020204" pitchFamily="34" charset="0"/>
+                <a:cs typeface="Arial" panose="020B0604020202020204" pitchFamily="34" charset="0"/>
+              </a:rPr>
+              <a:t>iznosa</a:t>
+            </a:r>
+            <a:r>
+              <a:rPr lang="hr-HR" sz="2600" b="1" dirty="0">
+                <a:latin typeface="Arial" panose="020B0604020202020204" pitchFamily="34" charset="0"/>
+                <a:cs typeface="Arial" panose="020B0604020202020204" pitchFamily="34" charset="0"/>
+              </a:rPr>
+              <a:t> 0.01</a:t>
+            </a:r>
+            <a:r>
+              <a:rPr lang="en-US" sz="2600" b="1" dirty="0">
+                <a:latin typeface="Arial" panose="020B0604020202020204" pitchFamily="34" charset="0"/>
+                <a:cs typeface="Arial" panose="020B0604020202020204" pitchFamily="34" charset="0"/>
+              </a:rPr>
+              <a:t> </a:t>
+            </a:r>
+            <a:r>
+              <a:rPr lang="hr-HR" sz="2600" dirty="0">
+                <a:latin typeface="Arial" panose="020B0604020202020204" pitchFamily="34" charset="0"/>
+                <a:cs typeface="Arial" panose="020B0604020202020204" pitchFamily="34" charset="0"/>
+              </a:rPr>
+              <a:t>i strategijom </a:t>
+            </a:r>
+            <a:r>
+              <a:rPr lang="hr-HR" sz="2600" b="1" dirty="0">
+                <a:latin typeface="Arial" panose="020B0604020202020204" pitchFamily="34" charset="0"/>
+                <a:cs typeface="Arial" panose="020B0604020202020204" pitchFamily="34" charset="0"/>
+              </a:rPr>
+              <a:t>kosinusnog kaljenja </a:t>
+            </a:r>
+            <a:r>
+              <a:rPr lang="hr-HR" sz="2600" dirty="0">
+                <a:latin typeface="Arial" panose="020B0604020202020204" pitchFamily="34" charset="0"/>
+                <a:cs typeface="Arial" panose="020B0604020202020204" pitchFamily="34" charset="0"/>
+              </a:rPr>
+              <a:t>bez restarta</a:t>
+            </a:r>
+          </a:p>
+          <a:p>
+            <a:r>
+              <a:rPr lang="hr-HR" sz="2600" noProof="0" dirty="0">
+                <a:latin typeface="Arial" panose="020B0604020202020204" pitchFamily="34" charset="0"/>
+                <a:cs typeface="Arial" panose="020B0604020202020204" pitchFamily="34" charset="0"/>
+              </a:rPr>
+              <a:t>skup podijeljen na </a:t>
+            </a:r>
+            <a:r>
+              <a:rPr lang="hr-HR" sz="2600" b="1" noProof="0" dirty="0">
+                <a:latin typeface="Arial" panose="020B0604020202020204" pitchFamily="34" charset="0"/>
+                <a:cs typeface="Arial" panose="020B0604020202020204" pitchFamily="34" charset="0"/>
+              </a:rPr>
+              <a:t>minigrupe </a:t>
+            </a:r>
+            <a:r>
+              <a:rPr lang="hr-HR" sz="2600" noProof="0" dirty="0">
+                <a:latin typeface="Arial" panose="020B0604020202020204" pitchFamily="34" charset="0"/>
+                <a:cs typeface="Arial" panose="020B0604020202020204" pitchFamily="34" charset="0"/>
+              </a:rPr>
+              <a:t>veličine</a:t>
+            </a:r>
+            <a:r>
+              <a:rPr lang="hr-HR" sz="2600" b="1" noProof="0" dirty="0">
+                <a:latin typeface="Arial" panose="020B0604020202020204" pitchFamily="34" charset="0"/>
+                <a:cs typeface="Arial" panose="020B0604020202020204" pitchFamily="34" charset="0"/>
+              </a:rPr>
+              <a:t> 256</a:t>
+            </a:r>
+          </a:p>
+          <a:p>
+            <a:r>
+              <a:rPr lang="hr-HR" sz="2600" dirty="0">
+                <a:latin typeface="Arial" panose="020B0604020202020204" pitchFamily="34" charset="0"/>
+                <a:cs typeface="Arial" panose="020B0604020202020204" pitchFamily="34" charset="0"/>
+              </a:rPr>
+              <a:t>provođenje </a:t>
+            </a:r>
+            <a:r>
+              <a:rPr lang="hr-HR" sz="2600" b="1" dirty="0">
+                <a:latin typeface="Arial" panose="020B0604020202020204" pitchFamily="34" charset="0"/>
+                <a:cs typeface="Arial" panose="020B0604020202020204" pitchFamily="34" charset="0"/>
+              </a:rPr>
+              <a:t>E koraka </a:t>
+            </a:r>
+            <a:r>
+              <a:rPr lang="hr-HR" sz="2600" dirty="0">
+                <a:latin typeface="Arial" panose="020B0604020202020204" pitchFamily="34" charset="0"/>
+                <a:cs typeface="Arial" panose="020B0604020202020204" pitchFamily="34" charset="0"/>
+              </a:rPr>
+              <a:t>učenja </a:t>
+            </a:r>
+            <a:r>
+              <a:rPr lang="hr-HR" sz="2600" b="1" dirty="0">
+                <a:latin typeface="Arial" panose="020B0604020202020204" pitchFamily="34" charset="0"/>
+                <a:cs typeface="Arial" panose="020B0604020202020204" pitchFamily="34" charset="0"/>
+              </a:rPr>
+              <a:t>svakih 1000 iteracija</a:t>
+            </a:r>
+          </a:p>
+          <a:p>
+            <a:r>
+              <a:rPr lang="hr-HR" sz="2600" b="1" noProof="0" dirty="0">
+                <a:latin typeface="Arial" panose="020B0604020202020204" pitchFamily="34" charset="0"/>
+                <a:cs typeface="Arial" panose="020B0604020202020204" pitchFamily="34" charset="0"/>
+              </a:rPr>
+              <a:t>stopa konzistencije </a:t>
+            </a:r>
+            <a:r>
+              <a:rPr lang="hr-HR" sz="2600" noProof="0" dirty="0">
+                <a:latin typeface="Arial" panose="020B0604020202020204" pitchFamily="34" charset="0"/>
+                <a:cs typeface="Arial" panose="020B0604020202020204" pitchFamily="34" charset="0"/>
+              </a:rPr>
+              <a:t>iznosa</a:t>
+            </a:r>
+            <a:r>
+              <a:rPr lang="hr-HR" sz="2600" b="1" noProof="0" dirty="0">
+                <a:latin typeface="Arial" panose="020B0604020202020204" pitchFamily="34" charset="0"/>
+                <a:cs typeface="Arial" panose="020B0604020202020204" pitchFamily="34" charset="0"/>
+              </a:rPr>
+              <a:t> </a:t>
+            </a:r>
+            <a:r>
+              <a:rPr lang="hr-HR" sz="2600" b="1" dirty="0">
+                <a:latin typeface="Arial" panose="020B0604020202020204" pitchFamily="34" charset="0"/>
+                <a:cs typeface="Arial" panose="020B0604020202020204" pitchFamily="34" charset="0"/>
+              </a:rPr>
+              <a:t>5</a:t>
+            </a:r>
+            <a:endParaRPr lang="hr-HR" sz="2600" b="1" noProof="0" dirty="0">
+              <a:latin typeface="Arial" panose="020B0604020202020204" pitchFamily="34" charset="0"/>
+              <a:cs typeface="Arial" panose="020B0604020202020204" pitchFamily="34" charset="0"/>
+            </a:endParaRPr>
+          </a:p>
+        </p:txBody>
+      </p:sp>
+      <p:sp>
+        <p:nvSpPr>
+          <p:cNvPr id="5" name="Slide Number Placeholder 4">
+            <a:extLst>
+              <a:ext uri="{FF2B5EF4-FFF2-40B4-BE49-F238E27FC236}">
+                <a16:creationId xmlns:a16="http://schemas.microsoft.com/office/drawing/2014/main" id="{45F96B62-BE47-1DBB-D7A7-59EE9D395AB2}"/>
+              </a:ext>
+            </a:extLst>
+          </p:cNvPr>
+          <p:cNvSpPr>
+            <a:spLocks noGrp="1"/>
+          </p:cNvSpPr>
+          <p:nvPr>
+            <p:ph type="sldNum" sz="quarter" idx="12"/>
+          </p:nvPr>
+        </p:nvSpPr>
+        <p:spPr/>
+        <p:txBody>
+          <a:bodyPr>
+            <a:normAutofit lnSpcReduction="10000"/>
+          </a:bodyPr>
+          <a:lstStyle/>
+          <a:p>
+            <a:r>
+              <a:rPr lang="en-US" dirty="0"/>
+              <a:t>10</a:t>
+            </a:r>
+            <a:endParaRPr lang="hr-HR" dirty="0"/>
+          </a:p>
+        </p:txBody>
+      </p:sp>
+      <p:sp>
+        <p:nvSpPr>
+          <p:cNvPr id="8" name="TextBox 7">
+            <a:extLst>
+              <a:ext uri="{FF2B5EF4-FFF2-40B4-BE49-F238E27FC236}">
+                <a16:creationId xmlns:a16="http://schemas.microsoft.com/office/drawing/2014/main" id="{B94CE49C-7183-98A8-00E6-7BD89AE0F6A1}"/>
+              </a:ext>
+            </a:extLst>
+          </p:cNvPr>
+          <p:cNvSpPr txBox="1"/>
+          <p:nvPr/>
+        </p:nvSpPr>
+        <p:spPr>
+          <a:xfrm>
+            <a:off x="10228507" y="6073019"/>
+            <a:ext cx="809199" cy="369332"/>
+          </a:xfrm>
+          <a:prstGeom prst="rect">
+            <a:avLst/>
+          </a:prstGeom>
+          <a:solidFill>
+            <a:schemeClr val="bg1"/>
+          </a:solidFill>
+        </p:spPr>
+        <p:txBody>
+          <a:bodyPr wrap="square" rtlCol="0">
+            <a:spAutoFit/>
+          </a:bodyPr>
+          <a:lstStyle/>
+          <a:p>
+            <a:endParaRPr lang="hr-HR" dirty="0"/>
+          </a:p>
+        </p:txBody>
+      </p:sp>
+    </p:spTree>
+    <p:extLst>
+      <p:ext uri="{BB962C8B-B14F-4D97-AF65-F5344CB8AC3E}">
+        <p14:creationId xmlns:p14="http://schemas.microsoft.com/office/powerpoint/2010/main" val="1028681248"/>
+      </p:ext>
+    </p:extLst>
+  </p:cSld>
+  <p:clrMapOvr>
+    <a:masterClrMapping/>
+  </p:clrMapOvr>
+</p:sld>
+</file>
+
+<file path=ppt/slides/slide14.xml><?xml version="1.0" encoding="utf-8"?>
 <p:sld xmlns:a="http://schemas.openxmlformats.org/drawingml/2006/main" xmlns:r="http://schemas.openxmlformats.org/officeDocument/2006/relationships" xmlns:p="http://schemas.openxmlformats.org/presentationml/2006/main">
   <p:cSld>
     <p:spTree>
@@ -4838,18 +5428,35 @@
             <p:ph type="title"/>
           </p:nvPr>
         </p:nvSpPr>
-        <p:spPr/>
-        <p:txBody>
-          <a:bodyPr/>
-          <a:lstStyle/>
-          <a:p>
-            <a:r>
-              <a:rPr lang="hr-HR" noProof="0" dirty="0">
-                <a:latin typeface="Arial" panose="020B0604020202020204" pitchFamily="34" charset="0"/>
-                <a:cs typeface="Arial" panose="020B0604020202020204" pitchFamily="34" charset="0"/>
-              </a:rPr>
-              <a:t>Rezultati</a:t>
-            </a:r>
+        <p:spPr>
+          <a:xfrm>
+            <a:off x="1261872" y="294198"/>
+            <a:ext cx="9775834" cy="1397124"/>
+          </a:xfrm>
+        </p:spPr>
+        <p:txBody>
+          <a:bodyPr>
+            <a:normAutofit/>
+          </a:bodyPr>
+          <a:lstStyle/>
+          <a:p>
+            <a:r>
+              <a:rPr lang="hr-HR" sz="4000" dirty="0">
+                <a:latin typeface="Arial" panose="020B0604020202020204" pitchFamily="34" charset="0"/>
+                <a:cs typeface="Arial" panose="020B0604020202020204" pitchFamily="34" charset="0"/>
+              </a:rPr>
+              <a:t>Zašumljene oznake, usporedba sa SotA</a:t>
+            </a:r>
+            <a:br>
+              <a:rPr lang="en-US" sz="4000" dirty="0">
+                <a:latin typeface="Arial" panose="020B0604020202020204" pitchFamily="34" charset="0"/>
+                <a:cs typeface="Arial" panose="020B0604020202020204" pitchFamily="34" charset="0"/>
+              </a:rPr>
+            </a:br>
+            <a:endParaRPr lang="hr-HR" sz="4000" noProof="0" dirty="0">
+              <a:latin typeface="Arial" panose="020B0604020202020204" pitchFamily="34" charset="0"/>
+              <a:cs typeface="Arial" panose="020B0604020202020204" pitchFamily="34" charset="0"/>
+            </a:endParaRPr>
           </a:p>
         </p:txBody>
       </p:sp>
@@ -4877,9 +5484,10 @@
           <a:lstStyle/>
           <a:p>
             <a:r>
-              <a:rPr lang="hr-HR" dirty="0"/>
-              <a:t>14</a:t>
-            </a:r>
+              <a:rPr lang="hr-HR"/>
+              <a:t>11</a:t>
+            </a:r>
+            <a:endParaRPr lang="hr-HR" dirty="0"/>
           </a:p>
         </p:txBody>
       </p:sp>
@@ -4917,12 +5525,102 @@
           </a:p>
         </p:txBody>
       </p:sp>
+      <p:sp>
+        <p:nvSpPr>
+          <p:cNvPr id="25" name="TextBox 24">
+            <a:extLst>
+              <a:ext uri="{FF2B5EF4-FFF2-40B4-BE49-F238E27FC236}">
+                <a16:creationId xmlns:a16="http://schemas.microsoft.com/office/drawing/2014/main" id="{7C0F6ED8-F856-7668-D143-B0F3237E447B}"/>
+              </a:ext>
+            </a:extLst>
+          </p:cNvPr>
+          <p:cNvSpPr txBox="1"/>
+          <p:nvPr/>
+        </p:nvSpPr>
+        <p:spPr>
+          <a:xfrm>
+            <a:off x="1261872" y="2036831"/>
+            <a:ext cx="4541832" cy="492443"/>
+          </a:xfrm>
+          <a:prstGeom prst="rect">
+            <a:avLst/>
+          </a:prstGeom>
+          <a:noFill/>
+        </p:spPr>
+        <p:txBody>
+          <a:bodyPr wrap="square" rtlCol="0">
+            <a:spAutoFit/>
+          </a:bodyPr>
+          <a:lstStyle/>
+          <a:p>
+            <a:pPr algn="ctr"/>
+            <a:r>
+              <a:rPr lang="hr-HR" sz="2600" b="1" dirty="0">
+                <a:solidFill>
+                  <a:schemeClr val="tx1">
+                    <a:lumMod val="65000"/>
+                    <a:lumOff val="35000"/>
+                  </a:schemeClr>
+                </a:solidFill>
+                <a:latin typeface="Arial" panose="020B0604020202020204" pitchFamily="34" charset="0"/>
+                <a:cs typeface="Arial" panose="020B0604020202020204" pitchFamily="34" charset="0"/>
+              </a:rPr>
+              <a:t>Simetrično zašumljivanje</a:t>
+            </a:r>
+          </a:p>
+        </p:txBody>
+      </p:sp>
+      <p:sp>
+        <p:nvSpPr>
+          <p:cNvPr id="26" name="TextBox 25">
+            <a:extLst>
+              <a:ext uri="{FF2B5EF4-FFF2-40B4-BE49-F238E27FC236}">
+                <a16:creationId xmlns:a16="http://schemas.microsoft.com/office/drawing/2014/main" id="{709791A7-68A4-7211-9B53-9E5BF6FF9236}"/>
+              </a:ext>
+            </a:extLst>
+          </p:cNvPr>
+          <p:cNvSpPr txBox="1"/>
+          <p:nvPr/>
+        </p:nvSpPr>
+        <p:spPr>
+          <a:xfrm>
+            <a:off x="6469392" y="2036830"/>
+            <a:ext cx="4541832" cy="492443"/>
+          </a:xfrm>
+          <a:prstGeom prst="rect">
+            <a:avLst/>
+          </a:prstGeom>
+          <a:noFill/>
+        </p:spPr>
+        <p:txBody>
+          <a:bodyPr wrap="square" rtlCol="0">
+            <a:spAutoFit/>
+          </a:bodyPr>
+          <a:lstStyle/>
+          <a:p>
+            <a:pPr algn="ctr"/>
+            <a:r>
+              <a:rPr lang="hr-HR" sz="2600" b="1" dirty="0">
+                <a:solidFill>
+                  <a:schemeClr val="tx1">
+                    <a:lumMod val="65000"/>
+                    <a:lumOff val="35000"/>
+                  </a:schemeClr>
+                </a:solidFill>
+                <a:latin typeface="Arial" panose="020B0604020202020204" pitchFamily="34" charset="0"/>
+                <a:cs typeface="Arial" panose="020B0604020202020204" pitchFamily="34" charset="0"/>
+              </a:rPr>
+              <a:t>Asimetrično zašumljivanje</a:t>
+            </a:r>
+          </a:p>
+        </p:txBody>
+      </p:sp>
       <p:pic>
         <p:nvPicPr>
-          <p:cNvPr id="10" name="Picture 9">
+          <p:cNvPr id="30" name="Picture 29">
             <a:extLst>
               <a:ext uri="{FF2B5EF4-FFF2-40B4-BE49-F238E27FC236}">
-                <a16:creationId xmlns:a16="http://schemas.microsoft.com/office/drawing/2014/main" id="{74D6FFA7-CB6C-54FC-91D7-FD47F31B4E0E}"/>
+                <a16:creationId xmlns:a16="http://schemas.microsoft.com/office/drawing/2014/main" id="{BA433559-7543-44F0-127F-E1396F22924D}"/>
               </a:ext>
             </a:extLst>
           </p:cNvPr>
@@ -4939,98 +5637,45 @@
         </p:blipFill>
         <p:spPr>
           <a:xfrm>
-            <a:off x="488716" y="2479453"/>
-            <a:ext cx="10733103" cy="1455336"/>
+            <a:off x="1379837" y="2612400"/>
+            <a:ext cx="4305901" cy="3115110"/>
           </a:xfrm>
           <a:prstGeom prst="rect">
             <a:avLst/>
           </a:prstGeom>
         </p:spPr>
       </p:pic>
-      <p:sp>
-        <p:nvSpPr>
-          <p:cNvPr id="11" name="Content Placeholder 2">
+      <p:pic>
+        <p:nvPicPr>
+          <p:cNvPr id="32" name="Picture 31">
             <a:extLst>
               <a:ext uri="{FF2B5EF4-FFF2-40B4-BE49-F238E27FC236}">
-                <a16:creationId xmlns:a16="http://schemas.microsoft.com/office/drawing/2014/main" id="{353C9CFA-D70C-BC7F-AFB6-9EFF871233D3}"/>
+                <a16:creationId xmlns:a16="http://schemas.microsoft.com/office/drawing/2014/main" id="{C0950E4D-E91C-3DBE-DF61-6627B398A128}"/>
               </a:ext>
             </a:extLst>
           </p:cNvPr>
-          <p:cNvSpPr>
-            <a:spLocks noGrp="1"/>
-          </p:cNvSpPr>
-          <p:nvPr>
-            <p:ph idx="1"/>
-          </p:nvPr>
-        </p:nvSpPr>
+          <p:cNvPicPr>
+            <a:picLocks noChangeAspect="1"/>
+          </p:cNvPicPr>
+          <p:nvPr/>
+        </p:nvPicPr>
+        <p:blipFill>
+          <a:blip r:embed="rId3"/>
+          <a:srcRect t="-1" b="586"/>
+          <a:stretch>
+            <a:fillRect/>
+          </a:stretch>
+        </p:blipFill>
         <p:spPr>
           <a:xfrm>
-            <a:off x="1261871" y="4722920"/>
-            <a:ext cx="8966635" cy="1840881"/>
+            <a:off x="7116069" y="2933730"/>
+            <a:ext cx="3248478" cy="2793780"/>
           </a:xfrm>
+          <a:prstGeom prst="rect">
+            <a:avLst/>
+          </a:prstGeom>
         </p:spPr>
-        <p:txBody>
-          <a:bodyPr>
-            <a:normAutofit/>
-          </a:bodyPr>
-          <a:lstStyle/>
-          <a:p>
-            <a:pPr marL="0" indent="0">
-              <a:buNone/>
-            </a:pPr>
-            <a:r>
-              <a:rPr lang="hr-HR" sz="2600" dirty="0">
-                <a:latin typeface="Arial" panose="020B0604020202020204" pitchFamily="34" charset="0"/>
-                <a:cs typeface="Arial" panose="020B0604020202020204" pitchFamily="34" charset="0"/>
-              </a:rPr>
-              <a:t>Mogući uzroci:</a:t>
-            </a:r>
-          </a:p>
-          <a:p>
-            <a:pPr marL="731520" lvl="1" indent="-457200">
-              <a:buFont typeface="+mj-lt"/>
-              <a:buAutoNum type="arabicPeriod"/>
-            </a:pPr>
-            <a:r>
-              <a:rPr lang="hr-HR" sz="2600" dirty="0">
-                <a:latin typeface="Arial" panose="020B0604020202020204" pitchFamily="34" charset="0"/>
-                <a:cs typeface="Arial" panose="020B0604020202020204" pitchFamily="34" charset="0"/>
-              </a:rPr>
-              <a:t>Veličina korištenog skupa podataka (500 000 parova)</a:t>
-            </a:r>
-          </a:p>
-          <a:p>
-            <a:pPr marL="731520" lvl="1" indent="-457200">
-              <a:buFont typeface="+mj-lt"/>
-              <a:buAutoNum type="arabicPeriod"/>
-            </a:pPr>
-            <a:r>
-              <a:rPr lang="hr-HR" sz="2600" noProof="0" dirty="0">
-                <a:latin typeface="Arial" panose="020B0604020202020204" pitchFamily="34" charset="0"/>
-                <a:cs typeface="Arial" panose="020B0604020202020204" pitchFamily="34" charset="0"/>
-              </a:rPr>
-              <a:t>Broj epoha učenja (32 epohe)</a:t>
-            </a:r>
-          </a:p>
-          <a:p>
-            <a:pPr marL="731520" lvl="1" indent="-457200">
-              <a:buFont typeface="+mj-lt"/>
-              <a:buAutoNum type="arabicPeriod"/>
-            </a:pPr>
-            <a:r>
-              <a:rPr lang="hr-HR" sz="2600" dirty="0">
-                <a:latin typeface="Arial" panose="020B0604020202020204" pitchFamily="34" charset="0"/>
-                <a:cs typeface="Arial" panose="020B0604020202020204" pitchFamily="34" charset="0"/>
-              </a:rPr>
-              <a:t>Veličina mini-grupe (128 parova)</a:t>
-            </a:r>
-            <a:endParaRPr lang="hr-HR" sz="2600" noProof="0" dirty="0">
-              <a:latin typeface="Arial" panose="020B0604020202020204" pitchFamily="34" charset="0"/>
-              <a:cs typeface="Arial" panose="020B0604020202020204" pitchFamily="34" charset="0"/>
-            </a:endParaRPr>
-          </a:p>
-        </p:txBody>
-      </p:sp>
+      </p:pic>
     </p:spTree>
     <p:extLst>
       <p:ext uri="{BB962C8B-B14F-4D97-AF65-F5344CB8AC3E}">
@@ -5044,7 +5689,1343 @@
 </p:sld>
 </file>
 
-<file path=ppt/slides/slide14.xml><?xml version="1.0" encoding="utf-8"?>
+<file path=ppt/slides/slide15.xml><?xml version="1.0" encoding="utf-8"?>
+<p:sld xmlns:a="http://schemas.openxmlformats.org/drawingml/2006/main" xmlns:r="http://schemas.openxmlformats.org/officeDocument/2006/relationships" xmlns:p="http://schemas.openxmlformats.org/presentationml/2006/main">
+  <p:cSld>
+    <p:spTree>
+      <p:nvGrpSpPr>
+        <p:cNvPr id="1" name="">
+          <a:extLst>
+            <a:ext uri="{FF2B5EF4-FFF2-40B4-BE49-F238E27FC236}">
+              <a16:creationId xmlns:a16="http://schemas.microsoft.com/office/drawing/2014/main" id="{4BFC37ED-2E23-2DD0-BB70-C02326F88BB9}"/>
+            </a:ext>
+          </a:extLst>
+        </p:cNvPr>
+        <p:cNvGrpSpPr/>
+        <p:nvPr/>
+      </p:nvGrpSpPr>
+      <p:grpSpPr>
+        <a:xfrm>
+          <a:off x="0" y="0"/>
+          <a:ext cx="0" cy="0"/>
+          <a:chOff x="0" y="0"/>
+          <a:chExt cx="0" cy="0"/>
+        </a:xfrm>
+      </p:grpSpPr>
+      <p:sp>
+        <p:nvSpPr>
+          <p:cNvPr id="2" name="Title 1">
+            <a:extLst>
+              <a:ext uri="{FF2B5EF4-FFF2-40B4-BE49-F238E27FC236}">
+                <a16:creationId xmlns:a16="http://schemas.microsoft.com/office/drawing/2014/main" id="{7F3A0789-C644-35FA-BA66-1D6B1A75C3DD}"/>
+              </a:ext>
+            </a:extLst>
+          </p:cNvPr>
+          <p:cNvSpPr>
+            <a:spLocks noGrp="1"/>
+          </p:cNvSpPr>
+          <p:nvPr>
+            <p:ph type="title"/>
+          </p:nvPr>
+        </p:nvSpPr>
+        <p:spPr>
+          <a:xfrm>
+            <a:off x="1261872" y="294198"/>
+            <a:ext cx="9775834" cy="1397124"/>
+          </a:xfrm>
+        </p:spPr>
+        <p:txBody>
+          <a:bodyPr>
+            <a:normAutofit/>
+          </a:bodyPr>
+          <a:lstStyle/>
+          <a:p>
+            <a:r>
+              <a:rPr lang="hr-HR" sz="4000" dirty="0">
+                <a:latin typeface="Arial" panose="020B0604020202020204" pitchFamily="34" charset="0"/>
+                <a:cs typeface="Arial" panose="020B0604020202020204" pitchFamily="34" charset="0"/>
+              </a:rPr>
+              <a:t>Zašumljene oznake, validacija VIBE</a:t>
+            </a:r>
+            <a:br>
+              <a:rPr lang="en-US" sz="4000" dirty="0">
+                <a:latin typeface="Arial" panose="020B0604020202020204" pitchFamily="34" charset="0"/>
+                <a:cs typeface="Arial" panose="020B0604020202020204" pitchFamily="34" charset="0"/>
+              </a:rPr>
+            </a:br>
+            <a:endParaRPr lang="hr-HR" sz="4000" noProof="0" dirty="0">
+              <a:latin typeface="Arial" panose="020B0604020202020204" pitchFamily="34" charset="0"/>
+              <a:cs typeface="Arial" panose="020B0604020202020204" pitchFamily="34" charset="0"/>
+            </a:endParaRPr>
+          </a:p>
+        </p:txBody>
+      </p:sp>
+      <p:sp>
+        <p:nvSpPr>
+          <p:cNvPr id="5" name="Slide Number Placeholder 4">
+            <a:extLst>
+              <a:ext uri="{FF2B5EF4-FFF2-40B4-BE49-F238E27FC236}">
+                <a16:creationId xmlns:a16="http://schemas.microsoft.com/office/drawing/2014/main" id="{1F7B1577-BDC0-CBEF-44A8-E41624B774C1}"/>
+              </a:ext>
+            </a:extLst>
+          </p:cNvPr>
+          <p:cNvSpPr>
+            <a:spLocks noGrp="1"/>
+          </p:cNvSpPr>
+          <p:nvPr>
+            <p:ph type="sldNum" sz="quarter" idx="12"/>
+          </p:nvPr>
+        </p:nvSpPr>
+        <p:spPr/>
+        <p:txBody>
+          <a:bodyPr>
+            <a:normAutofit lnSpcReduction="10000"/>
+          </a:bodyPr>
+          <a:lstStyle/>
+          <a:p>
+            <a:r>
+              <a:rPr lang="hr-HR" dirty="0"/>
+              <a:t>12</a:t>
+            </a:r>
+          </a:p>
+        </p:txBody>
+      </p:sp>
+      <p:sp>
+        <p:nvSpPr>
+          <p:cNvPr id="8" name="TextBox 7">
+            <a:extLst>
+              <a:ext uri="{FF2B5EF4-FFF2-40B4-BE49-F238E27FC236}">
+                <a16:creationId xmlns:a16="http://schemas.microsoft.com/office/drawing/2014/main" id="{22798630-F672-5C62-48CB-90DB6179F117}"/>
+              </a:ext>
+            </a:extLst>
+          </p:cNvPr>
+          <p:cNvSpPr txBox="1"/>
+          <p:nvPr/>
+        </p:nvSpPr>
+        <p:spPr>
+          <a:xfrm>
+            <a:off x="10228507" y="6073019"/>
+            <a:ext cx="809199" cy="369332"/>
+          </a:xfrm>
+          <a:prstGeom prst="rect">
+            <a:avLst/>
+          </a:prstGeom>
+          <a:solidFill>
+            <a:schemeClr val="bg1"/>
+          </a:solidFill>
+        </p:spPr>
+        <p:txBody>
+          <a:bodyPr wrap="square" rtlCol="0">
+            <a:spAutoFit/>
+          </a:bodyPr>
+          <a:lstStyle/>
+          <a:p>
+            <a:endParaRPr lang="hr-HR" dirty="0"/>
+          </a:p>
+        </p:txBody>
+      </p:sp>
+      <p:pic>
+        <p:nvPicPr>
+          <p:cNvPr id="4" name="Picture 3">
+            <a:extLst>
+              <a:ext uri="{FF2B5EF4-FFF2-40B4-BE49-F238E27FC236}">
+                <a16:creationId xmlns:a16="http://schemas.microsoft.com/office/drawing/2014/main" id="{9FB54A31-BDBD-F96A-80E0-00AFC08C625C}"/>
+              </a:ext>
+            </a:extLst>
+          </p:cNvPr>
+          <p:cNvPicPr>
+            <a:picLocks noChangeAspect="1"/>
+          </p:cNvPicPr>
+          <p:nvPr/>
+        </p:nvPicPr>
+        <p:blipFill>
+          <a:blip r:embed="rId2"/>
+          <a:stretch>
+            <a:fillRect/>
+          </a:stretch>
+        </p:blipFill>
+        <p:spPr>
+          <a:xfrm>
+            <a:off x="3007348" y="1988413"/>
+            <a:ext cx="5553850" cy="2105319"/>
+          </a:xfrm>
+          <a:prstGeom prst="rect">
+            <a:avLst/>
+          </a:prstGeom>
+        </p:spPr>
+      </p:pic>
+      <p:sp>
+        <p:nvSpPr>
+          <p:cNvPr id="6" name="TextBox 5">
+            <a:extLst>
+              <a:ext uri="{FF2B5EF4-FFF2-40B4-BE49-F238E27FC236}">
+                <a16:creationId xmlns:a16="http://schemas.microsoft.com/office/drawing/2014/main" id="{62C65AD1-5842-2E7A-2ABB-9E3C1D6C3818}"/>
+              </a:ext>
+            </a:extLst>
+          </p:cNvPr>
+          <p:cNvSpPr txBox="1"/>
+          <p:nvPr/>
+        </p:nvSpPr>
+        <p:spPr>
+          <a:xfrm>
+            <a:off x="3640897" y="4564914"/>
+            <a:ext cx="4286752" cy="1692771"/>
+          </a:xfrm>
+          <a:prstGeom prst="rect">
+            <a:avLst/>
+          </a:prstGeom>
+          <a:noFill/>
+        </p:spPr>
+        <p:txBody>
+          <a:bodyPr wrap="square" rtlCol="0">
+            <a:spAutoFit/>
+          </a:bodyPr>
+          <a:lstStyle/>
+          <a:p>
+            <a:r>
+              <a:rPr lang="hr-HR" sz="2600" b="1" dirty="0">
+                <a:solidFill>
+                  <a:schemeClr val="tx1">
+                    <a:lumMod val="65000"/>
+                    <a:lumOff val="35000"/>
+                  </a:schemeClr>
+                </a:solidFill>
+                <a:latin typeface="Arial" panose="020B0604020202020204" pitchFamily="34" charset="0"/>
+                <a:cs typeface="Arial" panose="020B0604020202020204" pitchFamily="34" charset="0"/>
+              </a:rPr>
+              <a:t>CA</a:t>
+            </a:r>
+            <a:r>
+              <a:rPr lang="hr-HR" sz="2600" dirty="0">
+                <a:solidFill>
+                  <a:schemeClr val="tx1">
+                    <a:lumMod val="65000"/>
+                    <a:lumOff val="35000"/>
+                  </a:schemeClr>
+                </a:solidFill>
+                <a:latin typeface="Arial" panose="020B0604020202020204" pitchFamily="34" charset="0"/>
+                <a:cs typeface="Arial" panose="020B0604020202020204" pitchFamily="34" charset="0"/>
+              </a:rPr>
+              <a:t> – kosinusno kaljenje</a:t>
+            </a:r>
+            <a:endParaRPr lang="hr-HR" sz="2600" dirty="0">
+              <a:solidFill>
+                <a:schemeClr val="accent1"/>
+              </a:solidFill>
+              <a:latin typeface="Arial" panose="020B0604020202020204" pitchFamily="34" charset="0"/>
+              <a:cs typeface="Arial" panose="020B0604020202020204" pitchFamily="34" charset="0"/>
+            </a:endParaRPr>
+          </a:p>
+          <a:p>
+            <a:r>
+              <a:rPr lang="hr-HR" sz="2600" b="1" dirty="0">
+                <a:solidFill>
+                  <a:schemeClr val="tx1">
+                    <a:lumMod val="65000"/>
+                    <a:lumOff val="35000"/>
+                  </a:schemeClr>
+                </a:solidFill>
+                <a:latin typeface="Arial" panose="020B0604020202020204" pitchFamily="34" charset="0"/>
+                <a:cs typeface="Arial" panose="020B0604020202020204" pitchFamily="34" charset="0"/>
+              </a:rPr>
+              <a:t>CL</a:t>
+            </a:r>
+            <a:r>
+              <a:rPr lang="hr-HR" sz="2600" dirty="0">
+                <a:solidFill>
+                  <a:schemeClr val="tx1">
+                    <a:lumMod val="65000"/>
+                    <a:lumOff val="35000"/>
+                  </a:schemeClr>
+                </a:solidFill>
+                <a:latin typeface="Arial" panose="020B0604020202020204" pitchFamily="34" charset="0"/>
+                <a:cs typeface="Arial" panose="020B0604020202020204" pitchFamily="34" charset="0"/>
+              </a:rPr>
+              <a:t> – konzistencijski gubitak</a:t>
+            </a:r>
+          </a:p>
+          <a:p>
+            <a:r>
+              <a:rPr lang="hr-HR" sz="2600" b="1" dirty="0">
+                <a:solidFill>
+                  <a:schemeClr val="tx1">
+                    <a:lumMod val="65000"/>
+                    <a:lumOff val="35000"/>
+                  </a:schemeClr>
+                </a:solidFill>
+                <a:latin typeface="Arial" panose="020B0604020202020204" pitchFamily="34" charset="0"/>
+                <a:cs typeface="Arial" panose="020B0604020202020204" pitchFamily="34" charset="0"/>
+              </a:rPr>
+              <a:t>CR</a:t>
+            </a:r>
+            <a:r>
+              <a:rPr lang="hr-HR" sz="2600" dirty="0">
+                <a:solidFill>
+                  <a:schemeClr val="tx1">
+                    <a:lumMod val="65000"/>
+                    <a:lumOff val="35000"/>
+                  </a:schemeClr>
+                </a:solidFill>
+                <a:latin typeface="Arial" panose="020B0604020202020204" pitchFamily="34" charset="0"/>
+                <a:cs typeface="Arial" panose="020B0604020202020204" pitchFamily="34" charset="0"/>
+              </a:rPr>
+              <a:t> – stopa konzistencije</a:t>
+            </a:r>
+          </a:p>
+          <a:p>
+            <a:r>
+              <a:rPr lang="hr-HR" sz="2600" b="1" dirty="0">
+                <a:solidFill>
+                  <a:schemeClr val="tx1">
+                    <a:lumMod val="65000"/>
+                    <a:lumOff val="35000"/>
+                  </a:schemeClr>
+                </a:solidFill>
+                <a:latin typeface="Arial" panose="020B0604020202020204" pitchFamily="34" charset="0"/>
+                <a:cs typeface="Arial" panose="020B0604020202020204" pitchFamily="34" charset="0"/>
+              </a:rPr>
+              <a:t>RE</a:t>
+            </a:r>
+            <a:r>
+              <a:rPr lang="hr-HR" sz="2600" dirty="0">
+                <a:solidFill>
+                  <a:schemeClr val="tx1">
+                    <a:lumMod val="65000"/>
+                    <a:lumOff val="35000"/>
+                  </a:schemeClr>
+                </a:solidFill>
+                <a:latin typeface="Arial" panose="020B0604020202020204" pitchFamily="34" charset="0"/>
+                <a:cs typeface="Arial" panose="020B0604020202020204" pitchFamily="34" charset="0"/>
+              </a:rPr>
+              <a:t> – nasumično brisanje</a:t>
+            </a:r>
+            <a:endParaRPr lang="en-US" sz="2600" dirty="0">
+              <a:solidFill>
+                <a:schemeClr val="tx1">
+                  <a:lumMod val="65000"/>
+                  <a:lumOff val="35000"/>
+                </a:schemeClr>
+              </a:solidFill>
+              <a:latin typeface="Arial" panose="020B0604020202020204" pitchFamily="34" charset="0"/>
+              <a:cs typeface="Arial" panose="020B0604020202020204" pitchFamily="34" charset="0"/>
+            </a:endParaRPr>
+          </a:p>
+        </p:txBody>
+      </p:sp>
+    </p:spTree>
+    <p:extLst>
+      <p:ext uri="{BB962C8B-B14F-4D97-AF65-F5344CB8AC3E}">
+        <p14:creationId xmlns:p14="http://schemas.microsoft.com/office/powerpoint/2010/main" val="3535358291"/>
+      </p:ext>
+    </p:extLst>
+  </p:cSld>
+  <p:clrMapOvr>
+    <a:masterClrMapping/>
+  </p:clrMapOvr>
+</p:sld>
+</file>
+
+<file path=ppt/slides/slide16.xml><?xml version="1.0" encoding="utf-8"?>
+<p:sld xmlns:a="http://schemas.openxmlformats.org/drawingml/2006/main" xmlns:r="http://schemas.openxmlformats.org/officeDocument/2006/relationships" xmlns:p="http://schemas.openxmlformats.org/presentationml/2006/main">
+  <p:cSld>
+    <p:spTree>
+      <p:nvGrpSpPr>
+        <p:cNvPr id="1" name="">
+          <a:extLst>
+            <a:ext uri="{FF2B5EF4-FFF2-40B4-BE49-F238E27FC236}">
+              <a16:creationId xmlns:a16="http://schemas.microsoft.com/office/drawing/2014/main" id="{57335EBC-073D-517B-E248-70DBF9FE7177}"/>
+            </a:ext>
+          </a:extLst>
+        </p:cNvPr>
+        <p:cNvGrpSpPr/>
+        <p:nvPr/>
+      </p:nvGrpSpPr>
+      <p:grpSpPr>
+        <a:xfrm>
+          <a:off x="0" y="0"/>
+          <a:ext cx="0" cy="0"/>
+          <a:chOff x="0" y="0"/>
+          <a:chExt cx="0" cy="0"/>
+        </a:xfrm>
+      </p:grpSpPr>
+      <p:sp>
+        <p:nvSpPr>
+          <p:cNvPr id="2" name="Title 1">
+            <a:extLst>
+              <a:ext uri="{FF2B5EF4-FFF2-40B4-BE49-F238E27FC236}">
+                <a16:creationId xmlns:a16="http://schemas.microsoft.com/office/drawing/2014/main" id="{4E762BA8-1347-C00A-D4A1-B49C8DFC1FA0}"/>
+              </a:ext>
+            </a:extLst>
+          </p:cNvPr>
+          <p:cNvSpPr>
+            <a:spLocks noGrp="1"/>
+          </p:cNvSpPr>
+          <p:nvPr>
+            <p:ph type="title"/>
+          </p:nvPr>
+        </p:nvSpPr>
+        <p:spPr>
+          <a:xfrm>
+            <a:off x="1261871" y="294198"/>
+            <a:ext cx="10126565" cy="1397124"/>
+          </a:xfrm>
+        </p:spPr>
+        <p:txBody>
+          <a:bodyPr>
+            <a:noAutofit/>
+          </a:bodyPr>
+          <a:lstStyle/>
+          <a:p>
+            <a:br>
+              <a:rPr lang="en-US" sz="4000" dirty="0">
+                <a:latin typeface="Arial" panose="020B0604020202020204" pitchFamily="34" charset="0"/>
+                <a:cs typeface="Arial" panose="020B0604020202020204" pitchFamily="34" charset="0"/>
+              </a:rPr>
+            </a:br>
+            <a:r>
+              <a:rPr lang="hr-HR" sz="4000" dirty="0">
+                <a:latin typeface="Arial" panose="020B0604020202020204" pitchFamily="34" charset="0"/>
+                <a:cs typeface="Arial" panose="020B0604020202020204" pitchFamily="34" charset="0"/>
+              </a:rPr>
+              <a:t>Zašumljene oznake, validacija SotA</a:t>
+            </a:r>
+            <a:br>
+              <a:rPr lang="en-US" sz="4000" dirty="0">
+                <a:latin typeface="Arial" panose="020B0604020202020204" pitchFamily="34" charset="0"/>
+                <a:cs typeface="Arial" panose="020B0604020202020204" pitchFamily="34" charset="0"/>
+              </a:rPr>
+            </a:br>
+            <a:endParaRPr lang="hr-HR" sz="4000" noProof="0" dirty="0">
+              <a:latin typeface="Arial" panose="020B0604020202020204" pitchFamily="34" charset="0"/>
+              <a:cs typeface="Arial" panose="020B0604020202020204" pitchFamily="34" charset="0"/>
+            </a:endParaRPr>
+          </a:p>
+        </p:txBody>
+      </p:sp>
+      <p:sp>
+        <p:nvSpPr>
+          <p:cNvPr id="5" name="Slide Number Placeholder 4">
+            <a:extLst>
+              <a:ext uri="{FF2B5EF4-FFF2-40B4-BE49-F238E27FC236}">
+                <a16:creationId xmlns:a16="http://schemas.microsoft.com/office/drawing/2014/main" id="{AA0F8701-D8F5-C0E7-6702-BF4069BFE43C}"/>
+              </a:ext>
+            </a:extLst>
+          </p:cNvPr>
+          <p:cNvSpPr>
+            <a:spLocks noGrp="1"/>
+          </p:cNvSpPr>
+          <p:nvPr>
+            <p:ph type="sldNum" sz="quarter" idx="12"/>
+          </p:nvPr>
+        </p:nvSpPr>
+        <p:spPr/>
+        <p:txBody>
+          <a:bodyPr>
+            <a:normAutofit lnSpcReduction="10000"/>
+          </a:bodyPr>
+          <a:lstStyle/>
+          <a:p>
+            <a:r>
+              <a:rPr lang="hr-HR" dirty="0"/>
+              <a:t>13</a:t>
+            </a:r>
+          </a:p>
+        </p:txBody>
+      </p:sp>
+      <p:sp>
+        <p:nvSpPr>
+          <p:cNvPr id="8" name="TextBox 7">
+            <a:extLst>
+              <a:ext uri="{FF2B5EF4-FFF2-40B4-BE49-F238E27FC236}">
+                <a16:creationId xmlns:a16="http://schemas.microsoft.com/office/drawing/2014/main" id="{179EED21-DB1C-2B5E-33BA-61CD8CD7D67E}"/>
+              </a:ext>
+            </a:extLst>
+          </p:cNvPr>
+          <p:cNvSpPr txBox="1"/>
+          <p:nvPr/>
+        </p:nvSpPr>
+        <p:spPr>
+          <a:xfrm>
+            <a:off x="10228507" y="6073019"/>
+            <a:ext cx="809199" cy="369332"/>
+          </a:xfrm>
+          <a:prstGeom prst="rect">
+            <a:avLst/>
+          </a:prstGeom>
+          <a:solidFill>
+            <a:schemeClr val="bg1"/>
+          </a:solidFill>
+        </p:spPr>
+        <p:txBody>
+          <a:bodyPr wrap="square" rtlCol="0">
+            <a:spAutoFit/>
+          </a:bodyPr>
+          <a:lstStyle/>
+          <a:p>
+            <a:endParaRPr lang="hr-HR" dirty="0"/>
+          </a:p>
+        </p:txBody>
+      </p:sp>
+      <p:sp>
+        <p:nvSpPr>
+          <p:cNvPr id="25" name="TextBox 24">
+            <a:extLst>
+              <a:ext uri="{FF2B5EF4-FFF2-40B4-BE49-F238E27FC236}">
+                <a16:creationId xmlns:a16="http://schemas.microsoft.com/office/drawing/2014/main" id="{3CA5770F-0A1D-E444-C177-F807D77522BA}"/>
+              </a:ext>
+            </a:extLst>
+          </p:cNvPr>
+          <p:cNvSpPr txBox="1"/>
+          <p:nvPr/>
+        </p:nvSpPr>
+        <p:spPr>
+          <a:xfrm>
+            <a:off x="3556169" y="1607187"/>
+            <a:ext cx="4541832" cy="492443"/>
+          </a:xfrm>
+          <a:prstGeom prst="rect">
+            <a:avLst/>
+          </a:prstGeom>
+          <a:noFill/>
+        </p:spPr>
+        <p:txBody>
+          <a:bodyPr wrap="square" rtlCol="0">
+            <a:spAutoFit/>
+          </a:bodyPr>
+          <a:lstStyle/>
+          <a:p>
+            <a:pPr algn="ctr"/>
+            <a:r>
+              <a:rPr lang="hr-HR" sz="2600" b="1" dirty="0">
+                <a:solidFill>
+                  <a:schemeClr val="tx1">
+                    <a:lumMod val="65000"/>
+                    <a:lumOff val="35000"/>
+                  </a:schemeClr>
+                </a:solidFill>
+                <a:latin typeface="Arial" panose="020B0604020202020204" pitchFamily="34" charset="0"/>
+                <a:cs typeface="Arial" panose="020B0604020202020204" pitchFamily="34" charset="0"/>
+              </a:rPr>
+              <a:t>Algoritam SOP+</a:t>
+            </a:r>
+          </a:p>
+        </p:txBody>
+      </p:sp>
+      <p:pic>
+        <p:nvPicPr>
+          <p:cNvPr id="4" name="Picture 3">
+            <a:extLst>
+              <a:ext uri="{FF2B5EF4-FFF2-40B4-BE49-F238E27FC236}">
+                <a16:creationId xmlns:a16="http://schemas.microsoft.com/office/drawing/2014/main" id="{E23DDFF3-E01C-3CA1-33E5-110A015F3955}"/>
+              </a:ext>
+            </a:extLst>
+          </p:cNvPr>
+          <p:cNvPicPr>
+            <a:picLocks noChangeAspect="1"/>
+          </p:cNvPicPr>
+          <p:nvPr/>
+        </p:nvPicPr>
+        <p:blipFill>
+          <a:blip r:embed="rId2"/>
+          <a:stretch>
+            <a:fillRect/>
+          </a:stretch>
+        </p:blipFill>
+        <p:spPr>
+          <a:xfrm>
+            <a:off x="2188027" y="2183177"/>
+            <a:ext cx="7278116" cy="2067213"/>
+          </a:xfrm>
+          <a:prstGeom prst="rect">
+            <a:avLst/>
+          </a:prstGeom>
+        </p:spPr>
+      </p:pic>
+      <p:pic>
+        <p:nvPicPr>
+          <p:cNvPr id="7" name="Picture 6">
+            <a:extLst>
+              <a:ext uri="{FF2B5EF4-FFF2-40B4-BE49-F238E27FC236}">
+                <a16:creationId xmlns:a16="http://schemas.microsoft.com/office/drawing/2014/main" id="{48FA8BF9-8FAA-1753-7F34-698235FA637E}"/>
+              </a:ext>
+            </a:extLst>
+          </p:cNvPr>
+          <p:cNvPicPr>
+            <a:picLocks noChangeAspect="1"/>
+          </p:cNvPicPr>
+          <p:nvPr/>
+        </p:nvPicPr>
+        <p:blipFill>
+          <a:blip r:embed="rId3"/>
+          <a:stretch>
+            <a:fillRect/>
+          </a:stretch>
+        </p:blipFill>
+        <p:spPr>
+          <a:xfrm>
+            <a:off x="3693187" y="5318244"/>
+            <a:ext cx="4267796" cy="1124107"/>
+          </a:xfrm>
+          <a:prstGeom prst="rect">
+            <a:avLst/>
+          </a:prstGeom>
+        </p:spPr>
+      </p:pic>
+      <p:sp>
+        <p:nvSpPr>
+          <p:cNvPr id="11" name="TextBox 10">
+            <a:extLst>
+              <a:ext uri="{FF2B5EF4-FFF2-40B4-BE49-F238E27FC236}">
+                <a16:creationId xmlns:a16="http://schemas.microsoft.com/office/drawing/2014/main" id="{CB92F103-EEC4-9CEB-5F08-DCB3F2DEB1F0}"/>
+              </a:ext>
+            </a:extLst>
+          </p:cNvPr>
+          <p:cNvSpPr txBox="1"/>
+          <p:nvPr/>
+        </p:nvSpPr>
+        <p:spPr>
+          <a:xfrm>
+            <a:off x="3556169" y="4736952"/>
+            <a:ext cx="4541832" cy="492443"/>
+          </a:xfrm>
+          <a:prstGeom prst="rect">
+            <a:avLst/>
+          </a:prstGeom>
+          <a:noFill/>
+        </p:spPr>
+        <p:txBody>
+          <a:bodyPr wrap="square" rtlCol="0">
+            <a:spAutoFit/>
+          </a:bodyPr>
+          <a:lstStyle/>
+          <a:p>
+            <a:pPr algn="ctr"/>
+            <a:r>
+              <a:rPr lang="hr-HR" sz="2600" b="1" dirty="0">
+                <a:solidFill>
+                  <a:schemeClr val="tx1">
+                    <a:lumMod val="65000"/>
+                    <a:lumOff val="35000"/>
+                  </a:schemeClr>
+                </a:solidFill>
+                <a:latin typeface="Arial" panose="020B0604020202020204" pitchFamily="34" charset="0"/>
+                <a:cs typeface="Arial" panose="020B0604020202020204" pitchFamily="34" charset="0"/>
+              </a:rPr>
+              <a:t>Algoritam ILL</a:t>
+            </a:r>
+          </a:p>
+        </p:txBody>
+      </p:sp>
+    </p:spTree>
+    <p:extLst>
+      <p:ext uri="{BB962C8B-B14F-4D97-AF65-F5344CB8AC3E}">
+        <p14:creationId xmlns:p14="http://schemas.microsoft.com/office/powerpoint/2010/main" val="3951312789"/>
+      </p:ext>
+    </p:extLst>
+  </p:cSld>
+  <p:clrMapOvr>
+    <a:masterClrMapping/>
+  </p:clrMapOvr>
+</p:sld>
+</file>
+
+<file path=ppt/slides/slide17.xml><?xml version="1.0" encoding="utf-8"?>
+<p:sld xmlns:a="http://schemas.openxmlformats.org/drawingml/2006/main" xmlns:r="http://schemas.openxmlformats.org/officeDocument/2006/relationships" xmlns:p="http://schemas.openxmlformats.org/presentationml/2006/main">
+  <p:cSld>
+    <p:spTree>
+      <p:nvGrpSpPr>
+        <p:cNvPr id="1" name="">
+          <a:extLst>
+            <a:ext uri="{FF2B5EF4-FFF2-40B4-BE49-F238E27FC236}">
+              <a16:creationId xmlns:a16="http://schemas.microsoft.com/office/drawing/2014/main" id="{CE9F6CCA-F5B1-4AB2-3585-B28D5D2467C9}"/>
+            </a:ext>
+          </a:extLst>
+        </p:cNvPr>
+        <p:cNvGrpSpPr/>
+        <p:nvPr/>
+      </p:nvGrpSpPr>
+      <p:grpSpPr>
+        <a:xfrm>
+          <a:off x="0" y="0"/>
+          <a:ext cx="0" cy="0"/>
+          <a:chOff x="0" y="0"/>
+          <a:chExt cx="0" cy="0"/>
+        </a:xfrm>
+      </p:grpSpPr>
+      <p:sp>
+        <p:nvSpPr>
+          <p:cNvPr id="2" name="Title 1">
+            <a:extLst>
+              <a:ext uri="{FF2B5EF4-FFF2-40B4-BE49-F238E27FC236}">
+                <a16:creationId xmlns:a16="http://schemas.microsoft.com/office/drawing/2014/main" id="{A7CF247E-C733-AAE7-7F97-10810314BABE}"/>
+              </a:ext>
+            </a:extLst>
+          </p:cNvPr>
+          <p:cNvSpPr>
+            <a:spLocks noGrp="1"/>
+          </p:cNvSpPr>
+          <p:nvPr>
+            <p:ph type="title"/>
+          </p:nvPr>
+        </p:nvSpPr>
+        <p:spPr>
+          <a:xfrm>
+            <a:off x="1261871" y="294198"/>
+            <a:ext cx="10126565" cy="1397124"/>
+          </a:xfrm>
+        </p:spPr>
+        <p:txBody>
+          <a:bodyPr>
+            <a:noAutofit/>
+          </a:bodyPr>
+          <a:lstStyle/>
+          <a:p>
+            <a:br>
+              <a:rPr lang="en-US" sz="4000" dirty="0">
+                <a:latin typeface="Arial" panose="020B0604020202020204" pitchFamily="34" charset="0"/>
+                <a:cs typeface="Arial" panose="020B0604020202020204" pitchFamily="34" charset="0"/>
+              </a:rPr>
+            </a:br>
+            <a:r>
+              <a:rPr lang="hr-HR" sz="4000" dirty="0">
+                <a:latin typeface="Arial" panose="020B0604020202020204" pitchFamily="34" charset="0"/>
+                <a:cs typeface="Arial" panose="020B0604020202020204" pitchFamily="34" charset="0"/>
+              </a:rPr>
+              <a:t>Zašumljene oznake, validacija CE</a:t>
+            </a:r>
+            <a:br>
+              <a:rPr lang="en-US" sz="4000" dirty="0">
+                <a:latin typeface="Arial" panose="020B0604020202020204" pitchFamily="34" charset="0"/>
+                <a:cs typeface="Arial" panose="020B0604020202020204" pitchFamily="34" charset="0"/>
+              </a:rPr>
+            </a:br>
+            <a:endParaRPr lang="hr-HR" sz="4000" noProof="0" dirty="0">
+              <a:latin typeface="Arial" panose="020B0604020202020204" pitchFamily="34" charset="0"/>
+              <a:cs typeface="Arial" panose="020B0604020202020204" pitchFamily="34" charset="0"/>
+            </a:endParaRPr>
+          </a:p>
+        </p:txBody>
+      </p:sp>
+      <p:sp>
+        <p:nvSpPr>
+          <p:cNvPr id="5" name="Slide Number Placeholder 4">
+            <a:extLst>
+              <a:ext uri="{FF2B5EF4-FFF2-40B4-BE49-F238E27FC236}">
+                <a16:creationId xmlns:a16="http://schemas.microsoft.com/office/drawing/2014/main" id="{576C0CBB-AFB1-8391-B6C8-0FCC71939B90}"/>
+              </a:ext>
+            </a:extLst>
+          </p:cNvPr>
+          <p:cNvSpPr>
+            <a:spLocks noGrp="1"/>
+          </p:cNvSpPr>
+          <p:nvPr>
+            <p:ph type="sldNum" sz="quarter" idx="12"/>
+          </p:nvPr>
+        </p:nvSpPr>
+        <p:spPr/>
+        <p:txBody>
+          <a:bodyPr>
+            <a:normAutofit lnSpcReduction="10000"/>
+          </a:bodyPr>
+          <a:lstStyle/>
+          <a:p>
+            <a:r>
+              <a:rPr lang="hr-HR" dirty="0"/>
+              <a:t>14</a:t>
+            </a:r>
+          </a:p>
+        </p:txBody>
+      </p:sp>
+      <p:sp>
+        <p:nvSpPr>
+          <p:cNvPr id="8" name="TextBox 7">
+            <a:extLst>
+              <a:ext uri="{FF2B5EF4-FFF2-40B4-BE49-F238E27FC236}">
+                <a16:creationId xmlns:a16="http://schemas.microsoft.com/office/drawing/2014/main" id="{E173D876-80B6-2E5E-A8E7-B1C35C1284F8}"/>
+              </a:ext>
+            </a:extLst>
+          </p:cNvPr>
+          <p:cNvSpPr txBox="1"/>
+          <p:nvPr/>
+        </p:nvSpPr>
+        <p:spPr>
+          <a:xfrm>
+            <a:off x="10228507" y="6073019"/>
+            <a:ext cx="809199" cy="369332"/>
+          </a:xfrm>
+          <a:prstGeom prst="rect">
+            <a:avLst/>
+          </a:prstGeom>
+          <a:solidFill>
+            <a:schemeClr val="bg1"/>
+          </a:solidFill>
+        </p:spPr>
+        <p:txBody>
+          <a:bodyPr wrap="square" rtlCol="0">
+            <a:spAutoFit/>
+          </a:bodyPr>
+          <a:lstStyle/>
+          <a:p>
+            <a:endParaRPr lang="hr-HR" dirty="0"/>
+          </a:p>
+        </p:txBody>
+      </p:sp>
+      <p:sp>
+        <p:nvSpPr>
+          <p:cNvPr id="25" name="TextBox 24">
+            <a:extLst>
+              <a:ext uri="{FF2B5EF4-FFF2-40B4-BE49-F238E27FC236}">
+                <a16:creationId xmlns:a16="http://schemas.microsoft.com/office/drawing/2014/main" id="{E2452F31-ADA5-19AE-CA10-5ED078396C29}"/>
+              </a:ext>
+            </a:extLst>
+          </p:cNvPr>
+          <p:cNvSpPr txBox="1"/>
+          <p:nvPr/>
+        </p:nvSpPr>
+        <p:spPr>
+          <a:xfrm>
+            <a:off x="3686540" y="1664304"/>
+            <a:ext cx="4541832" cy="492443"/>
+          </a:xfrm>
+          <a:prstGeom prst="rect">
+            <a:avLst/>
+          </a:prstGeom>
+          <a:noFill/>
+        </p:spPr>
+        <p:txBody>
+          <a:bodyPr wrap="square" rtlCol="0">
+            <a:spAutoFit/>
+          </a:bodyPr>
+          <a:lstStyle/>
+          <a:p>
+            <a:pPr algn="ctr"/>
+            <a:r>
+              <a:rPr lang="en-US" sz="2600" b="1" dirty="0">
+                <a:solidFill>
+                  <a:schemeClr val="tx1">
+                    <a:lumMod val="65000"/>
+                    <a:lumOff val="35000"/>
+                  </a:schemeClr>
+                </a:solidFill>
+                <a:latin typeface="Arial" panose="020B0604020202020204" pitchFamily="34" charset="0"/>
+                <a:cs typeface="Arial" panose="020B0604020202020204" pitchFamily="34" charset="0"/>
+              </a:rPr>
+              <a:t>N</a:t>
+            </a:r>
+            <a:r>
+              <a:rPr lang="hr-HR" sz="2600" b="1" dirty="0">
+                <a:solidFill>
+                  <a:schemeClr val="tx1">
+                    <a:lumMod val="65000"/>
+                    <a:lumOff val="35000"/>
+                  </a:schemeClr>
+                </a:solidFill>
+                <a:latin typeface="Arial" panose="020B0604020202020204" pitchFamily="34" charset="0"/>
+                <a:cs typeface="Arial" panose="020B0604020202020204" pitchFamily="34" charset="0"/>
+              </a:rPr>
+              <a:t>adzirano učenje</a:t>
+            </a:r>
+          </a:p>
+        </p:txBody>
+      </p:sp>
+      <p:sp>
+        <p:nvSpPr>
+          <p:cNvPr id="11" name="TextBox 10">
+            <a:extLst>
+              <a:ext uri="{FF2B5EF4-FFF2-40B4-BE49-F238E27FC236}">
+                <a16:creationId xmlns:a16="http://schemas.microsoft.com/office/drawing/2014/main" id="{B6E1EF54-08AA-7D61-D8D1-F5E586D0EA92}"/>
+              </a:ext>
+            </a:extLst>
+          </p:cNvPr>
+          <p:cNvSpPr txBox="1"/>
+          <p:nvPr/>
+        </p:nvSpPr>
+        <p:spPr>
+          <a:xfrm>
+            <a:off x="2126621" y="4253824"/>
+            <a:ext cx="7661665" cy="492443"/>
+          </a:xfrm>
+          <a:prstGeom prst="rect">
+            <a:avLst/>
+          </a:prstGeom>
+          <a:noFill/>
+        </p:spPr>
+        <p:txBody>
+          <a:bodyPr wrap="square" rtlCol="0">
+            <a:spAutoFit/>
+          </a:bodyPr>
+          <a:lstStyle/>
+          <a:p>
+            <a:pPr algn="ctr"/>
+            <a:r>
+              <a:rPr lang="hr-HR" sz="2600" b="1" dirty="0">
+                <a:solidFill>
+                  <a:schemeClr val="tx1">
+                    <a:lumMod val="65000"/>
+                    <a:lumOff val="35000"/>
+                  </a:schemeClr>
+                </a:solidFill>
+                <a:latin typeface="Arial" panose="020B0604020202020204" pitchFamily="34" charset="0"/>
+                <a:cs typeface="Arial" panose="020B0604020202020204" pitchFamily="34" charset="0"/>
+              </a:rPr>
+              <a:t>Nadzirano učenje s konzistencijskim gubitkom</a:t>
+            </a:r>
+          </a:p>
+        </p:txBody>
+      </p:sp>
+      <p:pic>
+        <p:nvPicPr>
+          <p:cNvPr id="6" name="Picture 5">
+            <a:extLst>
+              <a:ext uri="{FF2B5EF4-FFF2-40B4-BE49-F238E27FC236}">
+                <a16:creationId xmlns:a16="http://schemas.microsoft.com/office/drawing/2014/main" id="{63713248-CD5B-5CD1-13F5-7A7E8CB6CE3D}"/>
+              </a:ext>
+            </a:extLst>
+          </p:cNvPr>
+          <p:cNvPicPr>
+            <a:picLocks noChangeAspect="1"/>
+          </p:cNvPicPr>
+          <p:nvPr/>
+        </p:nvPicPr>
+        <p:blipFill>
+          <a:blip r:embed="rId2"/>
+          <a:stretch>
+            <a:fillRect/>
+          </a:stretch>
+        </p:blipFill>
+        <p:spPr>
+          <a:xfrm>
+            <a:off x="2432713" y="2246175"/>
+            <a:ext cx="6982799" cy="1467055"/>
+          </a:xfrm>
+          <a:prstGeom prst="rect">
+            <a:avLst/>
+          </a:prstGeom>
+        </p:spPr>
+      </p:pic>
+      <p:pic>
+        <p:nvPicPr>
+          <p:cNvPr id="10" name="Picture 9">
+            <a:extLst>
+              <a:ext uri="{FF2B5EF4-FFF2-40B4-BE49-F238E27FC236}">
+                <a16:creationId xmlns:a16="http://schemas.microsoft.com/office/drawing/2014/main" id="{D0345826-227D-2445-F058-BDBAEE756E96}"/>
+              </a:ext>
+            </a:extLst>
+          </p:cNvPr>
+          <p:cNvPicPr>
+            <a:picLocks noChangeAspect="1"/>
+          </p:cNvPicPr>
+          <p:nvPr/>
+        </p:nvPicPr>
+        <p:blipFill>
+          <a:blip r:embed="rId3"/>
+          <a:stretch>
+            <a:fillRect/>
+          </a:stretch>
+        </p:blipFill>
+        <p:spPr>
+          <a:xfrm>
+            <a:off x="2499397" y="4830886"/>
+            <a:ext cx="6916115" cy="1409897"/>
+          </a:xfrm>
+          <a:prstGeom prst="rect">
+            <a:avLst/>
+          </a:prstGeom>
+        </p:spPr>
+      </p:pic>
+    </p:spTree>
+    <p:extLst>
+      <p:ext uri="{BB962C8B-B14F-4D97-AF65-F5344CB8AC3E}">
+        <p14:creationId xmlns:p14="http://schemas.microsoft.com/office/powerpoint/2010/main" val="2445987352"/>
+      </p:ext>
+    </p:extLst>
+  </p:cSld>
+  <p:clrMapOvr>
+    <a:masterClrMapping/>
+  </p:clrMapOvr>
+</p:sld>
+</file>
+
+<file path=ppt/slides/slide18.xml><?xml version="1.0" encoding="utf-8"?>
+<p:sld xmlns:a="http://schemas.openxmlformats.org/drawingml/2006/main" xmlns:r="http://schemas.openxmlformats.org/officeDocument/2006/relationships" xmlns:p="http://schemas.openxmlformats.org/presentationml/2006/main">
+  <p:cSld>
+    <p:spTree>
+      <p:nvGrpSpPr>
+        <p:cNvPr id="1" name="">
+          <a:extLst>
+            <a:ext uri="{FF2B5EF4-FFF2-40B4-BE49-F238E27FC236}">
+              <a16:creationId xmlns:a16="http://schemas.microsoft.com/office/drawing/2014/main" id="{E4D634F9-0ADB-9EC4-1D97-1016918AF7BB}"/>
+            </a:ext>
+          </a:extLst>
+        </p:cNvPr>
+        <p:cNvGrpSpPr/>
+        <p:nvPr/>
+      </p:nvGrpSpPr>
+      <p:grpSpPr>
+        <a:xfrm>
+          <a:off x="0" y="0"/>
+          <a:ext cx="0" cy="0"/>
+          <a:chOff x="0" y="0"/>
+          <a:chExt cx="0" cy="0"/>
+        </a:xfrm>
+      </p:grpSpPr>
+      <p:sp>
+        <p:nvSpPr>
+          <p:cNvPr id="2" name="Title 1">
+            <a:extLst>
+              <a:ext uri="{FF2B5EF4-FFF2-40B4-BE49-F238E27FC236}">
+                <a16:creationId xmlns:a16="http://schemas.microsoft.com/office/drawing/2014/main" id="{DEB2D733-7709-9166-C56B-E4EA70C1D77D}"/>
+              </a:ext>
+            </a:extLst>
+          </p:cNvPr>
+          <p:cNvSpPr>
+            <a:spLocks noGrp="1"/>
+          </p:cNvSpPr>
+          <p:nvPr>
+            <p:ph type="title"/>
+          </p:nvPr>
+        </p:nvSpPr>
+        <p:spPr>
+          <a:xfrm>
+            <a:off x="1261872" y="294198"/>
+            <a:ext cx="9775834" cy="1397124"/>
+          </a:xfrm>
+        </p:spPr>
+        <p:txBody>
+          <a:bodyPr>
+            <a:normAutofit fontScale="90000"/>
+          </a:bodyPr>
+          <a:lstStyle/>
+          <a:p>
+            <a:br>
+              <a:rPr lang="hr-HR" dirty="0">
+                <a:latin typeface="Arial" panose="020B0604020202020204" pitchFamily="34" charset="0"/>
+                <a:cs typeface="Arial" panose="020B0604020202020204" pitchFamily="34" charset="0"/>
+              </a:rPr>
+            </a:br>
+            <a:r>
+              <a:rPr lang="hr-HR" dirty="0">
+                <a:latin typeface="Arial" panose="020B0604020202020204" pitchFamily="34" charset="0"/>
+                <a:cs typeface="Arial" panose="020B0604020202020204" pitchFamily="34" charset="0"/>
+              </a:rPr>
+              <a:t>Napadi, usporedba sa SotA</a:t>
+            </a:r>
+            <a:br>
+              <a:rPr lang="en-US" dirty="0">
+                <a:latin typeface="Arial" panose="020B0604020202020204" pitchFamily="34" charset="0"/>
+                <a:cs typeface="Arial" panose="020B0604020202020204" pitchFamily="34" charset="0"/>
+              </a:rPr>
+            </a:br>
+            <a:endParaRPr lang="hr-HR" noProof="0" dirty="0">
+              <a:latin typeface="Arial" panose="020B0604020202020204" pitchFamily="34" charset="0"/>
+              <a:cs typeface="Arial" panose="020B0604020202020204" pitchFamily="34" charset="0"/>
+            </a:endParaRPr>
+          </a:p>
+        </p:txBody>
+      </p:sp>
+      <p:sp>
+        <p:nvSpPr>
+          <p:cNvPr id="5" name="Slide Number Placeholder 4">
+            <a:extLst>
+              <a:ext uri="{FF2B5EF4-FFF2-40B4-BE49-F238E27FC236}">
+                <a16:creationId xmlns:a16="http://schemas.microsoft.com/office/drawing/2014/main" id="{87B8DC4E-B479-5A44-FAFE-698FE1A39B4C}"/>
+              </a:ext>
+            </a:extLst>
+          </p:cNvPr>
+          <p:cNvSpPr>
+            <a:spLocks noGrp="1"/>
+          </p:cNvSpPr>
+          <p:nvPr>
+            <p:ph type="sldNum" sz="quarter" idx="12"/>
+          </p:nvPr>
+        </p:nvSpPr>
+        <p:spPr/>
+        <p:txBody>
+          <a:bodyPr>
+            <a:normAutofit lnSpcReduction="10000"/>
+          </a:bodyPr>
+          <a:lstStyle/>
+          <a:p>
+            <a:r>
+              <a:rPr lang="hr-HR" dirty="0"/>
+              <a:t>15</a:t>
+            </a:r>
+          </a:p>
+        </p:txBody>
+      </p:sp>
+      <p:sp>
+        <p:nvSpPr>
+          <p:cNvPr id="8" name="TextBox 7">
+            <a:extLst>
+              <a:ext uri="{FF2B5EF4-FFF2-40B4-BE49-F238E27FC236}">
+                <a16:creationId xmlns:a16="http://schemas.microsoft.com/office/drawing/2014/main" id="{C1AF4C28-5349-66F9-F1E6-92F7B7A0B351}"/>
+              </a:ext>
+            </a:extLst>
+          </p:cNvPr>
+          <p:cNvSpPr txBox="1"/>
+          <p:nvPr/>
+        </p:nvSpPr>
+        <p:spPr>
+          <a:xfrm>
+            <a:off x="10228507" y="6073019"/>
+            <a:ext cx="809199" cy="369332"/>
+          </a:xfrm>
+          <a:prstGeom prst="rect">
+            <a:avLst/>
+          </a:prstGeom>
+          <a:solidFill>
+            <a:schemeClr val="bg1"/>
+          </a:solidFill>
+        </p:spPr>
+        <p:txBody>
+          <a:bodyPr wrap="square" rtlCol="0">
+            <a:spAutoFit/>
+          </a:bodyPr>
+          <a:lstStyle/>
+          <a:p>
+            <a:endParaRPr lang="hr-HR" dirty="0"/>
+          </a:p>
+        </p:txBody>
+      </p:sp>
+      <p:pic>
+        <p:nvPicPr>
+          <p:cNvPr id="10" name="Picture 9">
+            <a:extLst>
+              <a:ext uri="{FF2B5EF4-FFF2-40B4-BE49-F238E27FC236}">
+                <a16:creationId xmlns:a16="http://schemas.microsoft.com/office/drawing/2014/main" id="{FA612C26-FD20-9E2C-807F-E692AF38E6A5}"/>
+              </a:ext>
+            </a:extLst>
+          </p:cNvPr>
+          <p:cNvPicPr>
+            <a:picLocks noChangeAspect="1"/>
+          </p:cNvPicPr>
+          <p:nvPr/>
+        </p:nvPicPr>
+        <p:blipFill>
+          <a:blip r:embed="rId2"/>
+          <a:stretch>
+            <a:fillRect/>
+          </a:stretch>
+        </p:blipFill>
+        <p:spPr>
+          <a:xfrm>
+            <a:off x="1007169" y="1845651"/>
+            <a:ext cx="4525006" cy="2105319"/>
+          </a:xfrm>
+          <a:prstGeom prst="rect">
+            <a:avLst/>
+          </a:prstGeom>
+        </p:spPr>
+      </p:pic>
+      <p:pic>
+        <p:nvPicPr>
+          <p:cNvPr id="12" name="Picture 11">
+            <a:extLst>
+              <a:ext uri="{FF2B5EF4-FFF2-40B4-BE49-F238E27FC236}">
+                <a16:creationId xmlns:a16="http://schemas.microsoft.com/office/drawing/2014/main" id="{229FA482-D53C-DF5D-E8B0-8E8EFBA4FCAC}"/>
+              </a:ext>
+            </a:extLst>
+          </p:cNvPr>
+          <p:cNvPicPr>
+            <a:picLocks noChangeAspect="1"/>
+          </p:cNvPicPr>
+          <p:nvPr/>
+        </p:nvPicPr>
+        <p:blipFill>
+          <a:blip r:embed="rId3"/>
+          <a:stretch>
+            <a:fillRect/>
+          </a:stretch>
+        </p:blipFill>
+        <p:spPr>
+          <a:xfrm>
+            <a:off x="6198278" y="1826598"/>
+            <a:ext cx="4620270" cy="2143424"/>
+          </a:xfrm>
+          <a:prstGeom prst="rect">
+            <a:avLst/>
+          </a:prstGeom>
+        </p:spPr>
+      </p:pic>
+      <p:pic>
+        <p:nvPicPr>
+          <p:cNvPr id="14" name="Picture 13">
+            <a:extLst>
+              <a:ext uri="{FF2B5EF4-FFF2-40B4-BE49-F238E27FC236}">
+                <a16:creationId xmlns:a16="http://schemas.microsoft.com/office/drawing/2014/main" id="{B0EE4245-E6D3-F790-DD4A-5AF837A6051E}"/>
+              </a:ext>
+            </a:extLst>
+          </p:cNvPr>
+          <p:cNvPicPr>
+            <a:picLocks noChangeAspect="1"/>
+          </p:cNvPicPr>
+          <p:nvPr/>
+        </p:nvPicPr>
+        <p:blipFill>
+          <a:blip r:embed="rId4"/>
+          <a:stretch>
+            <a:fillRect/>
+          </a:stretch>
+        </p:blipFill>
+        <p:spPr>
+          <a:xfrm>
+            <a:off x="3604027" y="4596236"/>
+            <a:ext cx="4582164" cy="2143424"/>
+          </a:xfrm>
+          <a:prstGeom prst="rect">
+            <a:avLst/>
+          </a:prstGeom>
+        </p:spPr>
+      </p:pic>
+      <p:sp>
+        <p:nvSpPr>
+          <p:cNvPr id="15" name="TextBox 14">
+            <a:extLst>
+              <a:ext uri="{FF2B5EF4-FFF2-40B4-BE49-F238E27FC236}">
+                <a16:creationId xmlns:a16="http://schemas.microsoft.com/office/drawing/2014/main" id="{AB653B42-6214-3D0F-D63D-5007E0890338}"/>
+              </a:ext>
+            </a:extLst>
+          </p:cNvPr>
+          <p:cNvSpPr txBox="1"/>
+          <p:nvPr/>
+        </p:nvSpPr>
+        <p:spPr>
+          <a:xfrm>
+            <a:off x="2443220" y="1335661"/>
+            <a:ext cx="1652903" cy="492443"/>
+          </a:xfrm>
+          <a:prstGeom prst="rect">
+            <a:avLst/>
+          </a:prstGeom>
+          <a:noFill/>
+        </p:spPr>
+        <p:txBody>
+          <a:bodyPr wrap="square" rtlCol="0">
+            <a:spAutoFit/>
+          </a:bodyPr>
+          <a:lstStyle/>
+          <a:p>
+            <a:pPr algn="ctr"/>
+            <a:r>
+              <a:rPr lang="hr-HR" sz="2600" b="1" dirty="0">
+                <a:solidFill>
+                  <a:schemeClr val="tx1">
+                    <a:lumMod val="65000"/>
+                    <a:lumOff val="35000"/>
+                  </a:schemeClr>
+                </a:solidFill>
+                <a:latin typeface="Arial" panose="020B0604020202020204" pitchFamily="34" charset="0"/>
+                <a:cs typeface="Arial" panose="020B0604020202020204" pitchFamily="34" charset="0"/>
+              </a:rPr>
+              <a:t>BadNets</a:t>
+            </a:r>
+          </a:p>
+        </p:txBody>
+      </p:sp>
+      <p:sp>
+        <p:nvSpPr>
+          <p:cNvPr id="17" name="TextBox 16">
+            <a:extLst>
+              <a:ext uri="{FF2B5EF4-FFF2-40B4-BE49-F238E27FC236}">
+                <a16:creationId xmlns:a16="http://schemas.microsoft.com/office/drawing/2014/main" id="{3D44A51E-3430-78F3-E6E6-1A27B147E5BA}"/>
+              </a:ext>
+            </a:extLst>
+          </p:cNvPr>
+          <p:cNvSpPr txBox="1"/>
+          <p:nvPr/>
+        </p:nvSpPr>
+        <p:spPr>
+          <a:xfrm>
+            <a:off x="7681962" y="1335660"/>
+            <a:ext cx="1652903" cy="492443"/>
+          </a:xfrm>
+          <a:prstGeom prst="rect">
+            <a:avLst/>
+          </a:prstGeom>
+          <a:noFill/>
+        </p:spPr>
+        <p:txBody>
+          <a:bodyPr wrap="square" rtlCol="0">
+            <a:spAutoFit/>
+          </a:bodyPr>
+          <a:lstStyle/>
+          <a:p>
+            <a:pPr algn="ctr"/>
+            <a:r>
+              <a:rPr lang="hr-HR" sz="2600" b="1" dirty="0">
+                <a:solidFill>
+                  <a:schemeClr val="tx1">
+                    <a:lumMod val="65000"/>
+                    <a:lumOff val="35000"/>
+                  </a:schemeClr>
+                </a:solidFill>
+                <a:latin typeface="Arial" panose="020B0604020202020204" pitchFamily="34" charset="0"/>
+                <a:cs typeface="Arial" panose="020B0604020202020204" pitchFamily="34" charset="0"/>
+              </a:rPr>
+              <a:t>Blend</a:t>
+            </a:r>
+          </a:p>
+        </p:txBody>
+      </p:sp>
+      <p:sp>
+        <p:nvSpPr>
+          <p:cNvPr id="18" name="TextBox 17">
+            <a:extLst>
+              <a:ext uri="{FF2B5EF4-FFF2-40B4-BE49-F238E27FC236}">
+                <a16:creationId xmlns:a16="http://schemas.microsoft.com/office/drawing/2014/main" id="{B607CDCD-2CCC-7111-0B0F-3C56C6354B35}"/>
+              </a:ext>
+            </a:extLst>
+          </p:cNvPr>
+          <p:cNvSpPr txBox="1"/>
+          <p:nvPr/>
+        </p:nvSpPr>
+        <p:spPr>
+          <a:xfrm>
+            <a:off x="5068657" y="4105299"/>
+            <a:ext cx="1652903" cy="492443"/>
+          </a:xfrm>
+          <a:prstGeom prst="rect">
+            <a:avLst/>
+          </a:prstGeom>
+          <a:noFill/>
+        </p:spPr>
+        <p:txBody>
+          <a:bodyPr wrap="square" rtlCol="0">
+            <a:spAutoFit/>
+          </a:bodyPr>
+          <a:lstStyle/>
+          <a:p>
+            <a:pPr algn="ctr"/>
+            <a:r>
+              <a:rPr lang="hr-HR" sz="2600" b="1" dirty="0">
+                <a:solidFill>
+                  <a:schemeClr val="tx1">
+                    <a:lumMod val="65000"/>
+                    <a:lumOff val="35000"/>
+                  </a:schemeClr>
+                </a:solidFill>
+                <a:latin typeface="Arial" panose="020B0604020202020204" pitchFamily="34" charset="0"/>
+                <a:cs typeface="Arial" panose="020B0604020202020204" pitchFamily="34" charset="0"/>
+              </a:rPr>
+              <a:t>WaNet</a:t>
+            </a:r>
+          </a:p>
+        </p:txBody>
+      </p:sp>
+    </p:spTree>
+    <p:extLst>
+      <p:ext uri="{BB962C8B-B14F-4D97-AF65-F5344CB8AC3E}">
+        <p14:creationId xmlns:p14="http://schemas.microsoft.com/office/powerpoint/2010/main" val="1259540914"/>
+      </p:ext>
+    </p:extLst>
+  </p:cSld>
+  <p:clrMapOvr>
+    <a:masterClrMapping/>
+  </p:clrMapOvr>
+</p:sld>
+</file>
+
+<file path=ppt/slides/slide19.xml><?xml version="1.0" encoding="utf-8"?>
 <p:sld xmlns:a="http://schemas.openxmlformats.org/drawingml/2006/main" xmlns:r="http://schemas.openxmlformats.org/officeDocument/2006/relationships" xmlns:p="http://schemas.openxmlformats.org/presentationml/2006/main">
   <p:cSld>
     <p:spTree>
@@ -5122,41 +7103,9 @@
         </p:spPr>
         <p:txBody>
           <a:bodyPr>
-            <a:normAutofit/>
+            <a:normAutofit lnSpcReduction="10000"/>
           </a:bodyPr>
           <a:lstStyle/>
-          <a:p>
-            <a:r>
-              <a:rPr lang="hr-HR" sz="2600" dirty="0">
-                <a:latin typeface="Arial" panose="020B0604020202020204" pitchFamily="34" charset="0"/>
-                <a:cs typeface="Arial" panose="020B0604020202020204" pitchFamily="34" charset="0"/>
-              </a:rPr>
-              <a:t>n</a:t>
-            </a:r>
-            <a:r>
-              <a:rPr lang="hr-HR" sz="2600" noProof="0" dirty="0">
-                <a:latin typeface="Arial" panose="020B0604020202020204" pitchFamily="34" charset="0"/>
-                <a:cs typeface="Arial" panose="020B0604020202020204" pitchFamily="34" charset="0"/>
-              </a:rPr>
-              <a:t>ismo uspjeli eksperimentalno potvrditi ranjivost multimodalnog modela CLIP</a:t>
-            </a:r>
-          </a:p>
-          <a:p>
-            <a:r>
-              <a:rPr lang="hr-HR" sz="2600" dirty="0">
-                <a:latin typeface="Arial" panose="020B0604020202020204" pitchFamily="34" charset="0"/>
-                <a:cs typeface="Arial" panose="020B0604020202020204" pitchFamily="34" charset="0"/>
-              </a:rPr>
-              <a:t>m</a:t>
-            </a:r>
-            <a:r>
-              <a:rPr lang="hr-HR" sz="2600" noProof="0" dirty="0">
-                <a:latin typeface="Arial" panose="020B0604020202020204" pitchFamily="34" charset="0"/>
-                <a:cs typeface="Arial" panose="020B0604020202020204" pitchFamily="34" charset="0"/>
-              </a:rPr>
-              <a:t>ogući uzrok: model nije učen dovoljno</a:t>
-            </a:r>
-          </a:p>
           <a:p>
             <a:endParaRPr lang="hr-HR" sz="2600" dirty="0">
               <a:latin typeface="Arial" panose="020B0604020202020204" pitchFamily="34" charset="0"/>
@@ -5164,47 +7113,106 @@
             </a:endParaRPr>
           </a:p>
           <a:p>
+            <a:r>
+              <a:rPr lang="hr-HR" sz="2600" dirty="0">
+                <a:latin typeface="Arial" panose="020B0604020202020204" pitchFamily="34" charset="0"/>
+                <a:cs typeface="Arial" panose="020B0604020202020204" pitchFamily="34" charset="0"/>
+              </a:rPr>
+              <a:t>osnovnu inačicu VIBE-a nadogradili smo korištenjem </a:t>
+            </a:r>
+            <a:r>
+              <a:rPr lang="hr-HR" sz="2600" b="1" dirty="0">
+                <a:latin typeface="Arial" panose="020B0604020202020204" pitchFamily="34" charset="0"/>
+                <a:cs typeface="Arial" panose="020B0604020202020204" pitchFamily="34" charset="0"/>
+              </a:rPr>
+              <a:t>kosinusnog kaljenja </a:t>
+            </a:r>
+            <a:r>
+              <a:rPr lang="hr-HR" sz="2600" dirty="0">
+                <a:latin typeface="Arial" panose="020B0604020202020204" pitchFamily="34" charset="0"/>
+                <a:cs typeface="Arial" panose="020B0604020202020204" pitchFamily="34" charset="0"/>
+              </a:rPr>
+              <a:t>te dodavanjem </a:t>
+            </a:r>
+            <a:r>
+              <a:rPr lang="hr-HR" sz="2600" b="1" dirty="0">
+                <a:latin typeface="Arial" panose="020B0604020202020204" pitchFamily="34" charset="0"/>
+                <a:cs typeface="Arial" panose="020B0604020202020204" pitchFamily="34" charset="0"/>
+              </a:rPr>
+              <a:t>konzistencijskog gubitka</a:t>
+            </a:r>
+          </a:p>
+          <a:p>
             <a:pPr marL="0" indent="0">
               <a:buNone/>
             </a:pPr>
-            <a:r>
-              <a:rPr lang="hr-HR" sz="2600" noProof="0" dirty="0">
-                <a:latin typeface="Arial" panose="020B0604020202020204" pitchFamily="34" charset="0"/>
-                <a:cs typeface="Arial" panose="020B0604020202020204" pitchFamily="34" charset="0"/>
-              </a:rPr>
-              <a:t>Budući rad:</a:t>
-            </a:r>
-          </a:p>
-          <a:p>
-            <a:pPr lvl="1"/>
-            <a:r>
-              <a:rPr lang="hr-HR" sz="2600" dirty="0">
-                <a:latin typeface="Arial" panose="020B0604020202020204" pitchFamily="34" charset="0"/>
-                <a:cs typeface="Arial" panose="020B0604020202020204" pitchFamily="34" charset="0"/>
-              </a:rPr>
-              <a:t>p</a:t>
-            </a:r>
-            <a:r>
-              <a:rPr lang="hr-HR" sz="2600" noProof="0" dirty="0">
-                <a:latin typeface="Arial" panose="020B0604020202020204" pitchFamily="34" charset="0"/>
-                <a:cs typeface="Arial" panose="020B0604020202020204" pitchFamily="34" charset="0"/>
-              </a:rPr>
-              <a:t>rovođenje eksperimenata na većem skupu podataka uz veći broj epoha i veće mini-grupe</a:t>
-            </a:r>
-          </a:p>
-          <a:p>
-            <a:pPr lvl="1"/>
-            <a:r>
-              <a:rPr lang="hr-HR" sz="2600" dirty="0">
-                <a:latin typeface="Arial" panose="020B0604020202020204" pitchFamily="34" charset="0"/>
-                <a:cs typeface="Arial" panose="020B0604020202020204" pitchFamily="34" charset="0"/>
-              </a:rPr>
-              <a:t>kontaktiranje autora originalnog rada i validiranje algoritma učenja</a:t>
-            </a:r>
-            <a:endParaRPr lang="hr-HR" sz="2600" noProof="0" dirty="0">
+            <a:endParaRPr lang="hr-HR" sz="2600" b="1" dirty="0">
               <a:latin typeface="Arial" panose="020B0604020202020204" pitchFamily="34" charset="0"/>
               <a:cs typeface="Arial" panose="020B0604020202020204" pitchFamily="34" charset="0"/>
             </a:endParaRPr>
+          </a:p>
+          <a:p>
+            <a:pPr marL="0" indent="0">
+              <a:buNone/>
+            </a:pPr>
+            <a:r>
+              <a:rPr lang="hr-HR" sz="2600" dirty="0">
+                <a:latin typeface="Arial" panose="020B0604020202020204" pitchFamily="34" charset="0"/>
+                <a:cs typeface="Arial" panose="020B0604020202020204" pitchFamily="34" charset="0"/>
+              </a:rPr>
+              <a:t>Zašumljene oznake</a:t>
+            </a:r>
+          </a:p>
+          <a:p>
+            <a:pPr lvl="1"/>
+            <a:r>
+              <a:rPr lang="hr-HR" sz="2600" dirty="0">
+                <a:latin typeface="Arial" panose="020B0604020202020204" pitchFamily="34" charset="0"/>
+                <a:cs typeface="Arial" panose="020B0604020202020204" pitchFamily="34" charset="0"/>
+              </a:rPr>
+              <a:t>osnovna inačica VIBE-a postiže lošije rezultate od SotA</a:t>
+            </a:r>
+          </a:p>
+          <a:p>
+            <a:pPr lvl="1"/>
+            <a:r>
+              <a:rPr lang="hr-HR" sz="2600" dirty="0">
+                <a:latin typeface="Arial" panose="020B0604020202020204" pitchFamily="34" charset="0"/>
+                <a:cs typeface="Arial" panose="020B0604020202020204" pitchFamily="34" charset="0"/>
+              </a:rPr>
+              <a:t>nadograđena inačica VIBE-a postiže </a:t>
+            </a:r>
+            <a:r>
+              <a:rPr lang="hr-HR" sz="2600" b="1" dirty="0">
+                <a:latin typeface="Arial" panose="020B0604020202020204" pitchFamily="34" charset="0"/>
+                <a:cs typeface="Arial" panose="020B0604020202020204" pitchFamily="34" charset="0"/>
+              </a:rPr>
+              <a:t>najbolje rezultate u teškim postavima</a:t>
+            </a:r>
+          </a:p>
+          <a:p>
+            <a:pPr lvl="1"/>
+            <a:r>
+              <a:rPr lang="hr-HR" sz="2600" dirty="0">
+                <a:latin typeface="Arial" panose="020B0604020202020204" pitchFamily="34" charset="0"/>
+                <a:cs typeface="Arial" panose="020B0604020202020204" pitchFamily="34" charset="0"/>
+              </a:rPr>
+              <a:t>dodavanje konzistencijskog gubitka nadziranom učenju može </a:t>
+            </a:r>
+            <a:r>
+              <a:rPr lang="hr-HR" sz="2600" b="1" dirty="0">
+                <a:latin typeface="Arial" panose="020B0604020202020204" pitchFamily="34" charset="0"/>
+                <a:cs typeface="Arial" panose="020B0604020202020204" pitchFamily="34" charset="0"/>
+              </a:rPr>
+              <a:t>značajno povećati točnost </a:t>
+            </a:r>
+            <a:r>
+              <a:rPr lang="hr-HR" sz="2600" dirty="0">
+                <a:latin typeface="Arial" panose="020B0604020202020204" pitchFamily="34" charset="0"/>
+                <a:cs typeface="Arial" panose="020B0604020202020204" pitchFamily="34" charset="0"/>
+              </a:rPr>
+              <a:t>naučenih modela</a:t>
+            </a:r>
           </a:p>
         </p:txBody>
       </p:sp>
@@ -5233,7 +7241,7 @@
           <a:p>
             <a:r>
               <a:rPr lang="hr-HR" dirty="0"/>
-              <a:t>15</a:t>
+              <a:t>16</a:t>
             </a:r>
           </a:p>
         </p:txBody>
@@ -5276,686 +7284,6 @@
     <p:extLst>
       <p:ext uri="{BB962C8B-B14F-4D97-AF65-F5344CB8AC3E}">
         <p14:creationId xmlns:p14="http://schemas.microsoft.com/office/powerpoint/2010/main" val="2990422386"/>
-      </p:ext>
-    </p:extLst>
-  </p:cSld>
-  <p:clrMapOvr>
-    <a:masterClrMapping/>
-  </p:clrMapOvr>
-</p:sld>
-</file>
-
-<file path=ppt/slides/slide15.xml><?xml version="1.0" encoding="utf-8"?>
-<p:sld xmlns:a="http://schemas.openxmlformats.org/drawingml/2006/main" xmlns:r="http://schemas.openxmlformats.org/officeDocument/2006/relationships" xmlns:p="http://schemas.openxmlformats.org/presentationml/2006/main">
-  <p:cSld>
-    <p:spTree>
-      <p:nvGrpSpPr>
-        <p:cNvPr id="1" name="">
-          <a:extLst>
-            <a:ext uri="{FF2B5EF4-FFF2-40B4-BE49-F238E27FC236}">
-              <a16:creationId xmlns:a16="http://schemas.microsoft.com/office/drawing/2014/main" id="{A05ABD07-8022-BDDD-2E54-030D5B2DB89A}"/>
-            </a:ext>
-          </a:extLst>
-        </p:cNvPr>
-        <p:cNvGrpSpPr/>
-        <p:nvPr/>
-      </p:nvGrpSpPr>
-      <p:grpSpPr>
-        <a:xfrm>
-          <a:off x="0" y="0"/>
-          <a:ext cx="0" cy="0"/>
-          <a:chOff x="0" y="0"/>
-          <a:chExt cx="0" cy="0"/>
-        </a:xfrm>
-      </p:grpSpPr>
-      <p:sp>
-        <p:nvSpPr>
-          <p:cNvPr id="2" name="Title 1">
-            <a:extLst>
-              <a:ext uri="{FF2B5EF4-FFF2-40B4-BE49-F238E27FC236}">
-                <a16:creationId xmlns:a16="http://schemas.microsoft.com/office/drawing/2014/main" id="{012BA5D5-5F50-2398-360A-95FB2F5A16FA}"/>
-              </a:ext>
-            </a:extLst>
-          </p:cNvPr>
-          <p:cNvSpPr>
-            <a:spLocks noGrp="1"/>
-          </p:cNvSpPr>
-          <p:nvPr>
-            <p:ph type="title"/>
-          </p:nvPr>
-        </p:nvSpPr>
-        <p:spPr/>
-        <p:txBody>
-          <a:bodyPr/>
-          <a:lstStyle/>
-          <a:p>
-            <a:r>
-              <a:rPr lang="hr-HR" noProof="0" dirty="0">
-                <a:latin typeface="Arial" panose="020B0604020202020204" pitchFamily="34" charset="0"/>
-                <a:cs typeface="Arial" panose="020B0604020202020204" pitchFamily="34" charset="0"/>
-              </a:rPr>
-              <a:t>Literatura</a:t>
-            </a:r>
-          </a:p>
-        </p:txBody>
-      </p:sp>
-      <p:sp>
-        <p:nvSpPr>
-          <p:cNvPr id="3" name="Content Placeholder 2">
-            <a:extLst>
-              <a:ext uri="{FF2B5EF4-FFF2-40B4-BE49-F238E27FC236}">
-                <a16:creationId xmlns:a16="http://schemas.microsoft.com/office/drawing/2014/main" id="{34F663E9-A5B5-19EF-BF61-48528D19023A}"/>
-              </a:ext>
-            </a:extLst>
-          </p:cNvPr>
-          <p:cNvSpPr>
-            <a:spLocks noGrp="1"/>
-          </p:cNvSpPr>
-          <p:nvPr>
-            <p:ph idx="1"/>
-          </p:nvPr>
-        </p:nvSpPr>
-        <p:spPr>
-          <a:xfrm>
-            <a:off x="1261871" y="1828800"/>
-            <a:ext cx="9586642" cy="4735002"/>
-          </a:xfrm>
-        </p:spPr>
-        <p:txBody>
-          <a:bodyPr>
-            <a:normAutofit fontScale="92500" lnSpcReduction="20000"/>
-          </a:bodyPr>
-          <a:lstStyle/>
-          <a:p>
-            <a:r>
-              <a:rPr lang="hr-HR" sz="2800" dirty="0">
-                <a:latin typeface="Arial" panose="020B0604020202020204" pitchFamily="34" charset="0"/>
-                <a:cs typeface="Arial" panose="020B0604020202020204" pitchFamily="34" charset="0"/>
-              </a:rPr>
-              <a:t>s</a:t>
-            </a:r>
-            <a:r>
-              <a:rPr lang="hr-HR" sz="2800" noProof="0" dirty="0">
-                <a:latin typeface="Arial" panose="020B0604020202020204" pitchFamily="34" charset="0"/>
-                <a:cs typeface="Arial" panose="020B0604020202020204" pitchFamily="34" charset="0"/>
-              </a:rPr>
-              <a:t>lajd 4, arhitektura CLIP</a:t>
-            </a:r>
-            <a:r>
-              <a:rPr lang="en-US" sz="2800" noProof="0" dirty="0">
-                <a:latin typeface="Arial" panose="020B0604020202020204" pitchFamily="34" charset="0"/>
-                <a:cs typeface="Arial" panose="020B0604020202020204" pitchFamily="34" charset="0"/>
-              </a:rPr>
-              <a:t>: </a:t>
-            </a:r>
-            <a:r>
-              <a:rPr lang="hr-HR" sz="2800" noProof="0" dirty="0">
-                <a:latin typeface="Arial" panose="020B0604020202020204" pitchFamily="34" charset="0"/>
-                <a:cs typeface="Arial" panose="020B0604020202020204" pitchFamily="34" charset="0"/>
-              </a:rPr>
-              <a:t>preuzeto iz </a:t>
-            </a:r>
-            <a:r>
-              <a:rPr lang="en-US" sz="2800" noProof="0" dirty="0">
-                <a:solidFill>
-                  <a:schemeClr val="accent1"/>
-                </a:solidFill>
-                <a:latin typeface="Arial" panose="020B0604020202020204" pitchFamily="34" charset="0"/>
-                <a:cs typeface="Arial" panose="020B0604020202020204" pitchFamily="34" charset="0"/>
-              </a:rPr>
-              <a:t>Radford, Alec, et al. "Learning transferable visual models from natural language supervision.“</a:t>
-            </a:r>
-          </a:p>
-          <a:p>
-            <a:r>
-              <a:rPr lang="hr-HR" sz="2800" dirty="0">
-                <a:latin typeface="Arial" panose="020B0604020202020204" pitchFamily="34" charset="0"/>
-                <a:cs typeface="Arial" panose="020B0604020202020204" pitchFamily="34" charset="0"/>
-              </a:rPr>
-              <a:t>s</a:t>
-            </a:r>
-            <a:r>
-              <a:rPr lang="hr-HR" sz="2800" noProof="0" dirty="0">
-                <a:latin typeface="Arial" panose="020B0604020202020204" pitchFamily="34" charset="0"/>
-                <a:cs typeface="Arial" panose="020B0604020202020204" pitchFamily="34" charset="0"/>
-              </a:rPr>
-              <a:t>lajd </a:t>
-            </a:r>
-            <a:r>
-              <a:rPr lang="en-US" sz="2800" noProof="0" dirty="0">
-                <a:latin typeface="Arial" panose="020B0604020202020204" pitchFamily="34" charset="0"/>
-                <a:cs typeface="Arial" panose="020B0604020202020204" pitchFamily="34" charset="0"/>
-              </a:rPr>
-              <a:t>6</a:t>
-            </a:r>
-            <a:r>
-              <a:rPr lang="hr-HR" sz="2800" noProof="0" dirty="0">
-                <a:latin typeface="Arial" panose="020B0604020202020204" pitchFamily="34" charset="0"/>
-                <a:cs typeface="Arial" panose="020B0604020202020204" pitchFamily="34" charset="0"/>
-              </a:rPr>
-              <a:t>, </a:t>
-            </a:r>
-            <a:r>
-              <a:rPr lang="en-US" sz="2800" i="1" dirty="0">
-                <a:latin typeface="Arial" panose="020B0604020202020204" pitchFamily="34" charset="0"/>
-                <a:cs typeface="Arial" panose="020B0604020202020204" pitchFamily="34" charset="0"/>
-              </a:rPr>
-              <a:t>zero-shot</a:t>
-            </a:r>
-            <a:r>
-              <a:rPr lang="en-US" sz="2800" dirty="0">
-                <a:latin typeface="Arial" panose="020B0604020202020204" pitchFamily="34" charset="0"/>
-                <a:cs typeface="Arial" panose="020B0604020202020204" pitchFamily="34" charset="0"/>
-              </a:rPr>
-              <a:t> </a:t>
-            </a:r>
-            <a:r>
-              <a:rPr lang="hr-HR" sz="2800" noProof="0" dirty="0">
-                <a:latin typeface="Arial" panose="020B0604020202020204" pitchFamily="34" charset="0"/>
-                <a:cs typeface="Arial" panose="020B0604020202020204" pitchFamily="34" charset="0"/>
-              </a:rPr>
-              <a:t>klasifikacija</a:t>
-            </a:r>
-            <a:r>
-              <a:rPr lang="en-US" sz="2800" dirty="0">
-                <a:latin typeface="Arial" panose="020B0604020202020204" pitchFamily="34" charset="0"/>
-                <a:cs typeface="Arial" panose="020B0604020202020204" pitchFamily="34" charset="0"/>
-              </a:rPr>
-              <a:t> </a:t>
-            </a:r>
-            <a:r>
-              <a:rPr lang="hr-HR" sz="2800" noProof="0" dirty="0">
-                <a:latin typeface="Arial" panose="020B0604020202020204" pitchFamily="34" charset="0"/>
-                <a:cs typeface="Arial" panose="020B0604020202020204" pitchFamily="34" charset="0"/>
-              </a:rPr>
-              <a:t>kod CLIP</a:t>
-            </a:r>
-            <a:r>
-              <a:rPr lang="en-US" sz="2800" dirty="0">
-                <a:latin typeface="Arial" panose="020B0604020202020204" pitchFamily="34" charset="0"/>
-                <a:cs typeface="Arial" panose="020B0604020202020204" pitchFamily="34" charset="0"/>
-              </a:rPr>
-              <a:t>-a</a:t>
-            </a:r>
-            <a:r>
-              <a:rPr lang="en-US" sz="2800" noProof="0" dirty="0">
-                <a:latin typeface="Arial" panose="020B0604020202020204" pitchFamily="34" charset="0"/>
-                <a:cs typeface="Arial" panose="020B0604020202020204" pitchFamily="34" charset="0"/>
-              </a:rPr>
-              <a:t>: </a:t>
-            </a:r>
-            <a:r>
-              <a:rPr lang="hr-HR" sz="2800" noProof="0" dirty="0">
-                <a:latin typeface="Arial" panose="020B0604020202020204" pitchFamily="34" charset="0"/>
-                <a:cs typeface="Arial" panose="020B0604020202020204" pitchFamily="34" charset="0"/>
-              </a:rPr>
-              <a:t>preuzeto</a:t>
-            </a:r>
-            <a:r>
-              <a:rPr lang="en-US" sz="2800" noProof="0" dirty="0">
-                <a:latin typeface="Arial" panose="020B0604020202020204" pitchFamily="34" charset="0"/>
-                <a:cs typeface="Arial" panose="020B0604020202020204" pitchFamily="34" charset="0"/>
-              </a:rPr>
-              <a:t> </a:t>
-            </a:r>
-            <a:r>
-              <a:rPr lang="hr-HR" sz="2800" noProof="0" dirty="0">
-                <a:latin typeface="Arial" panose="020B0604020202020204" pitchFamily="34" charset="0"/>
-                <a:cs typeface="Arial" panose="020B0604020202020204" pitchFamily="34" charset="0"/>
-              </a:rPr>
-              <a:t>iz</a:t>
-            </a:r>
-            <a:r>
-              <a:rPr lang="en-US" sz="2800" noProof="0" dirty="0">
-                <a:latin typeface="Arial" panose="020B0604020202020204" pitchFamily="34" charset="0"/>
-                <a:cs typeface="Arial" panose="020B0604020202020204" pitchFamily="34" charset="0"/>
-              </a:rPr>
-              <a:t> </a:t>
-            </a:r>
-            <a:r>
-              <a:rPr lang="en-US" sz="2800" noProof="0" dirty="0">
-                <a:solidFill>
-                  <a:schemeClr val="accent1"/>
-                </a:solidFill>
-                <a:latin typeface="Arial" panose="020B0604020202020204" pitchFamily="34" charset="0"/>
-                <a:cs typeface="Arial" panose="020B0604020202020204" pitchFamily="34" charset="0"/>
-              </a:rPr>
-              <a:t>Radford, Alec, et al. "Learning transferable visual models from natural language supervision.“</a:t>
-            </a:r>
-            <a:endParaRPr lang="hr-HR" sz="2800" noProof="0" dirty="0">
-              <a:solidFill>
-                <a:schemeClr val="accent1"/>
-              </a:solidFill>
-              <a:latin typeface="Arial" panose="020B0604020202020204" pitchFamily="34" charset="0"/>
-              <a:cs typeface="Arial" panose="020B0604020202020204" pitchFamily="34" charset="0"/>
-            </a:endParaRPr>
-          </a:p>
-          <a:p>
-            <a:r>
-              <a:rPr lang="hr-HR" sz="2800" dirty="0">
-                <a:latin typeface="Arial" panose="020B0604020202020204" pitchFamily="34" charset="0"/>
-                <a:cs typeface="Arial" panose="020B0604020202020204" pitchFamily="34" charset="0"/>
-              </a:rPr>
-              <a:t>s</a:t>
-            </a:r>
-            <a:r>
-              <a:rPr lang="hr-HR" sz="2800" noProof="0" dirty="0">
-                <a:latin typeface="Arial" panose="020B0604020202020204" pitchFamily="34" charset="0"/>
-                <a:cs typeface="Arial" panose="020B0604020202020204" pitchFamily="34" charset="0"/>
-              </a:rPr>
-              <a:t>lajd </a:t>
-            </a:r>
-            <a:r>
-              <a:rPr lang="hr-HR" sz="2800" dirty="0">
-                <a:latin typeface="Arial" panose="020B0604020202020204" pitchFamily="34" charset="0"/>
-                <a:cs typeface="Arial" panose="020B0604020202020204" pitchFamily="34" charset="0"/>
-              </a:rPr>
-              <a:t>10</a:t>
-            </a:r>
-            <a:r>
-              <a:rPr lang="hr-HR" sz="2800" noProof="0" dirty="0">
-                <a:latin typeface="Arial" panose="020B0604020202020204" pitchFamily="34" charset="0"/>
-                <a:cs typeface="Arial" panose="020B0604020202020204" pitchFamily="34" charset="0"/>
-              </a:rPr>
-              <a:t>, </a:t>
-            </a:r>
-            <a:r>
-              <a:rPr lang="hr-HR" sz="2800" dirty="0">
-                <a:latin typeface="Arial" panose="020B0604020202020204" pitchFamily="34" charset="0"/>
-                <a:cs typeface="Arial" panose="020B0604020202020204" pitchFamily="34" charset="0"/>
-              </a:rPr>
-              <a:t>primjer slike i opisa iz skupa CC3M</a:t>
-            </a:r>
-            <a:r>
-              <a:rPr lang="en-US" sz="2800" noProof="0" dirty="0">
-                <a:latin typeface="Arial" panose="020B0604020202020204" pitchFamily="34" charset="0"/>
-                <a:cs typeface="Arial" panose="020B0604020202020204" pitchFamily="34" charset="0"/>
-              </a:rPr>
-              <a:t>: </a:t>
-            </a:r>
-            <a:r>
-              <a:rPr lang="hr-HR" sz="2800" noProof="0" dirty="0">
-                <a:latin typeface="Arial" panose="020B0604020202020204" pitchFamily="34" charset="0"/>
-                <a:cs typeface="Arial" panose="020B0604020202020204" pitchFamily="34" charset="0"/>
-              </a:rPr>
-              <a:t>preuzeto</a:t>
-            </a:r>
-            <a:r>
-              <a:rPr lang="en-US" sz="2800" noProof="0" dirty="0">
-                <a:latin typeface="Arial" panose="020B0604020202020204" pitchFamily="34" charset="0"/>
-                <a:cs typeface="Arial" panose="020B0604020202020204" pitchFamily="34" charset="0"/>
-              </a:rPr>
-              <a:t> </a:t>
-            </a:r>
-            <a:r>
-              <a:rPr lang="hr-HR" sz="2800" noProof="0" dirty="0">
-                <a:latin typeface="Arial" panose="020B0604020202020204" pitchFamily="34" charset="0"/>
-                <a:cs typeface="Arial" panose="020B0604020202020204" pitchFamily="34" charset="0"/>
-              </a:rPr>
-              <a:t>iz</a:t>
-            </a:r>
-            <a:r>
-              <a:rPr lang="en-US" sz="2800" noProof="0" dirty="0">
-                <a:latin typeface="Arial" panose="020B0604020202020204" pitchFamily="34" charset="0"/>
-                <a:cs typeface="Arial" panose="020B0604020202020204" pitchFamily="34" charset="0"/>
-              </a:rPr>
-              <a:t> </a:t>
-            </a:r>
-            <a:r>
-              <a:rPr lang="en-US" sz="2800" noProof="0" dirty="0">
-                <a:solidFill>
-                  <a:schemeClr val="accent1"/>
-                </a:solidFill>
-                <a:latin typeface="Arial" panose="020B0604020202020204" pitchFamily="34" charset="0"/>
-                <a:cs typeface="Arial" panose="020B0604020202020204" pitchFamily="34" charset="0"/>
-              </a:rPr>
-              <a:t>Sharma, Piyush, et al. "Conceptual captions: A cleaned, </a:t>
-            </a:r>
-            <a:r>
-              <a:rPr lang="en-US" sz="2800" noProof="0" dirty="0" err="1">
-                <a:solidFill>
-                  <a:schemeClr val="accent1"/>
-                </a:solidFill>
-                <a:latin typeface="Arial" panose="020B0604020202020204" pitchFamily="34" charset="0"/>
-                <a:cs typeface="Arial" panose="020B0604020202020204" pitchFamily="34" charset="0"/>
-              </a:rPr>
-              <a:t>hypernymed</a:t>
-            </a:r>
-            <a:r>
-              <a:rPr lang="en-US" sz="2800" noProof="0" dirty="0">
-                <a:solidFill>
-                  <a:schemeClr val="accent1"/>
-                </a:solidFill>
-                <a:latin typeface="Arial" panose="020B0604020202020204" pitchFamily="34" charset="0"/>
-                <a:cs typeface="Arial" panose="020B0604020202020204" pitchFamily="34" charset="0"/>
-              </a:rPr>
-              <a:t>, image alt-text dataset for automatic image captioning.„</a:t>
-            </a:r>
-            <a:endParaRPr lang="hr-HR" sz="2800" noProof="0" dirty="0">
-              <a:solidFill>
-                <a:schemeClr val="accent1"/>
-              </a:solidFill>
-              <a:latin typeface="Arial" panose="020B0604020202020204" pitchFamily="34" charset="0"/>
-              <a:cs typeface="Arial" panose="020B0604020202020204" pitchFamily="34" charset="0"/>
-            </a:endParaRPr>
-          </a:p>
-          <a:p>
-            <a:r>
-              <a:rPr lang="hr-HR" sz="2800" dirty="0">
-                <a:latin typeface="Arial" panose="020B0604020202020204" pitchFamily="34" charset="0"/>
-                <a:cs typeface="Arial" panose="020B0604020202020204" pitchFamily="34" charset="0"/>
-              </a:rPr>
-              <a:t>s</a:t>
-            </a:r>
-            <a:r>
-              <a:rPr lang="hr-HR" sz="2800" noProof="0" dirty="0">
-                <a:latin typeface="Arial" panose="020B0604020202020204" pitchFamily="34" charset="0"/>
-                <a:cs typeface="Arial" panose="020B0604020202020204" pitchFamily="34" charset="0"/>
-              </a:rPr>
-              <a:t>lajd </a:t>
-            </a:r>
-            <a:r>
-              <a:rPr lang="hr-HR" sz="2800" dirty="0">
-                <a:latin typeface="Arial" panose="020B0604020202020204" pitchFamily="34" charset="0"/>
-                <a:cs typeface="Arial" panose="020B0604020202020204" pitchFamily="34" charset="0"/>
-              </a:rPr>
-              <a:t>11</a:t>
-            </a:r>
-            <a:r>
-              <a:rPr lang="hr-HR" sz="2800" noProof="0" dirty="0">
-                <a:latin typeface="Arial" panose="020B0604020202020204" pitchFamily="34" charset="0"/>
-                <a:cs typeface="Arial" panose="020B0604020202020204" pitchFamily="34" charset="0"/>
-              </a:rPr>
-              <a:t>, primjer slika i razreda iz skupa ImageNet</a:t>
-            </a:r>
-            <a:r>
-              <a:rPr lang="en-US" sz="2800" noProof="0" dirty="0">
-                <a:latin typeface="Arial" panose="020B0604020202020204" pitchFamily="34" charset="0"/>
-                <a:cs typeface="Arial" panose="020B0604020202020204" pitchFamily="34" charset="0"/>
-              </a:rPr>
-              <a:t>: </a:t>
-            </a:r>
-            <a:r>
-              <a:rPr lang="hr-HR" sz="2800" noProof="0" dirty="0">
-                <a:latin typeface="Arial" panose="020B0604020202020204" pitchFamily="34" charset="0"/>
-                <a:cs typeface="Arial" panose="020B0604020202020204" pitchFamily="34" charset="0"/>
-              </a:rPr>
-              <a:t>preuzeto</a:t>
-            </a:r>
-            <a:r>
-              <a:rPr lang="en-US" sz="2800" noProof="0" dirty="0">
-                <a:latin typeface="Arial" panose="020B0604020202020204" pitchFamily="34" charset="0"/>
-                <a:cs typeface="Arial" panose="020B0604020202020204" pitchFamily="34" charset="0"/>
-              </a:rPr>
-              <a:t> </a:t>
-            </a:r>
-            <a:r>
-              <a:rPr lang="hr-HR" sz="2800" noProof="0" dirty="0">
-                <a:latin typeface="Arial" panose="020B0604020202020204" pitchFamily="34" charset="0"/>
-                <a:cs typeface="Arial" panose="020B0604020202020204" pitchFamily="34" charset="0"/>
-              </a:rPr>
-              <a:t>iz</a:t>
-            </a:r>
-            <a:r>
-              <a:rPr lang="en-US" sz="2800" noProof="0" dirty="0">
-                <a:latin typeface="Arial" panose="020B0604020202020204" pitchFamily="34" charset="0"/>
-                <a:cs typeface="Arial" panose="020B0604020202020204" pitchFamily="34" charset="0"/>
-              </a:rPr>
-              <a:t> </a:t>
-            </a:r>
-            <a:r>
-              <a:rPr lang="fr-FR" sz="2800" noProof="0" dirty="0">
-                <a:solidFill>
-                  <a:schemeClr val="accent1"/>
-                </a:solidFill>
-                <a:latin typeface="Arial" panose="020B0604020202020204" pitchFamily="34" charset="0"/>
-                <a:cs typeface="Arial" panose="020B0604020202020204" pitchFamily="34" charset="0"/>
-              </a:rPr>
-              <a:t>Deng, Jia, et al. "</a:t>
-            </a:r>
-            <a:r>
-              <a:rPr lang="fr-FR" sz="2800" noProof="0" dirty="0" err="1">
-                <a:solidFill>
-                  <a:schemeClr val="accent1"/>
-                </a:solidFill>
-                <a:latin typeface="Arial" panose="020B0604020202020204" pitchFamily="34" charset="0"/>
-                <a:cs typeface="Arial" panose="020B0604020202020204" pitchFamily="34" charset="0"/>
-              </a:rPr>
-              <a:t>Imagenet</a:t>
-            </a:r>
-            <a:r>
-              <a:rPr lang="fr-FR" sz="2800" noProof="0" dirty="0">
-                <a:solidFill>
-                  <a:schemeClr val="accent1"/>
-                </a:solidFill>
-                <a:latin typeface="Arial" panose="020B0604020202020204" pitchFamily="34" charset="0"/>
-                <a:cs typeface="Arial" panose="020B0604020202020204" pitchFamily="34" charset="0"/>
-              </a:rPr>
-              <a:t>: A large-</a:t>
-            </a:r>
-            <a:r>
-              <a:rPr lang="fr-FR" sz="2800" noProof="0" dirty="0" err="1">
-                <a:solidFill>
-                  <a:schemeClr val="accent1"/>
-                </a:solidFill>
-                <a:latin typeface="Arial" panose="020B0604020202020204" pitchFamily="34" charset="0"/>
-                <a:cs typeface="Arial" panose="020B0604020202020204" pitchFamily="34" charset="0"/>
-              </a:rPr>
-              <a:t>scale</a:t>
-            </a:r>
-            <a:r>
-              <a:rPr lang="fr-FR" sz="2800" noProof="0" dirty="0">
-                <a:solidFill>
-                  <a:schemeClr val="accent1"/>
-                </a:solidFill>
-                <a:latin typeface="Arial" panose="020B0604020202020204" pitchFamily="34" charset="0"/>
-                <a:cs typeface="Arial" panose="020B0604020202020204" pitchFamily="34" charset="0"/>
-              </a:rPr>
-              <a:t> </a:t>
-            </a:r>
-            <a:r>
-              <a:rPr lang="fr-FR" sz="2800" noProof="0" dirty="0" err="1">
-                <a:solidFill>
-                  <a:schemeClr val="accent1"/>
-                </a:solidFill>
-                <a:latin typeface="Arial" panose="020B0604020202020204" pitchFamily="34" charset="0"/>
-                <a:cs typeface="Arial" panose="020B0604020202020204" pitchFamily="34" charset="0"/>
-              </a:rPr>
-              <a:t>hierarchical</a:t>
-            </a:r>
-            <a:r>
-              <a:rPr lang="fr-FR" sz="2800" noProof="0" dirty="0">
-                <a:solidFill>
-                  <a:schemeClr val="accent1"/>
-                </a:solidFill>
-                <a:latin typeface="Arial" panose="020B0604020202020204" pitchFamily="34" charset="0"/>
-                <a:cs typeface="Arial" panose="020B0604020202020204" pitchFamily="34" charset="0"/>
-              </a:rPr>
-              <a:t> image </a:t>
-            </a:r>
-            <a:r>
-              <a:rPr lang="fr-FR" sz="2800" noProof="0" dirty="0" err="1">
-                <a:solidFill>
-                  <a:schemeClr val="accent1"/>
-                </a:solidFill>
-                <a:latin typeface="Arial" panose="020B0604020202020204" pitchFamily="34" charset="0"/>
-                <a:cs typeface="Arial" panose="020B0604020202020204" pitchFamily="34" charset="0"/>
-              </a:rPr>
-              <a:t>database</a:t>
-            </a:r>
-            <a:r>
-              <a:rPr lang="fr-FR" sz="2800" noProof="0" dirty="0">
-                <a:solidFill>
-                  <a:schemeClr val="accent1"/>
-                </a:solidFill>
-                <a:latin typeface="Arial" panose="020B0604020202020204" pitchFamily="34" charset="0"/>
-                <a:cs typeface="Arial" panose="020B0604020202020204" pitchFamily="34" charset="0"/>
-              </a:rPr>
-              <a:t>."</a:t>
-            </a:r>
-            <a:endParaRPr lang="en-US" sz="2800" noProof="0" dirty="0">
-              <a:solidFill>
-                <a:schemeClr val="accent1"/>
-              </a:solidFill>
-              <a:latin typeface="Arial" panose="020B0604020202020204" pitchFamily="34" charset="0"/>
-              <a:cs typeface="Arial" panose="020B0604020202020204" pitchFamily="34" charset="0"/>
-            </a:endParaRPr>
-          </a:p>
-          <a:p>
-            <a:endParaRPr lang="en-US" sz="2600" noProof="0" dirty="0">
-              <a:solidFill>
-                <a:schemeClr val="accent1"/>
-              </a:solidFill>
-              <a:latin typeface="Arial" panose="020B0604020202020204" pitchFamily="34" charset="0"/>
-              <a:cs typeface="Arial" panose="020B0604020202020204" pitchFamily="34" charset="0"/>
-            </a:endParaRPr>
-          </a:p>
-          <a:p>
-            <a:endParaRPr lang="hr-HR" sz="2600" noProof="0" dirty="0">
-              <a:solidFill>
-                <a:schemeClr val="accent1"/>
-              </a:solidFill>
-              <a:latin typeface="Arial" panose="020B0604020202020204" pitchFamily="34" charset="0"/>
-              <a:cs typeface="Arial" panose="020B0604020202020204" pitchFamily="34" charset="0"/>
-            </a:endParaRPr>
-          </a:p>
-        </p:txBody>
-      </p:sp>
-      <p:sp>
-        <p:nvSpPr>
-          <p:cNvPr id="5" name="Slide Number Placeholder 4">
-            <a:extLst>
-              <a:ext uri="{FF2B5EF4-FFF2-40B4-BE49-F238E27FC236}">
-                <a16:creationId xmlns:a16="http://schemas.microsoft.com/office/drawing/2014/main" id="{B91DAC2E-8824-6912-025B-EE639883C1C8}"/>
-              </a:ext>
-            </a:extLst>
-          </p:cNvPr>
-          <p:cNvSpPr>
-            <a:spLocks noGrp="1"/>
-          </p:cNvSpPr>
-          <p:nvPr>
-            <p:ph type="sldNum" sz="quarter" idx="12"/>
-          </p:nvPr>
-        </p:nvSpPr>
-        <p:spPr/>
-        <p:txBody>
-          <a:bodyPr>
-            <a:normAutofit lnSpcReduction="10000"/>
-          </a:bodyPr>
-          <a:lstStyle/>
-          <a:p>
-            <a:r>
-              <a:rPr lang="hr-HR" dirty="0"/>
-              <a:t>16</a:t>
-            </a:r>
-          </a:p>
-        </p:txBody>
-      </p:sp>
-      <p:sp>
-        <p:nvSpPr>
-          <p:cNvPr id="8" name="TextBox 7">
-            <a:extLst>
-              <a:ext uri="{FF2B5EF4-FFF2-40B4-BE49-F238E27FC236}">
-                <a16:creationId xmlns:a16="http://schemas.microsoft.com/office/drawing/2014/main" id="{30FCC836-6DB7-17BF-85B1-0627021316D0}"/>
-              </a:ext>
-            </a:extLst>
-          </p:cNvPr>
-          <p:cNvSpPr txBox="1"/>
-          <p:nvPr/>
-        </p:nvSpPr>
-        <p:spPr>
-          <a:xfrm>
-            <a:off x="10228507" y="6073019"/>
-            <a:ext cx="809199" cy="369332"/>
-          </a:xfrm>
-          <a:prstGeom prst="rect">
-            <a:avLst/>
-          </a:prstGeom>
-          <a:solidFill>
-            <a:schemeClr val="bg1"/>
-          </a:solidFill>
-        </p:spPr>
-        <p:txBody>
-          <a:bodyPr wrap="square" rtlCol="0">
-            <a:spAutoFit/>
-          </a:bodyPr>
-          <a:lstStyle/>
-          <a:p>
-            <a:endParaRPr lang="hr-HR" dirty="0"/>
-          </a:p>
-        </p:txBody>
-      </p:sp>
-    </p:spTree>
-    <p:extLst>
-      <p:ext uri="{BB962C8B-B14F-4D97-AF65-F5344CB8AC3E}">
-        <p14:creationId xmlns:p14="http://schemas.microsoft.com/office/powerpoint/2010/main" val="1065744065"/>
-      </p:ext>
-    </p:extLst>
-  </p:cSld>
-  <p:clrMapOvr>
-    <a:masterClrMapping/>
-  </p:clrMapOvr>
-</p:sld>
-</file>
-
-<file path=ppt/slides/slide16.xml><?xml version="1.0" encoding="utf-8"?>
-<p:sld xmlns:a="http://schemas.openxmlformats.org/drawingml/2006/main" xmlns:r="http://schemas.openxmlformats.org/officeDocument/2006/relationships" xmlns:p="http://schemas.openxmlformats.org/presentationml/2006/main">
-  <p:cSld>
-    <p:spTree>
-      <p:nvGrpSpPr>
-        <p:cNvPr id="1" name="">
-          <a:extLst>
-            <a:ext uri="{FF2B5EF4-FFF2-40B4-BE49-F238E27FC236}">
-              <a16:creationId xmlns:a16="http://schemas.microsoft.com/office/drawing/2014/main" id="{5616C9F9-911B-E360-F68E-AC14538EA3B9}"/>
-            </a:ext>
-          </a:extLst>
-        </p:cNvPr>
-        <p:cNvGrpSpPr/>
-        <p:nvPr/>
-      </p:nvGrpSpPr>
-      <p:grpSpPr>
-        <a:xfrm>
-          <a:off x="0" y="0"/>
-          <a:ext cx="0" cy="0"/>
-          <a:chOff x="0" y="0"/>
-          <a:chExt cx="0" cy="0"/>
-        </a:xfrm>
-      </p:grpSpPr>
-      <p:sp>
-        <p:nvSpPr>
-          <p:cNvPr id="2" name="Title 1">
-            <a:extLst>
-              <a:ext uri="{FF2B5EF4-FFF2-40B4-BE49-F238E27FC236}">
-                <a16:creationId xmlns:a16="http://schemas.microsoft.com/office/drawing/2014/main" id="{876A27CA-E20B-2F39-A3AF-D15DDDD3C0DD}"/>
-              </a:ext>
-            </a:extLst>
-          </p:cNvPr>
-          <p:cNvSpPr>
-            <a:spLocks noGrp="1"/>
-          </p:cNvSpPr>
-          <p:nvPr>
-            <p:ph type="ctrTitle"/>
-          </p:nvPr>
-        </p:nvSpPr>
-        <p:spPr/>
-        <p:txBody>
-          <a:bodyPr/>
-          <a:lstStyle/>
-          <a:p>
-            <a:r>
-              <a:rPr lang="hr-HR" dirty="0">
-                <a:latin typeface="Arial" panose="020B0604020202020204" pitchFamily="34" charset="0"/>
-                <a:cs typeface="Arial" panose="020B0604020202020204" pitchFamily="34" charset="0"/>
-              </a:rPr>
-              <a:t>Diskusija</a:t>
-            </a:r>
-          </a:p>
-        </p:txBody>
-      </p:sp>
-    </p:spTree>
-    <p:extLst>
-      <p:ext uri="{BB962C8B-B14F-4D97-AF65-F5344CB8AC3E}">
-        <p14:creationId xmlns:p14="http://schemas.microsoft.com/office/powerpoint/2010/main" val="3897778742"/>
       </p:ext>
     </p:extLst>
   </p:cSld>
@@ -6160,6 +7488,399 @@
     <p:extLst>
       <p:ext uri="{BB962C8B-B14F-4D97-AF65-F5344CB8AC3E}">
         <p14:creationId xmlns:p14="http://schemas.microsoft.com/office/powerpoint/2010/main" val="888114086"/>
+      </p:ext>
+    </p:extLst>
+  </p:cSld>
+  <p:clrMapOvr>
+    <a:masterClrMapping/>
+  </p:clrMapOvr>
+</p:sld>
+</file>
+
+<file path=ppt/slides/slide20.xml><?xml version="1.0" encoding="utf-8"?>
+<p:sld xmlns:a="http://schemas.openxmlformats.org/drawingml/2006/main" xmlns:r="http://schemas.openxmlformats.org/officeDocument/2006/relationships" xmlns:p="http://schemas.openxmlformats.org/presentationml/2006/main">
+  <p:cSld>
+    <p:spTree>
+      <p:nvGrpSpPr>
+        <p:cNvPr id="1" name="">
+          <a:extLst>
+            <a:ext uri="{FF2B5EF4-FFF2-40B4-BE49-F238E27FC236}">
+              <a16:creationId xmlns:a16="http://schemas.microsoft.com/office/drawing/2014/main" id="{90F3F277-45B8-6CFD-9D7C-B98DCDAA3247}"/>
+            </a:ext>
+          </a:extLst>
+        </p:cNvPr>
+        <p:cNvGrpSpPr/>
+        <p:nvPr/>
+      </p:nvGrpSpPr>
+      <p:grpSpPr>
+        <a:xfrm>
+          <a:off x="0" y="0"/>
+          <a:ext cx="0" cy="0"/>
+          <a:chOff x="0" y="0"/>
+          <a:chExt cx="0" cy="0"/>
+        </a:xfrm>
+      </p:grpSpPr>
+      <p:sp>
+        <p:nvSpPr>
+          <p:cNvPr id="2" name="Title 1">
+            <a:extLst>
+              <a:ext uri="{FF2B5EF4-FFF2-40B4-BE49-F238E27FC236}">
+                <a16:creationId xmlns:a16="http://schemas.microsoft.com/office/drawing/2014/main" id="{00313256-68C7-2EB3-EC28-D09A0FAD3124}"/>
+              </a:ext>
+            </a:extLst>
+          </p:cNvPr>
+          <p:cNvSpPr>
+            <a:spLocks noGrp="1"/>
+          </p:cNvSpPr>
+          <p:nvPr>
+            <p:ph type="title"/>
+          </p:nvPr>
+        </p:nvSpPr>
+        <p:spPr/>
+        <p:txBody>
+          <a:bodyPr/>
+          <a:lstStyle/>
+          <a:p>
+            <a:r>
+              <a:rPr lang="hr-HR" noProof="0" dirty="0">
+                <a:latin typeface="Arial" panose="020B0604020202020204" pitchFamily="34" charset="0"/>
+                <a:cs typeface="Arial" panose="020B0604020202020204" pitchFamily="34" charset="0"/>
+              </a:rPr>
+              <a:t>Zaključak i budući rad</a:t>
+            </a:r>
+          </a:p>
+        </p:txBody>
+      </p:sp>
+      <p:sp>
+        <p:nvSpPr>
+          <p:cNvPr id="3" name="Content Placeholder 2">
+            <a:extLst>
+              <a:ext uri="{FF2B5EF4-FFF2-40B4-BE49-F238E27FC236}">
+                <a16:creationId xmlns:a16="http://schemas.microsoft.com/office/drawing/2014/main" id="{000BAB14-0488-B4DC-5B1D-4C2E87B090E9}"/>
+              </a:ext>
+            </a:extLst>
+          </p:cNvPr>
+          <p:cNvSpPr>
+            <a:spLocks noGrp="1"/>
+          </p:cNvSpPr>
+          <p:nvPr>
+            <p:ph idx="1"/>
+          </p:nvPr>
+        </p:nvSpPr>
+        <p:spPr>
+          <a:xfrm>
+            <a:off x="1261871" y="1544715"/>
+            <a:ext cx="8966635" cy="5486400"/>
+          </a:xfrm>
+        </p:spPr>
+        <p:txBody>
+          <a:bodyPr>
+            <a:normAutofit lnSpcReduction="10000"/>
+          </a:bodyPr>
+          <a:lstStyle/>
+          <a:p>
+            <a:pPr marL="0" indent="0">
+              <a:buNone/>
+            </a:pPr>
+            <a:endParaRPr lang="hr-HR" sz="2600" dirty="0">
+              <a:latin typeface="Arial" panose="020B0604020202020204" pitchFamily="34" charset="0"/>
+              <a:cs typeface="Arial" panose="020B0604020202020204" pitchFamily="34" charset="0"/>
+            </a:endParaRPr>
+          </a:p>
+          <a:p>
+            <a:pPr marL="0" indent="0">
+              <a:buNone/>
+            </a:pPr>
+            <a:r>
+              <a:rPr lang="hr-HR" sz="2600" dirty="0">
+                <a:latin typeface="Arial" panose="020B0604020202020204" pitchFamily="34" charset="0"/>
+                <a:cs typeface="Arial" panose="020B0604020202020204" pitchFamily="34" charset="0"/>
+              </a:rPr>
+              <a:t>Napadi umetanjem stražnjih vrata</a:t>
+            </a:r>
+          </a:p>
+          <a:p>
+            <a:pPr lvl="1"/>
+            <a:r>
+              <a:rPr lang="hr-HR" sz="2600" dirty="0">
+                <a:latin typeface="Arial" panose="020B0604020202020204" pitchFamily="34" charset="0"/>
+                <a:cs typeface="Arial" panose="020B0604020202020204" pitchFamily="34" charset="0"/>
+              </a:rPr>
+              <a:t>osnovna inačica VIBE-a postiže </a:t>
+            </a:r>
+            <a:r>
+              <a:rPr lang="hr-HR" sz="2600" b="1" dirty="0">
+                <a:latin typeface="Arial" panose="020B0604020202020204" pitchFamily="34" charset="0"/>
+                <a:cs typeface="Arial" panose="020B0604020202020204" pitchFamily="34" charset="0"/>
+              </a:rPr>
+              <a:t>najvišu točnost</a:t>
+            </a:r>
+            <a:r>
+              <a:rPr lang="hr-HR" sz="2600" dirty="0">
+                <a:latin typeface="Arial" panose="020B0604020202020204" pitchFamily="34" charset="0"/>
+                <a:cs typeface="Arial" panose="020B0604020202020204" pitchFamily="34" charset="0"/>
+              </a:rPr>
+              <a:t>, ali ne i najniži ASR u usporedbi sa SotA na </a:t>
+            </a:r>
+            <a:r>
+              <a:rPr lang="hr-HR" sz="2600" b="1" dirty="0">
+                <a:latin typeface="Arial" panose="020B0604020202020204" pitchFamily="34" charset="0"/>
+                <a:cs typeface="Arial" panose="020B0604020202020204" pitchFamily="34" charset="0"/>
+              </a:rPr>
+              <a:t>3 različita napada</a:t>
+            </a:r>
+          </a:p>
+          <a:p>
+            <a:pPr lvl="1"/>
+            <a:r>
+              <a:rPr lang="hr-HR" sz="2600" dirty="0">
+                <a:latin typeface="Arial" panose="020B0604020202020204" pitchFamily="34" charset="0"/>
+                <a:cs typeface="Arial" panose="020B0604020202020204" pitchFamily="34" charset="0"/>
+              </a:rPr>
+              <a:t>nadograđena inačica VIBE-a postiže </a:t>
+            </a:r>
+            <a:r>
+              <a:rPr lang="hr-HR" sz="2600" b="1" dirty="0">
+                <a:latin typeface="Arial" panose="020B0604020202020204" pitchFamily="34" charset="0"/>
+                <a:cs typeface="Arial" panose="020B0604020202020204" pitchFamily="34" charset="0"/>
+              </a:rPr>
+              <a:t>najvišu točnost</a:t>
+            </a:r>
+            <a:r>
+              <a:rPr lang="hr-HR" sz="2600" dirty="0">
+                <a:latin typeface="Arial" panose="020B0604020202020204" pitchFamily="34" charset="0"/>
+                <a:cs typeface="Arial" panose="020B0604020202020204" pitchFamily="34" charset="0"/>
+              </a:rPr>
+              <a:t>, kao i</a:t>
+            </a:r>
+            <a:r>
+              <a:rPr lang="hr-HR" sz="2600" b="1" dirty="0">
+                <a:latin typeface="Arial" panose="020B0604020202020204" pitchFamily="34" charset="0"/>
+                <a:cs typeface="Arial" panose="020B0604020202020204" pitchFamily="34" charset="0"/>
+              </a:rPr>
+              <a:t> najniži ASR</a:t>
+            </a:r>
+            <a:r>
+              <a:rPr lang="hr-HR" sz="2600" dirty="0">
+                <a:latin typeface="Arial" panose="020B0604020202020204" pitchFamily="34" charset="0"/>
+                <a:cs typeface="Arial" panose="020B0604020202020204" pitchFamily="34" charset="0"/>
+              </a:rPr>
+              <a:t> u usporedbi s osnovnom inačicom VIBE-a te SotA na </a:t>
+            </a:r>
+            <a:r>
+              <a:rPr lang="hr-HR" sz="2600" b="1" dirty="0">
+                <a:latin typeface="Arial" panose="020B0604020202020204" pitchFamily="34" charset="0"/>
+                <a:cs typeface="Arial" panose="020B0604020202020204" pitchFamily="34" charset="0"/>
+              </a:rPr>
+              <a:t>2</a:t>
+            </a:r>
+            <a:r>
+              <a:rPr lang="en-US" sz="2600" b="1" dirty="0">
+                <a:latin typeface="Arial" panose="020B0604020202020204" pitchFamily="34" charset="0"/>
+                <a:cs typeface="Arial" panose="020B0604020202020204" pitchFamily="34" charset="0"/>
+              </a:rPr>
+              <a:t>/3 r</a:t>
+            </a:r>
+            <a:r>
+              <a:rPr lang="hr-HR" sz="2600" b="1" dirty="0">
+                <a:latin typeface="Arial" panose="020B0604020202020204" pitchFamily="34" charset="0"/>
+                <a:cs typeface="Arial" panose="020B0604020202020204" pitchFamily="34" charset="0"/>
+              </a:rPr>
+              <a:t>azličita napada</a:t>
+            </a:r>
+          </a:p>
+          <a:p>
+            <a:pPr lvl="1"/>
+            <a:endParaRPr lang="hr-HR" sz="2600" b="1" dirty="0">
+              <a:latin typeface="Arial" panose="020B0604020202020204" pitchFamily="34" charset="0"/>
+              <a:cs typeface="Arial" panose="020B0604020202020204" pitchFamily="34" charset="0"/>
+            </a:endParaRPr>
+          </a:p>
+          <a:p>
+            <a:pPr marL="0" indent="0">
+              <a:buNone/>
+            </a:pPr>
+            <a:r>
+              <a:rPr lang="hr-HR" sz="2600" dirty="0">
+                <a:latin typeface="Arial" panose="020B0604020202020204" pitchFamily="34" charset="0"/>
+                <a:cs typeface="Arial" panose="020B0604020202020204" pitchFamily="34" charset="0"/>
+              </a:rPr>
+              <a:t>Budući rad</a:t>
+            </a:r>
+          </a:p>
+          <a:p>
+            <a:pPr lvl="1"/>
+            <a:r>
+              <a:rPr lang="hr-HR" sz="2600" dirty="0">
+                <a:latin typeface="Arial" panose="020B0604020202020204" pitchFamily="34" charset="0"/>
+                <a:cs typeface="Arial" panose="020B0604020202020204" pitchFamily="34" charset="0"/>
+              </a:rPr>
+              <a:t>primjena nadograđene inačice VIBE-a na </a:t>
+            </a:r>
+            <a:r>
+              <a:rPr lang="hr-HR" sz="2600" b="1" dirty="0">
+                <a:latin typeface="Arial" panose="020B0604020202020204" pitchFamily="34" charset="0"/>
+                <a:cs typeface="Arial" panose="020B0604020202020204" pitchFamily="34" charset="0"/>
+              </a:rPr>
+              <a:t>problem učenja na djelomičnim oznakama</a:t>
+            </a:r>
+          </a:p>
+          <a:p>
+            <a:pPr lvl="1"/>
+            <a:r>
+              <a:rPr lang="hr-HR" sz="2600" dirty="0">
+                <a:latin typeface="Arial" panose="020B0604020202020204" pitchFamily="34" charset="0"/>
+                <a:cs typeface="Arial" panose="020B0604020202020204" pitchFamily="34" charset="0"/>
+              </a:rPr>
+              <a:t>dodatni eksperimenti u vezi dodavanja konzistencijskog gubitka nadziranom učenju</a:t>
+            </a:r>
+          </a:p>
+          <a:p>
+            <a:pPr marL="0" indent="0">
+              <a:buNone/>
+            </a:pPr>
+            <a:endParaRPr lang="hr-HR" sz="2600" dirty="0">
+              <a:latin typeface="Arial" panose="020B0604020202020204" pitchFamily="34" charset="0"/>
+              <a:cs typeface="Arial" panose="020B0604020202020204" pitchFamily="34" charset="0"/>
+            </a:endParaRPr>
+          </a:p>
+        </p:txBody>
+      </p:sp>
+      <p:sp>
+        <p:nvSpPr>
+          <p:cNvPr id="5" name="Slide Number Placeholder 4">
+            <a:extLst>
+              <a:ext uri="{FF2B5EF4-FFF2-40B4-BE49-F238E27FC236}">
+                <a16:creationId xmlns:a16="http://schemas.microsoft.com/office/drawing/2014/main" id="{061699EC-F442-0E43-B766-D3E31E56C1C8}"/>
+              </a:ext>
+            </a:extLst>
+          </p:cNvPr>
+          <p:cNvSpPr>
+            <a:spLocks noGrp="1"/>
+          </p:cNvSpPr>
+          <p:nvPr>
+            <p:ph type="sldNum" sz="quarter" idx="12"/>
+          </p:nvPr>
+        </p:nvSpPr>
+        <p:spPr/>
+        <p:txBody>
+          <a:bodyPr>
+            <a:normAutofit lnSpcReduction="10000"/>
+          </a:bodyPr>
+          <a:lstStyle/>
+          <a:p>
+            <a:r>
+              <a:rPr lang="hr-HR" dirty="0"/>
+              <a:t>17</a:t>
+            </a:r>
+          </a:p>
+        </p:txBody>
+      </p:sp>
+      <p:sp>
+        <p:nvSpPr>
+          <p:cNvPr id="8" name="TextBox 7">
+            <a:extLst>
+              <a:ext uri="{FF2B5EF4-FFF2-40B4-BE49-F238E27FC236}">
+                <a16:creationId xmlns:a16="http://schemas.microsoft.com/office/drawing/2014/main" id="{A42425D5-3F46-1A20-29B4-55183106D2EC}"/>
+              </a:ext>
+            </a:extLst>
+          </p:cNvPr>
+          <p:cNvSpPr txBox="1"/>
+          <p:nvPr/>
+        </p:nvSpPr>
+        <p:spPr>
+          <a:xfrm>
+            <a:off x="10228507" y="6073019"/>
+            <a:ext cx="809199" cy="369332"/>
+          </a:xfrm>
+          <a:prstGeom prst="rect">
+            <a:avLst/>
+          </a:prstGeom>
+          <a:solidFill>
+            <a:schemeClr val="bg1"/>
+          </a:solidFill>
+        </p:spPr>
+        <p:txBody>
+          <a:bodyPr wrap="square" rtlCol="0">
+            <a:spAutoFit/>
+          </a:bodyPr>
+          <a:lstStyle/>
+          <a:p>
+            <a:endParaRPr lang="hr-HR" dirty="0"/>
+          </a:p>
+        </p:txBody>
+      </p:sp>
+    </p:spTree>
+    <p:extLst>
+      <p:ext uri="{BB962C8B-B14F-4D97-AF65-F5344CB8AC3E}">
+        <p14:creationId xmlns:p14="http://schemas.microsoft.com/office/powerpoint/2010/main" val="194112924"/>
+      </p:ext>
+    </p:extLst>
+  </p:cSld>
+  <p:clrMapOvr>
+    <a:masterClrMapping/>
+  </p:clrMapOvr>
+</p:sld>
+</file>
+
+<file path=ppt/slides/slide21.xml><?xml version="1.0" encoding="utf-8"?>
+<p:sld xmlns:a="http://schemas.openxmlformats.org/drawingml/2006/main" xmlns:r="http://schemas.openxmlformats.org/officeDocument/2006/relationships" xmlns:p="http://schemas.openxmlformats.org/presentationml/2006/main">
+  <p:cSld>
+    <p:spTree>
+      <p:nvGrpSpPr>
+        <p:cNvPr id="1" name="">
+          <a:extLst>
+            <a:ext uri="{FF2B5EF4-FFF2-40B4-BE49-F238E27FC236}">
+              <a16:creationId xmlns:a16="http://schemas.microsoft.com/office/drawing/2014/main" id="{5616C9F9-911B-E360-F68E-AC14538EA3B9}"/>
+            </a:ext>
+          </a:extLst>
+        </p:cNvPr>
+        <p:cNvGrpSpPr/>
+        <p:nvPr/>
+      </p:nvGrpSpPr>
+      <p:grpSpPr>
+        <a:xfrm>
+          <a:off x="0" y="0"/>
+          <a:ext cx="0" cy="0"/>
+          <a:chOff x="0" y="0"/>
+          <a:chExt cx="0" cy="0"/>
+        </a:xfrm>
+      </p:grpSpPr>
+      <p:sp>
+        <p:nvSpPr>
+          <p:cNvPr id="2" name="Title 1">
+            <a:extLst>
+              <a:ext uri="{FF2B5EF4-FFF2-40B4-BE49-F238E27FC236}">
+                <a16:creationId xmlns:a16="http://schemas.microsoft.com/office/drawing/2014/main" id="{876A27CA-E20B-2F39-A3AF-D15DDDD3C0DD}"/>
+              </a:ext>
+            </a:extLst>
+          </p:cNvPr>
+          <p:cNvSpPr>
+            <a:spLocks noGrp="1"/>
+          </p:cNvSpPr>
+          <p:nvPr>
+            <p:ph type="ctrTitle"/>
+          </p:nvPr>
+        </p:nvSpPr>
+        <p:spPr/>
+        <p:txBody>
+          <a:bodyPr/>
+          <a:lstStyle/>
+          <a:p>
+            <a:r>
+              <a:rPr lang="hr-HR" dirty="0">
+                <a:latin typeface="Arial" panose="020B0604020202020204" pitchFamily="34" charset="0"/>
+                <a:cs typeface="Arial" panose="020B0604020202020204" pitchFamily="34" charset="0"/>
+              </a:rPr>
+              <a:t>Diskusija</a:t>
+            </a:r>
+          </a:p>
+        </p:txBody>
+      </p:sp>
+    </p:spTree>
+    <p:extLst>
+      <p:ext uri="{BB962C8B-B14F-4D97-AF65-F5344CB8AC3E}">
+        <p14:creationId xmlns:p14="http://schemas.microsoft.com/office/powerpoint/2010/main" val="3897778742"/>
       </p:ext>
     </p:extLst>
   </p:cSld>
@@ -6249,7 +7970,7 @@
             <a:pPr marL="0" indent="0">
               <a:buNone/>
             </a:pPr>
-            <a:endParaRPr lang="hr-HR" sz="2600" noProof="0" dirty="0">
+            <a:endParaRPr lang="en-US" sz="2600" noProof="0" dirty="0">
               <a:latin typeface="Arial" panose="020B0604020202020204" pitchFamily="34" charset="0"/>
               <a:cs typeface="Arial" panose="020B0604020202020204" pitchFamily="34" charset="0"/>
             </a:endParaRPr>
@@ -7684,7 +9405,7 @@
         </p:blipFill>
         <p:spPr>
           <a:xfrm>
-            <a:off x="501390" y="2432481"/>
+            <a:off x="501390" y="2334827"/>
             <a:ext cx="10791450" cy="3446755"/>
           </a:xfrm>
           <a:prstGeom prst="rect">
@@ -7692,6 +9413,91 @@
           </a:prstGeom>
         </p:spPr>
       </p:pic>
+      <p:sp>
+        <p:nvSpPr>
+          <p:cNvPr id="4" name="TextBox 3">
+            <a:extLst>
+              <a:ext uri="{FF2B5EF4-FFF2-40B4-BE49-F238E27FC236}">
+                <a16:creationId xmlns:a16="http://schemas.microsoft.com/office/drawing/2014/main" id="{4338E3E9-19BE-142E-0026-27CB290AB2E2}"/>
+              </a:ext>
+            </a:extLst>
+          </p:cNvPr>
+          <p:cNvSpPr txBox="1"/>
+          <p:nvPr/>
+        </p:nvSpPr>
+        <p:spPr>
+          <a:xfrm>
+            <a:off x="2354555" y="5873373"/>
+            <a:ext cx="7085120" cy="892552"/>
+          </a:xfrm>
+          <a:prstGeom prst="rect">
+            <a:avLst/>
+          </a:prstGeom>
+          <a:noFill/>
+        </p:spPr>
+        <p:txBody>
+          <a:bodyPr wrap="square">
+            <a:spAutoFit/>
+          </a:bodyPr>
+          <a:lstStyle/>
+          <a:p>
+            <a:pPr algn="ctr"/>
+            <a:r>
+              <a:rPr lang="hr-HR" sz="2600" dirty="0">
+                <a:solidFill>
+                  <a:schemeClr val="tx1">
+                    <a:lumMod val="65000"/>
+                    <a:lumOff val="35000"/>
+                  </a:schemeClr>
+                </a:solidFill>
+                <a:latin typeface="Arial" panose="020B0604020202020204" pitchFamily="34" charset="0"/>
+                <a:cs typeface="Arial" panose="020B0604020202020204" pitchFamily="34" charset="0"/>
+              </a:rPr>
+              <a:t>P</a:t>
+            </a:r>
+            <a:r>
+              <a:rPr lang="hr-HR" sz="2600" noProof="0" dirty="0">
+                <a:solidFill>
+                  <a:schemeClr val="tx1">
+                    <a:lumMod val="65000"/>
+                    <a:lumOff val="35000"/>
+                  </a:schemeClr>
+                </a:solidFill>
+                <a:latin typeface="Arial" panose="020B0604020202020204" pitchFamily="34" charset="0"/>
+                <a:cs typeface="Arial" panose="020B0604020202020204" pitchFamily="34" charset="0"/>
+              </a:rPr>
+              <a:t>reuzeto iz </a:t>
+            </a:r>
+            <a:r>
+              <a:rPr lang="hr-HR" sz="2600" noProof="0" dirty="0">
+                <a:solidFill>
+                  <a:schemeClr val="accent1"/>
+                </a:solidFill>
+                <a:latin typeface="Arial" panose="020B0604020202020204" pitchFamily="34" charset="0"/>
+                <a:cs typeface="Arial" panose="020B0604020202020204" pitchFamily="34" charset="0"/>
+              </a:rPr>
+              <a:t>I. Sabolić, M. Grcić, i S. Šegvić</a:t>
+            </a:r>
+            <a:r>
+              <a:rPr lang="en-US" sz="2600" noProof="0" dirty="0">
+                <a:solidFill>
+                  <a:schemeClr val="accent1"/>
+                </a:solidFill>
+                <a:latin typeface="Arial" panose="020B0604020202020204" pitchFamily="34" charset="0"/>
+                <a:cs typeface="Arial" panose="020B0604020202020204" pitchFamily="34" charset="0"/>
+              </a:rPr>
+              <a:t>, “Seal your backdoor with variational defense”</a:t>
+            </a:r>
+            <a:endParaRPr lang="hr-HR" sz="2600" noProof="0" dirty="0">
+              <a:solidFill>
+                <a:schemeClr val="accent1"/>
+              </a:solidFill>
+              <a:latin typeface="Arial" panose="020B0604020202020204" pitchFamily="34" charset="0"/>
+              <a:cs typeface="Arial" panose="020B0604020202020204" pitchFamily="34" charset="0"/>
+            </a:endParaRPr>
+          </a:p>
+        </p:txBody>
+      </p:sp>
     </p:spTree>
     <p:extLst>
       <p:ext uri="{BB962C8B-B14F-4D97-AF65-F5344CB8AC3E}">

--- a/Prezentacija/Varijacijsko učenje na zašumljenim oznakama.pptx
+++ b/Prezentacija/Varijacijsko učenje na zašumljenim oznakama.pptx
@@ -5,7 +5,7 @@
     <p:sldMasterId id="2147483660" r:id="rId1"/>
   </p:sldMasterIdLst>
   <p:notesMasterIdLst>
-    <p:notesMasterId r:id="rId23"/>
+    <p:notesMasterId r:id="rId25"/>
   </p:notesMasterIdLst>
   <p:sldIdLst>
     <p:sldId id="256" r:id="rId2"/>
@@ -15,20 +15,22 @@
     <p:sldId id="275" r:id="rId6"/>
     <p:sldId id="276" r:id="rId7"/>
     <p:sldId id="265" r:id="rId8"/>
-    <p:sldId id="274" r:id="rId9"/>
-    <p:sldId id="277" r:id="rId10"/>
-    <p:sldId id="266" r:id="rId11"/>
-    <p:sldId id="267" r:id="rId12"/>
-    <p:sldId id="278" r:id="rId13"/>
-    <p:sldId id="279" r:id="rId14"/>
-    <p:sldId id="270" r:id="rId15"/>
-    <p:sldId id="283" r:id="rId16"/>
-    <p:sldId id="282" r:id="rId17"/>
-    <p:sldId id="284" r:id="rId18"/>
-    <p:sldId id="280" r:id="rId19"/>
-    <p:sldId id="271" r:id="rId20"/>
-    <p:sldId id="285" r:id="rId21"/>
-    <p:sldId id="273" r:id="rId22"/>
+    <p:sldId id="286" r:id="rId9"/>
+    <p:sldId id="274" r:id="rId10"/>
+    <p:sldId id="277" r:id="rId11"/>
+    <p:sldId id="266" r:id="rId12"/>
+    <p:sldId id="267" r:id="rId13"/>
+    <p:sldId id="278" r:id="rId14"/>
+    <p:sldId id="279" r:id="rId15"/>
+    <p:sldId id="287" r:id="rId16"/>
+    <p:sldId id="270" r:id="rId17"/>
+    <p:sldId id="283" r:id="rId18"/>
+    <p:sldId id="282" r:id="rId19"/>
+    <p:sldId id="284" r:id="rId20"/>
+    <p:sldId id="280" r:id="rId21"/>
+    <p:sldId id="271" r:id="rId22"/>
+    <p:sldId id="285" r:id="rId23"/>
+    <p:sldId id="273" r:id="rId24"/>
   </p:sldIdLst>
   <p:sldSz cx="12192000" cy="6858000"/>
   <p:notesSz cx="6858000" cy="9144000"/>
@@ -217,7 +219,7 @@
           <a:p>
             <a:fld id="{4EC22A23-FA0E-43FF-AD6A-5A9DC9E7A77F}" type="datetimeFigureOut">
               <a:rPr lang="hr-HR" smtClean="0"/>
-              <a:t>30.6.2025.</a:t>
+              <a:t>4.7.2025.</a:t>
             </a:fld>
             <a:endParaRPr lang="hr-HR"/>
           </a:p>
@@ -485,6 +487,90 @@
 </p:notesMaster>
 </file>
 
+<file path=ppt/notesSlides/notesSlide1.xml><?xml version="1.0" encoding="utf-8"?>
+<p:notes xmlns:a="http://schemas.openxmlformats.org/drawingml/2006/main" xmlns:r="http://schemas.openxmlformats.org/officeDocument/2006/relationships" xmlns:p="http://schemas.openxmlformats.org/presentationml/2006/main">
+  <p:cSld>
+    <p:spTree>
+      <p:nvGrpSpPr>
+        <p:cNvPr id="1" name=""/>
+        <p:cNvGrpSpPr/>
+        <p:nvPr/>
+      </p:nvGrpSpPr>
+      <p:grpSpPr>
+        <a:xfrm>
+          <a:off x="0" y="0"/>
+          <a:ext cx="0" cy="0"/>
+          <a:chOff x="0" y="0"/>
+          <a:chExt cx="0" cy="0"/>
+        </a:xfrm>
+      </p:grpSpPr>
+      <p:sp>
+        <p:nvSpPr>
+          <p:cNvPr id="2" name="Slide Image Placeholder 1"/>
+          <p:cNvSpPr>
+            <a:spLocks noGrp="1" noRot="1" noChangeAspect="1"/>
+          </p:cNvSpPr>
+          <p:nvPr>
+            <p:ph type="sldImg"/>
+          </p:nvPr>
+        </p:nvSpPr>
+        <p:spPr/>
+      </p:sp>
+      <p:sp>
+        <p:nvSpPr>
+          <p:cNvPr id="3" name="Notes Placeholder 2"/>
+          <p:cNvSpPr>
+            <a:spLocks noGrp="1"/>
+          </p:cNvSpPr>
+          <p:nvPr>
+            <p:ph type="body" idx="1"/>
+          </p:nvPr>
+        </p:nvSpPr>
+        <p:spPr/>
+        <p:txBody>
+          <a:bodyPr/>
+          <a:lstStyle/>
+          <a:p>
+            <a:endParaRPr lang="hr-HR" dirty="0"/>
+          </a:p>
+        </p:txBody>
+      </p:sp>
+      <p:sp>
+        <p:nvSpPr>
+          <p:cNvPr id="4" name="Slide Number Placeholder 3"/>
+          <p:cNvSpPr>
+            <a:spLocks noGrp="1"/>
+          </p:cNvSpPr>
+          <p:nvPr>
+            <p:ph type="sldNum" sz="quarter" idx="5"/>
+          </p:nvPr>
+        </p:nvSpPr>
+        <p:spPr/>
+        <p:txBody>
+          <a:bodyPr/>
+          <a:lstStyle/>
+          <a:p>
+            <a:fld id="{A9F8539C-3157-43D8-9A64-3BC58E37B14C}" type="slidenum">
+              <a:rPr lang="hr-HR" smtClean="0"/>
+              <a:t>13</a:t>
+            </a:fld>
+            <a:endParaRPr lang="hr-HR"/>
+          </a:p>
+        </p:txBody>
+      </p:sp>
+    </p:spTree>
+    <p:extLst>
+      <p:ext uri="{BB962C8B-B14F-4D97-AF65-F5344CB8AC3E}">
+        <p14:creationId xmlns:p14="http://schemas.microsoft.com/office/powerpoint/2010/main" val="4133160232"/>
+      </p:ext>
+    </p:extLst>
+  </p:cSld>
+  <p:clrMapOvr>
+    <a:masterClrMapping/>
+  </p:clrMapOvr>
+</p:notes>
+</file>
+
 <file path=ppt/slideLayouts/slideLayout1.xml><?xml version="1.0" encoding="utf-8"?>
 <p:sldLayout xmlns:a="http://schemas.openxmlformats.org/drawingml/2006/main" xmlns:r="http://schemas.openxmlformats.org/officeDocument/2006/relationships" xmlns:p="http://schemas.openxmlformats.org/presentationml/2006/main" type="title" preserve="1">
   <p:cSld name="Title Slide">
@@ -679,7 +765,7 @@
           <a:p>
             <a:fld id="{08F0DB6F-6EB1-4D7D-9BCC-E96C905FFC52}" type="datetime1">
               <a:rPr lang="hr-HR" smtClean="0"/>
-              <a:t>30.6.2025.</a:t>
+              <a:t>4.7.2025.</a:t>
             </a:fld>
             <a:endParaRPr lang="hr-HR"/>
           </a:p>
@@ -849,7 +935,7 @@
           <a:p>
             <a:fld id="{1D8897EE-C1D5-4E52-876C-358FABA2E6DD}" type="datetime1">
               <a:rPr lang="hr-HR" smtClean="0"/>
-              <a:t>30.6.2025.</a:t>
+              <a:t>4.7.2025.</a:t>
             </a:fld>
             <a:endParaRPr lang="hr-HR"/>
           </a:p>
@@ -1070,7 +1156,7 @@
           <a:p>
             <a:fld id="{846F014D-1E5A-4CE6-87B2-A696E1D2C514}" type="datetime1">
               <a:rPr lang="hr-HR" smtClean="0"/>
-              <a:t>30.6.2025.</a:t>
+              <a:t>4.7.2025.</a:t>
             </a:fld>
             <a:endParaRPr lang="hr-HR"/>
           </a:p>
@@ -1281,7 +1367,7 @@
           <a:p>
             <a:fld id="{CC657D9C-C0AF-48FA-BBAF-7CAA57C23F8E}" type="datetime1">
               <a:rPr lang="hr-HR" smtClean="0"/>
-              <a:t>30.6.2025.</a:t>
+              <a:t>4.7.2025.</a:t>
             </a:fld>
             <a:endParaRPr lang="hr-HR"/>
           </a:p>
@@ -1576,7 +1662,7 @@
           <a:p>
             <a:fld id="{70E6B098-981F-45CA-83FF-788349BDC294}" type="datetime1">
               <a:rPr lang="hr-HR" smtClean="0"/>
-              <a:t>30.6.2025.</a:t>
+              <a:t>4.7.2025.</a:t>
             </a:fld>
             <a:endParaRPr lang="hr-HR"/>
           </a:p>
@@ -1905,7 +1991,7 @@
           <a:p>
             <a:fld id="{8F06E4C2-5A97-4809-9A3F-0AD2CD797138}" type="datetime1">
               <a:rPr lang="hr-HR" smtClean="0"/>
-              <a:t>30.6.2025.</a:t>
+              <a:t>4.7.2025.</a:t>
             </a:fld>
             <a:endParaRPr lang="hr-HR"/>
           </a:p>
@@ -2397,7 +2483,7 @@
           <a:p>
             <a:fld id="{7760B546-6293-4D30-BD97-A6B6A01C90BF}" type="datetime1">
               <a:rPr lang="hr-HR" smtClean="0"/>
-              <a:t>30.6.2025.</a:t>
+              <a:t>4.7.2025.</a:t>
             </a:fld>
             <a:endParaRPr lang="hr-HR"/>
           </a:p>
@@ -2556,7 +2642,7 @@
           <a:p>
             <a:fld id="{C5F7632D-88EC-4C5E-9269-EEF5AECE77DB}" type="datetime1">
               <a:rPr lang="hr-HR" smtClean="0"/>
-              <a:t>30.6.2025.</a:t>
+              <a:t>4.7.2025.</a:t>
             </a:fld>
             <a:endParaRPr lang="hr-HR"/>
           </a:p>
@@ -2692,7 +2778,7 @@
           <a:p>
             <a:fld id="{40E43FE3-F849-413C-9C82-49701E1B3EF3}" type="datetime1">
               <a:rPr lang="hr-HR" smtClean="0"/>
-              <a:t>30.6.2025.</a:t>
+              <a:t>4.7.2025.</a:t>
             </a:fld>
             <a:endParaRPr lang="hr-HR"/>
           </a:p>
@@ -3020,7 +3106,7 @@
           <a:p>
             <a:fld id="{058D4826-6613-4A6F-B53D-11761422A9FC}" type="datetime1">
               <a:rPr lang="hr-HR" smtClean="0"/>
-              <a:t>30.6.2025.</a:t>
+              <a:t>4.7.2025.</a:t>
             </a:fld>
             <a:endParaRPr lang="hr-HR"/>
           </a:p>
@@ -3335,7 +3421,7 @@
           <a:p>
             <a:fld id="{CB3A042B-28D4-4EE9-A191-0F90C01EB3D9}" type="datetime1">
               <a:rPr lang="hr-HR" smtClean="0"/>
-              <a:t>30.6.2025.</a:t>
+              <a:t>4.7.2025.</a:t>
             </a:fld>
             <a:endParaRPr lang="hr-HR"/>
           </a:p>
@@ -3587,7 +3673,7 @@
           <a:p>
             <a:fld id="{DE49A88E-18D6-498E-8265-50D671D76CD0}" type="datetime1">
               <a:rPr lang="hr-HR" smtClean="0"/>
-              <a:t>30.6.2025.</a:t>
+              <a:t>4.7.2025.</a:t>
             </a:fld>
             <a:endParaRPr lang="hr-HR"/>
           </a:p>
@@ -4186,7 +4272,21 @@
                 <a:latin typeface="Arial" panose="020B0604020202020204" pitchFamily="34" charset="0"/>
                 <a:cs typeface="Arial" panose="020B0604020202020204" pitchFamily="34" charset="0"/>
               </a:rPr>
-              <a:t>Voditelji: prof. dr. sc. Siniša Šegvić, univ. mag. ing. Ivan Sabolić</a:t>
+              <a:t>Voditelji: Ivan Sabolić</a:t>
+            </a:r>
+            <a:r>
+              <a:rPr lang="en-US" dirty="0">
+                <a:latin typeface="Arial" panose="020B0604020202020204" pitchFamily="34" charset="0"/>
+                <a:cs typeface="Arial" panose="020B0604020202020204" pitchFamily="34" charset="0"/>
+              </a:rPr>
+              <a:t>, </a:t>
+            </a:r>
+            <a:r>
+              <a:rPr lang="hr-HR" dirty="0">
+                <a:latin typeface="Arial" panose="020B0604020202020204" pitchFamily="34" charset="0"/>
+                <a:cs typeface="Arial" panose="020B0604020202020204" pitchFamily="34" charset="0"/>
+              </a:rPr>
+              <a:t>Siniša Šegvić</a:t>
             </a:r>
           </a:p>
         </p:txBody>
@@ -4209,6 +4309,312 @@
   <p:cSld>
     <p:spTree>
       <p:nvGrpSpPr>
+        <p:cNvPr id="1" name="">
+          <a:extLst>
+            <a:ext uri="{FF2B5EF4-FFF2-40B4-BE49-F238E27FC236}">
+              <a16:creationId xmlns:a16="http://schemas.microsoft.com/office/drawing/2014/main" id="{EFD79DC0-028A-FC80-FDF1-FA8AEAD0345D}"/>
+            </a:ext>
+          </a:extLst>
+        </p:cNvPr>
+        <p:cNvGrpSpPr/>
+        <p:nvPr/>
+      </p:nvGrpSpPr>
+      <p:grpSpPr>
+        <a:xfrm>
+          <a:off x="0" y="0"/>
+          <a:ext cx="0" cy="0"/>
+          <a:chOff x="0" y="0"/>
+          <a:chExt cx="0" cy="0"/>
+        </a:xfrm>
+      </p:grpSpPr>
+      <p:sp>
+        <p:nvSpPr>
+          <p:cNvPr id="2" name="Title 1">
+            <a:extLst>
+              <a:ext uri="{FF2B5EF4-FFF2-40B4-BE49-F238E27FC236}">
+                <a16:creationId xmlns:a16="http://schemas.microsoft.com/office/drawing/2014/main" id="{A6098E85-BDA4-7EB5-511C-62EAD823B775}"/>
+              </a:ext>
+            </a:extLst>
+          </p:cNvPr>
+          <p:cNvSpPr>
+            <a:spLocks noGrp="1"/>
+          </p:cNvSpPr>
+          <p:nvPr>
+            <p:ph type="title"/>
+          </p:nvPr>
+        </p:nvSpPr>
+        <p:spPr/>
+        <p:txBody>
+          <a:bodyPr/>
+          <a:lstStyle/>
+          <a:p>
+            <a:r>
+              <a:rPr lang="hr-HR" noProof="0" dirty="0">
+                <a:latin typeface="Arial" panose="020B0604020202020204" pitchFamily="34" charset="0"/>
+                <a:cs typeface="Arial" panose="020B0604020202020204" pitchFamily="34" charset="0"/>
+              </a:rPr>
+              <a:t>Konzistencijski gubitak</a:t>
+            </a:r>
+          </a:p>
+        </p:txBody>
+      </p:sp>
+      <p:sp>
+        <p:nvSpPr>
+          <p:cNvPr id="3" name="Content Placeholder 2">
+            <a:extLst>
+              <a:ext uri="{FF2B5EF4-FFF2-40B4-BE49-F238E27FC236}">
+                <a16:creationId xmlns:a16="http://schemas.microsoft.com/office/drawing/2014/main" id="{4115AFB7-9C7E-F25E-00CD-1CC2A10E8118}"/>
+              </a:ext>
+            </a:extLst>
+          </p:cNvPr>
+          <p:cNvSpPr>
+            <a:spLocks noGrp="1"/>
+          </p:cNvSpPr>
+          <p:nvPr>
+            <p:ph idx="1"/>
+          </p:nvPr>
+        </p:nvSpPr>
+        <p:spPr>
+          <a:xfrm>
+            <a:off x="1261872" y="1828800"/>
+            <a:ext cx="9692640" cy="4735002"/>
+          </a:xfrm>
+        </p:spPr>
+        <p:txBody>
+          <a:bodyPr>
+            <a:normAutofit/>
+          </a:bodyPr>
+          <a:lstStyle/>
+          <a:p>
+            <a:endParaRPr lang="hr-HR" sz="2600" noProof="0" dirty="0">
+              <a:latin typeface="Arial" panose="020B0604020202020204" pitchFamily="34" charset="0"/>
+              <a:cs typeface="Arial" panose="020B0604020202020204" pitchFamily="34" charset="0"/>
+            </a:endParaRPr>
+          </a:p>
+          <a:p>
+            <a:r>
+              <a:rPr lang="hr-HR" sz="2600" noProof="0" dirty="0">
+                <a:latin typeface="Arial" panose="020B0604020202020204" pitchFamily="34" charset="0"/>
+                <a:cs typeface="Arial" panose="020B0604020202020204" pitchFamily="34" charset="0"/>
+              </a:rPr>
+              <a:t>cilj: osigurati da model z</a:t>
+            </a:r>
+            <a:r>
+              <a:rPr lang="en-US" sz="2600" noProof="0" dirty="0">
+                <a:latin typeface="Arial" panose="020B0604020202020204" pitchFamily="34" charset="0"/>
+                <a:cs typeface="Arial" panose="020B0604020202020204" pitchFamily="34" charset="0"/>
+              </a:rPr>
+              <a:t>a</a:t>
+            </a:r>
+            <a:r>
+              <a:rPr lang="en-US" sz="2600" b="1" noProof="0" dirty="0">
+                <a:latin typeface="Arial" panose="020B0604020202020204" pitchFamily="34" charset="0"/>
+                <a:cs typeface="Arial" panose="020B0604020202020204" pitchFamily="34" charset="0"/>
+              </a:rPr>
+              <a:t> </a:t>
+            </a:r>
+            <a:r>
+              <a:rPr lang="hr-HR" sz="2600" b="1" noProof="0" dirty="0">
+                <a:latin typeface="Arial" panose="020B0604020202020204" pitchFamily="34" charset="0"/>
+                <a:cs typeface="Arial" panose="020B0604020202020204" pitchFamily="34" charset="0"/>
+              </a:rPr>
+              <a:t>različite perturbacije istog ulaza </a:t>
+            </a:r>
+            <a:r>
+              <a:rPr lang="hr-HR" sz="2600" noProof="0" dirty="0">
+                <a:latin typeface="Arial" panose="020B0604020202020204" pitchFamily="34" charset="0"/>
+                <a:cs typeface="Arial" panose="020B0604020202020204" pitchFamily="34" charset="0"/>
+              </a:rPr>
+              <a:t>daje</a:t>
+            </a:r>
+            <a:r>
+              <a:rPr lang="hr-HR" sz="2600" b="1" noProof="0" dirty="0">
+                <a:latin typeface="Arial" panose="020B0604020202020204" pitchFamily="34" charset="0"/>
+                <a:cs typeface="Arial" panose="020B0604020202020204" pitchFamily="34" charset="0"/>
+              </a:rPr>
+              <a:t> isti izlaz</a:t>
+            </a:r>
+            <a:endParaRPr lang="hr-HR" sz="2600" dirty="0">
+              <a:latin typeface="Arial" panose="020B0604020202020204" pitchFamily="34" charset="0"/>
+              <a:cs typeface="Arial" panose="020B0604020202020204" pitchFamily="34" charset="0"/>
+            </a:endParaRPr>
+          </a:p>
+          <a:p>
+            <a:r>
+              <a:rPr lang="hr-HR" sz="2600" b="1" noProof="0" dirty="0">
+                <a:latin typeface="Arial" panose="020B0604020202020204" pitchFamily="34" charset="0"/>
+                <a:cs typeface="Arial" panose="020B0604020202020204" pitchFamily="34" charset="0"/>
+              </a:rPr>
+              <a:t>dva pogleda </a:t>
+            </a:r>
+            <a:r>
+              <a:rPr lang="hr-HR" sz="2600" noProof="0" dirty="0">
+                <a:latin typeface="Arial" panose="020B0604020202020204" pitchFamily="34" charset="0"/>
+                <a:cs typeface="Arial" panose="020B0604020202020204" pitchFamily="34" charset="0"/>
+              </a:rPr>
+              <a:t>na podatke: </a:t>
+            </a:r>
+            <a:r>
+              <a:rPr lang="hr-HR" sz="2600" b="1" dirty="0">
+                <a:latin typeface="Arial" panose="020B0604020202020204" pitchFamily="34" charset="0"/>
+                <a:cs typeface="Arial" panose="020B0604020202020204" pitchFamily="34" charset="0"/>
+              </a:rPr>
+              <a:t>slabe</a:t>
+            </a:r>
+            <a:r>
+              <a:rPr lang="hr-HR" sz="2600" dirty="0">
+                <a:latin typeface="Arial" panose="020B0604020202020204" pitchFamily="34" charset="0"/>
+                <a:cs typeface="Arial" panose="020B0604020202020204" pitchFamily="34" charset="0"/>
+              </a:rPr>
+              <a:t> i </a:t>
+            </a:r>
+            <a:r>
+              <a:rPr lang="hr-HR" sz="2600" b="1" dirty="0">
+                <a:latin typeface="Arial" panose="020B0604020202020204" pitchFamily="34" charset="0"/>
+                <a:cs typeface="Arial" panose="020B0604020202020204" pitchFamily="34" charset="0"/>
+              </a:rPr>
+              <a:t>jake</a:t>
+            </a:r>
+            <a:r>
+              <a:rPr lang="hr-HR" sz="2600" dirty="0">
+                <a:latin typeface="Arial" panose="020B0604020202020204" pitchFamily="34" charset="0"/>
+                <a:cs typeface="Arial" panose="020B0604020202020204" pitchFamily="34" charset="0"/>
+              </a:rPr>
+              <a:t> augmentacije</a:t>
+            </a:r>
+          </a:p>
+          <a:p>
+            <a:endParaRPr lang="hr-HR" sz="2600" noProof="0" dirty="0">
+              <a:latin typeface="Arial" panose="020B0604020202020204" pitchFamily="34" charset="0"/>
+              <a:cs typeface="Arial" panose="020B0604020202020204" pitchFamily="34" charset="0"/>
+            </a:endParaRPr>
+          </a:p>
+          <a:p>
+            <a:endParaRPr lang="hr-HR" sz="2600" dirty="0">
+              <a:latin typeface="Arial" panose="020B0604020202020204" pitchFamily="34" charset="0"/>
+              <a:cs typeface="Arial" panose="020B0604020202020204" pitchFamily="34" charset="0"/>
+            </a:endParaRPr>
+          </a:p>
+          <a:p>
+            <a:r>
+              <a:rPr lang="hr-HR" sz="2600" dirty="0">
+                <a:latin typeface="Arial" panose="020B0604020202020204" pitchFamily="34" charset="0"/>
+                <a:cs typeface="Arial" panose="020B0604020202020204" pitchFamily="34" charset="0"/>
+              </a:rPr>
+              <a:t>povećavanje </a:t>
+            </a:r>
+            <a:r>
+              <a:rPr lang="hr-HR" sz="2600" b="1" dirty="0">
+                <a:latin typeface="Arial" panose="020B0604020202020204" pitchFamily="34" charset="0"/>
+                <a:cs typeface="Arial" panose="020B0604020202020204" pitchFamily="34" charset="0"/>
+              </a:rPr>
+              <a:t>invarijantnosti na perturbacije ulaza</a:t>
+            </a:r>
+            <a:r>
+              <a:rPr lang="hr-HR" sz="2600" dirty="0">
+                <a:latin typeface="Arial" panose="020B0604020202020204" pitchFamily="34" charset="0"/>
+                <a:cs typeface="Arial" panose="020B0604020202020204" pitchFamily="34" charset="0"/>
+              </a:rPr>
+              <a:t>, sprječavanje </a:t>
+            </a:r>
+            <a:r>
+              <a:rPr lang="hr-HR" sz="2600" b="1" dirty="0">
+                <a:latin typeface="Arial" panose="020B0604020202020204" pitchFamily="34" charset="0"/>
+                <a:cs typeface="Arial" panose="020B0604020202020204" pitchFamily="34" charset="0"/>
+              </a:rPr>
+              <a:t>prenaučenosti</a:t>
+            </a:r>
+            <a:endParaRPr lang="hr-HR" sz="2600" b="1" noProof="0" dirty="0">
+              <a:latin typeface="Arial" panose="020B0604020202020204" pitchFamily="34" charset="0"/>
+              <a:cs typeface="Arial" panose="020B0604020202020204" pitchFamily="34" charset="0"/>
+            </a:endParaRPr>
+          </a:p>
+          <a:p>
+            <a:endParaRPr lang="hr-HR" sz="2800" noProof="0" dirty="0">
+              <a:latin typeface="Arial" panose="020B0604020202020204" pitchFamily="34" charset="0"/>
+              <a:cs typeface="Arial" panose="020B0604020202020204" pitchFamily="34" charset="0"/>
+            </a:endParaRPr>
+          </a:p>
+        </p:txBody>
+      </p:sp>
+      <p:sp>
+        <p:nvSpPr>
+          <p:cNvPr id="5" name="Slide Number Placeholder 4">
+            <a:extLst>
+              <a:ext uri="{FF2B5EF4-FFF2-40B4-BE49-F238E27FC236}">
+                <a16:creationId xmlns:a16="http://schemas.microsoft.com/office/drawing/2014/main" id="{D58F7740-24FB-E7AA-570E-A745E1EDE189}"/>
+              </a:ext>
+            </a:extLst>
+          </p:cNvPr>
+          <p:cNvSpPr>
+            <a:spLocks noGrp="1"/>
+          </p:cNvSpPr>
+          <p:nvPr>
+            <p:ph type="sldNum" sz="quarter" idx="12"/>
+          </p:nvPr>
+        </p:nvSpPr>
+        <p:spPr/>
+        <p:txBody>
+          <a:bodyPr>
+            <a:normAutofit lnSpcReduction="10000"/>
+          </a:bodyPr>
+          <a:lstStyle/>
+          <a:p>
+            <a:r>
+              <a:rPr lang="hr-HR" dirty="0"/>
+              <a:t>8</a:t>
+            </a:r>
+          </a:p>
+        </p:txBody>
+      </p:sp>
+      <p:pic>
+        <p:nvPicPr>
+          <p:cNvPr id="7" name="Picture 6">
+            <a:extLst>
+              <a:ext uri="{FF2B5EF4-FFF2-40B4-BE49-F238E27FC236}">
+                <a16:creationId xmlns:a16="http://schemas.microsoft.com/office/drawing/2014/main" id="{6095EC41-835B-7249-819C-F56930CD2E64}"/>
+              </a:ext>
+            </a:extLst>
+          </p:cNvPr>
+          <p:cNvPicPr>
+            <a:picLocks noChangeAspect="1"/>
+          </p:cNvPicPr>
+          <p:nvPr/>
+        </p:nvPicPr>
+        <p:blipFill>
+          <a:blip r:embed="rId2"/>
+          <a:stretch>
+            <a:fillRect/>
+          </a:stretch>
+        </p:blipFill>
+        <p:spPr>
+          <a:xfrm>
+            <a:off x="2484257" y="4217404"/>
+            <a:ext cx="6573167" cy="571580"/>
+          </a:xfrm>
+          <a:prstGeom prst="rect">
+            <a:avLst/>
+          </a:prstGeom>
+        </p:spPr>
+      </p:pic>
+    </p:spTree>
+    <p:extLst>
+      <p:ext uri="{BB962C8B-B14F-4D97-AF65-F5344CB8AC3E}">
+        <p14:creationId xmlns:p14="http://schemas.microsoft.com/office/powerpoint/2010/main" val="1307808060"/>
+      </p:ext>
+    </p:extLst>
+  </p:cSld>
+  <p:clrMapOvr>
+    <a:masterClrMapping/>
+  </p:clrMapOvr>
+</p:sld>
+</file>
+
+<file path=ppt/slides/slide11.xml><?xml version="1.0" encoding="utf-8"?>
+<p:sld xmlns:a="http://schemas.openxmlformats.org/drawingml/2006/main" xmlns:r="http://schemas.openxmlformats.org/officeDocument/2006/relationships" xmlns:p="http://schemas.openxmlformats.org/presentationml/2006/main">
+  <p:cSld>
+    <p:spTree>
+      <p:nvGrpSpPr>
         <p:cNvPr id="1" name=""/>
         <p:cNvGrpSpPr/>
         <p:nvPr/>
@@ -4265,7 +4671,7 @@
 </p:sld>
 </file>
 
-<file path=ppt/slides/slide11.xml><?xml version="1.0" encoding="utf-8"?>
+<file path=ppt/slides/slide12.xml><?xml version="1.0" encoding="utf-8"?>
 <p:sld xmlns:a="http://schemas.openxmlformats.org/drawingml/2006/main" xmlns:r="http://schemas.openxmlformats.org/officeDocument/2006/relationships" xmlns:p="http://schemas.openxmlformats.org/presentationml/2006/main">
   <p:cSld>
     <p:spTree>
@@ -4452,7 +4858,7 @@
           <a:p>
             <a:r>
               <a:rPr lang="hr-HR" dirty="0"/>
-              <a:t>8</a:t>
+              <a:t>9</a:t>
             </a:r>
           </a:p>
         </p:txBody>
@@ -4507,7 +4913,7 @@
 </p:sld>
 </file>
 
-<file path=ppt/slides/slide12.xml><?xml version="1.0" encoding="utf-8"?>
+<file path=ppt/slides/slide13.xml><?xml version="1.0" encoding="utf-8"?>
 <p:sld xmlns:a="http://schemas.openxmlformats.org/drawingml/2006/main" xmlns:r="http://schemas.openxmlformats.org/officeDocument/2006/relationships" xmlns:p="http://schemas.openxmlformats.org/presentationml/2006/main">
   <p:cSld>
     <p:spTree>
@@ -4699,7 +5105,7 @@
                 <a:latin typeface="Arial" panose="020B0604020202020204" pitchFamily="34" charset="0"/>
                 <a:cs typeface="Arial" panose="020B0604020202020204" pitchFamily="34" charset="0"/>
               </a:rPr>
-              <a:t>evaluacija</a:t>
+              <a:t>vrednovanje</a:t>
             </a:r>
             <a:r>
               <a:rPr lang="hr-HR" sz="2600" dirty="0">
@@ -4720,7 +5126,7 @@
                 <a:latin typeface="Arial" panose="020B0604020202020204" pitchFamily="34" charset="0"/>
                 <a:cs typeface="Arial" panose="020B0604020202020204" pitchFamily="34" charset="0"/>
               </a:rPr>
-              <a:t>na prirodnom skupu</a:t>
+              <a:t>na čistom skupu</a:t>
             </a:r>
           </a:p>
           <a:p>
@@ -4846,7 +5252,7 @@
                 <a:latin typeface="Arial" panose="020B0604020202020204" pitchFamily="34" charset="0"/>
                 <a:cs typeface="Arial" panose="020B0604020202020204" pitchFamily="34" charset="0"/>
               </a:rPr>
-              <a:t>evaluacija: </a:t>
+              <a:t>vrednovanje: </a:t>
             </a:r>
             <a:r>
               <a:rPr lang="hr-HR" sz="2600" b="1" dirty="0">
@@ -4860,14 +5266,14 @@
                 <a:latin typeface="Arial" panose="020B0604020202020204" pitchFamily="34" charset="0"/>
                 <a:cs typeface="Arial" panose="020B0604020202020204" pitchFamily="34" charset="0"/>
               </a:rPr>
-              <a:t>na prirodnom skupu, </a:t>
+              <a:t>na čistom skupu, </a:t>
             </a:r>
             <a:r>
               <a:rPr lang="hr-HR" sz="2600" b="1" dirty="0">
                 <a:latin typeface="Arial" panose="020B0604020202020204" pitchFamily="34" charset="0"/>
                 <a:cs typeface="Arial" panose="020B0604020202020204" pitchFamily="34" charset="0"/>
               </a:rPr>
-              <a:t>stopa uspješnosti napada</a:t>
+              <a:t>udio uspješnih napada</a:t>
             </a:r>
             <a:r>
               <a:rPr lang="hr-HR" sz="2600" dirty="0">
@@ -4921,10 +5327,9 @@
           <a:lstStyle/>
           <a:p>
             <a:r>
-              <a:rPr lang="en-US" dirty="0"/>
-              <a:t>9</a:t>
-            </a:r>
-            <a:endParaRPr lang="hr-HR" dirty="0"/>
+              <a:rPr lang="hr-HR" dirty="0"/>
+              <a:t>10</a:t>
+            </a:r>
           </a:p>
         </p:txBody>
       </p:sp>
@@ -4975,7 +5380,7 @@
 </p:sld>
 </file>
 
-<file path=ppt/slides/slide13.xml><?xml version="1.0" encoding="utf-8"?>
+<file path=ppt/slides/slide14.xml><?xml version="1.0" encoding="utf-8"?>
 <p:sld xmlns:a="http://schemas.openxmlformats.org/drawingml/2006/main" xmlns:r="http://schemas.openxmlformats.org/officeDocument/2006/relationships" xmlns:p="http://schemas.openxmlformats.org/presentationml/2006/main">
   <p:cSld>
     <p:spTree>
@@ -5053,7 +5458,7 @@
         </p:spPr>
         <p:txBody>
           <a:bodyPr>
-            <a:normAutofit/>
+            <a:normAutofit lnSpcReduction="10000"/>
           </a:bodyPr>
           <a:lstStyle/>
           <a:p>
@@ -5101,21 +5506,7 @@
                 <a:latin typeface="Arial" panose="020B0604020202020204" pitchFamily="34" charset="0"/>
                 <a:cs typeface="Arial" panose="020B0604020202020204" pitchFamily="34" charset="0"/>
               </a:rPr>
-              <a:t>inicijalizacija </a:t>
-            </a:r>
-            <a:r>
-              <a:rPr lang="hr-HR" sz="2600" b="1" dirty="0">
-                <a:latin typeface="Arial" panose="020B0604020202020204" pitchFamily="34" charset="0"/>
-                <a:cs typeface="Arial" panose="020B0604020202020204" pitchFamily="34" charset="0"/>
-              </a:rPr>
-              <a:t>prototipova</a:t>
-            </a:r>
-            <a:r>
-              <a:rPr lang="hr-HR" sz="2600" dirty="0">
-                <a:latin typeface="Arial" panose="020B0604020202020204" pitchFamily="34" charset="0"/>
-                <a:cs typeface="Arial" panose="020B0604020202020204" pitchFamily="34" charset="0"/>
-              </a:rPr>
-              <a:t> na </a:t>
+              <a:t>inicijalizacija čistih i zatrovanih prototipova na </a:t>
             </a:r>
             <a:r>
               <a:rPr lang="hr-HR" sz="2600" b="1" dirty="0">
@@ -5149,6 +5540,20 @@
                 <a:latin typeface="Arial" panose="020B0604020202020204" pitchFamily="34" charset="0"/>
                 <a:cs typeface="Arial" panose="020B0604020202020204" pitchFamily="34" charset="0"/>
               </a:rPr>
+              <a:t>okvirom </a:t>
+            </a:r>
+            <a:r>
+              <a:rPr lang="hr-HR" sz="2600" b="1" dirty="0">
+                <a:latin typeface="Arial" panose="020B0604020202020204" pitchFamily="34" charset="0"/>
+                <a:cs typeface="Arial" panose="020B0604020202020204" pitchFamily="34" charset="0"/>
+              </a:rPr>
+              <a:t>VIBE </a:t>
+            </a:r>
+            <a:r>
+              <a:rPr lang="hr-HR" sz="2600" dirty="0">
+                <a:latin typeface="Arial" panose="020B0604020202020204" pitchFamily="34" charset="0"/>
+                <a:cs typeface="Arial" panose="020B0604020202020204" pitchFamily="34" charset="0"/>
+              </a:rPr>
               <a:t>uz optimizator </a:t>
             </a:r>
             <a:r>
@@ -5281,7 +5686,7 @@
                 <a:latin typeface="Arial" panose="020B0604020202020204" pitchFamily="34" charset="0"/>
                 <a:cs typeface="Arial" panose="020B0604020202020204" pitchFamily="34" charset="0"/>
               </a:rPr>
-              <a:t>stopa konzistencije </a:t>
+              <a:t>faktor konzistencijskog gubitka </a:t>
             </a:r>
             <a:r>
               <a:rPr lang="hr-HR" sz="2600" noProof="0" dirty="0">
@@ -5336,9 +5741,12 @@
           <a:p>
             <a:r>
               <a:rPr lang="en-US" dirty="0"/>
-              <a:t>10</a:t>
-            </a:r>
-            <a:endParaRPr lang="hr-HR" dirty="0"/>
+              <a:t>1</a:t>
+            </a:r>
+            <a:r>
+              <a:rPr lang="hr-HR" dirty="0"/>
+              <a:t>1</a:t>
+            </a:r>
           </a:p>
         </p:txBody>
       </p:sp>
@@ -5389,7 +5797,550 @@
 </p:sld>
 </file>
 
-<file path=ppt/slides/slide14.xml><?xml version="1.0" encoding="utf-8"?>
+<file path=ppt/slides/slide15.xml><?xml version="1.0" encoding="utf-8"?>
+<p:sld xmlns:a="http://schemas.openxmlformats.org/drawingml/2006/main" xmlns:r="http://schemas.openxmlformats.org/officeDocument/2006/relationships" xmlns:p="http://schemas.openxmlformats.org/presentationml/2006/main">
+  <p:cSld>
+    <p:spTree>
+      <p:nvGrpSpPr>
+        <p:cNvPr id="1" name="">
+          <a:extLst>
+            <a:ext uri="{FF2B5EF4-FFF2-40B4-BE49-F238E27FC236}">
+              <a16:creationId xmlns:a16="http://schemas.microsoft.com/office/drawing/2014/main" id="{4A45C142-48F7-E6F2-4F4D-F2399F2E550C}"/>
+            </a:ext>
+          </a:extLst>
+        </p:cNvPr>
+        <p:cNvGrpSpPr/>
+        <p:nvPr/>
+      </p:nvGrpSpPr>
+      <p:grpSpPr>
+        <a:xfrm>
+          <a:off x="0" y="0"/>
+          <a:ext cx="0" cy="0"/>
+          <a:chOff x="0" y="0"/>
+          <a:chExt cx="0" cy="0"/>
+        </a:xfrm>
+      </p:grpSpPr>
+      <p:sp>
+        <p:nvSpPr>
+          <p:cNvPr id="11" name="Content Placeholder 2">
+            <a:extLst>
+              <a:ext uri="{FF2B5EF4-FFF2-40B4-BE49-F238E27FC236}">
+                <a16:creationId xmlns:a16="http://schemas.microsoft.com/office/drawing/2014/main" id="{A7B1359D-A2F4-20F0-6300-FAB958F1C541}"/>
+              </a:ext>
+            </a:extLst>
+          </p:cNvPr>
+          <p:cNvSpPr txBox="1">
+            <a:spLocks/>
+          </p:cNvSpPr>
+          <p:nvPr/>
+        </p:nvSpPr>
+        <p:spPr>
+          <a:xfrm>
+            <a:off x="1261871" y="1473693"/>
+            <a:ext cx="9222657" cy="5090109"/>
+          </a:xfrm>
+          <a:prstGeom prst="rect">
+            <a:avLst/>
+          </a:prstGeom>
+        </p:spPr>
+        <p:txBody>
+          <a:bodyPr vert="horz" lIns="91440" tIns="45720" rIns="91440" bIns="45720" rtlCol="0">
+            <a:normAutofit/>
+          </a:bodyPr>
+          <a:lstStyle>
+            <a:lvl1pPr marL="182880" indent="-182880" algn="l" defTabSz="914400" rtl="0" eaLnBrk="1" latinLnBrk="0" hangingPunct="1">
+              <a:lnSpc>
+                <a:spcPct val="95000"/>
+              </a:lnSpc>
+              <a:spcBef>
+                <a:spcPts val="1400"/>
+              </a:spcBef>
+              <a:spcAft>
+                <a:spcPts val="200"/>
+              </a:spcAft>
+              <a:buClr>
+                <a:schemeClr val="accent1"/>
+              </a:buClr>
+              <a:buSzPct val="80000"/>
+              <a:buFont typeface="Arial" pitchFamily="34" charset="0"/>
+              <a:buChar char="•"/>
+              <a:defRPr sz="2000" kern="1200" spc="10" baseline="0">
+                <a:solidFill>
+                  <a:schemeClr val="tx1">
+                    <a:lumMod val="65000"/>
+                    <a:lumOff val="35000"/>
+                  </a:schemeClr>
+                </a:solidFill>
+                <a:latin typeface="+mn-lt"/>
+                <a:ea typeface="+mn-ea"/>
+                <a:cs typeface="+mn-cs"/>
+              </a:defRPr>
+            </a:lvl1pPr>
+            <a:lvl2pPr marL="457200" indent="-182880" algn="l" defTabSz="914400" rtl="0" eaLnBrk="1" latinLnBrk="0" hangingPunct="1">
+              <a:lnSpc>
+                <a:spcPct val="90000"/>
+              </a:lnSpc>
+              <a:spcBef>
+                <a:spcPts val="300"/>
+              </a:spcBef>
+              <a:spcAft>
+                <a:spcPts val="300"/>
+              </a:spcAft>
+              <a:buClr>
+                <a:schemeClr val="accent1"/>
+              </a:buClr>
+              <a:buFont typeface="Wingdings 2" pitchFamily="18" charset="2"/>
+              <a:buChar char=""/>
+              <a:defRPr sz="1800" kern="1200">
+                <a:solidFill>
+                  <a:schemeClr val="tx1">
+                    <a:lumMod val="65000"/>
+                    <a:lumOff val="35000"/>
+                  </a:schemeClr>
+                </a:solidFill>
+                <a:latin typeface="+mn-lt"/>
+                <a:ea typeface="+mn-ea"/>
+                <a:cs typeface="+mn-cs"/>
+              </a:defRPr>
+            </a:lvl2pPr>
+            <a:lvl3pPr marL="731520" indent="-182880" algn="l" defTabSz="914400" rtl="0" eaLnBrk="1" latinLnBrk="0" hangingPunct="1">
+              <a:lnSpc>
+                <a:spcPct val="90000"/>
+              </a:lnSpc>
+              <a:spcBef>
+                <a:spcPts val="300"/>
+              </a:spcBef>
+              <a:spcAft>
+                <a:spcPts val="300"/>
+              </a:spcAft>
+              <a:buClr>
+                <a:schemeClr val="accent1"/>
+              </a:buClr>
+              <a:buFont typeface="Wingdings 2" pitchFamily="18" charset="2"/>
+              <a:buChar char=""/>
+              <a:defRPr sz="1600" kern="1200">
+                <a:solidFill>
+                  <a:schemeClr val="tx1">
+                    <a:lumMod val="65000"/>
+                    <a:lumOff val="35000"/>
+                  </a:schemeClr>
+                </a:solidFill>
+                <a:latin typeface="+mn-lt"/>
+                <a:ea typeface="+mn-ea"/>
+                <a:cs typeface="+mn-cs"/>
+              </a:defRPr>
+            </a:lvl3pPr>
+            <a:lvl4pPr marL="1005840" indent="-182880" algn="l" defTabSz="914400" rtl="0" eaLnBrk="1" latinLnBrk="0" hangingPunct="1">
+              <a:lnSpc>
+                <a:spcPct val="90000"/>
+              </a:lnSpc>
+              <a:spcBef>
+                <a:spcPts val="300"/>
+              </a:spcBef>
+              <a:spcAft>
+                <a:spcPts val="300"/>
+              </a:spcAft>
+              <a:buClr>
+                <a:schemeClr val="accent1"/>
+              </a:buClr>
+              <a:buFont typeface="Wingdings 2" pitchFamily="18" charset="2"/>
+              <a:buChar char=""/>
+              <a:defRPr sz="1400" kern="1200">
+                <a:solidFill>
+                  <a:schemeClr val="tx1">
+                    <a:lumMod val="65000"/>
+                    <a:lumOff val="35000"/>
+                  </a:schemeClr>
+                </a:solidFill>
+                <a:latin typeface="+mn-lt"/>
+                <a:ea typeface="+mn-ea"/>
+                <a:cs typeface="+mn-cs"/>
+              </a:defRPr>
+            </a:lvl4pPr>
+            <a:lvl5pPr marL="1280160" indent="-182880" algn="l" defTabSz="914400" rtl="0" eaLnBrk="1" latinLnBrk="0" hangingPunct="1">
+              <a:lnSpc>
+                <a:spcPct val="90000"/>
+              </a:lnSpc>
+              <a:spcBef>
+                <a:spcPts val="300"/>
+              </a:spcBef>
+              <a:spcAft>
+                <a:spcPts val="300"/>
+              </a:spcAft>
+              <a:buClr>
+                <a:schemeClr val="accent1"/>
+              </a:buClr>
+              <a:buFont typeface="Wingdings 2" pitchFamily="18" charset="2"/>
+              <a:buChar char=""/>
+              <a:defRPr sz="1400" kern="1200">
+                <a:solidFill>
+                  <a:schemeClr val="tx1">
+                    <a:lumMod val="65000"/>
+                    <a:lumOff val="35000"/>
+                  </a:schemeClr>
+                </a:solidFill>
+                <a:latin typeface="+mn-lt"/>
+                <a:ea typeface="+mn-ea"/>
+                <a:cs typeface="+mn-cs"/>
+              </a:defRPr>
+            </a:lvl5pPr>
+            <a:lvl6pPr marL="1600000" indent="-228600" algn="l" defTabSz="914400" rtl="0" eaLnBrk="1" latinLnBrk="0" hangingPunct="1">
+              <a:lnSpc>
+                <a:spcPct val="90000"/>
+              </a:lnSpc>
+              <a:spcBef>
+                <a:spcPts val="300"/>
+              </a:spcBef>
+              <a:spcAft>
+                <a:spcPts val="300"/>
+              </a:spcAft>
+              <a:buClr>
+                <a:schemeClr val="accent1"/>
+              </a:buClr>
+              <a:buFont typeface="Wingdings 2" pitchFamily="18" charset="2"/>
+              <a:buChar char=""/>
+              <a:defRPr sz="1400" kern="1200">
+                <a:solidFill>
+                  <a:schemeClr val="tx1">
+                    <a:lumMod val="65000"/>
+                    <a:lumOff val="35000"/>
+                  </a:schemeClr>
+                </a:solidFill>
+                <a:latin typeface="+mn-lt"/>
+                <a:ea typeface="+mn-ea"/>
+                <a:cs typeface="+mn-cs"/>
+              </a:defRPr>
+            </a:lvl6pPr>
+            <a:lvl7pPr marL="1900000" indent="-228600" algn="l" defTabSz="914400" rtl="0" eaLnBrk="1" latinLnBrk="0" hangingPunct="1">
+              <a:lnSpc>
+                <a:spcPct val="90000"/>
+              </a:lnSpc>
+              <a:spcBef>
+                <a:spcPts val="300"/>
+              </a:spcBef>
+              <a:spcAft>
+                <a:spcPts val="300"/>
+              </a:spcAft>
+              <a:buClr>
+                <a:schemeClr val="accent1"/>
+              </a:buClr>
+              <a:buFont typeface="Wingdings 2" pitchFamily="18" charset="2"/>
+              <a:buChar char=""/>
+              <a:defRPr sz="1400" kern="1200">
+                <a:solidFill>
+                  <a:schemeClr val="tx1">
+                    <a:lumMod val="65000"/>
+                    <a:lumOff val="35000"/>
+                  </a:schemeClr>
+                </a:solidFill>
+                <a:latin typeface="+mn-lt"/>
+                <a:ea typeface="+mn-ea"/>
+                <a:cs typeface="+mn-cs"/>
+              </a:defRPr>
+            </a:lvl7pPr>
+            <a:lvl8pPr marL="2200000" indent="-228600" algn="l" defTabSz="914400" rtl="0" eaLnBrk="1" latinLnBrk="0" hangingPunct="1">
+              <a:lnSpc>
+                <a:spcPct val="90000"/>
+              </a:lnSpc>
+              <a:spcBef>
+                <a:spcPts val="300"/>
+              </a:spcBef>
+              <a:spcAft>
+                <a:spcPts val="300"/>
+              </a:spcAft>
+              <a:buClr>
+                <a:schemeClr val="accent1"/>
+              </a:buClr>
+              <a:buFont typeface="Wingdings 2" pitchFamily="18" charset="2"/>
+              <a:buChar char=""/>
+              <a:defRPr sz="1400" kern="1200">
+                <a:solidFill>
+                  <a:schemeClr val="tx1">
+                    <a:lumMod val="65000"/>
+                    <a:lumOff val="35000"/>
+                  </a:schemeClr>
+                </a:solidFill>
+                <a:latin typeface="+mn-lt"/>
+                <a:ea typeface="+mn-ea"/>
+                <a:cs typeface="+mn-cs"/>
+              </a:defRPr>
+            </a:lvl8pPr>
+            <a:lvl9pPr marL="2500000" indent="-228600" algn="l" defTabSz="914400" rtl="0" eaLnBrk="1" latinLnBrk="0" hangingPunct="1">
+              <a:lnSpc>
+                <a:spcPct val="90000"/>
+              </a:lnSpc>
+              <a:spcBef>
+                <a:spcPts val="300"/>
+              </a:spcBef>
+              <a:spcAft>
+                <a:spcPts val="300"/>
+              </a:spcAft>
+              <a:buClr>
+                <a:schemeClr val="accent1"/>
+              </a:buClr>
+              <a:buFont typeface="Wingdings 2" pitchFamily="18" charset="2"/>
+              <a:buChar char=""/>
+              <a:defRPr sz="1400" kern="1200">
+                <a:solidFill>
+                  <a:schemeClr val="tx1">
+                    <a:lumMod val="65000"/>
+                    <a:lumOff val="35000"/>
+                  </a:schemeClr>
+                </a:solidFill>
+                <a:latin typeface="+mn-lt"/>
+                <a:ea typeface="+mn-ea"/>
+                <a:cs typeface="+mn-cs"/>
+              </a:defRPr>
+            </a:lvl9pPr>
+          </a:lstStyle>
+          <a:p>
+            <a:pPr marL="0" indent="0">
+              <a:buNone/>
+            </a:pPr>
+            <a:r>
+              <a:rPr lang="hr-HR" sz="2600" dirty="0">
+                <a:latin typeface="Arial" panose="020B0604020202020204" pitchFamily="34" charset="0"/>
+                <a:cs typeface="Arial" panose="020B0604020202020204" pitchFamily="34" charset="0"/>
+              </a:rPr>
+              <a:t>Stanje tehnike</a:t>
+            </a:r>
+          </a:p>
+          <a:p>
+            <a:pPr lvl="1"/>
+            <a:r>
+              <a:rPr lang="hr-HR" sz="2600" i="1" dirty="0">
+                <a:latin typeface="Arial" panose="020B0604020202020204" pitchFamily="34" charset="0"/>
+                <a:cs typeface="Arial" panose="020B0604020202020204" pitchFamily="34" charset="0"/>
+              </a:rPr>
+              <a:t>Sparse over-parameterization </a:t>
+            </a:r>
+            <a:r>
+              <a:rPr lang="hr-HR" sz="2600" dirty="0">
+                <a:latin typeface="Arial" panose="020B0604020202020204" pitchFamily="34" charset="0"/>
+                <a:cs typeface="Arial" panose="020B0604020202020204" pitchFamily="34" charset="0"/>
+              </a:rPr>
+              <a:t>(</a:t>
+            </a:r>
+            <a:r>
+              <a:rPr lang="hr-HR" sz="2600" b="1" dirty="0">
+                <a:latin typeface="Arial" panose="020B0604020202020204" pitchFamily="34" charset="0"/>
+                <a:cs typeface="Arial" panose="020B0604020202020204" pitchFamily="34" charset="0"/>
+              </a:rPr>
+              <a:t>SOP</a:t>
+            </a:r>
+            <a:r>
+              <a:rPr lang="hr-HR" sz="2600" dirty="0">
+                <a:latin typeface="Arial" panose="020B0604020202020204" pitchFamily="34" charset="0"/>
+                <a:cs typeface="Arial" panose="020B0604020202020204" pitchFamily="34" charset="0"/>
+              </a:rPr>
+              <a:t>) </a:t>
+            </a:r>
+          </a:p>
+          <a:p>
+            <a:pPr lvl="1"/>
+            <a:r>
+              <a:rPr lang="hr-HR" sz="2600" i="1" dirty="0">
+                <a:latin typeface="Arial" panose="020B0604020202020204" pitchFamily="34" charset="0"/>
+                <a:cs typeface="Arial" panose="020B0604020202020204" pitchFamily="34" charset="0"/>
+              </a:rPr>
+              <a:t>Imprecise label learning </a:t>
+            </a:r>
+            <a:r>
+              <a:rPr lang="hr-HR" sz="2600" dirty="0">
+                <a:latin typeface="Arial" panose="020B0604020202020204" pitchFamily="34" charset="0"/>
+                <a:cs typeface="Arial" panose="020B0604020202020204" pitchFamily="34" charset="0"/>
+              </a:rPr>
+              <a:t>(</a:t>
+            </a:r>
+            <a:r>
+              <a:rPr lang="hr-HR" sz="2600" b="1" dirty="0">
+                <a:latin typeface="Arial" panose="020B0604020202020204" pitchFamily="34" charset="0"/>
+                <a:cs typeface="Arial" panose="020B0604020202020204" pitchFamily="34" charset="0"/>
+              </a:rPr>
+              <a:t>ILL</a:t>
+            </a:r>
+            <a:r>
+              <a:rPr lang="hr-HR" sz="2600" dirty="0">
+                <a:latin typeface="Arial" panose="020B0604020202020204" pitchFamily="34" charset="0"/>
+                <a:cs typeface="Arial" panose="020B0604020202020204" pitchFamily="34" charset="0"/>
+              </a:rPr>
+              <a:t>)</a:t>
+            </a:r>
+          </a:p>
+          <a:p>
+            <a:r>
+              <a:rPr lang="hr-HR" sz="2600" dirty="0">
+                <a:latin typeface="Arial" panose="020B0604020202020204" pitchFamily="34" charset="0"/>
+                <a:cs typeface="Arial" panose="020B0604020202020204" pitchFamily="34" charset="0"/>
+              </a:rPr>
+              <a:t>SOP uz konzistencijski gubitak i gubitak ravnoteže razreda: </a:t>
+            </a:r>
+            <a:r>
+              <a:rPr lang="hr-HR" sz="2600" b="1" dirty="0">
+                <a:latin typeface="Arial" panose="020B0604020202020204" pitchFamily="34" charset="0"/>
+                <a:cs typeface="Arial" panose="020B0604020202020204" pitchFamily="34" charset="0"/>
+              </a:rPr>
+              <a:t>SOP+</a:t>
+            </a:r>
+          </a:p>
+        </p:txBody>
+      </p:sp>
+      <p:sp>
+        <p:nvSpPr>
+          <p:cNvPr id="2" name="Title 1">
+            <a:extLst>
+              <a:ext uri="{FF2B5EF4-FFF2-40B4-BE49-F238E27FC236}">
+                <a16:creationId xmlns:a16="http://schemas.microsoft.com/office/drawing/2014/main" id="{39F15B25-5FCC-941C-2A2D-C2B8121C0850}"/>
+              </a:ext>
+            </a:extLst>
+          </p:cNvPr>
+          <p:cNvSpPr>
+            <a:spLocks noGrp="1"/>
+          </p:cNvSpPr>
+          <p:nvPr>
+            <p:ph type="title"/>
+          </p:nvPr>
+        </p:nvSpPr>
+        <p:spPr>
+          <a:xfrm>
+            <a:off x="1261872" y="294198"/>
+            <a:ext cx="9775834" cy="1397124"/>
+          </a:xfrm>
+        </p:spPr>
+        <p:txBody>
+          <a:bodyPr>
+            <a:normAutofit/>
+          </a:bodyPr>
+          <a:lstStyle/>
+          <a:p>
+            <a:r>
+              <a:rPr lang="hr-HR" sz="4000" dirty="0">
+                <a:latin typeface="Arial" panose="020B0604020202020204" pitchFamily="34" charset="0"/>
+                <a:cs typeface="Arial" panose="020B0604020202020204" pitchFamily="34" charset="0"/>
+              </a:rPr>
+              <a:t>Čisti skup, usporedba sa SotA</a:t>
+            </a:r>
+            <a:br>
+              <a:rPr lang="en-US" sz="4000" dirty="0">
+                <a:latin typeface="Arial" panose="020B0604020202020204" pitchFamily="34" charset="0"/>
+                <a:cs typeface="Arial" panose="020B0604020202020204" pitchFamily="34" charset="0"/>
+              </a:rPr>
+            </a:br>
+            <a:endParaRPr lang="hr-HR" sz="4000" noProof="0" dirty="0">
+              <a:latin typeface="Arial" panose="020B0604020202020204" pitchFamily="34" charset="0"/>
+              <a:cs typeface="Arial" panose="020B0604020202020204" pitchFamily="34" charset="0"/>
+            </a:endParaRPr>
+          </a:p>
+        </p:txBody>
+      </p:sp>
+      <p:sp>
+        <p:nvSpPr>
+          <p:cNvPr id="5" name="Slide Number Placeholder 4">
+            <a:extLst>
+              <a:ext uri="{FF2B5EF4-FFF2-40B4-BE49-F238E27FC236}">
+                <a16:creationId xmlns:a16="http://schemas.microsoft.com/office/drawing/2014/main" id="{D68B705C-288F-4F9E-5589-47CF7E6871D6}"/>
+              </a:ext>
+            </a:extLst>
+          </p:cNvPr>
+          <p:cNvSpPr>
+            <a:spLocks noGrp="1"/>
+          </p:cNvSpPr>
+          <p:nvPr>
+            <p:ph type="sldNum" sz="quarter" idx="12"/>
+          </p:nvPr>
+        </p:nvSpPr>
+        <p:spPr/>
+        <p:txBody>
+          <a:bodyPr>
+            <a:normAutofit lnSpcReduction="10000"/>
+          </a:bodyPr>
+          <a:lstStyle/>
+          <a:p>
+            <a:r>
+              <a:rPr lang="hr-HR" dirty="0"/>
+              <a:t>12</a:t>
+            </a:r>
+          </a:p>
+        </p:txBody>
+      </p:sp>
+      <p:sp>
+        <p:nvSpPr>
+          <p:cNvPr id="8" name="TextBox 7">
+            <a:extLst>
+              <a:ext uri="{FF2B5EF4-FFF2-40B4-BE49-F238E27FC236}">
+                <a16:creationId xmlns:a16="http://schemas.microsoft.com/office/drawing/2014/main" id="{8D992DE8-972E-8B50-D00F-2BF8E34B752A}"/>
+              </a:ext>
+            </a:extLst>
+          </p:cNvPr>
+          <p:cNvSpPr txBox="1"/>
+          <p:nvPr/>
+        </p:nvSpPr>
+        <p:spPr>
+          <a:xfrm>
+            <a:off x="10228507" y="6073019"/>
+            <a:ext cx="809199" cy="369332"/>
+          </a:xfrm>
+          <a:prstGeom prst="rect">
+            <a:avLst/>
+          </a:prstGeom>
+          <a:solidFill>
+            <a:schemeClr val="bg1"/>
+          </a:solidFill>
+        </p:spPr>
+        <p:txBody>
+          <a:bodyPr wrap="square" rtlCol="0">
+            <a:spAutoFit/>
+          </a:bodyPr>
+          <a:lstStyle/>
+          <a:p>
+            <a:endParaRPr lang="hr-HR" dirty="0"/>
+          </a:p>
+        </p:txBody>
+      </p:sp>
+      <p:pic>
+        <p:nvPicPr>
+          <p:cNvPr id="9" name="Picture 8">
+            <a:extLst>
+              <a:ext uri="{FF2B5EF4-FFF2-40B4-BE49-F238E27FC236}">
+                <a16:creationId xmlns:a16="http://schemas.microsoft.com/office/drawing/2014/main" id="{6E53711F-750A-E518-B807-C09926D6886A}"/>
+              </a:ext>
+            </a:extLst>
+          </p:cNvPr>
+          <p:cNvPicPr>
+            <a:picLocks noChangeAspect="1"/>
+          </p:cNvPicPr>
+          <p:nvPr/>
+        </p:nvPicPr>
+        <p:blipFill>
+          <a:blip r:embed="rId2"/>
+          <a:stretch>
+            <a:fillRect/>
+          </a:stretch>
+        </p:blipFill>
+        <p:spPr>
+          <a:xfrm>
+            <a:off x="4130476" y="4245413"/>
+            <a:ext cx="3229426" cy="2105319"/>
+          </a:xfrm>
+          <a:prstGeom prst="rect">
+            <a:avLst/>
+          </a:prstGeom>
+        </p:spPr>
+      </p:pic>
+    </p:spTree>
+    <p:extLst>
+      <p:ext uri="{BB962C8B-B14F-4D97-AF65-F5344CB8AC3E}">
+        <p14:creationId xmlns:p14="http://schemas.microsoft.com/office/powerpoint/2010/main" val="2006364242"/>
+      </p:ext>
+    </p:extLst>
+  </p:cSld>
+  <p:clrMapOvr>
+    <a:masterClrMapping/>
+  </p:clrMapOvr>
+</p:sld>
+</file>
+
+<file path=ppt/slides/slide16.xml><?xml version="1.0" encoding="utf-8"?>
 <p:sld xmlns:a="http://schemas.openxmlformats.org/drawingml/2006/main" xmlns:r="http://schemas.openxmlformats.org/officeDocument/2006/relationships" xmlns:p="http://schemas.openxmlformats.org/presentationml/2006/main">
   <p:cSld>
     <p:spTree>
@@ -5484,10 +6435,9 @@
           <a:lstStyle/>
           <a:p>
             <a:r>
-              <a:rPr lang="hr-HR"/>
-              <a:t>11</a:t>
-            </a:r>
-            <a:endParaRPr lang="hr-HR" dirty="0"/>
+              <a:rPr lang="hr-HR" dirty="0"/>
+              <a:t>13</a:t>
+            </a:r>
           </a:p>
         </p:txBody>
       </p:sp>
@@ -5525,157 +6475,552 @@
           </a:p>
         </p:txBody>
       </p:sp>
-      <p:sp>
-        <p:nvSpPr>
-          <p:cNvPr id="25" name="TextBox 24">
+      <p:grpSp>
+        <p:nvGrpSpPr>
+          <p:cNvPr id="12" name="Group 11">
             <a:extLst>
               <a:ext uri="{FF2B5EF4-FFF2-40B4-BE49-F238E27FC236}">
-                <a16:creationId xmlns:a16="http://schemas.microsoft.com/office/drawing/2014/main" id="{7C0F6ED8-F856-7668-D143-B0F3237E447B}"/>
+                <a16:creationId xmlns:a16="http://schemas.microsoft.com/office/drawing/2014/main" id="{FEED14FE-4F5C-3879-9E99-1854608330F2}"/>
               </a:ext>
             </a:extLst>
           </p:cNvPr>
-          <p:cNvSpPr txBox="1"/>
+          <p:cNvGrpSpPr/>
+          <p:nvPr/>
+        </p:nvGrpSpPr>
+        <p:grpSpPr>
+          <a:xfrm>
+            <a:off x="1031044" y="2507345"/>
+            <a:ext cx="9749352" cy="3750340"/>
+            <a:chOff x="1261872" y="2036830"/>
+            <a:chExt cx="9749352" cy="3750340"/>
+          </a:xfrm>
+        </p:grpSpPr>
+        <p:sp>
+          <p:nvSpPr>
+            <p:cNvPr id="25" name="TextBox 24">
+              <a:extLst>
+                <a:ext uri="{FF2B5EF4-FFF2-40B4-BE49-F238E27FC236}">
+                  <a16:creationId xmlns:a16="http://schemas.microsoft.com/office/drawing/2014/main" id="{7C0F6ED8-F856-7668-D143-B0F3237E447B}"/>
+                </a:ext>
+              </a:extLst>
+            </p:cNvPr>
+            <p:cNvSpPr txBox="1"/>
+            <p:nvPr/>
+          </p:nvSpPr>
+          <p:spPr>
+            <a:xfrm>
+              <a:off x="1261872" y="2036831"/>
+              <a:ext cx="4541832" cy="492443"/>
+            </a:xfrm>
+            <a:prstGeom prst="rect">
+              <a:avLst/>
+            </a:prstGeom>
+            <a:noFill/>
+          </p:spPr>
+          <p:txBody>
+            <a:bodyPr wrap="square" rtlCol="0">
+              <a:spAutoFit/>
+            </a:bodyPr>
+            <a:lstStyle/>
+            <a:p>
+              <a:pPr algn="ctr"/>
+              <a:r>
+                <a:rPr lang="hr-HR" sz="2600" b="1" dirty="0">
+                  <a:solidFill>
+                    <a:schemeClr val="tx1">
+                      <a:lumMod val="65000"/>
+                      <a:lumOff val="35000"/>
+                    </a:schemeClr>
+                  </a:solidFill>
+                  <a:latin typeface="Arial" panose="020B0604020202020204" pitchFamily="34" charset="0"/>
+                  <a:cs typeface="Arial" panose="020B0604020202020204" pitchFamily="34" charset="0"/>
+                </a:rPr>
+                <a:t>Simetrično zašumljivanje</a:t>
+              </a:r>
+            </a:p>
+          </p:txBody>
+        </p:sp>
+        <p:sp>
+          <p:nvSpPr>
+            <p:cNvPr id="26" name="TextBox 25">
+              <a:extLst>
+                <a:ext uri="{FF2B5EF4-FFF2-40B4-BE49-F238E27FC236}">
+                  <a16:creationId xmlns:a16="http://schemas.microsoft.com/office/drawing/2014/main" id="{709791A7-68A4-7211-9B53-9E5BF6FF9236}"/>
+                </a:ext>
+              </a:extLst>
+            </p:cNvPr>
+            <p:cNvSpPr txBox="1"/>
+            <p:nvPr/>
+          </p:nvSpPr>
+          <p:spPr>
+            <a:xfrm>
+              <a:off x="6469392" y="2036830"/>
+              <a:ext cx="4541832" cy="892552"/>
+            </a:xfrm>
+            <a:prstGeom prst="rect">
+              <a:avLst/>
+            </a:prstGeom>
+            <a:noFill/>
+          </p:spPr>
+          <p:txBody>
+            <a:bodyPr wrap="square" rtlCol="0">
+              <a:spAutoFit/>
+            </a:bodyPr>
+            <a:lstStyle/>
+            <a:p>
+              <a:pPr algn="ctr"/>
+              <a:r>
+                <a:rPr lang="hr-HR" sz="2600" b="1" dirty="0">
+                  <a:solidFill>
+                    <a:schemeClr val="tx1">
+                      <a:lumMod val="65000"/>
+                      <a:lumOff val="35000"/>
+                    </a:schemeClr>
+                  </a:solidFill>
+                  <a:latin typeface="Arial" panose="020B0604020202020204" pitchFamily="34" charset="0"/>
+                  <a:cs typeface="Arial" panose="020B0604020202020204" pitchFamily="34" charset="0"/>
+                </a:rPr>
+                <a:t>Asimetrično zašumljivanje,</a:t>
+              </a:r>
+            </a:p>
+            <a:p>
+              <a:pPr algn="ctr"/>
+              <a:r>
+                <a:rPr lang="hr-HR" sz="2600" b="1" dirty="0">
+                  <a:solidFill>
+                    <a:schemeClr val="tx1">
+                      <a:lumMod val="65000"/>
+                      <a:lumOff val="35000"/>
+                    </a:schemeClr>
+                  </a:solidFill>
+                  <a:latin typeface="Arial" panose="020B0604020202020204" pitchFamily="34" charset="0"/>
+                  <a:cs typeface="Arial" panose="020B0604020202020204" pitchFamily="34" charset="0"/>
+                </a:rPr>
+                <a:t>stopa šuma 40%</a:t>
+              </a:r>
+            </a:p>
+          </p:txBody>
+        </p:sp>
+        <p:pic>
+          <p:nvPicPr>
+            <p:cNvPr id="30" name="Picture 29">
+              <a:extLst>
+                <a:ext uri="{FF2B5EF4-FFF2-40B4-BE49-F238E27FC236}">
+                  <a16:creationId xmlns:a16="http://schemas.microsoft.com/office/drawing/2014/main" id="{BA433559-7543-44F0-127F-E1396F22924D}"/>
+                </a:ext>
+              </a:extLst>
+            </p:cNvPr>
+            <p:cNvPicPr>
+              <a:picLocks noChangeAspect="1"/>
+            </p:cNvPicPr>
+            <p:nvPr/>
+          </p:nvPicPr>
+          <p:blipFill>
+            <a:blip r:embed="rId2"/>
+            <a:stretch>
+              <a:fillRect/>
+            </a:stretch>
+          </p:blipFill>
+          <p:spPr>
+            <a:xfrm>
+              <a:off x="1379837" y="2670376"/>
+              <a:ext cx="4305901" cy="3115110"/>
+            </a:xfrm>
+            <a:prstGeom prst="rect">
+              <a:avLst/>
+            </a:prstGeom>
+          </p:spPr>
+        </p:pic>
+        <p:pic>
+          <p:nvPicPr>
+            <p:cNvPr id="32" name="Picture 31">
+              <a:extLst>
+                <a:ext uri="{FF2B5EF4-FFF2-40B4-BE49-F238E27FC236}">
+                  <a16:creationId xmlns:a16="http://schemas.microsoft.com/office/drawing/2014/main" id="{C0950E4D-E91C-3DBE-DF61-6627B398A128}"/>
+                </a:ext>
+              </a:extLst>
+            </p:cNvPr>
+            <p:cNvPicPr>
+              <a:picLocks noChangeAspect="1"/>
+            </p:cNvPicPr>
+            <p:nvPr/>
+          </p:nvPicPr>
+          <p:blipFill>
+            <a:blip r:embed="rId3"/>
+            <a:srcRect t="-1" b="586"/>
+            <a:stretch>
+              <a:fillRect/>
+            </a:stretch>
+          </p:blipFill>
+          <p:spPr>
+            <a:xfrm>
+              <a:off x="7116069" y="2993390"/>
+              <a:ext cx="3248478" cy="2793780"/>
+            </a:xfrm>
+            <a:prstGeom prst="rect">
+              <a:avLst/>
+            </a:prstGeom>
+          </p:spPr>
+        </p:pic>
+      </p:grpSp>
+      <p:sp>
+        <p:nvSpPr>
+          <p:cNvPr id="11" name="Content Placeholder 2">
+            <a:extLst>
+              <a:ext uri="{FF2B5EF4-FFF2-40B4-BE49-F238E27FC236}">
+                <a16:creationId xmlns:a16="http://schemas.microsoft.com/office/drawing/2014/main" id="{1D61EFA3-AB36-013E-65D4-EB55E2BF6CAD}"/>
+              </a:ext>
+            </a:extLst>
+          </p:cNvPr>
+          <p:cNvSpPr txBox="1">
+            <a:spLocks/>
+          </p:cNvSpPr>
           <p:nvPr/>
         </p:nvSpPr>
         <p:spPr>
           <a:xfrm>
-            <a:off x="1261872" y="2036831"/>
-            <a:ext cx="4541832" cy="492443"/>
+            <a:off x="1149009" y="1615736"/>
+            <a:ext cx="10143831" cy="750508"/>
           </a:xfrm>
           <a:prstGeom prst="rect">
             <a:avLst/>
           </a:prstGeom>
-          <a:noFill/>
         </p:spPr>
         <p:txBody>
-          <a:bodyPr wrap="square" rtlCol="0">
-            <a:spAutoFit/>
+          <a:bodyPr vert="horz" lIns="91440" tIns="45720" rIns="91440" bIns="45720" rtlCol="0">
+            <a:normAutofit fontScale="92500"/>
           </a:bodyPr>
-          <a:lstStyle/>
-          <a:p>
-            <a:pPr algn="ctr"/>
-            <a:r>
-              <a:rPr lang="hr-HR" sz="2600" b="1" dirty="0">
+          <a:lstStyle>
+            <a:lvl1pPr marL="182880" indent="-182880" algn="l" defTabSz="914400" rtl="0" eaLnBrk="1" latinLnBrk="0" hangingPunct="1">
+              <a:lnSpc>
+                <a:spcPct val="95000"/>
+              </a:lnSpc>
+              <a:spcBef>
+                <a:spcPts val="1400"/>
+              </a:spcBef>
+              <a:spcAft>
+                <a:spcPts val="200"/>
+              </a:spcAft>
+              <a:buClr>
+                <a:schemeClr val="accent1"/>
+              </a:buClr>
+              <a:buSzPct val="80000"/>
+              <a:buFont typeface="Arial" pitchFamily="34" charset="0"/>
+              <a:buChar char="•"/>
+              <a:defRPr sz="2000" kern="1200" spc="10" baseline="0">
                 <a:solidFill>
                   <a:schemeClr val="tx1">
                     <a:lumMod val="65000"/>
                     <a:lumOff val="35000"/>
                   </a:schemeClr>
                 </a:solidFill>
-                <a:latin typeface="Arial" panose="020B0604020202020204" pitchFamily="34" charset="0"/>
-                <a:cs typeface="Arial" panose="020B0604020202020204" pitchFamily="34" charset="0"/>
-              </a:rPr>
-              <a:t>Simetrično zašumljivanje</a:t>
-            </a:r>
-          </a:p>
-        </p:txBody>
-      </p:sp>
-      <p:sp>
-        <p:nvSpPr>
-          <p:cNvPr id="26" name="TextBox 25">
-            <a:extLst>
-              <a:ext uri="{FF2B5EF4-FFF2-40B4-BE49-F238E27FC236}">
-                <a16:creationId xmlns:a16="http://schemas.microsoft.com/office/drawing/2014/main" id="{709791A7-68A4-7211-9B53-9E5BF6FF9236}"/>
-              </a:ext>
-            </a:extLst>
-          </p:cNvPr>
-          <p:cNvSpPr txBox="1"/>
-          <p:nvPr/>
-        </p:nvSpPr>
-        <p:spPr>
-          <a:xfrm>
-            <a:off x="6469392" y="2036830"/>
-            <a:ext cx="4541832" cy="492443"/>
-          </a:xfrm>
-          <a:prstGeom prst="rect">
-            <a:avLst/>
-          </a:prstGeom>
-          <a:noFill/>
-        </p:spPr>
-        <p:txBody>
-          <a:bodyPr wrap="square" rtlCol="0">
-            <a:spAutoFit/>
-          </a:bodyPr>
-          <a:lstStyle/>
-          <a:p>
-            <a:pPr algn="ctr"/>
-            <a:r>
-              <a:rPr lang="hr-HR" sz="2600" b="1" dirty="0">
+                <a:latin typeface="+mn-lt"/>
+                <a:ea typeface="+mn-ea"/>
+                <a:cs typeface="+mn-cs"/>
+              </a:defRPr>
+            </a:lvl1pPr>
+            <a:lvl2pPr marL="457200" indent="-182880" algn="l" defTabSz="914400" rtl="0" eaLnBrk="1" latinLnBrk="0" hangingPunct="1">
+              <a:lnSpc>
+                <a:spcPct val="90000"/>
+              </a:lnSpc>
+              <a:spcBef>
+                <a:spcPts val="300"/>
+              </a:spcBef>
+              <a:spcAft>
+                <a:spcPts val="300"/>
+              </a:spcAft>
+              <a:buClr>
+                <a:schemeClr val="accent1"/>
+              </a:buClr>
+              <a:buFont typeface="Wingdings 2" pitchFamily="18" charset="2"/>
+              <a:buChar char=""/>
+              <a:defRPr sz="1800" kern="1200">
                 <a:solidFill>
                   <a:schemeClr val="tx1">
                     <a:lumMod val="65000"/>
                     <a:lumOff val="35000"/>
                   </a:schemeClr>
                 </a:solidFill>
-                <a:latin typeface="Arial" panose="020B0604020202020204" pitchFamily="34" charset="0"/>
-                <a:cs typeface="Arial" panose="020B0604020202020204" pitchFamily="34" charset="0"/>
-              </a:rPr>
-              <a:t>Asimetrično zašumljivanje</a:t>
-            </a:r>
-          </a:p>
-        </p:txBody>
-      </p:sp>
-      <p:pic>
-        <p:nvPicPr>
-          <p:cNvPr id="30" name="Picture 29">
-            <a:extLst>
-              <a:ext uri="{FF2B5EF4-FFF2-40B4-BE49-F238E27FC236}">
-                <a16:creationId xmlns:a16="http://schemas.microsoft.com/office/drawing/2014/main" id="{BA433559-7543-44F0-127F-E1396F22924D}"/>
-              </a:ext>
-            </a:extLst>
-          </p:cNvPr>
-          <p:cNvPicPr>
-            <a:picLocks noChangeAspect="1"/>
-          </p:cNvPicPr>
-          <p:nvPr/>
-        </p:nvPicPr>
-        <p:blipFill>
-          <a:blip r:embed="rId2"/>
-          <a:stretch>
-            <a:fillRect/>
-          </a:stretch>
-        </p:blipFill>
-        <p:spPr>
-          <a:xfrm>
-            <a:off x="1379837" y="2612400"/>
-            <a:ext cx="4305901" cy="3115110"/>
-          </a:xfrm>
-          <a:prstGeom prst="rect">
-            <a:avLst/>
-          </a:prstGeom>
-        </p:spPr>
-      </p:pic>
-      <p:pic>
-        <p:nvPicPr>
-          <p:cNvPr id="32" name="Picture 31">
-            <a:extLst>
-              <a:ext uri="{FF2B5EF4-FFF2-40B4-BE49-F238E27FC236}">
-                <a16:creationId xmlns:a16="http://schemas.microsoft.com/office/drawing/2014/main" id="{C0950E4D-E91C-3DBE-DF61-6627B398A128}"/>
-              </a:ext>
-            </a:extLst>
-          </p:cNvPr>
-          <p:cNvPicPr>
-            <a:picLocks noChangeAspect="1"/>
-          </p:cNvPicPr>
-          <p:nvPr/>
-        </p:nvPicPr>
-        <p:blipFill>
-          <a:blip r:embed="rId3"/>
-          <a:srcRect t="-1" b="586"/>
-          <a:stretch>
-            <a:fillRect/>
-          </a:stretch>
-        </p:blipFill>
-        <p:spPr>
-          <a:xfrm>
-            <a:off x="7116069" y="2933730"/>
-            <a:ext cx="3248478" cy="2793780"/>
-          </a:xfrm>
-          <a:prstGeom prst="rect">
-            <a:avLst/>
-          </a:prstGeom>
-        </p:spPr>
-      </p:pic>
+                <a:latin typeface="+mn-lt"/>
+                <a:ea typeface="+mn-ea"/>
+                <a:cs typeface="+mn-cs"/>
+              </a:defRPr>
+            </a:lvl2pPr>
+            <a:lvl3pPr marL="731520" indent="-182880" algn="l" defTabSz="914400" rtl="0" eaLnBrk="1" latinLnBrk="0" hangingPunct="1">
+              <a:lnSpc>
+                <a:spcPct val="90000"/>
+              </a:lnSpc>
+              <a:spcBef>
+                <a:spcPts val="300"/>
+              </a:spcBef>
+              <a:spcAft>
+                <a:spcPts val="300"/>
+              </a:spcAft>
+              <a:buClr>
+                <a:schemeClr val="accent1"/>
+              </a:buClr>
+              <a:buFont typeface="Wingdings 2" pitchFamily="18" charset="2"/>
+              <a:buChar char=""/>
+              <a:defRPr sz="1600" kern="1200">
+                <a:solidFill>
+                  <a:schemeClr val="tx1">
+                    <a:lumMod val="65000"/>
+                    <a:lumOff val="35000"/>
+                  </a:schemeClr>
+                </a:solidFill>
+                <a:latin typeface="+mn-lt"/>
+                <a:ea typeface="+mn-ea"/>
+                <a:cs typeface="+mn-cs"/>
+              </a:defRPr>
+            </a:lvl3pPr>
+            <a:lvl4pPr marL="1005840" indent="-182880" algn="l" defTabSz="914400" rtl="0" eaLnBrk="1" latinLnBrk="0" hangingPunct="1">
+              <a:lnSpc>
+                <a:spcPct val="90000"/>
+              </a:lnSpc>
+              <a:spcBef>
+                <a:spcPts val="300"/>
+              </a:spcBef>
+              <a:spcAft>
+                <a:spcPts val="300"/>
+              </a:spcAft>
+              <a:buClr>
+                <a:schemeClr val="accent1"/>
+              </a:buClr>
+              <a:buFont typeface="Wingdings 2" pitchFamily="18" charset="2"/>
+              <a:buChar char=""/>
+              <a:defRPr sz="1400" kern="1200">
+                <a:solidFill>
+                  <a:schemeClr val="tx1">
+                    <a:lumMod val="65000"/>
+                    <a:lumOff val="35000"/>
+                  </a:schemeClr>
+                </a:solidFill>
+                <a:latin typeface="+mn-lt"/>
+                <a:ea typeface="+mn-ea"/>
+                <a:cs typeface="+mn-cs"/>
+              </a:defRPr>
+            </a:lvl4pPr>
+            <a:lvl5pPr marL="1280160" indent="-182880" algn="l" defTabSz="914400" rtl="0" eaLnBrk="1" latinLnBrk="0" hangingPunct="1">
+              <a:lnSpc>
+                <a:spcPct val="90000"/>
+              </a:lnSpc>
+              <a:spcBef>
+                <a:spcPts val="300"/>
+              </a:spcBef>
+              <a:spcAft>
+                <a:spcPts val="300"/>
+              </a:spcAft>
+              <a:buClr>
+                <a:schemeClr val="accent1"/>
+              </a:buClr>
+              <a:buFont typeface="Wingdings 2" pitchFamily="18" charset="2"/>
+              <a:buChar char=""/>
+              <a:defRPr sz="1400" kern="1200">
+                <a:solidFill>
+                  <a:schemeClr val="tx1">
+                    <a:lumMod val="65000"/>
+                    <a:lumOff val="35000"/>
+                  </a:schemeClr>
+                </a:solidFill>
+                <a:latin typeface="+mn-lt"/>
+                <a:ea typeface="+mn-ea"/>
+                <a:cs typeface="+mn-cs"/>
+              </a:defRPr>
+            </a:lvl5pPr>
+            <a:lvl6pPr marL="1600000" indent="-228600" algn="l" defTabSz="914400" rtl="0" eaLnBrk="1" latinLnBrk="0" hangingPunct="1">
+              <a:lnSpc>
+                <a:spcPct val="90000"/>
+              </a:lnSpc>
+              <a:spcBef>
+                <a:spcPts val="300"/>
+              </a:spcBef>
+              <a:spcAft>
+                <a:spcPts val="300"/>
+              </a:spcAft>
+              <a:buClr>
+                <a:schemeClr val="accent1"/>
+              </a:buClr>
+              <a:buFont typeface="Wingdings 2" pitchFamily="18" charset="2"/>
+              <a:buChar char=""/>
+              <a:defRPr sz="1400" kern="1200">
+                <a:solidFill>
+                  <a:schemeClr val="tx1">
+                    <a:lumMod val="65000"/>
+                    <a:lumOff val="35000"/>
+                  </a:schemeClr>
+                </a:solidFill>
+                <a:latin typeface="+mn-lt"/>
+                <a:ea typeface="+mn-ea"/>
+                <a:cs typeface="+mn-cs"/>
+              </a:defRPr>
+            </a:lvl6pPr>
+            <a:lvl7pPr marL="1900000" indent="-228600" algn="l" defTabSz="914400" rtl="0" eaLnBrk="1" latinLnBrk="0" hangingPunct="1">
+              <a:lnSpc>
+                <a:spcPct val="90000"/>
+              </a:lnSpc>
+              <a:spcBef>
+                <a:spcPts val="300"/>
+              </a:spcBef>
+              <a:spcAft>
+                <a:spcPts val="300"/>
+              </a:spcAft>
+              <a:buClr>
+                <a:schemeClr val="accent1"/>
+              </a:buClr>
+              <a:buFont typeface="Wingdings 2" pitchFamily="18" charset="2"/>
+              <a:buChar char=""/>
+              <a:defRPr sz="1400" kern="1200">
+                <a:solidFill>
+                  <a:schemeClr val="tx1">
+                    <a:lumMod val="65000"/>
+                    <a:lumOff val="35000"/>
+                  </a:schemeClr>
+                </a:solidFill>
+                <a:latin typeface="+mn-lt"/>
+                <a:ea typeface="+mn-ea"/>
+                <a:cs typeface="+mn-cs"/>
+              </a:defRPr>
+            </a:lvl7pPr>
+            <a:lvl8pPr marL="2200000" indent="-228600" algn="l" defTabSz="914400" rtl="0" eaLnBrk="1" latinLnBrk="0" hangingPunct="1">
+              <a:lnSpc>
+                <a:spcPct val="90000"/>
+              </a:lnSpc>
+              <a:spcBef>
+                <a:spcPts val="300"/>
+              </a:spcBef>
+              <a:spcAft>
+                <a:spcPts val="300"/>
+              </a:spcAft>
+              <a:buClr>
+                <a:schemeClr val="accent1"/>
+              </a:buClr>
+              <a:buFont typeface="Wingdings 2" pitchFamily="18" charset="2"/>
+              <a:buChar char=""/>
+              <a:defRPr sz="1400" kern="1200">
+                <a:solidFill>
+                  <a:schemeClr val="tx1">
+                    <a:lumMod val="65000"/>
+                    <a:lumOff val="35000"/>
+                  </a:schemeClr>
+                </a:solidFill>
+                <a:latin typeface="+mn-lt"/>
+                <a:ea typeface="+mn-ea"/>
+                <a:cs typeface="+mn-cs"/>
+              </a:defRPr>
+            </a:lvl8pPr>
+            <a:lvl9pPr marL="2500000" indent="-228600" algn="l" defTabSz="914400" rtl="0" eaLnBrk="1" latinLnBrk="0" hangingPunct="1">
+              <a:lnSpc>
+                <a:spcPct val="90000"/>
+              </a:lnSpc>
+              <a:spcBef>
+                <a:spcPts val="300"/>
+              </a:spcBef>
+              <a:spcAft>
+                <a:spcPts val="300"/>
+              </a:spcAft>
+              <a:buClr>
+                <a:schemeClr val="accent1"/>
+              </a:buClr>
+              <a:buFont typeface="Wingdings 2" pitchFamily="18" charset="2"/>
+              <a:buChar char=""/>
+              <a:defRPr sz="1400" kern="1200">
+                <a:solidFill>
+                  <a:schemeClr val="tx1">
+                    <a:lumMod val="65000"/>
+                    <a:lumOff val="35000"/>
+                  </a:schemeClr>
+                </a:solidFill>
+                <a:latin typeface="+mn-lt"/>
+                <a:ea typeface="+mn-ea"/>
+                <a:cs typeface="+mn-cs"/>
+              </a:defRPr>
+            </a:lvl9pPr>
+          </a:lstStyle>
+          <a:p>
+            <a:r>
+              <a:rPr lang="hr-HR" sz="2800" dirty="0">
+                <a:latin typeface="Arial" panose="020B0604020202020204" pitchFamily="34" charset="0"/>
+                <a:cs typeface="Arial" panose="020B0604020202020204" pitchFamily="34" charset="0"/>
+              </a:rPr>
+              <a:t>oznaka </a:t>
+            </a:r>
+            <a:r>
+              <a:rPr lang="hr-HR" sz="2800" b="1" dirty="0">
+                <a:latin typeface="Arial" panose="020B0604020202020204" pitchFamily="34" charset="0"/>
+                <a:cs typeface="Arial" panose="020B0604020202020204" pitchFamily="34" charset="0"/>
+              </a:rPr>
+              <a:t>*</a:t>
+            </a:r>
+            <a:r>
+              <a:rPr lang="hr-HR" sz="2800" dirty="0">
+                <a:latin typeface="Arial" panose="020B0604020202020204" pitchFamily="34" charset="0"/>
+                <a:cs typeface="Arial" panose="020B0604020202020204" pitchFamily="34" charset="0"/>
+              </a:rPr>
+              <a:t> prije imena algoritma – rezultat iz rada</a:t>
+            </a:r>
+            <a:r>
+              <a:rPr lang="en-US" sz="2800" dirty="0">
+                <a:latin typeface="Arial" panose="020B0604020202020204" pitchFamily="34" charset="0"/>
+                <a:cs typeface="Arial" panose="020B0604020202020204" pitchFamily="34" charset="0"/>
+              </a:rPr>
+              <a:t> </a:t>
+            </a:r>
+            <a:r>
+              <a:rPr lang="en-US" sz="2800" dirty="0">
+                <a:solidFill>
+                  <a:schemeClr val="accent1"/>
+                </a:solidFill>
+                <a:latin typeface="Arial" panose="020B0604020202020204" pitchFamily="34" charset="0"/>
+                <a:cs typeface="Arial" panose="020B0604020202020204" pitchFamily="34" charset="0"/>
+              </a:rPr>
+              <a:t>[</a:t>
+            </a:r>
+            <a:r>
+              <a:rPr lang="hr-HR" sz="2800" dirty="0">
+                <a:solidFill>
+                  <a:schemeClr val="accent1"/>
+                </a:solidFill>
+                <a:latin typeface="Arial" panose="020B0604020202020204" pitchFamily="34" charset="0"/>
+                <a:cs typeface="Arial" panose="020B0604020202020204" pitchFamily="34" charset="0"/>
+                <a:hlinkClick r:id="rId4">
+                  <a:extLst>
+                    <a:ext uri="{A12FA001-AC4F-418D-AE19-62706E023703}">
+                      <ahyp:hlinkClr xmlns:ahyp="http://schemas.microsoft.com/office/drawing/2018/hyperlinkcolor" val="tx"/>
+                    </a:ext>
+                  </a:extLst>
+                </a:hlinkClick>
+              </a:rPr>
+              <a:t>chen24neurips</a:t>
+            </a:r>
+            <a:r>
+              <a:rPr lang="en-US" sz="2800" dirty="0">
+                <a:solidFill>
+                  <a:schemeClr val="accent1"/>
+                </a:solidFill>
+                <a:latin typeface="Arial" panose="020B0604020202020204" pitchFamily="34" charset="0"/>
+                <a:cs typeface="Arial" panose="020B0604020202020204" pitchFamily="34" charset="0"/>
+              </a:rPr>
+              <a:t>]</a:t>
+            </a:r>
+            <a:endParaRPr lang="hr-HR" sz="2800" dirty="0">
+              <a:solidFill>
+                <a:schemeClr val="accent1"/>
+              </a:solidFill>
+              <a:latin typeface="Arial" panose="020B0604020202020204" pitchFamily="34" charset="0"/>
+              <a:cs typeface="Arial" panose="020B0604020202020204" pitchFamily="34" charset="0"/>
+            </a:endParaRPr>
+          </a:p>
+          <a:p>
+            <a:pPr marL="0" indent="0">
+              <a:buNone/>
+            </a:pPr>
+            <a:endParaRPr lang="hr-HR" sz="2600" b="1" dirty="0">
+              <a:latin typeface="Arial" panose="020B0604020202020204" pitchFamily="34" charset="0"/>
+              <a:cs typeface="Arial" panose="020B0604020202020204" pitchFamily="34" charset="0"/>
+            </a:endParaRPr>
+          </a:p>
+        </p:txBody>
+      </p:sp>
     </p:spTree>
     <p:extLst>
       <p:ext uri="{BB962C8B-B14F-4D97-AF65-F5344CB8AC3E}">
@@ -5689,7 +7034,7 @@
 </p:sld>
 </file>
 
-<file path=ppt/slides/slide15.xml><?xml version="1.0" encoding="utf-8"?>
+<file path=ppt/slides/slide17.xml><?xml version="1.0" encoding="utf-8"?>
 <p:sld xmlns:a="http://schemas.openxmlformats.org/drawingml/2006/main" xmlns:r="http://schemas.openxmlformats.org/officeDocument/2006/relationships" xmlns:p="http://schemas.openxmlformats.org/presentationml/2006/main">
   <p:cSld>
     <p:spTree>
@@ -5785,7 +7130,7 @@
           <a:p>
             <a:r>
               <a:rPr lang="hr-HR" dirty="0"/>
-              <a:t>12</a:t>
+              <a:t>14</a:t>
             </a:r>
           </a:p>
         </p:txBody>
@@ -5868,8 +7213,8 @@
         </p:nvSpPr>
         <p:spPr>
           <a:xfrm>
-            <a:off x="3640897" y="4564914"/>
-            <a:ext cx="4286752" cy="1692771"/>
+            <a:off x="2697721" y="4564914"/>
+            <a:ext cx="6173104" cy="1692771"/>
           </a:xfrm>
           <a:prstGeom prst="rect">
             <a:avLst/>
@@ -5969,7 +7314,59 @@
                 <a:latin typeface="Arial" panose="020B0604020202020204" pitchFamily="34" charset="0"/>
                 <a:cs typeface="Arial" panose="020B0604020202020204" pitchFamily="34" charset="0"/>
               </a:rPr>
-              <a:t> – stopa konzistencije</a:t>
+              <a:t> – </a:t>
+            </a:r>
+            <a:r>
+              <a:rPr lang="en-US" sz="2600" dirty="0">
+                <a:solidFill>
+                  <a:schemeClr val="tx1">
+                    <a:lumMod val="65000"/>
+                    <a:lumOff val="35000"/>
+                  </a:schemeClr>
+                </a:solidFill>
+                <a:latin typeface="Arial" panose="020B0604020202020204" pitchFamily="34" charset="0"/>
+                <a:cs typeface="Arial" panose="020B0604020202020204" pitchFamily="34" charset="0"/>
+              </a:rPr>
+              <a:t>fa</a:t>
+            </a:r>
+            <a:r>
+              <a:rPr lang="hr-HR" sz="2600" dirty="0">
+                <a:solidFill>
+                  <a:schemeClr val="tx1">
+                    <a:lumMod val="65000"/>
+                    <a:lumOff val="35000"/>
+                  </a:schemeClr>
+                </a:solidFill>
+                <a:latin typeface="Arial" panose="020B0604020202020204" pitchFamily="34" charset="0"/>
+                <a:cs typeface="Arial" panose="020B0604020202020204" pitchFamily="34" charset="0"/>
+              </a:rPr>
+              <a:t>k</a:t>
+            </a:r>
+            <a:r>
+              <a:rPr lang="en-US" sz="2600" dirty="0">
+                <a:solidFill>
+                  <a:schemeClr val="tx1">
+                    <a:lumMod val="65000"/>
+                    <a:lumOff val="35000"/>
+                  </a:schemeClr>
+                </a:solidFill>
+                <a:latin typeface="Arial" panose="020B0604020202020204" pitchFamily="34" charset="0"/>
+                <a:cs typeface="Arial" panose="020B0604020202020204" pitchFamily="34" charset="0"/>
+              </a:rPr>
+              <a:t>tor </a:t>
+            </a:r>
+            <a:r>
+              <a:rPr lang="hr-HR" sz="2600" dirty="0">
+                <a:solidFill>
+                  <a:schemeClr val="tx1">
+                    <a:lumMod val="65000"/>
+                    <a:lumOff val="35000"/>
+                  </a:schemeClr>
+                </a:solidFill>
+                <a:latin typeface="Arial" panose="020B0604020202020204" pitchFamily="34" charset="0"/>
+                <a:cs typeface="Arial" panose="020B0604020202020204" pitchFamily="34" charset="0"/>
+              </a:rPr>
+              <a:t>konzistencijskog gubitka</a:t>
             </a:r>
           </a:p>
           <a:p>
@@ -5997,7 +7394,7 @@
                 <a:latin typeface="Arial" panose="020B0604020202020204" pitchFamily="34" charset="0"/>
                 <a:cs typeface="Arial" panose="020B0604020202020204" pitchFamily="34" charset="0"/>
               </a:rPr>
-              <a:t> – nasumično brisanje</a:t>
+              <a:t> – augmentacija nasumičnog brisanja</a:t>
             </a:r>
             <a:endParaRPr lang="en-US" sz="2600" dirty="0">
               <a:solidFill>
@@ -6025,7 +7422,7 @@
 </p:sld>
 </file>
 
-<file path=ppt/slides/slide16.xml><?xml version="1.0" encoding="utf-8"?>
+<file path=ppt/slides/slide18.xml><?xml version="1.0" encoding="utf-8"?>
 <p:sld xmlns:a="http://schemas.openxmlformats.org/drawingml/2006/main" xmlns:r="http://schemas.openxmlformats.org/officeDocument/2006/relationships" xmlns:p="http://schemas.openxmlformats.org/presentationml/2006/main">
   <p:cSld>
     <p:spTree>
@@ -6048,175 +7445,12 @@
           <a:chExt cx="0" cy="0"/>
         </a:xfrm>
       </p:grpSpPr>
-      <p:sp>
-        <p:nvSpPr>
-          <p:cNvPr id="2" name="Title 1">
+      <p:pic>
+        <p:nvPicPr>
+          <p:cNvPr id="13" name="Picture 12">
             <a:extLst>
               <a:ext uri="{FF2B5EF4-FFF2-40B4-BE49-F238E27FC236}">
-                <a16:creationId xmlns:a16="http://schemas.microsoft.com/office/drawing/2014/main" id="{4E762BA8-1347-C00A-D4A1-B49C8DFC1FA0}"/>
-              </a:ext>
-            </a:extLst>
-          </p:cNvPr>
-          <p:cNvSpPr>
-            <a:spLocks noGrp="1"/>
-          </p:cNvSpPr>
-          <p:nvPr>
-            <p:ph type="title"/>
-          </p:nvPr>
-        </p:nvSpPr>
-        <p:spPr>
-          <a:xfrm>
-            <a:off x="1261871" y="294198"/>
-            <a:ext cx="10126565" cy="1397124"/>
-          </a:xfrm>
-        </p:spPr>
-        <p:txBody>
-          <a:bodyPr>
-            <a:noAutofit/>
-          </a:bodyPr>
-          <a:lstStyle/>
-          <a:p>
-            <a:br>
-              <a:rPr lang="en-US" sz="4000" dirty="0">
-                <a:latin typeface="Arial" panose="020B0604020202020204" pitchFamily="34" charset="0"/>
-                <a:cs typeface="Arial" panose="020B0604020202020204" pitchFamily="34" charset="0"/>
-              </a:rPr>
-            </a:br>
-            <a:r>
-              <a:rPr lang="hr-HR" sz="4000" dirty="0">
-                <a:latin typeface="Arial" panose="020B0604020202020204" pitchFamily="34" charset="0"/>
-                <a:cs typeface="Arial" panose="020B0604020202020204" pitchFamily="34" charset="0"/>
-              </a:rPr>
-              <a:t>Zašumljene oznake, validacija SotA</a:t>
-            </a:r>
-            <a:br>
-              <a:rPr lang="en-US" sz="4000" dirty="0">
-                <a:latin typeface="Arial" panose="020B0604020202020204" pitchFamily="34" charset="0"/>
-                <a:cs typeface="Arial" panose="020B0604020202020204" pitchFamily="34" charset="0"/>
-              </a:rPr>
-            </a:br>
-            <a:endParaRPr lang="hr-HR" sz="4000" noProof="0" dirty="0">
-              <a:latin typeface="Arial" panose="020B0604020202020204" pitchFamily="34" charset="0"/>
-              <a:cs typeface="Arial" panose="020B0604020202020204" pitchFamily="34" charset="0"/>
-            </a:endParaRPr>
-          </a:p>
-        </p:txBody>
-      </p:sp>
-      <p:sp>
-        <p:nvSpPr>
-          <p:cNvPr id="5" name="Slide Number Placeholder 4">
-            <a:extLst>
-              <a:ext uri="{FF2B5EF4-FFF2-40B4-BE49-F238E27FC236}">
-                <a16:creationId xmlns:a16="http://schemas.microsoft.com/office/drawing/2014/main" id="{AA0F8701-D8F5-C0E7-6702-BF4069BFE43C}"/>
-              </a:ext>
-            </a:extLst>
-          </p:cNvPr>
-          <p:cNvSpPr>
-            <a:spLocks noGrp="1"/>
-          </p:cNvSpPr>
-          <p:nvPr>
-            <p:ph type="sldNum" sz="quarter" idx="12"/>
-          </p:nvPr>
-        </p:nvSpPr>
-        <p:spPr/>
-        <p:txBody>
-          <a:bodyPr>
-            <a:normAutofit lnSpcReduction="10000"/>
-          </a:bodyPr>
-          <a:lstStyle/>
-          <a:p>
-            <a:r>
-              <a:rPr lang="hr-HR" dirty="0"/>
-              <a:t>13</a:t>
-            </a:r>
-          </a:p>
-        </p:txBody>
-      </p:sp>
-      <p:sp>
-        <p:nvSpPr>
-          <p:cNvPr id="8" name="TextBox 7">
-            <a:extLst>
-              <a:ext uri="{FF2B5EF4-FFF2-40B4-BE49-F238E27FC236}">
-                <a16:creationId xmlns:a16="http://schemas.microsoft.com/office/drawing/2014/main" id="{179EED21-DB1C-2B5E-33BA-61CD8CD7D67E}"/>
-              </a:ext>
-            </a:extLst>
-          </p:cNvPr>
-          <p:cNvSpPr txBox="1"/>
-          <p:nvPr/>
-        </p:nvSpPr>
-        <p:spPr>
-          <a:xfrm>
-            <a:off x="10228507" y="6073019"/>
-            <a:ext cx="809199" cy="369332"/>
-          </a:xfrm>
-          <a:prstGeom prst="rect">
-            <a:avLst/>
-          </a:prstGeom>
-          <a:solidFill>
-            <a:schemeClr val="bg1"/>
-          </a:solidFill>
-        </p:spPr>
-        <p:txBody>
-          <a:bodyPr wrap="square" rtlCol="0">
-            <a:spAutoFit/>
-          </a:bodyPr>
-          <a:lstStyle/>
-          <a:p>
-            <a:endParaRPr lang="hr-HR" dirty="0"/>
-          </a:p>
-        </p:txBody>
-      </p:sp>
-      <p:sp>
-        <p:nvSpPr>
-          <p:cNvPr id="25" name="TextBox 24">
-            <a:extLst>
-              <a:ext uri="{FF2B5EF4-FFF2-40B4-BE49-F238E27FC236}">
-                <a16:creationId xmlns:a16="http://schemas.microsoft.com/office/drawing/2014/main" id="{3CA5770F-0A1D-E444-C177-F807D77522BA}"/>
-              </a:ext>
-            </a:extLst>
-          </p:cNvPr>
-          <p:cNvSpPr txBox="1"/>
-          <p:nvPr/>
-        </p:nvSpPr>
-        <p:spPr>
-          <a:xfrm>
-            <a:off x="3556169" y="1607187"/>
-            <a:ext cx="4541832" cy="492443"/>
-          </a:xfrm>
-          <a:prstGeom prst="rect">
-            <a:avLst/>
-          </a:prstGeom>
-          <a:noFill/>
-        </p:spPr>
-        <p:txBody>
-          <a:bodyPr wrap="square" rtlCol="0">
-            <a:spAutoFit/>
-          </a:bodyPr>
-          <a:lstStyle/>
-          <a:p>
-            <a:pPr algn="ctr"/>
-            <a:r>
-              <a:rPr lang="hr-HR" sz="2600" b="1" dirty="0">
-                <a:solidFill>
-                  <a:schemeClr val="tx1">
-                    <a:lumMod val="65000"/>
-                    <a:lumOff val="35000"/>
-                  </a:schemeClr>
-                </a:solidFill>
-                <a:latin typeface="Arial" panose="020B0604020202020204" pitchFamily="34" charset="0"/>
-                <a:cs typeface="Arial" panose="020B0604020202020204" pitchFamily="34" charset="0"/>
-              </a:rPr>
-              <a:t>Algoritam SOP+</a:t>
-            </a:r>
-          </a:p>
-        </p:txBody>
-      </p:sp>
-      <p:pic>
-        <p:nvPicPr>
-          <p:cNvPr id="4" name="Picture 3">
-            <a:extLst>
-              <a:ext uri="{FF2B5EF4-FFF2-40B4-BE49-F238E27FC236}">
-                <a16:creationId xmlns:a16="http://schemas.microsoft.com/office/drawing/2014/main" id="{E23DDFF3-E01C-3CA1-33E5-110A015F3955}"/>
+                <a16:creationId xmlns:a16="http://schemas.microsoft.com/office/drawing/2014/main" id="{473D17B6-8E40-5C5E-C348-EEBC0F13FE1E}"/>
               </a:ext>
             </a:extLst>
           </p:cNvPr>
@@ -6233,8 +7467,8 @@
         </p:blipFill>
         <p:spPr>
           <a:xfrm>
-            <a:off x="2188027" y="2183177"/>
-            <a:ext cx="7278116" cy="2067213"/>
+            <a:off x="2950133" y="5313480"/>
+            <a:ext cx="5753903" cy="1133633"/>
           </a:xfrm>
           <a:prstGeom prst="rect">
             <a:avLst/>
@@ -6243,10 +7477,10 @@
       </p:pic>
       <p:pic>
         <p:nvPicPr>
-          <p:cNvPr id="7" name="Picture 6">
+          <p:cNvPr id="10" name="Picture 9">
             <a:extLst>
               <a:ext uri="{FF2B5EF4-FFF2-40B4-BE49-F238E27FC236}">
-                <a16:creationId xmlns:a16="http://schemas.microsoft.com/office/drawing/2014/main" id="{48FA8BF9-8FAA-1753-7F34-698235FA637E}"/>
+                <a16:creationId xmlns:a16="http://schemas.microsoft.com/office/drawing/2014/main" id="{CDED3F8A-A4B6-FD23-E329-17555F39C9EF}"/>
               </a:ext>
             </a:extLst>
           </p:cNvPr>
@@ -6263,14 +7497,177 @@
         </p:blipFill>
         <p:spPr>
           <a:xfrm>
-            <a:off x="3693187" y="5318244"/>
-            <a:ext cx="4267796" cy="1124107"/>
+            <a:off x="906736" y="2099630"/>
+            <a:ext cx="9840698" cy="2152950"/>
           </a:xfrm>
           <a:prstGeom prst="rect">
             <a:avLst/>
           </a:prstGeom>
         </p:spPr>
       </p:pic>
+      <p:sp>
+        <p:nvSpPr>
+          <p:cNvPr id="2" name="Title 1">
+            <a:extLst>
+              <a:ext uri="{FF2B5EF4-FFF2-40B4-BE49-F238E27FC236}">
+                <a16:creationId xmlns:a16="http://schemas.microsoft.com/office/drawing/2014/main" id="{4E762BA8-1347-C00A-D4A1-B49C8DFC1FA0}"/>
+              </a:ext>
+            </a:extLst>
+          </p:cNvPr>
+          <p:cNvSpPr>
+            <a:spLocks noGrp="1"/>
+          </p:cNvSpPr>
+          <p:nvPr>
+            <p:ph type="title"/>
+          </p:nvPr>
+        </p:nvSpPr>
+        <p:spPr>
+          <a:xfrm>
+            <a:off x="1261871" y="294198"/>
+            <a:ext cx="10126565" cy="1397124"/>
+          </a:xfrm>
+        </p:spPr>
+        <p:txBody>
+          <a:bodyPr>
+            <a:noAutofit/>
+          </a:bodyPr>
+          <a:lstStyle/>
+          <a:p>
+            <a:br>
+              <a:rPr lang="en-US" sz="4000" dirty="0">
+                <a:latin typeface="Arial" panose="020B0604020202020204" pitchFamily="34" charset="0"/>
+                <a:cs typeface="Arial" panose="020B0604020202020204" pitchFamily="34" charset="0"/>
+              </a:rPr>
+            </a:br>
+            <a:r>
+              <a:rPr lang="hr-HR" sz="4000" dirty="0">
+                <a:latin typeface="Arial" panose="020B0604020202020204" pitchFamily="34" charset="0"/>
+                <a:cs typeface="Arial" panose="020B0604020202020204" pitchFamily="34" charset="0"/>
+              </a:rPr>
+              <a:t>Zašumljene oznake, validacija SotA</a:t>
+            </a:r>
+            <a:br>
+              <a:rPr lang="en-US" sz="4000" dirty="0">
+                <a:latin typeface="Arial" panose="020B0604020202020204" pitchFamily="34" charset="0"/>
+                <a:cs typeface="Arial" panose="020B0604020202020204" pitchFamily="34" charset="0"/>
+              </a:rPr>
+            </a:br>
+            <a:endParaRPr lang="hr-HR" sz="4000" noProof="0" dirty="0">
+              <a:latin typeface="Arial" panose="020B0604020202020204" pitchFamily="34" charset="0"/>
+              <a:cs typeface="Arial" panose="020B0604020202020204" pitchFamily="34" charset="0"/>
+            </a:endParaRPr>
+          </a:p>
+        </p:txBody>
+      </p:sp>
+      <p:sp>
+        <p:nvSpPr>
+          <p:cNvPr id="5" name="Slide Number Placeholder 4">
+            <a:extLst>
+              <a:ext uri="{FF2B5EF4-FFF2-40B4-BE49-F238E27FC236}">
+                <a16:creationId xmlns:a16="http://schemas.microsoft.com/office/drawing/2014/main" id="{AA0F8701-D8F5-C0E7-6702-BF4069BFE43C}"/>
+              </a:ext>
+            </a:extLst>
+          </p:cNvPr>
+          <p:cNvSpPr>
+            <a:spLocks noGrp="1"/>
+          </p:cNvSpPr>
+          <p:nvPr>
+            <p:ph type="sldNum" sz="quarter" idx="12"/>
+          </p:nvPr>
+        </p:nvSpPr>
+        <p:spPr/>
+        <p:txBody>
+          <a:bodyPr>
+            <a:normAutofit lnSpcReduction="10000"/>
+          </a:bodyPr>
+          <a:lstStyle/>
+          <a:p>
+            <a:r>
+              <a:rPr lang="hr-HR" dirty="0"/>
+              <a:t>15</a:t>
+            </a:r>
+          </a:p>
+        </p:txBody>
+      </p:sp>
+      <p:sp>
+        <p:nvSpPr>
+          <p:cNvPr id="8" name="TextBox 7">
+            <a:extLst>
+              <a:ext uri="{FF2B5EF4-FFF2-40B4-BE49-F238E27FC236}">
+                <a16:creationId xmlns:a16="http://schemas.microsoft.com/office/drawing/2014/main" id="{179EED21-DB1C-2B5E-33BA-61CD8CD7D67E}"/>
+              </a:ext>
+            </a:extLst>
+          </p:cNvPr>
+          <p:cNvSpPr txBox="1"/>
+          <p:nvPr/>
+        </p:nvSpPr>
+        <p:spPr>
+          <a:xfrm>
+            <a:off x="10228507" y="6073019"/>
+            <a:ext cx="809199" cy="369332"/>
+          </a:xfrm>
+          <a:prstGeom prst="rect">
+            <a:avLst/>
+          </a:prstGeom>
+          <a:solidFill>
+            <a:schemeClr val="bg1"/>
+          </a:solidFill>
+        </p:spPr>
+        <p:txBody>
+          <a:bodyPr wrap="square" rtlCol="0">
+            <a:spAutoFit/>
+          </a:bodyPr>
+          <a:lstStyle/>
+          <a:p>
+            <a:endParaRPr lang="hr-HR" dirty="0"/>
+          </a:p>
+        </p:txBody>
+      </p:sp>
+      <p:sp>
+        <p:nvSpPr>
+          <p:cNvPr id="25" name="TextBox 24">
+            <a:extLst>
+              <a:ext uri="{FF2B5EF4-FFF2-40B4-BE49-F238E27FC236}">
+                <a16:creationId xmlns:a16="http://schemas.microsoft.com/office/drawing/2014/main" id="{3CA5770F-0A1D-E444-C177-F807D77522BA}"/>
+              </a:ext>
+            </a:extLst>
+          </p:cNvPr>
+          <p:cNvSpPr txBox="1"/>
+          <p:nvPr/>
+        </p:nvSpPr>
+        <p:spPr>
+          <a:xfrm>
+            <a:off x="3556169" y="1607187"/>
+            <a:ext cx="4541832" cy="492443"/>
+          </a:xfrm>
+          <a:prstGeom prst="rect">
+            <a:avLst/>
+          </a:prstGeom>
+          <a:noFill/>
+        </p:spPr>
+        <p:txBody>
+          <a:bodyPr wrap="square" rtlCol="0">
+            <a:spAutoFit/>
+          </a:bodyPr>
+          <a:lstStyle/>
+          <a:p>
+            <a:pPr algn="ctr"/>
+            <a:r>
+              <a:rPr lang="hr-HR" sz="2600" b="1" dirty="0">
+                <a:solidFill>
+                  <a:schemeClr val="tx1">
+                    <a:lumMod val="65000"/>
+                    <a:lumOff val="35000"/>
+                  </a:schemeClr>
+                </a:solidFill>
+                <a:latin typeface="Arial" panose="020B0604020202020204" pitchFamily="34" charset="0"/>
+                <a:cs typeface="Arial" panose="020B0604020202020204" pitchFamily="34" charset="0"/>
+              </a:rPr>
+              <a:t>Algoritam SOP+</a:t>
+            </a:r>
+          </a:p>
+        </p:txBody>
+      </p:sp>
       <p:sp>
         <p:nvSpPr>
           <p:cNvPr id="11" name="TextBox 10">
@@ -6329,7 +7726,7 @@
 </p:sld>
 </file>
 
-<file path=ppt/slides/slide17.xml><?xml version="1.0" encoding="utf-8"?>
+<file path=ppt/slides/slide19.xml><?xml version="1.0" encoding="utf-8"?>
 <p:sld xmlns:a="http://schemas.openxmlformats.org/drawingml/2006/main" xmlns:r="http://schemas.openxmlformats.org/officeDocument/2006/relationships" xmlns:p="http://schemas.openxmlformats.org/presentationml/2006/main">
   <p:cSld>
     <p:spTree>
@@ -6431,7 +7828,7 @@
           <a:p>
             <a:r>
               <a:rPr lang="hr-HR" dirty="0"/>
-              <a:t>14</a:t>
+              <a:t>16</a:t>
             </a:r>
           </a:p>
         </p:txBody>
@@ -6646,7 +8043,211 @@
 </p:sld>
 </file>
 
-<file path=ppt/slides/slide18.xml><?xml version="1.0" encoding="utf-8"?>
+<file path=ppt/slides/slide2.xml><?xml version="1.0" encoding="utf-8"?>
+<p:sld xmlns:a="http://schemas.openxmlformats.org/drawingml/2006/main" xmlns:r="http://schemas.openxmlformats.org/officeDocument/2006/relationships" xmlns:p="http://schemas.openxmlformats.org/presentationml/2006/main">
+  <p:cSld>
+    <p:spTree>
+      <p:nvGrpSpPr>
+        <p:cNvPr id="1" name=""/>
+        <p:cNvGrpSpPr/>
+        <p:nvPr/>
+      </p:nvGrpSpPr>
+      <p:grpSpPr>
+        <a:xfrm>
+          <a:off x="0" y="0"/>
+          <a:ext cx="0" cy="0"/>
+          <a:chOff x="0" y="0"/>
+          <a:chExt cx="0" cy="0"/>
+        </a:xfrm>
+      </p:grpSpPr>
+      <p:sp>
+        <p:nvSpPr>
+          <p:cNvPr id="2" name="Title 1">
+            <a:extLst>
+              <a:ext uri="{FF2B5EF4-FFF2-40B4-BE49-F238E27FC236}">
+                <a16:creationId xmlns:a16="http://schemas.microsoft.com/office/drawing/2014/main" id="{52C517BC-F7BD-0701-56EA-D6A1FE21631B}"/>
+              </a:ext>
+            </a:extLst>
+          </p:cNvPr>
+          <p:cNvSpPr>
+            <a:spLocks noGrp="1"/>
+          </p:cNvSpPr>
+          <p:nvPr>
+            <p:ph type="title"/>
+          </p:nvPr>
+        </p:nvSpPr>
+        <p:spPr/>
+        <p:txBody>
+          <a:bodyPr/>
+          <a:lstStyle/>
+          <a:p>
+            <a:r>
+              <a:rPr lang="hr-HR" dirty="0">
+                <a:latin typeface="Arial" panose="020B0604020202020204" pitchFamily="34" charset="0"/>
+                <a:cs typeface="Arial" panose="020B0604020202020204" pitchFamily="34" charset="0"/>
+              </a:rPr>
+              <a:t>Sadržaj</a:t>
+            </a:r>
+          </a:p>
+        </p:txBody>
+      </p:sp>
+      <p:sp>
+        <p:nvSpPr>
+          <p:cNvPr id="3" name="Content Placeholder 2">
+            <a:extLst>
+              <a:ext uri="{FF2B5EF4-FFF2-40B4-BE49-F238E27FC236}">
+                <a16:creationId xmlns:a16="http://schemas.microsoft.com/office/drawing/2014/main" id="{C14F33C4-ED8A-1EB1-D91E-FFB64A9A2C11}"/>
+              </a:ext>
+            </a:extLst>
+          </p:cNvPr>
+          <p:cNvSpPr>
+            <a:spLocks noGrp="1"/>
+          </p:cNvSpPr>
+          <p:nvPr>
+            <p:ph idx="1"/>
+          </p:nvPr>
+        </p:nvSpPr>
+        <p:spPr>
+          <a:xfrm>
+            <a:off x="1261872" y="1593668"/>
+            <a:ext cx="8595360" cy="4735002"/>
+          </a:xfrm>
+        </p:spPr>
+        <p:txBody>
+          <a:bodyPr>
+            <a:normAutofit fontScale="92500" lnSpcReduction="10000"/>
+          </a:bodyPr>
+          <a:lstStyle/>
+          <a:p>
+            <a:pPr marL="514350" indent="-514350">
+              <a:buFont typeface="+mj-lt"/>
+              <a:buAutoNum type="arabicPeriod"/>
+            </a:pPr>
+            <a:endParaRPr lang="hr-HR" sz="2600" dirty="0">
+              <a:latin typeface="Arial" panose="020B0604020202020204" pitchFamily="34" charset="0"/>
+              <a:cs typeface="Arial" panose="020B0604020202020204" pitchFamily="34" charset="0"/>
+            </a:endParaRPr>
+          </a:p>
+          <a:p>
+            <a:pPr marL="514350" indent="-514350">
+              <a:buFont typeface="+mj-lt"/>
+              <a:buAutoNum type="arabicPeriod"/>
+            </a:pPr>
+            <a:r>
+              <a:rPr lang="hr-HR" sz="2800" dirty="0">
+                <a:latin typeface="Arial" panose="020B0604020202020204" pitchFamily="34" charset="0"/>
+                <a:cs typeface="Arial" panose="020B0604020202020204" pitchFamily="34" charset="0"/>
+              </a:rPr>
+              <a:t>Uvod</a:t>
+            </a:r>
+          </a:p>
+          <a:p>
+            <a:pPr marL="514350" indent="-514350">
+              <a:buFont typeface="+mj-lt"/>
+              <a:buAutoNum type="arabicPeriod"/>
+            </a:pPr>
+            <a:r>
+              <a:rPr lang="hr-HR" sz="2800" dirty="0">
+                <a:latin typeface="Arial" panose="020B0604020202020204" pitchFamily="34" charset="0"/>
+                <a:cs typeface="Arial" panose="020B0604020202020204" pitchFamily="34" charset="0"/>
+              </a:rPr>
+              <a:t>Napadi umetanjem stražnjih vrata</a:t>
+            </a:r>
+          </a:p>
+          <a:p>
+            <a:pPr marL="514350" indent="-514350">
+              <a:buFont typeface="+mj-lt"/>
+              <a:buAutoNum type="arabicPeriod"/>
+            </a:pPr>
+            <a:r>
+              <a:rPr lang="hr-HR" sz="2800" dirty="0">
+                <a:latin typeface="Arial" panose="020B0604020202020204" pitchFamily="34" charset="0"/>
+                <a:cs typeface="Arial" panose="020B0604020202020204" pitchFamily="34" charset="0"/>
+              </a:rPr>
+              <a:t>Zašumljene oznake</a:t>
+            </a:r>
+          </a:p>
+          <a:p>
+            <a:pPr marL="514350" indent="-514350">
+              <a:buFont typeface="+mj-lt"/>
+              <a:buAutoNum type="arabicPeriod"/>
+            </a:pPr>
+            <a:r>
+              <a:rPr lang="hr-HR" sz="2800" noProof="0" dirty="0">
+                <a:latin typeface="Arial" panose="020B0604020202020204" pitchFamily="34" charset="0"/>
+                <a:cs typeface="Arial" panose="020B0604020202020204" pitchFamily="34" charset="0"/>
+              </a:rPr>
+              <a:t>Okvir VIBE</a:t>
+            </a:r>
+          </a:p>
+          <a:p>
+            <a:pPr marL="514350" indent="-514350">
+              <a:buFont typeface="+mj-lt"/>
+              <a:buAutoNum type="arabicPeriod"/>
+            </a:pPr>
+            <a:r>
+              <a:rPr lang="hr-HR" sz="2800" noProof="0" dirty="0">
+                <a:latin typeface="Arial" panose="020B0604020202020204" pitchFamily="34" charset="0"/>
+                <a:cs typeface="Arial" panose="020B0604020202020204" pitchFamily="34" charset="0"/>
+              </a:rPr>
+              <a:t>Konzistencijski gubitak</a:t>
+            </a:r>
+          </a:p>
+          <a:p>
+            <a:pPr marL="514350" indent="-514350">
+              <a:buFont typeface="+mj-lt"/>
+              <a:buAutoNum type="arabicPeriod"/>
+            </a:pPr>
+            <a:r>
+              <a:rPr lang="hr-HR" sz="2800" dirty="0">
+                <a:latin typeface="Arial" panose="020B0604020202020204" pitchFamily="34" charset="0"/>
+                <a:cs typeface="Arial" panose="020B0604020202020204" pitchFamily="34" charset="0"/>
+              </a:rPr>
+              <a:t>Eksperimenti</a:t>
+            </a:r>
+          </a:p>
+          <a:p>
+            <a:pPr marL="514350" indent="-514350">
+              <a:buFont typeface="+mj-lt"/>
+              <a:buAutoNum type="arabicPeriod"/>
+            </a:pPr>
+            <a:r>
+              <a:rPr lang="hr-HR" sz="2800" dirty="0">
+                <a:latin typeface="Arial" panose="020B0604020202020204" pitchFamily="34" charset="0"/>
+                <a:cs typeface="Arial" panose="020B0604020202020204" pitchFamily="34" charset="0"/>
+              </a:rPr>
+              <a:t>Zaključak i budući rad</a:t>
+            </a:r>
+          </a:p>
+          <a:p>
+            <a:pPr marL="514350" indent="-514350">
+              <a:buFont typeface="+mj-lt"/>
+              <a:buAutoNum type="arabicPeriod"/>
+            </a:pPr>
+            <a:r>
+              <a:rPr lang="hr-HR" sz="2800" dirty="0">
+                <a:latin typeface="Arial" panose="020B0604020202020204" pitchFamily="34" charset="0"/>
+                <a:cs typeface="Arial" panose="020B0604020202020204" pitchFamily="34" charset="0"/>
+              </a:rPr>
+              <a:t>Diskusija</a:t>
+            </a:r>
+          </a:p>
+        </p:txBody>
+      </p:sp>
+    </p:spTree>
+    <p:extLst>
+      <p:ext uri="{BB962C8B-B14F-4D97-AF65-F5344CB8AC3E}">
+        <p14:creationId xmlns:p14="http://schemas.microsoft.com/office/powerpoint/2010/main" val="888114086"/>
+      </p:ext>
+    </p:extLst>
+  </p:cSld>
+  <p:clrMapOvr>
+    <a:masterClrMapping/>
+  </p:clrMapOvr>
+</p:sld>
+</file>
+
+<file path=ppt/slides/slide20.xml><?xml version="1.0" encoding="utf-8"?>
 <p:sld xmlns:a="http://schemas.openxmlformats.org/drawingml/2006/main" xmlns:r="http://schemas.openxmlformats.org/officeDocument/2006/relationships" xmlns:p="http://schemas.openxmlformats.org/presentationml/2006/main">
   <p:cSld>
     <p:spTree>
@@ -6748,7 +8349,7 @@
           <a:p>
             <a:r>
               <a:rPr lang="hr-HR" dirty="0"/>
-              <a:t>15</a:t>
+              <a:t>17</a:t>
             </a:r>
           </a:p>
         </p:txBody>
@@ -7025,7 +8626,7 @@
 </p:sld>
 </file>
 
-<file path=ppt/slides/slide19.xml><?xml version="1.0" encoding="utf-8"?>
+<file path=ppt/slides/slide21.xml><?xml version="1.0" encoding="utf-8"?>
 <p:sld xmlns:a="http://schemas.openxmlformats.org/drawingml/2006/main" xmlns:r="http://schemas.openxmlformats.org/officeDocument/2006/relationships" xmlns:p="http://schemas.openxmlformats.org/presentationml/2006/main">
   <p:cSld>
     <p:spTree>
@@ -7241,7 +8842,7 @@
           <a:p>
             <a:r>
               <a:rPr lang="hr-HR" dirty="0"/>
-              <a:t>16</a:t>
+              <a:t>18</a:t>
             </a:r>
           </a:p>
         </p:txBody>
@@ -7293,211 +8894,7 @@
 </p:sld>
 </file>
 
-<file path=ppt/slides/slide2.xml><?xml version="1.0" encoding="utf-8"?>
-<p:sld xmlns:a="http://schemas.openxmlformats.org/drawingml/2006/main" xmlns:r="http://schemas.openxmlformats.org/officeDocument/2006/relationships" xmlns:p="http://schemas.openxmlformats.org/presentationml/2006/main">
-  <p:cSld>
-    <p:spTree>
-      <p:nvGrpSpPr>
-        <p:cNvPr id="1" name=""/>
-        <p:cNvGrpSpPr/>
-        <p:nvPr/>
-      </p:nvGrpSpPr>
-      <p:grpSpPr>
-        <a:xfrm>
-          <a:off x="0" y="0"/>
-          <a:ext cx="0" cy="0"/>
-          <a:chOff x="0" y="0"/>
-          <a:chExt cx="0" cy="0"/>
-        </a:xfrm>
-      </p:grpSpPr>
-      <p:sp>
-        <p:nvSpPr>
-          <p:cNvPr id="2" name="Title 1">
-            <a:extLst>
-              <a:ext uri="{FF2B5EF4-FFF2-40B4-BE49-F238E27FC236}">
-                <a16:creationId xmlns:a16="http://schemas.microsoft.com/office/drawing/2014/main" id="{52C517BC-F7BD-0701-56EA-D6A1FE21631B}"/>
-              </a:ext>
-            </a:extLst>
-          </p:cNvPr>
-          <p:cNvSpPr>
-            <a:spLocks noGrp="1"/>
-          </p:cNvSpPr>
-          <p:nvPr>
-            <p:ph type="title"/>
-          </p:nvPr>
-        </p:nvSpPr>
-        <p:spPr/>
-        <p:txBody>
-          <a:bodyPr/>
-          <a:lstStyle/>
-          <a:p>
-            <a:r>
-              <a:rPr lang="hr-HR" dirty="0">
-                <a:latin typeface="Arial" panose="020B0604020202020204" pitchFamily="34" charset="0"/>
-                <a:cs typeface="Arial" panose="020B0604020202020204" pitchFamily="34" charset="0"/>
-              </a:rPr>
-              <a:t>Sadržaj</a:t>
-            </a:r>
-          </a:p>
-        </p:txBody>
-      </p:sp>
-      <p:sp>
-        <p:nvSpPr>
-          <p:cNvPr id="3" name="Content Placeholder 2">
-            <a:extLst>
-              <a:ext uri="{FF2B5EF4-FFF2-40B4-BE49-F238E27FC236}">
-                <a16:creationId xmlns:a16="http://schemas.microsoft.com/office/drawing/2014/main" id="{C14F33C4-ED8A-1EB1-D91E-FFB64A9A2C11}"/>
-              </a:ext>
-            </a:extLst>
-          </p:cNvPr>
-          <p:cNvSpPr>
-            <a:spLocks noGrp="1"/>
-          </p:cNvSpPr>
-          <p:nvPr>
-            <p:ph idx="1"/>
-          </p:nvPr>
-        </p:nvSpPr>
-        <p:spPr>
-          <a:xfrm>
-            <a:off x="1261872" y="1593668"/>
-            <a:ext cx="8595360" cy="4735002"/>
-          </a:xfrm>
-        </p:spPr>
-        <p:txBody>
-          <a:bodyPr>
-            <a:normAutofit fontScale="92500" lnSpcReduction="10000"/>
-          </a:bodyPr>
-          <a:lstStyle/>
-          <a:p>
-            <a:pPr marL="514350" indent="-514350">
-              <a:buFont typeface="+mj-lt"/>
-              <a:buAutoNum type="arabicPeriod"/>
-            </a:pPr>
-            <a:endParaRPr lang="hr-HR" sz="2600" dirty="0">
-              <a:latin typeface="Arial" panose="020B0604020202020204" pitchFamily="34" charset="0"/>
-              <a:cs typeface="Arial" panose="020B0604020202020204" pitchFamily="34" charset="0"/>
-            </a:endParaRPr>
-          </a:p>
-          <a:p>
-            <a:pPr marL="514350" indent="-514350">
-              <a:buFont typeface="+mj-lt"/>
-              <a:buAutoNum type="arabicPeriod"/>
-            </a:pPr>
-            <a:r>
-              <a:rPr lang="hr-HR" sz="2800" dirty="0">
-                <a:latin typeface="Arial" panose="020B0604020202020204" pitchFamily="34" charset="0"/>
-                <a:cs typeface="Arial" panose="020B0604020202020204" pitchFamily="34" charset="0"/>
-              </a:rPr>
-              <a:t>Uvod</a:t>
-            </a:r>
-          </a:p>
-          <a:p>
-            <a:pPr marL="514350" indent="-514350">
-              <a:buFont typeface="+mj-lt"/>
-              <a:buAutoNum type="arabicPeriod"/>
-            </a:pPr>
-            <a:r>
-              <a:rPr lang="hr-HR" sz="2800" dirty="0">
-                <a:latin typeface="Arial" panose="020B0604020202020204" pitchFamily="34" charset="0"/>
-                <a:cs typeface="Arial" panose="020B0604020202020204" pitchFamily="34" charset="0"/>
-              </a:rPr>
-              <a:t>Napadi umetanjem stražnjih vrata</a:t>
-            </a:r>
-          </a:p>
-          <a:p>
-            <a:pPr marL="514350" indent="-514350">
-              <a:buFont typeface="+mj-lt"/>
-              <a:buAutoNum type="arabicPeriod"/>
-            </a:pPr>
-            <a:r>
-              <a:rPr lang="hr-HR" sz="2800" dirty="0">
-                <a:latin typeface="Arial" panose="020B0604020202020204" pitchFamily="34" charset="0"/>
-                <a:cs typeface="Arial" panose="020B0604020202020204" pitchFamily="34" charset="0"/>
-              </a:rPr>
-              <a:t>Zašumljene oznake</a:t>
-            </a:r>
-          </a:p>
-          <a:p>
-            <a:pPr marL="514350" indent="-514350">
-              <a:buFont typeface="+mj-lt"/>
-              <a:buAutoNum type="arabicPeriod"/>
-            </a:pPr>
-            <a:r>
-              <a:rPr lang="hr-HR" sz="2800" noProof="0" dirty="0">
-                <a:latin typeface="Arial" panose="020B0604020202020204" pitchFamily="34" charset="0"/>
-                <a:cs typeface="Arial" panose="020B0604020202020204" pitchFamily="34" charset="0"/>
-              </a:rPr>
-              <a:t>Okvir VIBE</a:t>
-            </a:r>
-          </a:p>
-          <a:p>
-            <a:pPr marL="514350" indent="-514350">
-              <a:buFont typeface="+mj-lt"/>
-              <a:buAutoNum type="arabicPeriod"/>
-            </a:pPr>
-            <a:r>
-              <a:rPr lang="hr-HR" sz="2800" noProof="0" dirty="0">
-                <a:latin typeface="Arial" panose="020B0604020202020204" pitchFamily="34" charset="0"/>
-                <a:cs typeface="Arial" panose="020B0604020202020204" pitchFamily="34" charset="0"/>
-              </a:rPr>
-              <a:t>Konzistencijski gubitak</a:t>
-            </a:r>
-          </a:p>
-          <a:p>
-            <a:pPr marL="514350" indent="-514350">
-              <a:buFont typeface="+mj-lt"/>
-              <a:buAutoNum type="arabicPeriod"/>
-            </a:pPr>
-            <a:r>
-              <a:rPr lang="hr-HR" sz="2800" dirty="0">
-                <a:latin typeface="Arial" panose="020B0604020202020204" pitchFamily="34" charset="0"/>
-                <a:cs typeface="Arial" panose="020B0604020202020204" pitchFamily="34" charset="0"/>
-              </a:rPr>
-              <a:t>Eksperimenti</a:t>
-            </a:r>
-          </a:p>
-          <a:p>
-            <a:pPr marL="514350" indent="-514350">
-              <a:buFont typeface="+mj-lt"/>
-              <a:buAutoNum type="arabicPeriod"/>
-            </a:pPr>
-            <a:r>
-              <a:rPr lang="hr-HR" sz="2800" dirty="0">
-                <a:latin typeface="Arial" panose="020B0604020202020204" pitchFamily="34" charset="0"/>
-                <a:cs typeface="Arial" panose="020B0604020202020204" pitchFamily="34" charset="0"/>
-              </a:rPr>
-              <a:t>Zaključak i budući rad</a:t>
-            </a:r>
-          </a:p>
-          <a:p>
-            <a:pPr marL="514350" indent="-514350">
-              <a:buFont typeface="+mj-lt"/>
-              <a:buAutoNum type="arabicPeriod"/>
-            </a:pPr>
-            <a:r>
-              <a:rPr lang="hr-HR" sz="2800" dirty="0">
-                <a:latin typeface="Arial" panose="020B0604020202020204" pitchFamily="34" charset="0"/>
-                <a:cs typeface="Arial" panose="020B0604020202020204" pitchFamily="34" charset="0"/>
-              </a:rPr>
-              <a:t>Diskusija</a:t>
-            </a:r>
-          </a:p>
-        </p:txBody>
-      </p:sp>
-    </p:spTree>
-    <p:extLst>
-      <p:ext uri="{BB962C8B-B14F-4D97-AF65-F5344CB8AC3E}">
-        <p14:creationId xmlns:p14="http://schemas.microsoft.com/office/powerpoint/2010/main" val="888114086"/>
-      </p:ext>
-    </p:extLst>
-  </p:cSld>
-  <p:clrMapOvr>
-    <a:masterClrMapping/>
-  </p:clrMapOvr>
-</p:sld>
-</file>
-
-<file path=ppt/slides/slide20.xml><?xml version="1.0" encoding="utf-8"?>
+<file path=ppt/slides/slide22.xml><?xml version="1.0" encoding="utf-8"?>
 <p:sld xmlns:a="http://schemas.openxmlformats.org/drawingml/2006/main" xmlns:r="http://schemas.openxmlformats.org/officeDocument/2006/relationships" xmlns:p="http://schemas.openxmlformats.org/presentationml/2006/main">
   <p:cSld>
     <p:spTree>
@@ -7569,8 +8966,8 @@
         </p:nvSpPr>
         <p:spPr>
           <a:xfrm>
-            <a:off x="1261871" y="1544715"/>
-            <a:ext cx="8966635" cy="5486400"/>
+            <a:off x="1261872" y="1544715"/>
+            <a:ext cx="9267584" cy="5486400"/>
           </a:xfrm>
         </p:spPr>
         <p:txBody>
@@ -7722,8 +9119,33 @@
                 <a:latin typeface="Arial" panose="020B0604020202020204" pitchFamily="34" charset="0"/>
                 <a:cs typeface="Arial" panose="020B0604020202020204" pitchFamily="34" charset="0"/>
               </a:rPr>
-              <a:t>problem učenja na djelomičnim oznakama</a:t>
-            </a:r>
+              <a:t>problem učenja na djelomičnim oznakama </a:t>
+            </a:r>
+            <a:r>
+              <a:rPr lang="hr-HR" sz="2600" dirty="0">
+                <a:latin typeface="Arial" panose="020B0604020202020204" pitchFamily="34" charset="0"/>
+                <a:cs typeface="Arial" panose="020B0604020202020204" pitchFamily="34" charset="0"/>
+              </a:rPr>
+              <a:t>(engl. </a:t>
+            </a:r>
+            <a:r>
+              <a:rPr lang="hr-HR" sz="2600" i="1" dirty="0">
+                <a:latin typeface="Arial" panose="020B0604020202020204" pitchFamily="34" charset="0"/>
+                <a:cs typeface="Arial" panose="020B0604020202020204" pitchFamily="34" charset="0"/>
+              </a:rPr>
+              <a:t>partial label learning</a:t>
+            </a:r>
+            <a:r>
+              <a:rPr lang="hr-HR" sz="2600" dirty="0">
+                <a:latin typeface="Arial" panose="020B0604020202020204" pitchFamily="34" charset="0"/>
+                <a:cs typeface="Arial" panose="020B0604020202020204" pitchFamily="34" charset="0"/>
+              </a:rPr>
+              <a:t>)</a:t>
+            </a:r>
+            <a:endParaRPr lang="hr-HR" sz="2600" b="1" dirty="0">
+              <a:latin typeface="Arial" panose="020B0604020202020204" pitchFamily="34" charset="0"/>
+              <a:cs typeface="Arial" panose="020B0604020202020204" pitchFamily="34" charset="0"/>
+            </a:endParaRPr>
           </a:p>
           <a:p>
             <a:pPr lvl="1"/>
@@ -7771,7 +9193,7 @@
           <a:p>
             <a:r>
               <a:rPr lang="hr-HR" dirty="0"/>
-              <a:t>17</a:t>
+              <a:t>19</a:t>
             </a:r>
           </a:p>
         </p:txBody>
@@ -7823,7 +9245,7 @@
 </p:sld>
 </file>
 
-<file path=ppt/slides/slide21.xml><?xml version="1.0" encoding="utf-8"?>
+<file path=ppt/slides/slide23.xml><?xml version="1.0" encoding="utf-8"?>
 <p:sld xmlns:a="http://schemas.openxmlformats.org/drawingml/2006/main" xmlns:r="http://schemas.openxmlformats.org/officeDocument/2006/relationships" xmlns:p="http://schemas.openxmlformats.org/presentationml/2006/main">
   <p:cSld>
     <p:spTree>
@@ -8227,8 +9649,8 @@
         </p:nvSpPr>
         <p:spPr>
           <a:xfrm>
-            <a:off x="1261872" y="1828800"/>
-            <a:ext cx="8574856" cy="4351337"/>
+            <a:off x="1261871" y="1828800"/>
+            <a:ext cx="9572383" cy="4351337"/>
           </a:xfrm>
         </p:spPr>
         <p:txBody>
@@ -8237,6 +9659,9 @@
           </a:bodyPr>
           <a:lstStyle/>
           <a:p>
+            <a:pPr marL="0" indent="0">
+              <a:buNone/>
+            </a:pPr>
             <a:endParaRPr lang="hr-HR" sz="2600" dirty="0">
               <a:latin typeface="Arial" panose="020B0604020202020204" pitchFamily="34" charset="0"/>
               <a:cs typeface="Arial" panose="020B0604020202020204" pitchFamily="34" charset="0"/>
@@ -8244,79 +9669,98 @@
           </a:p>
           <a:p>
             <a:r>
+              <a:rPr lang="hr-HR" sz="2600" b="1" dirty="0">
+                <a:latin typeface="Arial" panose="020B0604020202020204" pitchFamily="34" charset="0"/>
+                <a:cs typeface="Arial" panose="020B0604020202020204" pitchFamily="34" charset="0"/>
+              </a:rPr>
+              <a:t>zatrovani podatci </a:t>
+            </a:r>
+            <a:r>
               <a:rPr lang="hr-HR" sz="2600" dirty="0">
                 <a:latin typeface="Arial" panose="020B0604020202020204" pitchFamily="34" charset="0"/>
                 <a:cs typeface="Arial" panose="020B0604020202020204" pitchFamily="34" charset="0"/>
               </a:rPr>
-              <a:t>cilj: ugrađivanje </a:t>
+              <a:t>– izmijenjeni podatci za učenje koji u model ugrađuju </a:t>
             </a:r>
             <a:r>
               <a:rPr lang="hr-HR" sz="2600" b="1" dirty="0">
                 <a:latin typeface="Arial" panose="020B0604020202020204" pitchFamily="34" charset="0"/>
                 <a:cs typeface="Arial" panose="020B0604020202020204" pitchFamily="34" charset="0"/>
               </a:rPr>
-              <a:t>stražnjih vrata </a:t>
-            </a:r>
+              <a:t>stražnja vrata</a:t>
+            </a:r>
+          </a:p>
+          <a:p>
             <a:r>
               <a:rPr lang="hr-HR" sz="2600" dirty="0">
                 <a:latin typeface="Arial" panose="020B0604020202020204" pitchFamily="34" charset="0"/>
                 <a:cs typeface="Arial" panose="020B0604020202020204" pitchFamily="34" charset="0"/>
               </a:rPr>
-              <a:t>u model</a:t>
-            </a:r>
-          </a:p>
-          <a:p>
-            <a:endParaRPr lang="hr-HR" sz="2600" dirty="0">
+              <a:t>trovanje uvijek uključuje </a:t>
+            </a:r>
+            <a:r>
+              <a:rPr lang="hr-HR" sz="2600" b="1" dirty="0">
+                <a:latin typeface="Arial" panose="020B0604020202020204" pitchFamily="34" charset="0"/>
+                <a:cs typeface="Arial" panose="020B0604020202020204" pitchFamily="34" charset="0"/>
+              </a:rPr>
+              <a:t>dodavanje okidača u podatke</a:t>
+            </a:r>
+            <a:r>
+              <a:rPr lang="hr-HR" sz="2600" dirty="0">
+                <a:latin typeface="Arial" panose="020B0604020202020204" pitchFamily="34" charset="0"/>
+                <a:cs typeface="Arial" panose="020B0604020202020204" pitchFamily="34" charset="0"/>
+              </a:rPr>
+              <a:t>, a ovisno o vrsti napada, uključuje i </a:t>
+            </a:r>
+            <a:r>
+              <a:rPr lang="hr-HR" sz="2600" b="1" dirty="0">
+                <a:latin typeface="Arial" panose="020B0604020202020204" pitchFamily="34" charset="0"/>
+                <a:cs typeface="Arial" panose="020B0604020202020204" pitchFamily="34" charset="0"/>
+              </a:rPr>
+              <a:t>izmjenu oznaka </a:t>
+            </a:r>
+            <a:r>
+              <a:rPr lang="hr-HR" sz="2600" dirty="0">
+                <a:latin typeface="Arial" panose="020B0604020202020204" pitchFamily="34" charset="0"/>
+                <a:cs typeface="Arial" panose="020B0604020202020204" pitchFamily="34" charset="0"/>
+              </a:rPr>
+              <a:t>te dodatno perturbiranje podataka</a:t>
+            </a:r>
+            <a:endParaRPr lang="hr-HR" sz="2600" b="1" dirty="0">
               <a:latin typeface="Arial" panose="020B0604020202020204" pitchFamily="34" charset="0"/>
               <a:cs typeface="Arial" panose="020B0604020202020204" pitchFamily="34" charset="0"/>
             </a:endParaRPr>
           </a:p>
           <a:p>
             <a:r>
+              <a:rPr lang="hr-HR" sz="2600" noProof="0" dirty="0">
+                <a:latin typeface="Arial" panose="020B0604020202020204" pitchFamily="34" charset="0"/>
+                <a:cs typeface="Arial" panose="020B0604020202020204" pitchFamily="34" charset="0"/>
+              </a:rPr>
+              <a:t>stražnja vrata omogućavaju manipuliranje naučenim modelom</a:t>
+            </a:r>
+          </a:p>
+          <a:p>
+            <a:r>
+              <a:rPr lang="hr-HR" sz="2600" dirty="0">
+                <a:latin typeface="Arial" panose="020B0604020202020204" pitchFamily="34" charset="0"/>
+                <a:cs typeface="Arial" panose="020B0604020202020204" pitchFamily="34" charset="0"/>
+              </a:rPr>
+              <a:t>tijekom zaključivanja, model daje </a:t>
+            </a:r>
+            <a:r>
               <a:rPr lang="hr-HR" sz="2600" b="1" dirty="0">
                 <a:latin typeface="Arial" panose="020B0604020202020204" pitchFamily="34" charset="0"/>
                 <a:cs typeface="Arial" panose="020B0604020202020204" pitchFamily="34" charset="0"/>
               </a:rPr>
-              <a:t>zatrovani podatci </a:t>
+              <a:t>krivo predviđanje </a:t>
             </a:r>
             <a:r>
               <a:rPr lang="hr-HR" sz="2600" dirty="0">
                 <a:latin typeface="Arial" panose="020B0604020202020204" pitchFamily="34" charset="0"/>
                 <a:cs typeface="Arial" panose="020B0604020202020204" pitchFamily="34" charset="0"/>
               </a:rPr>
-              <a:t>– slike na koje je nadodan okidač uparene s izmijenjenim oznakama</a:t>
-            </a:r>
-          </a:p>
-          <a:p>
-            <a:pPr marL="0" indent="0">
-              <a:buNone/>
-            </a:pPr>
-            <a:endParaRPr lang="hr-HR" sz="2600" noProof="0" dirty="0">
-              <a:latin typeface="Arial" panose="020B0604020202020204" pitchFamily="34" charset="0"/>
-              <a:cs typeface="Arial" panose="020B0604020202020204" pitchFamily="34" charset="0"/>
-            </a:endParaRPr>
-          </a:p>
-          <a:p>
-            <a:r>
-              <a:rPr lang="hr-HR" sz="2600" dirty="0">
-                <a:latin typeface="Arial" panose="020B0604020202020204" pitchFamily="34" charset="0"/>
-                <a:cs typeface="Arial" panose="020B0604020202020204" pitchFamily="34" charset="0"/>
-              </a:rPr>
-              <a:t>tijekom kasnijeg korištenja, model daje </a:t>
-            </a:r>
-            <a:r>
-              <a:rPr lang="hr-HR" sz="2600" b="1" dirty="0">
-                <a:latin typeface="Arial" panose="020B0604020202020204" pitchFamily="34" charset="0"/>
-                <a:cs typeface="Arial" panose="020B0604020202020204" pitchFamily="34" charset="0"/>
-              </a:rPr>
-              <a:t>krivo predviđanje </a:t>
-            </a:r>
-            <a:r>
-              <a:rPr lang="hr-HR" sz="2600" dirty="0">
-                <a:latin typeface="Arial" panose="020B0604020202020204" pitchFamily="34" charset="0"/>
-                <a:cs typeface="Arial" panose="020B0604020202020204" pitchFamily="34" charset="0"/>
-              </a:rPr>
-              <a:t>ako je na ulazu slika s okidačem</a:t>
+              <a:t>ako je na ulazu ispitna slika s okidačem</a:t>
             </a:r>
             <a:endParaRPr lang="hr-HR" sz="2600" noProof="0" dirty="0">
               <a:latin typeface="Arial" panose="020B0604020202020204" pitchFamily="34" charset="0"/>
@@ -8417,7 +9861,7 @@
                 <a:latin typeface="Arial" panose="020B0604020202020204" pitchFamily="34" charset="0"/>
                 <a:cs typeface="Arial" panose="020B0604020202020204" pitchFamily="34" charset="0"/>
               </a:rPr>
-              <a:t>Napadi umetanjem stražnjih vrata</a:t>
+              <a:t>Neke vrste okidača</a:t>
             </a:r>
             <a:endParaRPr lang="hr-HR" noProof="0" dirty="0">
               <a:latin typeface="Arial" panose="020B0604020202020204" pitchFamily="34" charset="0"/>
@@ -8458,10 +9902,10 @@
       </p:sp>
       <p:grpSp>
         <p:nvGrpSpPr>
-          <p:cNvPr id="8" name="Group 7">
+          <p:cNvPr id="3" name="Group 2">
             <a:extLst>
               <a:ext uri="{FF2B5EF4-FFF2-40B4-BE49-F238E27FC236}">
-                <a16:creationId xmlns:a16="http://schemas.microsoft.com/office/drawing/2014/main" id="{5D9E099A-28CD-E388-B4B7-4E538E2A0F11}"/>
+                <a16:creationId xmlns:a16="http://schemas.microsoft.com/office/drawing/2014/main" id="{9C5B7D69-C76C-9024-181C-95521077BA96}"/>
               </a:ext>
             </a:extLst>
           </p:cNvPr>
@@ -8470,301 +9914,478 @@
         </p:nvGrpSpPr>
         <p:grpSpPr>
           <a:xfrm>
-            <a:off x="461639" y="2597816"/>
-            <a:ext cx="10831201" cy="2622254"/>
-            <a:chOff x="0" y="2117315"/>
-            <a:chExt cx="11259607" cy="2859293"/>
+            <a:off x="461639" y="2322608"/>
+            <a:ext cx="10831201" cy="3178313"/>
+            <a:chOff x="461639" y="2597816"/>
+            <a:chExt cx="10831201" cy="3178313"/>
           </a:xfrm>
         </p:grpSpPr>
-        <p:pic>
-          <p:nvPicPr>
-            <p:cNvPr id="9" name="Picture 8" descr="A blue bird on a branch&#10;&#10;AI-generated content may be incorrect.">
+        <p:grpSp>
+          <p:nvGrpSpPr>
+            <p:cNvPr id="8" name="Group 7">
               <a:extLst>
                 <a:ext uri="{FF2B5EF4-FFF2-40B4-BE49-F238E27FC236}">
-                  <a16:creationId xmlns:a16="http://schemas.microsoft.com/office/drawing/2014/main" id="{8962D0FF-52B5-A0C0-C7DE-3836406A9CB4}"/>
+                  <a16:creationId xmlns:a16="http://schemas.microsoft.com/office/drawing/2014/main" id="{5D9E099A-28CD-E388-B4B7-4E538E2A0F11}"/>
                 </a:ext>
               </a:extLst>
             </p:cNvPr>
-            <p:cNvPicPr>
-              <a:picLocks noChangeAspect="1"/>
-            </p:cNvPicPr>
+            <p:cNvGrpSpPr/>
             <p:nvPr/>
-          </p:nvPicPr>
-          <p:blipFill>
-            <a:blip r:embed="rId2">
+          </p:nvGrpSpPr>
+          <p:grpSpPr>
+            <a:xfrm>
+              <a:off x="461639" y="2597816"/>
+              <a:ext cx="10831201" cy="2622254"/>
+              <a:chOff x="0" y="2117315"/>
+              <a:chExt cx="11259607" cy="2859293"/>
+            </a:xfrm>
+          </p:grpSpPr>
+          <p:pic>
+            <p:nvPicPr>
+              <p:cNvPr id="9" name="Picture 8" descr="A blue bird on a branch&#10;&#10;AI-generated content may be incorrect.">
+                <a:extLst>
+                  <a:ext uri="{FF2B5EF4-FFF2-40B4-BE49-F238E27FC236}">
+                    <a16:creationId xmlns:a16="http://schemas.microsoft.com/office/drawing/2014/main" id="{8962D0FF-52B5-A0C0-C7DE-3836406A9CB4}"/>
+                  </a:ext>
+                </a:extLst>
+              </p:cNvPr>
+              <p:cNvPicPr>
+                <a:picLocks noChangeAspect="1"/>
+              </p:cNvPicPr>
+              <p:nvPr/>
+            </p:nvPicPr>
+            <p:blipFill>
+              <a:blip r:embed="rId2">
+                <a:extLst>
+                  <a:ext uri="{28A0092B-C50C-407E-A947-70E740481C1C}">
+                    <a14:useLocalDpi xmlns:a14="http://schemas.microsoft.com/office/drawing/2010/main" val="0"/>
+                  </a:ext>
+                </a:extLst>
+              </a:blip>
+              <a:stretch>
+                <a:fillRect/>
+              </a:stretch>
+            </p:blipFill>
+            <p:spPr>
+              <a:xfrm>
+                <a:off x="5541028" y="2117315"/>
+                <a:ext cx="5718579" cy="2859289"/>
+              </a:xfrm>
+              <a:prstGeom prst="rect">
+                <a:avLst/>
+              </a:prstGeom>
+            </p:spPr>
+          </p:pic>
+          <p:pic>
+            <p:nvPicPr>
+              <p:cNvPr id="6" name="Picture 5" descr="A blue bird sitting on a branch&#10;&#10;AI-generated content may be incorrect.">
+                <a:extLst>
+                  <a:ext uri="{FF2B5EF4-FFF2-40B4-BE49-F238E27FC236}">
+                    <a16:creationId xmlns:a16="http://schemas.microsoft.com/office/drawing/2014/main" id="{B51E7BE8-BFEF-2DBC-18D9-88F1A1A905EF}"/>
+                  </a:ext>
+                </a:extLst>
+              </p:cNvPr>
+              <p:cNvPicPr>
+                <a:picLocks noChangeAspect="1"/>
+              </p:cNvPicPr>
+              <p:nvPr/>
+            </p:nvPicPr>
+            <p:blipFill>
+              <a:blip r:embed="rId3">
+                <a:extLst>
+                  <a:ext uri="{28A0092B-C50C-407E-A947-70E740481C1C}">
+                    <a14:useLocalDpi xmlns:a14="http://schemas.microsoft.com/office/drawing/2010/main" val="0"/>
+                  </a:ext>
+                </a:extLst>
+              </a:blip>
+              <a:stretch>
+                <a:fillRect/>
+              </a:stretch>
+            </p:blipFill>
+            <p:spPr>
+              <a:xfrm>
+                <a:off x="2770514" y="2117315"/>
+                <a:ext cx="5718579" cy="2859289"/>
+              </a:xfrm>
+              <a:prstGeom prst="rect">
+                <a:avLst/>
+              </a:prstGeom>
+            </p:spPr>
+          </p:pic>
+          <p:pic>
+            <p:nvPicPr>
+              <p:cNvPr id="11" name="Picture 10" descr="A blue bird on a branch&#10;&#10;AI-generated content may be incorrect.">
+                <a:extLst>
+                  <a:ext uri="{FF2B5EF4-FFF2-40B4-BE49-F238E27FC236}">
+                    <a16:creationId xmlns:a16="http://schemas.microsoft.com/office/drawing/2014/main" id="{200E2F04-BB54-C967-B1A2-F6841A70A052}"/>
+                  </a:ext>
+                </a:extLst>
+              </p:cNvPr>
+              <p:cNvPicPr>
+                <a:picLocks noChangeAspect="1"/>
+              </p:cNvPicPr>
+              <p:nvPr/>
+            </p:nvPicPr>
+            <p:blipFill>
+              <a:blip r:embed="rId4">
+                <a:extLst>
+                  <a:ext uri="{28A0092B-C50C-407E-A947-70E740481C1C}">
+                    <a14:useLocalDpi xmlns:a14="http://schemas.microsoft.com/office/drawing/2010/main" val="0"/>
+                  </a:ext>
+                </a:extLst>
+              </a:blip>
+              <a:stretch>
+                <a:fillRect/>
+              </a:stretch>
+            </p:blipFill>
+            <p:spPr>
+              <a:xfrm>
+                <a:off x="0" y="2117319"/>
+                <a:ext cx="5718580" cy="2859289"/>
+              </a:xfrm>
+              <a:prstGeom prst="rect">
+                <a:avLst/>
+              </a:prstGeom>
+            </p:spPr>
+          </p:pic>
+        </p:grpSp>
+        <p:sp>
+          <p:nvSpPr>
+            <p:cNvPr id="10" name="TextBox 9">
               <a:extLst>
-                <a:ext uri="{28A0092B-C50C-407E-A947-70E740481C1C}">
-                  <a14:useLocalDpi xmlns:a14="http://schemas.microsoft.com/office/drawing/2010/main" val="0"/>
+                <a:ext uri="{FF2B5EF4-FFF2-40B4-BE49-F238E27FC236}">
+                  <a16:creationId xmlns:a16="http://schemas.microsoft.com/office/drawing/2014/main" id="{9116AEF6-FB61-0CEF-AC2A-459967475680}"/>
                 </a:ext>
               </a:extLst>
-            </a:blip>
-            <a:stretch>
-              <a:fillRect/>
-            </a:stretch>
-          </p:blipFill>
+            </p:cNvPr>
+            <p:cNvSpPr txBox="1"/>
+            <p:nvPr/>
+          </p:nvSpPr>
           <p:spPr>
             <a:xfrm>
-              <a:off x="5541028" y="2117315"/>
-              <a:ext cx="5718579" cy="2859289"/>
+              <a:off x="6422043" y="5283686"/>
+              <a:ext cx="1447060" cy="492443"/>
             </a:xfrm>
             <a:prstGeom prst="rect">
               <a:avLst/>
             </a:prstGeom>
+            <a:noFill/>
           </p:spPr>
-        </p:pic>
-        <p:pic>
-          <p:nvPicPr>
-            <p:cNvPr id="6" name="Picture 5" descr="A blue bird sitting on a branch&#10;&#10;AI-generated content may be incorrect.">
+          <p:txBody>
+            <a:bodyPr wrap="square" rtlCol="0">
+              <a:spAutoFit/>
+            </a:bodyPr>
+            <a:lstStyle/>
+            <a:p>
+              <a:pPr algn="ctr"/>
+              <a:r>
+                <a:rPr lang="hr-HR" sz="2600" b="1" dirty="0">
+                  <a:solidFill>
+                    <a:schemeClr val="tx1">
+                      <a:lumMod val="65000"/>
+                      <a:lumOff val="35000"/>
+                    </a:schemeClr>
+                  </a:solidFill>
+                  <a:latin typeface="Arial" panose="020B0604020202020204" pitchFamily="34" charset="0"/>
+                  <a:cs typeface="Arial" panose="020B0604020202020204" pitchFamily="34" charset="0"/>
+                </a:rPr>
+                <a:t>Blend</a:t>
+              </a:r>
+            </a:p>
+          </p:txBody>
+        </p:sp>
+        <p:sp>
+          <p:nvSpPr>
+            <p:cNvPr id="12" name="TextBox 11">
               <a:extLst>
                 <a:ext uri="{FF2B5EF4-FFF2-40B4-BE49-F238E27FC236}">
-                  <a16:creationId xmlns:a16="http://schemas.microsoft.com/office/drawing/2014/main" id="{B51E7BE8-BFEF-2DBC-18D9-88F1A1A905EF}"/>
+                  <a16:creationId xmlns:a16="http://schemas.microsoft.com/office/drawing/2014/main" id="{CBFB0EF2-2199-4259-092A-6A3DDD8915CE}"/>
                 </a:ext>
               </a:extLst>
             </p:cNvPr>
-            <p:cNvPicPr>
-              <a:picLocks noChangeAspect="1"/>
-            </p:cNvPicPr>
+            <p:cNvSpPr txBox="1"/>
             <p:nvPr/>
-          </p:nvPicPr>
-          <p:blipFill>
-            <a:blip r:embed="rId3">
-              <a:extLst>
-                <a:ext uri="{28A0092B-C50C-407E-A947-70E740481C1C}">
-                  <a14:useLocalDpi xmlns:a14="http://schemas.microsoft.com/office/drawing/2010/main" val="0"/>
-                </a:ext>
-              </a:extLst>
-            </a:blip>
-            <a:stretch>
-              <a:fillRect/>
-            </a:stretch>
-          </p:blipFill>
+          </p:nvSpPr>
           <p:spPr>
             <a:xfrm>
-              <a:off x="2770514" y="2117315"/>
-              <a:ext cx="5718579" cy="2859289"/>
+              <a:off x="1180517" y="5283685"/>
+              <a:ext cx="1447060" cy="492443"/>
             </a:xfrm>
             <a:prstGeom prst="rect">
               <a:avLst/>
             </a:prstGeom>
+            <a:noFill/>
           </p:spPr>
-        </p:pic>
-        <p:pic>
-          <p:nvPicPr>
-            <p:cNvPr id="11" name="Picture 10" descr="A blue bird on a branch&#10;&#10;AI-generated content may be incorrect.">
+          <p:txBody>
+            <a:bodyPr wrap="square" rtlCol="0">
+              <a:spAutoFit/>
+            </a:bodyPr>
+            <a:lstStyle/>
+            <a:p>
+              <a:pPr algn="ctr"/>
+              <a:r>
+                <a:rPr lang="hr-HR" sz="2600" b="1" dirty="0">
+                  <a:solidFill>
+                    <a:schemeClr val="tx1">
+                      <a:lumMod val="65000"/>
+                      <a:lumOff val="35000"/>
+                    </a:schemeClr>
+                  </a:solidFill>
+                  <a:latin typeface="Arial" panose="020B0604020202020204" pitchFamily="34" charset="0"/>
+                  <a:cs typeface="Arial" panose="020B0604020202020204" pitchFamily="34" charset="0"/>
+                </a:rPr>
+                <a:t>Original</a:t>
+              </a:r>
+            </a:p>
+          </p:txBody>
+        </p:sp>
+        <p:sp>
+          <p:nvSpPr>
+            <p:cNvPr id="13" name="TextBox 12">
               <a:extLst>
                 <a:ext uri="{FF2B5EF4-FFF2-40B4-BE49-F238E27FC236}">
-                  <a16:creationId xmlns:a16="http://schemas.microsoft.com/office/drawing/2014/main" id="{200E2F04-BB54-C967-B1A2-F6841A70A052}"/>
+                  <a16:creationId xmlns:a16="http://schemas.microsoft.com/office/drawing/2014/main" id="{E60B18B9-0AA9-C329-187C-D431F7BD99A4}"/>
                 </a:ext>
               </a:extLst>
             </p:cNvPr>
-            <p:cNvPicPr>
-              <a:picLocks noChangeAspect="1"/>
-            </p:cNvPicPr>
+            <p:cNvSpPr txBox="1"/>
             <p:nvPr/>
-          </p:nvPicPr>
-          <p:blipFill>
-            <a:blip r:embed="rId4">
-              <a:extLst>
-                <a:ext uri="{28A0092B-C50C-407E-A947-70E740481C1C}">
-                  <a14:useLocalDpi xmlns:a14="http://schemas.microsoft.com/office/drawing/2010/main" val="0"/>
-                </a:ext>
-              </a:extLst>
-            </a:blip>
-            <a:stretch>
-              <a:fillRect/>
-            </a:stretch>
-          </p:blipFill>
+          </p:nvSpPr>
           <p:spPr>
             <a:xfrm>
-              <a:off x="0" y="2117319"/>
-              <a:ext cx="5718580" cy="2859289"/>
+              <a:off x="3693111" y="5283685"/>
+              <a:ext cx="1660124" cy="492443"/>
             </a:xfrm>
             <a:prstGeom prst="rect">
               <a:avLst/>
             </a:prstGeom>
+            <a:noFill/>
           </p:spPr>
-        </p:pic>
+          <p:txBody>
+            <a:bodyPr wrap="square" rtlCol="0">
+              <a:spAutoFit/>
+            </a:bodyPr>
+            <a:lstStyle/>
+            <a:p>
+              <a:pPr algn="ctr"/>
+              <a:r>
+                <a:rPr lang="hr-HR" sz="2600" b="1" dirty="0">
+                  <a:solidFill>
+                    <a:schemeClr val="tx1">
+                      <a:lumMod val="65000"/>
+                      <a:lumOff val="35000"/>
+                    </a:schemeClr>
+                  </a:solidFill>
+                  <a:latin typeface="Arial" panose="020B0604020202020204" pitchFamily="34" charset="0"/>
+                  <a:cs typeface="Arial" panose="020B0604020202020204" pitchFamily="34" charset="0"/>
+                </a:rPr>
+                <a:t>BadNets</a:t>
+              </a:r>
+            </a:p>
+          </p:txBody>
+        </p:sp>
+        <p:sp>
+          <p:nvSpPr>
+            <p:cNvPr id="14" name="TextBox 13">
+              <a:extLst>
+                <a:ext uri="{FF2B5EF4-FFF2-40B4-BE49-F238E27FC236}">
+                  <a16:creationId xmlns:a16="http://schemas.microsoft.com/office/drawing/2014/main" id="{FF602169-BFD0-767F-6026-2EAE02807DFC}"/>
+                </a:ext>
+              </a:extLst>
+            </p:cNvPr>
+            <p:cNvSpPr txBox="1"/>
+            <p:nvPr/>
+          </p:nvSpPr>
+          <p:spPr>
+            <a:xfrm>
+              <a:off x="9042806" y="5283686"/>
+              <a:ext cx="1447060" cy="492443"/>
+            </a:xfrm>
+            <a:prstGeom prst="rect">
+              <a:avLst/>
+            </a:prstGeom>
+            <a:noFill/>
+          </p:spPr>
+          <p:txBody>
+            <a:bodyPr wrap="square" rtlCol="0">
+              <a:spAutoFit/>
+            </a:bodyPr>
+            <a:lstStyle/>
+            <a:p>
+              <a:pPr algn="ctr"/>
+              <a:r>
+                <a:rPr lang="hr-HR" sz="2600" b="1" dirty="0">
+                  <a:solidFill>
+                    <a:schemeClr val="tx1">
+                      <a:lumMod val="65000"/>
+                      <a:lumOff val="35000"/>
+                    </a:schemeClr>
+                  </a:solidFill>
+                  <a:latin typeface="Arial" panose="020B0604020202020204" pitchFamily="34" charset="0"/>
+                  <a:cs typeface="Arial" panose="020B0604020202020204" pitchFamily="34" charset="0"/>
+                </a:rPr>
+                <a:t>WaNet</a:t>
+              </a:r>
+            </a:p>
+          </p:txBody>
+        </p:sp>
       </p:grpSp>
-      <p:sp>
-        <p:nvSpPr>
-          <p:cNvPr id="10" name="TextBox 9">
+      <p:grpSp>
+        <p:nvGrpSpPr>
+          <p:cNvPr id="22" name="Group 21">
             <a:extLst>
               <a:ext uri="{FF2B5EF4-FFF2-40B4-BE49-F238E27FC236}">
-                <a16:creationId xmlns:a16="http://schemas.microsoft.com/office/drawing/2014/main" id="{9116AEF6-FB61-0CEF-AC2A-459967475680}"/>
+                <a16:creationId xmlns:a16="http://schemas.microsoft.com/office/drawing/2014/main" id="{2CF8755A-AEFA-1C94-F7F5-B733BD7C0C19}"/>
               </a:ext>
             </a:extLst>
           </p:cNvPr>
-          <p:cNvSpPr txBox="1"/>
+          <p:cNvGrpSpPr/>
           <p:nvPr/>
-        </p:nvSpPr>
-        <p:spPr>
+        </p:nvGrpSpPr>
+        <p:grpSpPr>
           <a:xfrm>
-            <a:off x="6422043" y="5283686"/>
-            <a:ext cx="1447060" cy="492443"/>
+            <a:off x="917234" y="5576510"/>
+            <a:ext cx="9487394" cy="892552"/>
+            <a:chOff x="934990" y="5479702"/>
+            <a:chExt cx="9487394" cy="892552"/>
           </a:xfrm>
-          <a:prstGeom prst="rect">
-            <a:avLst/>
-          </a:prstGeom>
-          <a:noFill/>
-        </p:spPr>
-        <p:txBody>
-          <a:bodyPr wrap="square" rtlCol="0">
-            <a:spAutoFit/>
-          </a:bodyPr>
-          <a:lstStyle/>
-          <a:p>
-            <a:pPr algn="ctr"/>
-            <a:r>
-              <a:rPr lang="hr-HR" sz="2600" b="1" dirty="0">
-                <a:solidFill>
-                  <a:schemeClr val="tx1">
-                    <a:lumMod val="65000"/>
-                    <a:lumOff val="35000"/>
-                  </a:schemeClr>
-                </a:solidFill>
-                <a:latin typeface="Arial" panose="020B0604020202020204" pitchFamily="34" charset="0"/>
-                <a:cs typeface="Arial" panose="020B0604020202020204" pitchFamily="34" charset="0"/>
-              </a:rPr>
-              <a:t>Blend</a:t>
-            </a:r>
-          </a:p>
-        </p:txBody>
-      </p:sp>
-      <p:sp>
-        <p:nvSpPr>
-          <p:cNvPr id="12" name="TextBox 11">
-            <a:extLst>
-              <a:ext uri="{FF2B5EF4-FFF2-40B4-BE49-F238E27FC236}">
-                <a16:creationId xmlns:a16="http://schemas.microsoft.com/office/drawing/2014/main" id="{CBFB0EF2-2199-4259-092A-6A3DDD8915CE}"/>
-              </a:ext>
-            </a:extLst>
-          </p:cNvPr>
-          <p:cNvSpPr txBox="1"/>
-          <p:nvPr/>
-        </p:nvSpPr>
-        <p:spPr>
-          <a:xfrm>
-            <a:off x="1180517" y="5283685"/>
-            <a:ext cx="1447060" cy="492443"/>
-          </a:xfrm>
-          <a:prstGeom prst="rect">
-            <a:avLst/>
-          </a:prstGeom>
-          <a:noFill/>
-        </p:spPr>
-        <p:txBody>
-          <a:bodyPr wrap="square" rtlCol="0">
-            <a:spAutoFit/>
-          </a:bodyPr>
-          <a:lstStyle/>
-          <a:p>
-            <a:pPr algn="ctr"/>
-            <a:r>
-              <a:rPr lang="hr-HR" sz="2600" b="1" dirty="0">
-                <a:solidFill>
-                  <a:schemeClr val="tx1">
-                    <a:lumMod val="65000"/>
-                    <a:lumOff val="35000"/>
-                  </a:schemeClr>
-                </a:solidFill>
-                <a:latin typeface="Arial" panose="020B0604020202020204" pitchFamily="34" charset="0"/>
-                <a:cs typeface="Arial" panose="020B0604020202020204" pitchFamily="34" charset="0"/>
-              </a:rPr>
-              <a:t>Original</a:t>
-            </a:r>
-          </a:p>
-        </p:txBody>
-      </p:sp>
-      <p:sp>
-        <p:nvSpPr>
-          <p:cNvPr id="13" name="TextBox 12">
-            <a:extLst>
-              <a:ext uri="{FF2B5EF4-FFF2-40B4-BE49-F238E27FC236}">
-                <a16:creationId xmlns:a16="http://schemas.microsoft.com/office/drawing/2014/main" id="{E60B18B9-0AA9-C329-187C-D431F7BD99A4}"/>
-              </a:ext>
-            </a:extLst>
-          </p:cNvPr>
-          <p:cNvSpPr txBox="1"/>
-          <p:nvPr/>
-        </p:nvSpPr>
-        <p:spPr>
-          <a:xfrm>
-            <a:off x="3693111" y="5283685"/>
-            <a:ext cx="1660124" cy="492443"/>
-          </a:xfrm>
-          <a:prstGeom prst="rect">
-            <a:avLst/>
-          </a:prstGeom>
-          <a:noFill/>
-        </p:spPr>
-        <p:txBody>
-          <a:bodyPr wrap="square" rtlCol="0">
-            <a:spAutoFit/>
-          </a:bodyPr>
-          <a:lstStyle/>
-          <a:p>
-            <a:pPr algn="ctr"/>
-            <a:r>
-              <a:rPr lang="hr-HR" sz="2600" b="1" dirty="0">
-                <a:solidFill>
-                  <a:schemeClr val="tx1">
-                    <a:lumMod val="65000"/>
-                    <a:lumOff val="35000"/>
-                  </a:schemeClr>
-                </a:solidFill>
-                <a:latin typeface="Arial" panose="020B0604020202020204" pitchFamily="34" charset="0"/>
-                <a:cs typeface="Arial" panose="020B0604020202020204" pitchFamily="34" charset="0"/>
-              </a:rPr>
-              <a:t>BadNets</a:t>
-            </a:r>
-          </a:p>
-        </p:txBody>
-      </p:sp>
-      <p:sp>
-        <p:nvSpPr>
-          <p:cNvPr id="14" name="TextBox 13">
-            <a:extLst>
-              <a:ext uri="{FF2B5EF4-FFF2-40B4-BE49-F238E27FC236}">
-                <a16:creationId xmlns:a16="http://schemas.microsoft.com/office/drawing/2014/main" id="{FF602169-BFD0-767F-6026-2EAE02807DFC}"/>
-              </a:ext>
-            </a:extLst>
-          </p:cNvPr>
-          <p:cNvSpPr txBox="1"/>
-          <p:nvPr/>
-        </p:nvSpPr>
-        <p:spPr>
-          <a:xfrm>
-            <a:off x="9042806" y="5283686"/>
-            <a:ext cx="1447060" cy="492443"/>
-          </a:xfrm>
-          <a:prstGeom prst="rect">
-            <a:avLst/>
-          </a:prstGeom>
-          <a:noFill/>
-        </p:spPr>
-        <p:txBody>
-          <a:bodyPr wrap="square" rtlCol="0">
-            <a:spAutoFit/>
-          </a:bodyPr>
-          <a:lstStyle/>
-          <a:p>
-            <a:pPr algn="ctr"/>
-            <a:r>
-              <a:rPr lang="hr-HR" sz="2600" b="1" dirty="0">
-                <a:solidFill>
-                  <a:schemeClr val="tx1">
-                    <a:lumMod val="65000"/>
-                    <a:lumOff val="35000"/>
-                  </a:schemeClr>
-                </a:solidFill>
-                <a:latin typeface="Arial" panose="020B0604020202020204" pitchFamily="34" charset="0"/>
-                <a:cs typeface="Arial" panose="020B0604020202020204" pitchFamily="34" charset="0"/>
-              </a:rPr>
-              <a:t>WaNet</a:t>
-            </a:r>
-          </a:p>
-        </p:txBody>
-      </p:sp>
+        </p:grpSpPr>
+        <p:sp>
+          <p:nvSpPr>
+            <p:cNvPr id="18" name="TextBox 17">
+              <a:extLst>
+                <a:ext uri="{FF2B5EF4-FFF2-40B4-BE49-F238E27FC236}">
+                  <a16:creationId xmlns:a16="http://schemas.microsoft.com/office/drawing/2014/main" id="{0BF14803-9D3D-F402-5D50-2DC9EAF336A3}"/>
+                </a:ext>
+              </a:extLst>
+            </p:cNvPr>
+            <p:cNvSpPr txBox="1"/>
+            <p:nvPr/>
+          </p:nvSpPr>
+          <p:spPr>
+            <a:xfrm>
+              <a:off x="6526938" y="5479702"/>
+              <a:ext cx="3895446" cy="892552"/>
+            </a:xfrm>
+            <a:prstGeom prst="rect">
+              <a:avLst/>
+            </a:prstGeom>
+            <a:noFill/>
+          </p:spPr>
+          <p:txBody>
+            <a:bodyPr wrap="square" rtlCol="0">
+              <a:spAutoFit/>
+            </a:bodyPr>
+            <a:lstStyle/>
+            <a:p>
+              <a:pPr algn="ctr"/>
+              <a:r>
+                <a:rPr lang="hr-HR" sz="2600" dirty="0">
+                  <a:solidFill>
+                    <a:schemeClr val="tx1">
+                      <a:lumMod val="65000"/>
+                      <a:lumOff val="35000"/>
+                    </a:schemeClr>
+                  </a:solidFill>
+                  <a:latin typeface="Arial" panose="020B0604020202020204" pitchFamily="34" charset="0"/>
+                  <a:cs typeface="Arial" panose="020B0604020202020204" pitchFamily="34" charset="0"/>
+                </a:rPr>
+                <a:t>Teško ih je primijeniti u stvarnom svijetu</a:t>
+              </a:r>
+            </a:p>
+          </p:txBody>
+        </p:sp>
+        <p:sp>
+          <p:nvSpPr>
+            <p:cNvPr id="7" name="TextBox 6">
+              <a:extLst>
+                <a:ext uri="{FF2B5EF4-FFF2-40B4-BE49-F238E27FC236}">
+                  <a16:creationId xmlns:a16="http://schemas.microsoft.com/office/drawing/2014/main" id="{37849596-BF02-8A18-7EAD-12B163D1E25F}"/>
+                </a:ext>
+              </a:extLst>
+            </p:cNvPr>
+            <p:cNvSpPr txBox="1"/>
+            <p:nvPr/>
+          </p:nvSpPr>
+          <p:spPr>
+            <a:xfrm>
+              <a:off x="934990" y="5679757"/>
+              <a:ext cx="1973625" cy="492443"/>
+            </a:xfrm>
+            <a:prstGeom prst="rect">
+              <a:avLst/>
+            </a:prstGeom>
+            <a:noFill/>
+          </p:spPr>
+          <p:txBody>
+            <a:bodyPr wrap="square" rtlCol="0">
+              <a:spAutoFit/>
+            </a:bodyPr>
+            <a:lstStyle/>
+            <a:p>
+              <a:pPr algn="ctr"/>
+              <a:r>
+                <a:rPr lang="hr-HR" sz="2600" dirty="0">
+                  <a:solidFill>
+                    <a:schemeClr val="tx1">
+                      <a:lumMod val="65000"/>
+                      <a:lumOff val="35000"/>
+                    </a:schemeClr>
+                  </a:solidFill>
+                  <a:latin typeface="Arial" panose="020B0604020202020204" pitchFamily="34" charset="0"/>
+                  <a:cs typeface="Arial" panose="020B0604020202020204" pitchFamily="34" charset="0"/>
+                </a:rPr>
+                <a:t>Nedostatak:</a:t>
+              </a:r>
+            </a:p>
+          </p:txBody>
+        </p:sp>
+        <p:sp>
+          <p:nvSpPr>
+            <p:cNvPr id="15" name="TextBox 14">
+              <a:extLst>
+                <a:ext uri="{FF2B5EF4-FFF2-40B4-BE49-F238E27FC236}">
+                  <a16:creationId xmlns:a16="http://schemas.microsoft.com/office/drawing/2014/main" id="{73A88C3A-D218-8B54-F54A-8B9BAB8E718E}"/>
+                </a:ext>
+              </a:extLst>
+            </p:cNvPr>
+            <p:cNvSpPr txBox="1"/>
+            <p:nvPr/>
+          </p:nvSpPr>
+          <p:spPr>
+            <a:xfrm>
+              <a:off x="3693111" y="5679757"/>
+              <a:ext cx="1660124" cy="492443"/>
+            </a:xfrm>
+            <a:prstGeom prst="rect">
+              <a:avLst/>
+            </a:prstGeom>
+            <a:noFill/>
+          </p:spPr>
+          <p:txBody>
+            <a:bodyPr wrap="square" rtlCol="0">
+              <a:spAutoFit/>
+            </a:bodyPr>
+            <a:lstStyle/>
+            <a:p>
+              <a:pPr algn="ctr"/>
+              <a:r>
+                <a:rPr lang="hr-HR" sz="2600" dirty="0">
+                  <a:solidFill>
+                    <a:schemeClr val="tx1">
+                      <a:lumMod val="65000"/>
+                      <a:lumOff val="35000"/>
+                    </a:schemeClr>
+                  </a:solidFill>
+                  <a:latin typeface="Arial" panose="020B0604020202020204" pitchFamily="34" charset="0"/>
+                  <a:cs typeface="Arial" panose="020B0604020202020204" pitchFamily="34" charset="0"/>
+                </a:rPr>
+                <a:t>Vidljiv</a:t>
+              </a:r>
+            </a:p>
+          </p:txBody>
+        </p:sp>
+      </p:grpSp>
     </p:spTree>
     <p:extLst>
       <p:ext uri="{BB962C8B-B14F-4D97-AF65-F5344CB8AC3E}">
@@ -8854,8 +10475,8 @@
         </p:nvSpPr>
         <p:spPr>
           <a:xfrm>
-            <a:off x="1261872" y="1593274"/>
-            <a:ext cx="8787650" cy="4586864"/>
+            <a:off x="1261871" y="1593274"/>
+            <a:ext cx="9692639" cy="4586864"/>
           </a:xfrm>
         </p:spPr>
         <p:txBody>
@@ -8875,7 +10496,7 @@
                 <a:latin typeface="Arial" panose="020B0604020202020204" pitchFamily="34" charset="0"/>
                 <a:cs typeface="Arial" panose="020B0604020202020204" pitchFamily="34" charset="0"/>
               </a:rPr>
-              <a:t>posljedica (slučajnog) </a:t>
+              <a:t>posljedica </a:t>
             </a:r>
             <a:r>
               <a:rPr lang="hr-HR" sz="2600" b="1" dirty="0">
@@ -8891,6 +10512,49 @@
               </a:rPr>
               <a:t>podataka</a:t>
             </a:r>
+          </a:p>
+          <a:p>
+            <a:r>
+              <a:rPr lang="hr-HR" sz="2600" dirty="0">
+                <a:latin typeface="Arial" panose="020B0604020202020204" pitchFamily="34" charset="0"/>
+                <a:cs typeface="Arial" panose="020B0604020202020204" pitchFamily="34" charset="0"/>
+              </a:rPr>
+              <a:t>razlikujemo</a:t>
+            </a:r>
+            <a:r>
+              <a:rPr lang="hr-HR" sz="2600" b="1" dirty="0">
+                <a:latin typeface="Arial" panose="020B0604020202020204" pitchFamily="34" charset="0"/>
+                <a:cs typeface="Arial" panose="020B0604020202020204" pitchFamily="34" charset="0"/>
+              </a:rPr>
+              <a:t> simetrično</a:t>
+            </a:r>
+            <a:r>
+              <a:rPr lang="hr-HR" sz="2600" dirty="0">
+                <a:latin typeface="Arial" panose="020B0604020202020204" pitchFamily="34" charset="0"/>
+                <a:cs typeface="Arial" panose="020B0604020202020204" pitchFamily="34" charset="0"/>
+              </a:rPr>
+              <a:t> (gore) i </a:t>
+            </a:r>
+            <a:r>
+              <a:rPr lang="hr-HR" sz="2600" b="1" dirty="0">
+                <a:latin typeface="Arial" panose="020B0604020202020204" pitchFamily="34" charset="0"/>
+                <a:cs typeface="Arial" panose="020B0604020202020204" pitchFamily="34" charset="0"/>
+              </a:rPr>
+              <a:t>asimetrično</a:t>
+            </a:r>
+            <a:r>
+              <a:rPr lang="hr-HR" sz="2600" dirty="0">
+                <a:latin typeface="Arial" panose="020B0604020202020204" pitchFamily="34" charset="0"/>
+                <a:cs typeface="Arial" panose="020B0604020202020204" pitchFamily="34" charset="0"/>
+              </a:rPr>
+              <a:t> (dolje) zašumljivanje</a:t>
+            </a:r>
+          </a:p>
+          <a:p>
+            <a:endParaRPr lang="hr-HR" sz="2600" dirty="0">
+              <a:latin typeface="Arial" panose="020B0604020202020204" pitchFamily="34" charset="0"/>
+              <a:cs typeface="Arial" panose="020B0604020202020204" pitchFamily="34" charset="0"/>
+            </a:endParaRPr>
           </a:p>
         </p:txBody>
       </p:sp>
@@ -8920,90 +10584,6 @@
             <a:r>
               <a:rPr lang="hr-HR" dirty="0"/>
               <a:t>4</a:t>
-            </a:r>
-          </a:p>
-        </p:txBody>
-      </p:sp>
-      <p:sp>
-        <p:nvSpPr>
-          <p:cNvPr id="11" name="TextBox 10">
-            <a:extLst>
-              <a:ext uri="{FF2B5EF4-FFF2-40B4-BE49-F238E27FC236}">
-                <a16:creationId xmlns:a16="http://schemas.microsoft.com/office/drawing/2014/main" id="{573C071F-E131-1BAC-7692-23E5DAB2E7BD}"/>
-              </a:ext>
-            </a:extLst>
-          </p:cNvPr>
-          <p:cNvSpPr txBox="1"/>
-          <p:nvPr/>
-        </p:nvSpPr>
-        <p:spPr>
-          <a:xfrm>
-            <a:off x="1031026" y="6172200"/>
-            <a:ext cx="9667782" cy="492443"/>
-          </a:xfrm>
-          <a:prstGeom prst="rect">
-            <a:avLst/>
-          </a:prstGeom>
-          <a:noFill/>
-        </p:spPr>
-        <p:txBody>
-          <a:bodyPr wrap="square" rtlCol="0">
-            <a:spAutoFit/>
-          </a:bodyPr>
-          <a:lstStyle/>
-          <a:p>
-            <a:pPr algn="ctr"/>
-            <a:r>
-              <a:rPr lang="hr-HR" sz="2600" b="1" dirty="0">
-                <a:solidFill>
-                  <a:schemeClr val="tx1">
-                    <a:lumMod val="65000"/>
-                    <a:lumOff val="35000"/>
-                  </a:schemeClr>
-                </a:solidFill>
-                <a:latin typeface="Arial" panose="020B0604020202020204" pitchFamily="34" charset="0"/>
-                <a:cs typeface="Arial" panose="020B0604020202020204" pitchFamily="34" charset="0"/>
-              </a:rPr>
-              <a:t>Simetrično</a:t>
-            </a:r>
-            <a:r>
-              <a:rPr lang="hr-HR" sz="2600" dirty="0">
-                <a:solidFill>
-                  <a:schemeClr val="tx1">
-                    <a:lumMod val="65000"/>
-                    <a:lumOff val="35000"/>
-                  </a:schemeClr>
-                </a:solidFill>
-                <a:latin typeface="Arial" panose="020B0604020202020204" pitchFamily="34" charset="0"/>
-                <a:cs typeface="Arial" panose="020B0604020202020204" pitchFamily="34" charset="0"/>
-              </a:rPr>
-              <a:t> (gore) i </a:t>
-            </a:r>
-            <a:r>
-              <a:rPr lang="hr-HR" sz="2600" b="1" dirty="0">
-                <a:solidFill>
-                  <a:schemeClr val="tx1">
-                    <a:lumMod val="65000"/>
-                    <a:lumOff val="35000"/>
-                  </a:schemeClr>
-                </a:solidFill>
-                <a:latin typeface="Arial" panose="020B0604020202020204" pitchFamily="34" charset="0"/>
-                <a:cs typeface="Arial" panose="020B0604020202020204" pitchFamily="34" charset="0"/>
-              </a:rPr>
-              <a:t>asimetrično</a:t>
-            </a:r>
-            <a:r>
-              <a:rPr lang="hr-HR" sz="2600" dirty="0">
-                <a:solidFill>
-                  <a:schemeClr val="tx1">
-                    <a:lumMod val="65000"/>
-                    <a:lumOff val="35000"/>
-                  </a:schemeClr>
-                </a:solidFill>
-                <a:latin typeface="Arial" panose="020B0604020202020204" pitchFamily="34" charset="0"/>
-                <a:cs typeface="Arial" panose="020B0604020202020204" pitchFamily="34" charset="0"/>
-              </a:rPr>
-              <a:t> (dolje) zašumljivanje</a:t>
             </a:r>
           </a:p>
         </p:txBody>
@@ -9030,7 +10610,7 @@
         </p:blipFill>
         <p:spPr>
           <a:xfrm>
-            <a:off x="1031026" y="3211685"/>
+            <a:off x="1027695" y="3841624"/>
             <a:ext cx="9667782" cy="2698750"/>
           </a:xfrm>
           <a:prstGeom prst="rect">
@@ -9147,19 +10727,30 @@
               <a:t>cilj: </a:t>
             </a:r>
             <a:r>
-              <a:rPr lang="hr-HR" sz="2600" b="1" noProof="0" dirty="0">
-                <a:latin typeface="Arial" panose="020B0604020202020204" pitchFamily="34" charset="0"/>
-                <a:cs typeface="Arial" panose="020B0604020202020204" pitchFamily="34" charset="0"/>
-              </a:rPr>
-              <a:t>otklanjanje ranjivosti modela </a:t>
-            </a:r>
-            <a:r>
-              <a:rPr lang="hr-HR" sz="2600" noProof="0" dirty="0">
-                <a:latin typeface="Arial" panose="020B0604020202020204" pitchFamily="34" charset="0"/>
-                <a:cs typeface="Arial" panose="020B0604020202020204" pitchFamily="34" charset="0"/>
-              </a:rPr>
-              <a:t>bez narušavanja performansi na prirodnim podatcima</a:t>
-            </a:r>
+              <a:rPr lang="hr-HR" sz="2600" dirty="0">
+                <a:latin typeface="Arial" panose="020B0604020202020204" pitchFamily="34" charset="0"/>
+                <a:cs typeface="Arial" panose="020B0604020202020204" pitchFamily="34" charset="0"/>
+              </a:rPr>
+              <a:t>učenje modela </a:t>
+            </a:r>
+            <a:r>
+              <a:rPr lang="hr-HR" sz="2600" b="1" dirty="0">
+                <a:latin typeface="Arial" panose="020B0604020202020204" pitchFamily="34" charset="0"/>
+                <a:cs typeface="Arial" panose="020B0604020202020204" pitchFamily="34" charset="0"/>
+              </a:rPr>
+              <a:t>bez stražnjih vrata </a:t>
+            </a:r>
+            <a:r>
+              <a:rPr lang="hr-HR" sz="2600" dirty="0">
+                <a:latin typeface="Arial" panose="020B0604020202020204" pitchFamily="34" charset="0"/>
+                <a:cs typeface="Arial" panose="020B0604020202020204" pitchFamily="34" charset="0"/>
+              </a:rPr>
+              <a:t>na zatrovanim podatcima</a:t>
+            </a:r>
+            <a:endParaRPr lang="hr-HR" sz="2600" noProof="0" dirty="0">
+              <a:latin typeface="Arial" panose="020B0604020202020204" pitchFamily="34" charset="0"/>
+              <a:cs typeface="Arial" panose="020B0604020202020204" pitchFamily="34" charset="0"/>
+            </a:endParaRPr>
           </a:p>
           <a:p>
             <a:endParaRPr lang="hr-HR" sz="2600" dirty="0">
@@ -9297,6 +10888,317 @@
         <p:cNvPr id="1" name="">
           <a:extLst>
             <a:ext uri="{FF2B5EF4-FFF2-40B4-BE49-F238E27FC236}">
+              <a16:creationId xmlns:a16="http://schemas.microsoft.com/office/drawing/2014/main" id="{4888D621-C0C9-42FB-03CD-313BB353C5BD}"/>
+            </a:ext>
+          </a:extLst>
+        </p:cNvPr>
+        <p:cNvGrpSpPr/>
+        <p:nvPr/>
+      </p:nvGrpSpPr>
+      <p:grpSpPr>
+        <a:xfrm>
+          <a:off x="0" y="0"/>
+          <a:ext cx="0" cy="0"/>
+          <a:chOff x="0" y="0"/>
+          <a:chExt cx="0" cy="0"/>
+        </a:xfrm>
+      </p:grpSpPr>
+      <p:sp>
+        <p:nvSpPr>
+          <p:cNvPr id="2" name="Title 1">
+            <a:extLst>
+              <a:ext uri="{FF2B5EF4-FFF2-40B4-BE49-F238E27FC236}">
+                <a16:creationId xmlns:a16="http://schemas.microsoft.com/office/drawing/2014/main" id="{5C6AF7BE-BB66-8B40-08A5-681B2DEA3179}"/>
+              </a:ext>
+            </a:extLst>
+          </p:cNvPr>
+          <p:cNvSpPr>
+            <a:spLocks noGrp="1"/>
+          </p:cNvSpPr>
+          <p:nvPr>
+            <p:ph type="title"/>
+          </p:nvPr>
+        </p:nvSpPr>
+        <p:spPr/>
+        <p:txBody>
+          <a:bodyPr/>
+          <a:lstStyle/>
+          <a:p>
+            <a:r>
+              <a:rPr lang="hr-HR" noProof="0" dirty="0">
+                <a:latin typeface="Arial" panose="020B0604020202020204" pitchFamily="34" charset="0"/>
+                <a:cs typeface="Arial" panose="020B0604020202020204" pitchFamily="34" charset="0"/>
+              </a:rPr>
+              <a:t>Okvir VIBE</a:t>
+            </a:r>
+          </a:p>
+        </p:txBody>
+      </p:sp>
+      <p:sp>
+        <p:nvSpPr>
+          <p:cNvPr id="3" name="Content Placeholder 2">
+            <a:extLst>
+              <a:ext uri="{FF2B5EF4-FFF2-40B4-BE49-F238E27FC236}">
+                <a16:creationId xmlns:a16="http://schemas.microsoft.com/office/drawing/2014/main" id="{19FF9997-24F3-C098-A02E-FA0EFB9B656C}"/>
+              </a:ext>
+            </a:extLst>
+          </p:cNvPr>
+          <p:cNvSpPr>
+            <a:spLocks noGrp="1"/>
+          </p:cNvSpPr>
+          <p:nvPr>
+            <p:ph idx="1"/>
+          </p:nvPr>
+        </p:nvSpPr>
+        <p:spPr>
+          <a:xfrm>
+            <a:off x="1261872" y="1828799"/>
+            <a:ext cx="9692640" cy="4937125"/>
+          </a:xfrm>
+        </p:spPr>
+        <p:txBody>
+          <a:bodyPr>
+            <a:normAutofit/>
+          </a:bodyPr>
+          <a:lstStyle/>
+          <a:p>
+            <a:r>
+              <a:rPr lang="en-US" sz="2600" noProof="0" dirty="0">
+                <a:latin typeface="Arial" panose="020B0604020202020204" pitchFamily="34" charset="0"/>
+                <a:cs typeface="Arial" panose="020B0604020202020204" pitchFamily="34" charset="0"/>
+              </a:rPr>
+              <a:t>model: </a:t>
+            </a:r>
+            <a:r>
+              <a:rPr lang="hr-HR" sz="2600" b="1" noProof="0" dirty="0">
+                <a:latin typeface="Arial" panose="020B0604020202020204" pitchFamily="34" charset="0"/>
+                <a:cs typeface="Arial" panose="020B0604020202020204" pitchFamily="34" charset="0"/>
+              </a:rPr>
+              <a:t>ekstraktor značajki</a:t>
+            </a:r>
+            <a:r>
+              <a:rPr lang="hr-HR" sz="2600" noProof="0" dirty="0">
+                <a:latin typeface="Arial" panose="020B0604020202020204" pitchFamily="34" charset="0"/>
+                <a:cs typeface="Arial" panose="020B0604020202020204" pitchFamily="34" charset="0"/>
+              </a:rPr>
+              <a:t>, skup čistih prototipova, skup zatrovanih prototipova </a:t>
+            </a:r>
+          </a:p>
+          <a:p>
+            <a:endParaRPr lang="hr-HR" sz="2600" noProof="0" dirty="0">
+              <a:latin typeface="Arial" panose="020B0604020202020204" pitchFamily="34" charset="0"/>
+              <a:cs typeface="Arial" panose="020B0604020202020204" pitchFamily="34" charset="0"/>
+            </a:endParaRPr>
+          </a:p>
+          <a:p>
+            <a:endParaRPr lang="hr-HR" sz="2600" noProof="0" dirty="0">
+              <a:latin typeface="Arial" panose="020B0604020202020204" pitchFamily="34" charset="0"/>
+              <a:cs typeface="Arial" panose="020B0604020202020204" pitchFamily="34" charset="0"/>
+            </a:endParaRPr>
+          </a:p>
+          <a:p>
+            <a:endParaRPr lang="hr-HR" sz="2600" dirty="0">
+              <a:latin typeface="Arial" panose="020B0604020202020204" pitchFamily="34" charset="0"/>
+              <a:cs typeface="Arial" panose="020B0604020202020204" pitchFamily="34" charset="0"/>
+            </a:endParaRPr>
+          </a:p>
+          <a:p>
+            <a:endParaRPr lang="hr-HR" sz="2600" noProof="0" dirty="0">
+              <a:latin typeface="Arial" panose="020B0604020202020204" pitchFamily="34" charset="0"/>
+              <a:cs typeface="Arial" panose="020B0604020202020204" pitchFamily="34" charset="0"/>
+            </a:endParaRPr>
+          </a:p>
+          <a:p>
+            <a:endParaRPr lang="hr-HR" sz="2600" dirty="0">
+              <a:latin typeface="Arial" panose="020B0604020202020204" pitchFamily="34" charset="0"/>
+              <a:cs typeface="Arial" panose="020B0604020202020204" pitchFamily="34" charset="0"/>
+            </a:endParaRPr>
+          </a:p>
+          <a:p>
+            <a:r>
+              <a:rPr lang="hr-HR" sz="2600" noProof="0" dirty="0">
+                <a:latin typeface="Arial" panose="020B0604020202020204" pitchFamily="34" charset="0"/>
+                <a:cs typeface="Arial" panose="020B0604020202020204" pitchFamily="34" charset="0"/>
+              </a:rPr>
+              <a:t>E korak: </a:t>
+            </a:r>
+            <a:r>
+              <a:rPr lang="hr-HR" sz="2600" b="1" noProof="0" dirty="0">
+                <a:latin typeface="Arial" panose="020B0604020202020204" pitchFamily="34" charset="0"/>
+                <a:cs typeface="Arial" panose="020B0604020202020204" pitchFamily="34" charset="0"/>
+              </a:rPr>
+              <a:t>aproksimacija čistih pseudooznaka </a:t>
+            </a:r>
+            <a:r>
+              <a:rPr lang="hr-HR" sz="2600" noProof="0" dirty="0">
+                <a:latin typeface="Arial" panose="020B0604020202020204" pitchFamily="34" charset="0"/>
+                <a:cs typeface="Arial" panose="020B0604020202020204" pitchFamily="34" charset="0"/>
+              </a:rPr>
+              <a:t>(algoritam SK)</a:t>
+            </a:r>
+          </a:p>
+          <a:p>
+            <a:r>
+              <a:rPr lang="hr-HR" sz="2600" dirty="0">
+                <a:latin typeface="Arial" panose="020B0604020202020204" pitchFamily="34" charset="0"/>
+                <a:cs typeface="Arial" panose="020B0604020202020204" pitchFamily="34" charset="0"/>
+              </a:rPr>
+              <a:t>M korak: </a:t>
+            </a:r>
+            <a:r>
+              <a:rPr lang="hr-HR" sz="2600" b="1" dirty="0">
+                <a:latin typeface="Arial" panose="020B0604020202020204" pitchFamily="34" charset="0"/>
+                <a:cs typeface="Arial" panose="020B0604020202020204" pitchFamily="34" charset="0"/>
+              </a:rPr>
+              <a:t>ažuriranje parametara modela</a:t>
+            </a:r>
+            <a:r>
+              <a:rPr lang="hr-HR" sz="2600" dirty="0">
+                <a:latin typeface="Arial" panose="020B0604020202020204" pitchFamily="34" charset="0"/>
+                <a:cs typeface="Arial" panose="020B0604020202020204" pitchFamily="34" charset="0"/>
+              </a:rPr>
+              <a:t> (gradijentni spust)</a:t>
+            </a:r>
+            <a:endParaRPr lang="hr-HR" sz="2600" noProof="0" dirty="0">
+              <a:latin typeface="Arial" panose="020B0604020202020204" pitchFamily="34" charset="0"/>
+              <a:cs typeface="Arial" panose="020B0604020202020204" pitchFamily="34" charset="0"/>
+            </a:endParaRPr>
+          </a:p>
+        </p:txBody>
+      </p:sp>
+      <p:sp>
+        <p:nvSpPr>
+          <p:cNvPr id="5" name="Slide Number Placeholder 4">
+            <a:extLst>
+              <a:ext uri="{FF2B5EF4-FFF2-40B4-BE49-F238E27FC236}">
+                <a16:creationId xmlns:a16="http://schemas.microsoft.com/office/drawing/2014/main" id="{166F4E7C-1CAF-80DB-BAF8-FD54241566DB}"/>
+              </a:ext>
+            </a:extLst>
+          </p:cNvPr>
+          <p:cNvSpPr>
+            <a:spLocks noGrp="1"/>
+          </p:cNvSpPr>
+          <p:nvPr>
+            <p:ph type="sldNum" sz="quarter" idx="12"/>
+          </p:nvPr>
+        </p:nvSpPr>
+        <p:spPr/>
+        <p:txBody>
+          <a:bodyPr>
+            <a:normAutofit lnSpcReduction="10000"/>
+          </a:bodyPr>
+          <a:lstStyle/>
+          <a:p>
+            <a:r>
+              <a:rPr lang="hr-HR" dirty="0"/>
+              <a:t>6</a:t>
+            </a:r>
+          </a:p>
+        </p:txBody>
+      </p:sp>
+      <p:grpSp>
+        <p:nvGrpSpPr>
+          <p:cNvPr id="17" name="Group 16">
+            <a:extLst>
+              <a:ext uri="{FF2B5EF4-FFF2-40B4-BE49-F238E27FC236}">
+                <a16:creationId xmlns:a16="http://schemas.microsoft.com/office/drawing/2014/main" id="{A6A95AE8-E5A2-F3A7-87EE-70DD803B443D}"/>
+              </a:ext>
+            </a:extLst>
+          </p:cNvPr>
+          <p:cNvGrpSpPr/>
+          <p:nvPr/>
+        </p:nvGrpSpPr>
+        <p:grpSpPr>
+          <a:xfrm>
+            <a:off x="2752542" y="2735846"/>
+            <a:ext cx="6711300" cy="2814377"/>
+            <a:chOff x="2733205" y="2662051"/>
+            <a:chExt cx="6711300" cy="2814377"/>
+          </a:xfrm>
+        </p:grpSpPr>
+        <p:pic>
+          <p:nvPicPr>
+            <p:cNvPr id="14" name="Picture 13">
+              <a:extLst>
+                <a:ext uri="{FF2B5EF4-FFF2-40B4-BE49-F238E27FC236}">
+                  <a16:creationId xmlns:a16="http://schemas.microsoft.com/office/drawing/2014/main" id="{200F0D49-A854-E309-B1DF-462B0242CCE9}"/>
+                </a:ext>
+              </a:extLst>
+            </p:cNvPr>
+            <p:cNvPicPr>
+              <a:picLocks noChangeAspect="1"/>
+            </p:cNvPicPr>
+            <p:nvPr/>
+          </p:nvPicPr>
+          <p:blipFill>
+            <a:blip r:embed="rId2"/>
+            <a:srcRect r="425"/>
+            <a:stretch>
+              <a:fillRect/>
+            </a:stretch>
+          </p:blipFill>
+          <p:spPr>
+            <a:xfrm>
+              <a:off x="2733205" y="2662051"/>
+              <a:ext cx="6697010" cy="1267002"/>
+            </a:xfrm>
+            <a:prstGeom prst="rect">
+              <a:avLst/>
+            </a:prstGeom>
+          </p:spPr>
+        </p:pic>
+        <p:pic>
+          <p:nvPicPr>
+            <p:cNvPr id="16" name="Picture 15">
+              <a:extLst>
+                <a:ext uri="{FF2B5EF4-FFF2-40B4-BE49-F238E27FC236}">
+                  <a16:creationId xmlns:a16="http://schemas.microsoft.com/office/drawing/2014/main" id="{B8B67BB9-001D-C688-03B8-384A916E52E9}"/>
+                </a:ext>
+              </a:extLst>
+            </p:cNvPr>
+            <p:cNvPicPr>
+              <a:picLocks noChangeAspect="1"/>
+            </p:cNvPicPr>
+            <p:nvPr/>
+          </p:nvPicPr>
+          <p:blipFill>
+            <a:blip r:embed="rId3"/>
+            <a:stretch>
+              <a:fillRect/>
+            </a:stretch>
+          </p:blipFill>
+          <p:spPr>
+            <a:xfrm>
+              <a:off x="2747495" y="4066531"/>
+              <a:ext cx="6697010" cy="1409897"/>
+            </a:xfrm>
+            <a:prstGeom prst="rect">
+              <a:avLst/>
+            </a:prstGeom>
+          </p:spPr>
+        </p:pic>
+      </p:grpSp>
+    </p:spTree>
+    <p:extLst>
+      <p:ext uri="{BB962C8B-B14F-4D97-AF65-F5344CB8AC3E}">
+        <p14:creationId xmlns:p14="http://schemas.microsoft.com/office/powerpoint/2010/main" val="1091975325"/>
+      </p:ext>
+    </p:extLst>
+  </p:cSld>
+  <p:clrMapOvr>
+    <a:masterClrMapping/>
+  </p:clrMapOvr>
+</p:sld>
+</file>
+
+<file path=ppt/slides/slide9.xml><?xml version="1.0" encoding="utf-8"?>
+<p:sld xmlns:a="http://schemas.openxmlformats.org/drawingml/2006/main" xmlns:r="http://schemas.openxmlformats.org/officeDocument/2006/relationships" xmlns:p="http://schemas.openxmlformats.org/presentationml/2006/main">
+  <p:cSld>
+    <p:spTree>
+      <p:nvGrpSpPr>
+        <p:cNvPr id="1" name="">
+          <a:extLst>
+            <a:ext uri="{FF2B5EF4-FFF2-40B4-BE49-F238E27FC236}">
               <a16:creationId xmlns:a16="http://schemas.microsoft.com/office/drawing/2014/main" id="{88491E6A-93E2-CEF2-7ACA-726C49939E6F}"/>
             </a:ext>
           </a:extLst>
@@ -9372,7 +11274,7 @@
           <a:p>
             <a:r>
               <a:rPr lang="hr-HR" dirty="0"/>
-              <a:t>6</a:t>
+              <a:t>7</a:t>
             </a:r>
           </a:p>
         </p:txBody>
@@ -9428,7 +11330,7 @@
         <p:spPr>
           <a:xfrm>
             <a:off x="2354555" y="5873373"/>
-            <a:ext cx="7085120" cy="892552"/>
+            <a:ext cx="7085120" cy="492443"/>
           </a:xfrm>
           <a:prstGeom prst="rect">
             <a:avLst/>
@@ -9469,16 +11371,6 @@
               <a:t>reuzeto iz </a:t>
             </a:r>
             <a:r>
-              <a:rPr lang="hr-HR" sz="2600" noProof="0" dirty="0">
-                <a:solidFill>
-                  <a:schemeClr val="accent1"/>
-                </a:solidFill>
-                <a:latin typeface="Arial" panose="020B0604020202020204" pitchFamily="34" charset="0"/>
-                <a:cs typeface="Arial" panose="020B0604020202020204" pitchFamily="34" charset="0"/>
-              </a:rPr>
-              <a:t>I. Sabolić, M. Grcić, i S. Šegvić</a:t>
-            </a:r>
-            <a:r>
               <a:rPr lang="en-US" sz="2600" noProof="0" dirty="0">
                 <a:solidFill>
                   <a:schemeClr val="accent1"/>
@@ -9486,7 +11378,34 @@
                 <a:latin typeface="Arial" panose="020B0604020202020204" pitchFamily="34" charset="0"/>
                 <a:cs typeface="Arial" panose="020B0604020202020204" pitchFamily="34" charset="0"/>
               </a:rPr>
-              <a:t>, “Seal your backdoor with variational defense”</a:t>
+              <a:t>[</a:t>
+            </a:r>
+            <a:r>
+              <a:rPr lang="en-US" sz="2600" noProof="0" dirty="0">
+                <a:solidFill>
+                  <a:schemeClr val="accent1"/>
+                </a:solidFill>
+                <a:latin typeface="Arial" panose="020B0604020202020204" pitchFamily="34" charset="0"/>
+                <a:cs typeface="Arial" panose="020B0604020202020204" pitchFamily="34" charset="0"/>
+                <a:hlinkClick r:id="rId3">
+                  <a:extLst>
+                    <a:ext uri="{A12FA001-AC4F-418D-AE19-62706E023703}">
+                      <ahyp:hlinkClr xmlns:ahyp="http://schemas.microsoft.com/office/drawing/2018/hyperlinkcolor" val="tx"/>
+                    </a:ext>
+                  </a:extLst>
+                </a:hlinkClick>
+              </a:rPr>
+              <a:t>sabolic25iccv</a:t>
+            </a:r>
+            <a:r>
+              <a:rPr lang="en-US" sz="2600" noProof="0" dirty="0">
+                <a:solidFill>
+                  <a:schemeClr val="accent1"/>
+                </a:solidFill>
+                <a:latin typeface="Arial" panose="020B0604020202020204" pitchFamily="34" charset="0"/>
+                <a:cs typeface="Arial" panose="020B0604020202020204" pitchFamily="34" charset="0"/>
+              </a:rPr>
+              <a:t>]</a:t>
             </a:r>
             <a:endParaRPr lang="hr-HR" sz="2600" noProof="0" dirty="0">
               <a:solidFill>
@@ -9502,286 +11421,6 @@
     <p:extLst>
       <p:ext uri="{BB962C8B-B14F-4D97-AF65-F5344CB8AC3E}">
         <p14:creationId xmlns:p14="http://schemas.microsoft.com/office/powerpoint/2010/main" val="3243471539"/>
-      </p:ext>
-    </p:extLst>
-  </p:cSld>
-  <p:clrMapOvr>
-    <a:masterClrMapping/>
-  </p:clrMapOvr>
-</p:sld>
-</file>
-
-<file path=ppt/slides/slide9.xml><?xml version="1.0" encoding="utf-8"?>
-<p:sld xmlns:a="http://schemas.openxmlformats.org/drawingml/2006/main" xmlns:r="http://schemas.openxmlformats.org/officeDocument/2006/relationships" xmlns:p="http://schemas.openxmlformats.org/presentationml/2006/main">
-  <p:cSld>
-    <p:spTree>
-      <p:nvGrpSpPr>
-        <p:cNvPr id="1" name="">
-          <a:extLst>
-            <a:ext uri="{FF2B5EF4-FFF2-40B4-BE49-F238E27FC236}">
-              <a16:creationId xmlns:a16="http://schemas.microsoft.com/office/drawing/2014/main" id="{EFD79DC0-028A-FC80-FDF1-FA8AEAD0345D}"/>
-            </a:ext>
-          </a:extLst>
-        </p:cNvPr>
-        <p:cNvGrpSpPr/>
-        <p:nvPr/>
-      </p:nvGrpSpPr>
-      <p:grpSpPr>
-        <a:xfrm>
-          <a:off x="0" y="0"/>
-          <a:ext cx="0" cy="0"/>
-          <a:chOff x="0" y="0"/>
-          <a:chExt cx="0" cy="0"/>
-        </a:xfrm>
-      </p:grpSpPr>
-      <p:sp>
-        <p:nvSpPr>
-          <p:cNvPr id="2" name="Title 1">
-            <a:extLst>
-              <a:ext uri="{FF2B5EF4-FFF2-40B4-BE49-F238E27FC236}">
-                <a16:creationId xmlns:a16="http://schemas.microsoft.com/office/drawing/2014/main" id="{A6098E85-BDA4-7EB5-511C-62EAD823B775}"/>
-              </a:ext>
-            </a:extLst>
-          </p:cNvPr>
-          <p:cNvSpPr>
-            <a:spLocks noGrp="1"/>
-          </p:cNvSpPr>
-          <p:nvPr>
-            <p:ph type="title"/>
-          </p:nvPr>
-        </p:nvSpPr>
-        <p:spPr/>
-        <p:txBody>
-          <a:bodyPr/>
-          <a:lstStyle/>
-          <a:p>
-            <a:r>
-              <a:rPr lang="hr-HR" noProof="0" dirty="0">
-                <a:latin typeface="Arial" panose="020B0604020202020204" pitchFamily="34" charset="0"/>
-                <a:cs typeface="Arial" panose="020B0604020202020204" pitchFamily="34" charset="0"/>
-              </a:rPr>
-              <a:t>Konzistencijski gubitak</a:t>
-            </a:r>
-          </a:p>
-        </p:txBody>
-      </p:sp>
-      <p:sp>
-        <p:nvSpPr>
-          <p:cNvPr id="3" name="Content Placeholder 2">
-            <a:extLst>
-              <a:ext uri="{FF2B5EF4-FFF2-40B4-BE49-F238E27FC236}">
-                <a16:creationId xmlns:a16="http://schemas.microsoft.com/office/drawing/2014/main" id="{4115AFB7-9C7E-F25E-00CD-1CC2A10E8118}"/>
-              </a:ext>
-            </a:extLst>
-          </p:cNvPr>
-          <p:cNvSpPr>
-            <a:spLocks noGrp="1"/>
-          </p:cNvSpPr>
-          <p:nvPr>
-            <p:ph idx="1"/>
-          </p:nvPr>
-        </p:nvSpPr>
-        <p:spPr>
-          <a:xfrm>
-            <a:off x="1261872" y="1828800"/>
-            <a:ext cx="9692640" cy="4735002"/>
-          </a:xfrm>
-        </p:spPr>
-        <p:txBody>
-          <a:bodyPr>
-            <a:normAutofit/>
-          </a:bodyPr>
-          <a:lstStyle/>
-          <a:p>
-            <a:endParaRPr lang="hr-HR" sz="2600" noProof="0" dirty="0">
-              <a:latin typeface="Arial" panose="020B0604020202020204" pitchFamily="34" charset="0"/>
-              <a:cs typeface="Arial" panose="020B0604020202020204" pitchFamily="34" charset="0"/>
-            </a:endParaRPr>
-          </a:p>
-          <a:p>
-            <a:r>
-              <a:rPr lang="hr-HR" sz="2800" noProof="0" dirty="0">
-                <a:latin typeface="Arial" panose="020B0604020202020204" pitchFamily="34" charset="0"/>
-                <a:cs typeface="Arial" panose="020B0604020202020204" pitchFamily="34" charset="0"/>
-              </a:rPr>
-              <a:t>cilj: osigurati da model </a:t>
-            </a:r>
-            <a:r>
-              <a:rPr lang="hr-HR" sz="2800" b="1" noProof="0" dirty="0">
-                <a:latin typeface="Arial" panose="020B0604020202020204" pitchFamily="34" charset="0"/>
-                <a:cs typeface="Arial" panose="020B0604020202020204" pitchFamily="34" charset="0"/>
-              </a:rPr>
-              <a:t>za slične ulaze daje slične izlaze</a:t>
-            </a:r>
-          </a:p>
-          <a:p>
-            <a:endParaRPr lang="hr-HR" sz="2800" dirty="0">
-              <a:latin typeface="Arial" panose="020B0604020202020204" pitchFamily="34" charset="0"/>
-              <a:cs typeface="Arial" panose="020B0604020202020204" pitchFamily="34" charset="0"/>
-            </a:endParaRPr>
-          </a:p>
-          <a:p>
-            <a:r>
-              <a:rPr lang="hr-HR" sz="2800" b="1" noProof="0" dirty="0">
-                <a:latin typeface="Arial" panose="020B0604020202020204" pitchFamily="34" charset="0"/>
-                <a:cs typeface="Arial" panose="020B0604020202020204" pitchFamily="34" charset="0"/>
-              </a:rPr>
-              <a:t>dva pogleda </a:t>
-            </a:r>
-            <a:r>
-              <a:rPr lang="hr-HR" sz="2800" noProof="0" dirty="0">
-                <a:latin typeface="Arial" panose="020B0604020202020204" pitchFamily="34" charset="0"/>
-                <a:cs typeface="Arial" panose="020B0604020202020204" pitchFamily="34" charset="0"/>
-              </a:rPr>
-              <a:t>na podatke: </a:t>
-            </a:r>
-            <a:r>
-              <a:rPr lang="hr-HR" sz="2800" b="1" dirty="0">
-                <a:latin typeface="Arial" panose="020B0604020202020204" pitchFamily="34" charset="0"/>
-                <a:cs typeface="Arial" panose="020B0604020202020204" pitchFamily="34" charset="0"/>
-              </a:rPr>
-              <a:t>slabe</a:t>
-            </a:r>
-            <a:r>
-              <a:rPr lang="hr-HR" sz="2800" dirty="0">
-                <a:latin typeface="Arial" panose="020B0604020202020204" pitchFamily="34" charset="0"/>
-                <a:cs typeface="Arial" panose="020B0604020202020204" pitchFamily="34" charset="0"/>
-              </a:rPr>
-              <a:t> i </a:t>
-            </a:r>
-            <a:r>
-              <a:rPr lang="hr-HR" sz="2800" b="1" dirty="0">
-                <a:latin typeface="Arial" panose="020B0604020202020204" pitchFamily="34" charset="0"/>
-                <a:cs typeface="Arial" panose="020B0604020202020204" pitchFamily="34" charset="0"/>
-              </a:rPr>
-              <a:t>jake</a:t>
-            </a:r>
-            <a:r>
-              <a:rPr lang="hr-HR" sz="2800" dirty="0">
-                <a:latin typeface="Arial" panose="020B0604020202020204" pitchFamily="34" charset="0"/>
-                <a:cs typeface="Arial" panose="020B0604020202020204" pitchFamily="34" charset="0"/>
-              </a:rPr>
-              <a:t> augmentacije</a:t>
-            </a:r>
-          </a:p>
-          <a:p>
-            <a:endParaRPr lang="hr-HR" sz="2800" noProof="0" dirty="0">
-              <a:latin typeface="Arial" panose="020B0604020202020204" pitchFamily="34" charset="0"/>
-              <a:cs typeface="Arial" panose="020B0604020202020204" pitchFamily="34" charset="0"/>
-            </a:endParaRPr>
-          </a:p>
-          <a:p>
-            <a:endParaRPr lang="hr-HR" sz="2800" dirty="0">
-              <a:latin typeface="Arial" panose="020B0604020202020204" pitchFamily="34" charset="0"/>
-              <a:cs typeface="Arial" panose="020B0604020202020204" pitchFamily="34" charset="0"/>
-            </a:endParaRPr>
-          </a:p>
-          <a:p>
-            <a:r>
-              <a:rPr lang="hr-HR" sz="2800" dirty="0">
-                <a:latin typeface="Arial" panose="020B0604020202020204" pitchFamily="34" charset="0"/>
-                <a:cs typeface="Arial" panose="020B0604020202020204" pitchFamily="34" charset="0"/>
-              </a:rPr>
-              <a:t>povećavanje </a:t>
-            </a:r>
-            <a:r>
-              <a:rPr lang="hr-HR" sz="2800" b="1" dirty="0">
-                <a:latin typeface="Arial" panose="020B0604020202020204" pitchFamily="34" charset="0"/>
-                <a:cs typeface="Arial" panose="020B0604020202020204" pitchFamily="34" charset="0"/>
-              </a:rPr>
-              <a:t>invarijantnosti na perturbacije ulaza</a:t>
-            </a:r>
-            <a:r>
-              <a:rPr lang="hr-HR" sz="2800" dirty="0">
-                <a:latin typeface="Arial" panose="020B0604020202020204" pitchFamily="34" charset="0"/>
-                <a:cs typeface="Arial" panose="020B0604020202020204" pitchFamily="34" charset="0"/>
-              </a:rPr>
-              <a:t>, sprječavanje </a:t>
-            </a:r>
-            <a:r>
-              <a:rPr lang="hr-HR" sz="2800" b="1" dirty="0">
-                <a:latin typeface="Arial" panose="020B0604020202020204" pitchFamily="34" charset="0"/>
-                <a:cs typeface="Arial" panose="020B0604020202020204" pitchFamily="34" charset="0"/>
-              </a:rPr>
-              <a:t>prenaučenosti</a:t>
-            </a:r>
-            <a:endParaRPr lang="hr-HR" sz="2800" b="1" noProof="0" dirty="0">
-              <a:latin typeface="Arial" panose="020B0604020202020204" pitchFamily="34" charset="0"/>
-              <a:cs typeface="Arial" panose="020B0604020202020204" pitchFamily="34" charset="0"/>
-            </a:endParaRPr>
-          </a:p>
-          <a:p>
-            <a:endParaRPr lang="hr-HR" sz="2800" noProof="0" dirty="0">
-              <a:latin typeface="Arial" panose="020B0604020202020204" pitchFamily="34" charset="0"/>
-              <a:cs typeface="Arial" panose="020B0604020202020204" pitchFamily="34" charset="0"/>
-            </a:endParaRPr>
-          </a:p>
-        </p:txBody>
-      </p:sp>
-      <p:sp>
-        <p:nvSpPr>
-          <p:cNvPr id="5" name="Slide Number Placeholder 4">
-            <a:extLst>
-              <a:ext uri="{FF2B5EF4-FFF2-40B4-BE49-F238E27FC236}">
-                <a16:creationId xmlns:a16="http://schemas.microsoft.com/office/drawing/2014/main" id="{D58F7740-24FB-E7AA-570E-A745E1EDE189}"/>
-              </a:ext>
-            </a:extLst>
-          </p:cNvPr>
-          <p:cNvSpPr>
-            <a:spLocks noGrp="1"/>
-          </p:cNvSpPr>
-          <p:nvPr>
-            <p:ph type="sldNum" sz="quarter" idx="12"/>
-          </p:nvPr>
-        </p:nvSpPr>
-        <p:spPr/>
-        <p:txBody>
-          <a:bodyPr>
-            <a:normAutofit lnSpcReduction="10000"/>
-          </a:bodyPr>
-          <a:lstStyle/>
-          <a:p>
-            <a:r>
-              <a:rPr lang="hr-HR" dirty="0"/>
-              <a:t>7</a:t>
-            </a:r>
-          </a:p>
-        </p:txBody>
-      </p:sp>
-      <p:pic>
-        <p:nvPicPr>
-          <p:cNvPr id="7" name="Picture 6">
-            <a:extLst>
-              <a:ext uri="{FF2B5EF4-FFF2-40B4-BE49-F238E27FC236}">
-                <a16:creationId xmlns:a16="http://schemas.microsoft.com/office/drawing/2014/main" id="{6095EC41-835B-7249-819C-F56930CD2E64}"/>
-              </a:ext>
-            </a:extLst>
-          </p:cNvPr>
-          <p:cNvPicPr>
-            <a:picLocks noChangeAspect="1"/>
-          </p:cNvPicPr>
-          <p:nvPr/>
-        </p:nvPicPr>
-        <p:blipFill>
-          <a:blip r:embed="rId2"/>
-          <a:stretch>
-            <a:fillRect/>
-          </a:stretch>
-        </p:blipFill>
-        <p:spPr>
-          <a:xfrm>
-            <a:off x="2484257" y="4554759"/>
-            <a:ext cx="6573167" cy="571580"/>
-          </a:xfrm>
-          <a:prstGeom prst="rect">
-            <a:avLst/>
-          </a:prstGeom>
-        </p:spPr>
-      </p:pic>
-    </p:spTree>
-    <p:extLst>
-      <p:ext uri="{BB962C8B-B14F-4D97-AF65-F5344CB8AC3E}">
-        <p14:creationId xmlns:p14="http://schemas.microsoft.com/office/powerpoint/2010/main" val="1307808060"/>
       </p:ext>
     </p:extLst>
   </p:cSld>

--- a/Prezentacija/Varijacijsko učenje na zašumljenim oznakama.pptx
+++ b/Prezentacija/Varijacijsko učenje na zašumljenim oznakama.pptx
@@ -219,7 +219,7 @@
           <a:p>
             <a:fld id="{4EC22A23-FA0E-43FF-AD6A-5A9DC9E7A77F}" type="datetimeFigureOut">
               <a:rPr lang="hr-HR" smtClean="0"/>
-              <a:t>4.7.2025.</a:t>
+              <a:t>6.7.2025.</a:t>
             </a:fld>
             <a:endParaRPr lang="hr-HR"/>
           </a:p>
@@ -765,7 +765,7 @@
           <a:p>
             <a:fld id="{08F0DB6F-6EB1-4D7D-9BCC-E96C905FFC52}" type="datetime1">
               <a:rPr lang="hr-HR" smtClean="0"/>
-              <a:t>4.7.2025.</a:t>
+              <a:t>6.7.2025.</a:t>
             </a:fld>
             <a:endParaRPr lang="hr-HR"/>
           </a:p>
@@ -935,7 +935,7 @@
           <a:p>
             <a:fld id="{1D8897EE-C1D5-4E52-876C-358FABA2E6DD}" type="datetime1">
               <a:rPr lang="hr-HR" smtClean="0"/>
-              <a:t>4.7.2025.</a:t>
+              <a:t>6.7.2025.</a:t>
             </a:fld>
             <a:endParaRPr lang="hr-HR"/>
           </a:p>
@@ -1156,7 +1156,7 @@
           <a:p>
             <a:fld id="{846F014D-1E5A-4CE6-87B2-A696E1D2C514}" type="datetime1">
               <a:rPr lang="hr-HR" smtClean="0"/>
-              <a:t>4.7.2025.</a:t>
+              <a:t>6.7.2025.</a:t>
             </a:fld>
             <a:endParaRPr lang="hr-HR"/>
           </a:p>
@@ -1367,7 +1367,7 @@
           <a:p>
             <a:fld id="{CC657D9C-C0AF-48FA-BBAF-7CAA57C23F8E}" type="datetime1">
               <a:rPr lang="hr-HR" smtClean="0"/>
-              <a:t>4.7.2025.</a:t>
+              <a:t>6.7.2025.</a:t>
             </a:fld>
             <a:endParaRPr lang="hr-HR"/>
           </a:p>
@@ -1662,7 +1662,7 @@
           <a:p>
             <a:fld id="{70E6B098-981F-45CA-83FF-788349BDC294}" type="datetime1">
               <a:rPr lang="hr-HR" smtClean="0"/>
-              <a:t>4.7.2025.</a:t>
+              <a:t>6.7.2025.</a:t>
             </a:fld>
             <a:endParaRPr lang="hr-HR"/>
           </a:p>
@@ -1991,7 +1991,7 @@
           <a:p>
             <a:fld id="{8F06E4C2-5A97-4809-9A3F-0AD2CD797138}" type="datetime1">
               <a:rPr lang="hr-HR" smtClean="0"/>
-              <a:t>4.7.2025.</a:t>
+              <a:t>6.7.2025.</a:t>
             </a:fld>
             <a:endParaRPr lang="hr-HR"/>
           </a:p>
@@ -2483,7 +2483,7 @@
           <a:p>
             <a:fld id="{7760B546-6293-4D30-BD97-A6B6A01C90BF}" type="datetime1">
               <a:rPr lang="hr-HR" smtClean="0"/>
-              <a:t>4.7.2025.</a:t>
+              <a:t>6.7.2025.</a:t>
             </a:fld>
             <a:endParaRPr lang="hr-HR"/>
           </a:p>
@@ -2642,7 +2642,7 @@
           <a:p>
             <a:fld id="{C5F7632D-88EC-4C5E-9269-EEF5AECE77DB}" type="datetime1">
               <a:rPr lang="hr-HR" smtClean="0"/>
-              <a:t>4.7.2025.</a:t>
+              <a:t>6.7.2025.</a:t>
             </a:fld>
             <a:endParaRPr lang="hr-HR"/>
           </a:p>
@@ -2778,7 +2778,7 @@
           <a:p>
             <a:fld id="{40E43FE3-F849-413C-9C82-49701E1B3EF3}" type="datetime1">
               <a:rPr lang="hr-HR" smtClean="0"/>
-              <a:t>4.7.2025.</a:t>
+              <a:t>6.7.2025.</a:t>
             </a:fld>
             <a:endParaRPr lang="hr-HR"/>
           </a:p>
@@ -3106,7 +3106,7 @@
           <a:p>
             <a:fld id="{058D4826-6613-4A6F-B53D-11761422A9FC}" type="datetime1">
               <a:rPr lang="hr-HR" smtClean="0"/>
-              <a:t>4.7.2025.</a:t>
+              <a:t>6.7.2025.</a:t>
             </a:fld>
             <a:endParaRPr lang="hr-HR"/>
           </a:p>
@@ -3421,7 +3421,7 @@
           <a:p>
             <a:fld id="{CB3A042B-28D4-4EE9-A191-0F90C01EB3D9}" type="datetime1">
               <a:rPr lang="hr-HR" smtClean="0"/>
-              <a:t>4.7.2025.</a:t>
+              <a:t>6.7.2025.</a:t>
             </a:fld>
             <a:endParaRPr lang="hr-HR"/>
           </a:p>
@@ -3673,7 +3673,7 @@
           <a:p>
             <a:fld id="{DE49A88E-18D6-498E-8265-50D671D76CD0}" type="datetime1">
               <a:rPr lang="hr-HR" smtClean="0"/>
-              <a:t>4.7.2025.</a:t>
+              <a:t>6.7.2025.</a:t>
             </a:fld>
             <a:endParaRPr lang="hr-HR"/>
           </a:p>
@@ -6679,7 +6679,7 @@
         </p:nvSpPr>
         <p:spPr>
           <a:xfrm>
-            <a:off x="1149009" y="1615736"/>
+            <a:off x="1038170" y="1615736"/>
             <a:ext cx="10143831" cy="750508"/>
           </a:xfrm>
           <a:prstGeom prst="rect">
@@ -8288,8 +8288,8 @@
         </p:nvSpPr>
         <p:spPr>
           <a:xfrm>
-            <a:off x="1261872" y="294198"/>
-            <a:ext cx="9775834" cy="1397124"/>
+            <a:off x="1261872" y="65738"/>
+            <a:ext cx="9775834" cy="1382062"/>
           </a:xfrm>
         </p:spPr>
         <p:txBody>
@@ -8388,231 +8388,599 @@
           </a:p>
         </p:txBody>
       </p:sp>
-      <p:pic>
-        <p:nvPicPr>
-          <p:cNvPr id="10" name="Picture 9">
+      <p:sp>
+        <p:nvSpPr>
+          <p:cNvPr id="6" name="Content Placeholder 2">
             <a:extLst>
               <a:ext uri="{FF2B5EF4-FFF2-40B4-BE49-F238E27FC236}">
-                <a16:creationId xmlns:a16="http://schemas.microsoft.com/office/drawing/2014/main" id="{FA612C26-FD20-9E2C-807F-E692AF38E6A5}"/>
+                <a16:creationId xmlns:a16="http://schemas.microsoft.com/office/drawing/2014/main" id="{E48E4ED2-4130-4F26-CA7A-B8D32B79D480}"/>
               </a:ext>
             </a:extLst>
           </p:cNvPr>
-          <p:cNvPicPr>
-            <a:picLocks noChangeAspect="1"/>
-          </p:cNvPicPr>
+          <p:cNvSpPr txBox="1">
+            <a:spLocks/>
+          </p:cNvSpPr>
           <p:nvPr/>
-        </p:nvPicPr>
-        <p:blipFill>
-          <a:blip r:embed="rId2"/>
-          <a:stretch>
-            <a:fillRect/>
-          </a:stretch>
-        </p:blipFill>
+        </p:nvSpPr>
         <p:spPr>
           <a:xfrm>
-            <a:off x="1007169" y="1845651"/>
-            <a:ext cx="4525006" cy="2105319"/>
+            <a:off x="1038169" y="1010777"/>
+            <a:ext cx="10143831" cy="750508"/>
           </a:xfrm>
           <a:prstGeom prst="rect">
             <a:avLst/>
           </a:prstGeom>
         </p:spPr>
-      </p:pic>
-      <p:pic>
-        <p:nvPicPr>
-          <p:cNvPr id="12" name="Picture 11">
-            <a:extLst>
-              <a:ext uri="{FF2B5EF4-FFF2-40B4-BE49-F238E27FC236}">
-                <a16:creationId xmlns:a16="http://schemas.microsoft.com/office/drawing/2014/main" id="{229FA482-D53C-DF5D-E8B0-8E8EFBA4FCAC}"/>
-              </a:ext>
-            </a:extLst>
-          </p:cNvPr>
-          <p:cNvPicPr>
-            <a:picLocks noChangeAspect="1"/>
-          </p:cNvPicPr>
-          <p:nvPr/>
-        </p:nvPicPr>
-        <p:blipFill>
-          <a:blip r:embed="rId3"/>
-          <a:stretch>
-            <a:fillRect/>
-          </a:stretch>
-        </p:blipFill>
-        <p:spPr>
-          <a:xfrm>
-            <a:off x="6198278" y="1826598"/>
-            <a:ext cx="4620270" cy="2143424"/>
-          </a:xfrm>
-          <a:prstGeom prst="rect">
-            <a:avLst/>
-          </a:prstGeom>
-        </p:spPr>
-      </p:pic>
-      <p:pic>
-        <p:nvPicPr>
-          <p:cNvPr id="14" name="Picture 13">
-            <a:extLst>
-              <a:ext uri="{FF2B5EF4-FFF2-40B4-BE49-F238E27FC236}">
-                <a16:creationId xmlns:a16="http://schemas.microsoft.com/office/drawing/2014/main" id="{B0EE4245-E6D3-F790-DD4A-5AF837A6051E}"/>
-              </a:ext>
-            </a:extLst>
-          </p:cNvPr>
-          <p:cNvPicPr>
-            <a:picLocks noChangeAspect="1"/>
-          </p:cNvPicPr>
-          <p:nvPr/>
-        </p:nvPicPr>
-        <p:blipFill>
-          <a:blip r:embed="rId4"/>
-          <a:stretch>
-            <a:fillRect/>
-          </a:stretch>
-        </p:blipFill>
-        <p:spPr>
-          <a:xfrm>
-            <a:off x="3604027" y="4596236"/>
-            <a:ext cx="4582164" cy="2143424"/>
-          </a:xfrm>
-          <a:prstGeom prst="rect">
-            <a:avLst/>
-          </a:prstGeom>
-        </p:spPr>
-      </p:pic>
-      <p:sp>
-        <p:nvSpPr>
-          <p:cNvPr id="15" name="TextBox 14">
-            <a:extLst>
-              <a:ext uri="{FF2B5EF4-FFF2-40B4-BE49-F238E27FC236}">
-                <a16:creationId xmlns:a16="http://schemas.microsoft.com/office/drawing/2014/main" id="{AB653B42-6214-3D0F-D63D-5007E0890338}"/>
-              </a:ext>
-            </a:extLst>
-          </p:cNvPr>
-          <p:cNvSpPr txBox="1"/>
-          <p:nvPr/>
-        </p:nvSpPr>
-        <p:spPr>
-          <a:xfrm>
-            <a:off x="2443220" y="1335661"/>
-            <a:ext cx="1652903" cy="492443"/>
-          </a:xfrm>
-          <a:prstGeom prst="rect">
-            <a:avLst/>
-          </a:prstGeom>
-          <a:noFill/>
-        </p:spPr>
-        <p:txBody>
-          <a:bodyPr wrap="square" rtlCol="0">
-            <a:spAutoFit/>
+        <p:txBody>
+          <a:bodyPr vert="horz" lIns="91440" tIns="45720" rIns="91440" bIns="45720" rtlCol="0">
+            <a:normAutofit fontScale="92500"/>
           </a:bodyPr>
-          <a:lstStyle/>
-          <a:p>
-            <a:pPr algn="ctr"/>
-            <a:r>
-              <a:rPr lang="hr-HR" sz="2600" b="1" dirty="0">
+          <a:lstStyle>
+            <a:lvl1pPr marL="182880" indent="-182880" algn="l" defTabSz="914400" rtl="0" eaLnBrk="1" latinLnBrk="0" hangingPunct="1">
+              <a:lnSpc>
+                <a:spcPct val="95000"/>
+              </a:lnSpc>
+              <a:spcBef>
+                <a:spcPts val="1400"/>
+              </a:spcBef>
+              <a:spcAft>
+                <a:spcPts val="200"/>
+              </a:spcAft>
+              <a:buClr>
+                <a:schemeClr val="accent1"/>
+              </a:buClr>
+              <a:buSzPct val="80000"/>
+              <a:buFont typeface="Arial" pitchFamily="34" charset="0"/>
+              <a:buChar char="•"/>
+              <a:defRPr sz="2000" kern="1200" spc="10" baseline="0">
                 <a:solidFill>
                   <a:schemeClr val="tx1">
                     <a:lumMod val="65000"/>
                     <a:lumOff val="35000"/>
                   </a:schemeClr>
                 </a:solidFill>
-                <a:latin typeface="Arial" panose="020B0604020202020204" pitchFamily="34" charset="0"/>
-                <a:cs typeface="Arial" panose="020B0604020202020204" pitchFamily="34" charset="0"/>
-              </a:rPr>
-              <a:t>BadNets</a:t>
-            </a:r>
-          </a:p>
-        </p:txBody>
-      </p:sp>
-      <p:sp>
-        <p:nvSpPr>
-          <p:cNvPr id="17" name="TextBox 16">
-            <a:extLst>
-              <a:ext uri="{FF2B5EF4-FFF2-40B4-BE49-F238E27FC236}">
-                <a16:creationId xmlns:a16="http://schemas.microsoft.com/office/drawing/2014/main" id="{3D44A51E-3430-78F3-E6E6-1A27B147E5BA}"/>
-              </a:ext>
-            </a:extLst>
-          </p:cNvPr>
-          <p:cNvSpPr txBox="1"/>
-          <p:nvPr/>
-        </p:nvSpPr>
-        <p:spPr>
-          <a:xfrm>
-            <a:off x="7681962" y="1335660"/>
-            <a:ext cx="1652903" cy="492443"/>
-          </a:xfrm>
-          <a:prstGeom prst="rect">
-            <a:avLst/>
-          </a:prstGeom>
-          <a:noFill/>
-        </p:spPr>
-        <p:txBody>
-          <a:bodyPr wrap="square" rtlCol="0">
-            <a:spAutoFit/>
-          </a:bodyPr>
-          <a:lstStyle/>
-          <a:p>
-            <a:pPr algn="ctr"/>
-            <a:r>
-              <a:rPr lang="hr-HR" sz="2600" b="1" dirty="0">
+                <a:latin typeface="+mn-lt"/>
+                <a:ea typeface="+mn-ea"/>
+                <a:cs typeface="+mn-cs"/>
+              </a:defRPr>
+            </a:lvl1pPr>
+            <a:lvl2pPr marL="457200" indent="-182880" algn="l" defTabSz="914400" rtl="0" eaLnBrk="1" latinLnBrk="0" hangingPunct="1">
+              <a:lnSpc>
+                <a:spcPct val="90000"/>
+              </a:lnSpc>
+              <a:spcBef>
+                <a:spcPts val="300"/>
+              </a:spcBef>
+              <a:spcAft>
+                <a:spcPts val="300"/>
+              </a:spcAft>
+              <a:buClr>
+                <a:schemeClr val="accent1"/>
+              </a:buClr>
+              <a:buFont typeface="Wingdings 2" pitchFamily="18" charset="2"/>
+              <a:buChar char=""/>
+              <a:defRPr sz="1800" kern="1200">
                 <a:solidFill>
                   <a:schemeClr val="tx1">
                     <a:lumMod val="65000"/>
                     <a:lumOff val="35000"/>
                   </a:schemeClr>
                 </a:solidFill>
-                <a:latin typeface="Arial" panose="020B0604020202020204" pitchFamily="34" charset="0"/>
-                <a:cs typeface="Arial" panose="020B0604020202020204" pitchFamily="34" charset="0"/>
-              </a:rPr>
-              <a:t>Blend</a:t>
-            </a:r>
-          </a:p>
-        </p:txBody>
-      </p:sp>
-      <p:sp>
-        <p:nvSpPr>
-          <p:cNvPr id="18" name="TextBox 17">
-            <a:extLst>
-              <a:ext uri="{FF2B5EF4-FFF2-40B4-BE49-F238E27FC236}">
-                <a16:creationId xmlns:a16="http://schemas.microsoft.com/office/drawing/2014/main" id="{B607CDCD-2CCC-7111-0B0F-3C56C6354B35}"/>
-              </a:ext>
-            </a:extLst>
-          </p:cNvPr>
-          <p:cNvSpPr txBox="1"/>
-          <p:nvPr/>
-        </p:nvSpPr>
-        <p:spPr>
-          <a:xfrm>
-            <a:off x="5068657" y="4105299"/>
-            <a:ext cx="1652903" cy="492443"/>
-          </a:xfrm>
-          <a:prstGeom prst="rect">
-            <a:avLst/>
-          </a:prstGeom>
-          <a:noFill/>
-        </p:spPr>
-        <p:txBody>
-          <a:bodyPr wrap="square" rtlCol="0">
-            <a:spAutoFit/>
-          </a:bodyPr>
-          <a:lstStyle/>
-          <a:p>
-            <a:pPr algn="ctr"/>
-            <a:r>
-              <a:rPr lang="hr-HR" sz="2600" b="1" dirty="0">
+                <a:latin typeface="+mn-lt"/>
+                <a:ea typeface="+mn-ea"/>
+                <a:cs typeface="+mn-cs"/>
+              </a:defRPr>
+            </a:lvl2pPr>
+            <a:lvl3pPr marL="731520" indent="-182880" algn="l" defTabSz="914400" rtl="0" eaLnBrk="1" latinLnBrk="0" hangingPunct="1">
+              <a:lnSpc>
+                <a:spcPct val="90000"/>
+              </a:lnSpc>
+              <a:spcBef>
+                <a:spcPts val="300"/>
+              </a:spcBef>
+              <a:spcAft>
+                <a:spcPts val="300"/>
+              </a:spcAft>
+              <a:buClr>
+                <a:schemeClr val="accent1"/>
+              </a:buClr>
+              <a:buFont typeface="Wingdings 2" pitchFamily="18" charset="2"/>
+              <a:buChar char=""/>
+              <a:defRPr sz="1600" kern="1200">
                 <a:solidFill>
                   <a:schemeClr val="tx1">
                     <a:lumMod val="65000"/>
                     <a:lumOff val="35000"/>
                   </a:schemeClr>
                 </a:solidFill>
-                <a:latin typeface="Arial" panose="020B0604020202020204" pitchFamily="34" charset="0"/>
-                <a:cs typeface="Arial" panose="020B0604020202020204" pitchFamily="34" charset="0"/>
-              </a:rPr>
-              <a:t>WaNet</a:t>
-            </a:r>
-          </a:p>
-        </p:txBody>
-      </p:sp>
+                <a:latin typeface="+mn-lt"/>
+                <a:ea typeface="+mn-ea"/>
+                <a:cs typeface="+mn-cs"/>
+              </a:defRPr>
+            </a:lvl3pPr>
+            <a:lvl4pPr marL="1005840" indent="-182880" algn="l" defTabSz="914400" rtl="0" eaLnBrk="1" latinLnBrk="0" hangingPunct="1">
+              <a:lnSpc>
+                <a:spcPct val="90000"/>
+              </a:lnSpc>
+              <a:spcBef>
+                <a:spcPts val="300"/>
+              </a:spcBef>
+              <a:spcAft>
+                <a:spcPts val="300"/>
+              </a:spcAft>
+              <a:buClr>
+                <a:schemeClr val="accent1"/>
+              </a:buClr>
+              <a:buFont typeface="Wingdings 2" pitchFamily="18" charset="2"/>
+              <a:buChar char=""/>
+              <a:defRPr sz="1400" kern="1200">
+                <a:solidFill>
+                  <a:schemeClr val="tx1">
+                    <a:lumMod val="65000"/>
+                    <a:lumOff val="35000"/>
+                  </a:schemeClr>
+                </a:solidFill>
+                <a:latin typeface="+mn-lt"/>
+                <a:ea typeface="+mn-ea"/>
+                <a:cs typeface="+mn-cs"/>
+              </a:defRPr>
+            </a:lvl4pPr>
+            <a:lvl5pPr marL="1280160" indent="-182880" algn="l" defTabSz="914400" rtl="0" eaLnBrk="1" latinLnBrk="0" hangingPunct="1">
+              <a:lnSpc>
+                <a:spcPct val="90000"/>
+              </a:lnSpc>
+              <a:spcBef>
+                <a:spcPts val="300"/>
+              </a:spcBef>
+              <a:spcAft>
+                <a:spcPts val="300"/>
+              </a:spcAft>
+              <a:buClr>
+                <a:schemeClr val="accent1"/>
+              </a:buClr>
+              <a:buFont typeface="Wingdings 2" pitchFamily="18" charset="2"/>
+              <a:buChar char=""/>
+              <a:defRPr sz="1400" kern="1200">
+                <a:solidFill>
+                  <a:schemeClr val="tx1">
+                    <a:lumMod val="65000"/>
+                    <a:lumOff val="35000"/>
+                  </a:schemeClr>
+                </a:solidFill>
+                <a:latin typeface="+mn-lt"/>
+                <a:ea typeface="+mn-ea"/>
+                <a:cs typeface="+mn-cs"/>
+              </a:defRPr>
+            </a:lvl5pPr>
+            <a:lvl6pPr marL="1600000" indent="-228600" algn="l" defTabSz="914400" rtl="0" eaLnBrk="1" latinLnBrk="0" hangingPunct="1">
+              <a:lnSpc>
+                <a:spcPct val="90000"/>
+              </a:lnSpc>
+              <a:spcBef>
+                <a:spcPts val="300"/>
+              </a:spcBef>
+              <a:spcAft>
+                <a:spcPts val="300"/>
+              </a:spcAft>
+              <a:buClr>
+                <a:schemeClr val="accent1"/>
+              </a:buClr>
+              <a:buFont typeface="Wingdings 2" pitchFamily="18" charset="2"/>
+              <a:buChar char=""/>
+              <a:defRPr sz="1400" kern="1200">
+                <a:solidFill>
+                  <a:schemeClr val="tx1">
+                    <a:lumMod val="65000"/>
+                    <a:lumOff val="35000"/>
+                  </a:schemeClr>
+                </a:solidFill>
+                <a:latin typeface="+mn-lt"/>
+                <a:ea typeface="+mn-ea"/>
+                <a:cs typeface="+mn-cs"/>
+              </a:defRPr>
+            </a:lvl6pPr>
+            <a:lvl7pPr marL="1900000" indent="-228600" algn="l" defTabSz="914400" rtl="0" eaLnBrk="1" latinLnBrk="0" hangingPunct="1">
+              <a:lnSpc>
+                <a:spcPct val="90000"/>
+              </a:lnSpc>
+              <a:spcBef>
+                <a:spcPts val="300"/>
+              </a:spcBef>
+              <a:spcAft>
+                <a:spcPts val="300"/>
+              </a:spcAft>
+              <a:buClr>
+                <a:schemeClr val="accent1"/>
+              </a:buClr>
+              <a:buFont typeface="Wingdings 2" pitchFamily="18" charset="2"/>
+              <a:buChar char=""/>
+              <a:defRPr sz="1400" kern="1200">
+                <a:solidFill>
+                  <a:schemeClr val="tx1">
+                    <a:lumMod val="65000"/>
+                    <a:lumOff val="35000"/>
+                  </a:schemeClr>
+                </a:solidFill>
+                <a:latin typeface="+mn-lt"/>
+                <a:ea typeface="+mn-ea"/>
+                <a:cs typeface="+mn-cs"/>
+              </a:defRPr>
+            </a:lvl7pPr>
+            <a:lvl8pPr marL="2200000" indent="-228600" algn="l" defTabSz="914400" rtl="0" eaLnBrk="1" latinLnBrk="0" hangingPunct="1">
+              <a:lnSpc>
+                <a:spcPct val="90000"/>
+              </a:lnSpc>
+              <a:spcBef>
+                <a:spcPts val="300"/>
+              </a:spcBef>
+              <a:spcAft>
+                <a:spcPts val="300"/>
+              </a:spcAft>
+              <a:buClr>
+                <a:schemeClr val="accent1"/>
+              </a:buClr>
+              <a:buFont typeface="Wingdings 2" pitchFamily="18" charset="2"/>
+              <a:buChar char=""/>
+              <a:defRPr sz="1400" kern="1200">
+                <a:solidFill>
+                  <a:schemeClr val="tx1">
+                    <a:lumMod val="65000"/>
+                    <a:lumOff val="35000"/>
+                  </a:schemeClr>
+                </a:solidFill>
+                <a:latin typeface="+mn-lt"/>
+                <a:ea typeface="+mn-ea"/>
+                <a:cs typeface="+mn-cs"/>
+              </a:defRPr>
+            </a:lvl8pPr>
+            <a:lvl9pPr marL="2500000" indent="-228600" algn="l" defTabSz="914400" rtl="0" eaLnBrk="1" latinLnBrk="0" hangingPunct="1">
+              <a:lnSpc>
+                <a:spcPct val="90000"/>
+              </a:lnSpc>
+              <a:spcBef>
+                <a:spcPts val="300"/>
+              </a:spcBef>
+              <a:spcAft>
+                <a:spcPts val="300"/>
+              </a:spcAft>
+              <a:buClr>
+                <a:schemeClr val="accent1"/>
+              </a:buClr>
+              <a:buFont typeface="Wingdings 2" pitchFamily="18" charset="2"/>
+              <a:buChar char=""/>
+              <a:defRPr sz="1400" kern="1200">
+                <a:solidFill>
+                  <a:schemeClr val="tx1">
+                    <a:lumMod val="65000"/>
+                    <a:lumOff val="35000"/>
+                  </a:schemeClr>
+                </a:solidFill>
+                <a:latin typeface="+mn-lt"/>
+                <a:ea typeface="+mn-ea"/>
+                <a:cs typeface="+mn-cs"/>
+              </a:defRPr>
+            </a:lvl9pPr>
+          </a:lstStyle>
+          <a:p>
+            <a:r>
+              <a:rPr lang="hr-HR" sz="2800" dirty="0">
+                <a:latin typeface="Arial" panose="020B0604020202020204" pitchFamily="34" charset="0"/>
+                <a:cs typeface="Arial" panose="020B0604020202020204" pitchFamily="34" charset="0"/>
+              </a:rPr>
+              <a:t>oznaka </a:t>
+            </a:r>
+            <a:r>
+              <a:rPr lang="hr-HR" sz="2800" b="1" dirty="0">
+                <a:latin typeface="Arial" panose="020B0604020202020204" pitchFamily="34" charset="0"/>
+                <a:cs typeface="Arial" panose="020B0604020202020204" pitchFamily="34" charset="0"/>
+              </a:rPr>
+              <a:t>*</a:t>
+            </a:r>
+            <a:r>
+              <a:rPr lang="hr-HR" sz="2800" dirty="0">
+                <a:latin typeface="Arial" panose="020B0604020202020204" pitchFamily="34" charset="0"/>
+                <a:cs typeface="Arial" panose="020B0604020202020204" pitchFamily="34" charset="0"/>
+              </a:rPr>
+              <a:t> prije imena algoritma – rezultat iz rada</a:t>
+            </a:r>
+            <a:r>
+              <a:rPr lang="en-US" sz="2800" dirty="0">
+                <a:latin typeface="Arial" panose="020B0604020202020204" pitchFamily="34" charset="0"/>
+                <a:cs typeface="Arial" panose="020B0604020202020204" pitchFamily="34" charset="0"/>
+              </a:rPr>
+              <a:t> </a:t>
+            </a:r>
+            <a:r>
+              <a:rPr lang="en-US" sz="2800" dirty="0">
+                <a:solidFill>
+                  <a:schemeClr val="accent1"/>
+                </a:solidFill>
+                <a:latin typeface="Arial" panose="020B0604020202020204" pitchFamily="34" charset="0"/>
+                <a:cs typeface="Arial" panose="020B0604020202020204" pitchFamily="34" charset="0"/>
+              </a:rPr>
+              <a:t>[</a:t>
+            </a:r>
+            <a:r>
+              <a:rPr lang="en-US" sz="2800" dirty="0">
+                <a:solidFill>
+                  <a:schemeClr val="accent1"/>
+                </a:solidFill>
+                <a:latin typeface="Arial" panose="020B0604020202020204" pitchFamily="34" charset="0"/>
+                <a:cs typeface="Arial" panose="020B0604020202020204" pitchFamily="34" charset="0"/>
+                <a:hlinkClick r:id="rId2">
+                  <a:extLst>
+                    <a:ext uri="{A12FA001-AC4F-418D-AE19-62706E023703}">
+                      <ahyp:hlinkClr xmlns:ahyp="http://schemas.microsoft.com/office/drawing/2018/hyperlinkcolor" val="tx"/>
+                    </a:ext>
+                  </a:extLst>
+                </a:hlinkClick>
+              </a:rPr>
+              <a:t>sabolic25iccv</a:t>
+            </a:r>
+            <a:r>
+              <a:rPr lang="en-US" sz="2800" dirty="0">
+                <a:solidFill>
+                  <a:schemeClr val="accent1"/>
+                </a:solidFill>
+                <a:latin typeface="Arial" panose="020B0604020202020204" pitchFamily="34" charset="0"/>
+                <a:cs typeface="Arial" panose="020B0604020202020204" pitchFamily="34" charset="0"/>
+              </a:rPr>
+              <a:t>]</a:t>
+            </a:r>
+            <a:endParaRPr lang="hr-HR" sz="2600" b="1" dirty="0">
+              <a:latin typeface="Arial" panose="020B0604020202020204" pitchFamily="34" charset="0"/>
+              <a:cs typeface="Arial" panose="020B0604020202020204" pitchFamily="34" charset="0"/>
+            </a:endParaRPr>
+          </a:p>
+        </p:txBody>
+      </p:sp>
+      <p:grpSp>
+        <p:nvGrpSpPr>
+          <p:cNvPr id="26" name="Group 25">
+            <a:extLst>
+              <a:ext uri="{FF2B5EF4-FFF2-40B4-BE49-F238E27FC236}">
+                <a16:creationId xmlns:a16="http://schemas.microsoft.com/office/drawing/2014/main" id="{17C3C945-209C-6BE1-F94F-04F5637E7B61}"/>
+              </a:ext>
+            </a:extLst>
+          </p:cNvPr>
+          <p:cNvGrpSpPr/>
+          <p:nvPr/>
+        </p:nvGrpSpPr>
+        <p:grpSpPr>
+          <a:xfrm>
+            <a:off x="992447" y="1535306"/>
+            <a:ext cx="9792327" cy="5136862"/>
+            <a:chOff x="992447" y="1535306"/>
+            <a:chExt cx="9792327" cy="5136862"/>
+          </a:xfrm>
+        </p:grpSpPr>
+        <p:pic>
+          <p:nvPicPr>
+            <p:cNvPr id="13" name="Picture 12">
+              <a:extLst>
+                <a:ext uri="{FF2B5EF4-FFF2-40B4-BE49-F238E27FC236}">
+                  <a16:creationId xmlns:a16="http://schemas.microsoft.com/office/drawing/2014/main" id="{02BEFB21-BD6B-5AC9-66C6-4DAA7C4B88C7}"/>
+                </a:ext>
+              </a:extLst>
+            </p:cNvPr>
+            <p:cNvPicPr>
+              <a:picLocks noChangeAspect="1"/>
+            </p:cNvPicPr>
+            <p:nvPr/>
+          </p:nvPicPr>
+          <p:blipFill>
+            <a:blip r:embed="rId3"/>
+            <a:stretch>
+              <a:fillRect/>
+            </a:stretch>
+          </p:blipFill>
+          <p:spPr>
+            <a:xfrm>
+              <a:off x="992447" y="2031761"/>
+              <a:ext cx="4553585" cy="2095792"/>
+            </a:xfrm>
+            <a:prstGeom prst="rect">
+              <a:avLst/>
+            </a:prstGeom>
+          </p:spPr>
+        </p:pic>
+        <p:sp>
+          <p:nvSpPr>
+            <p:cNvPr id="15" name="TextBox 14">
+              <a:extLst>
+                <a:ext uri="{FF2B5EF4-FFF2-40B4-BE49-F238E27FC236}">
+                  <a16:creationId xmlns:a16="http://schemas.microsoft.com/office/drawing/2014/main" id="{AB653B42-6214-3D0F-D63D-5007E0890338}"/>
+                </a:ext>
+              </a:extLst>
+            </p:cNvPr>
+            <p:cNvSpPr txBox="1"/>
+            <p:nvPr/>
+          </p:nvSpPr>
+          <p:spPr>
+            <a:xfrm>
+              <a:off x="2442787" y="1535307"/>
+              <a:ext cx="1652903" cy="492443"/>
+            </a:xfrm>
+            <a:prstGeom prst="rect">
+              <a:avLst/>
+            </a:prstGeom>
+            <a:noFill/>
+          </p:spPr>
+          <p:txBody>
+            <a:bodyPr wrap="square" rtlCol="0">
+              <a:spAutoFit/>
+            </a:bodyPr>
+            <a:lstStyle/>
+            <a:p>
+              <a:pPr algn="ctr"/>
+              <a:r>
+                <a:rPr lang="hr-HR" sz="2600" b="1" dirty="0">
+                  <a:solidFill>
+                    <a:schemeClr val="tx1">
+                      <a:lumMod val="65000"/>
+                      <a:lumOff val="35000"/>
+                    </a:schemeClr>
+                  </a:solidFill>
+                  <a:latin typeface="Arial" panose="020B0604020202020204" pitchFamily="34" charset="0"/>
+                  <a:cs typeface="Arial" panose="020B0604020202020204" pitchFamily="34" charset="0"/>
+                </a:rPr>
+                <a:t>BadNets</a:t>
+              </a:r>
+            </a:p>
+          </p:txBody>
+        </p:sp>
+        <p:sp>
+          <p:nvSpPr>
+            <p:cNvPr id="17" name="TextBox 16">
+              <a:extLst>
+                <a:ext uri="{FF2B5EF4-FFF2-40B4-BE49-F238E27FC236}">
+                  <a16:creationId xmlns:a16="http://schemas.microsoft.com/office/drawing/2014/main" id="{3D44A51E-3430-78F3-E6E6-1A27B147E5BA}"/>
+                </a:ext>
+              </a:extLst>
+            </p:cNvPr>
+            <p:cNvSpPr txBox="1"/>
+            <p:nvPr/>
+          </p:nvSpPr>
+          <p:spPr>
+            <a:xfrm>
+              <a:off x="7681529" y="1535306"/>
+              <a:ext cx="1652903" cy="492443"/>
+            </a:xfrm>
+            <a:prstGeom prst="rect">
+              <a:avLst/>
+            </a:prstGeom>
+            <a:noFill/>
+          </p:spPr>
+          <p:txBody>
+            <a:bodyPr wrap="square" rtlCol="0">
+              <a:spAutoFit/>
+            </a:bodyPr>
+            <a:lstStyle/>
+            <a:p>
+              <a:pPr algn="ctr"/>
+              <a:r>
+                <a:rPr lang="hr-HR" sz="2600" b="1" dirty="0">
+                  <a:solidFill>
+                    <a:schemeClr val="tx1">
+                      <a:lumMod val="65000"/>
+                      <a:lumOff val="35000"/>
+                    </a:schemeClr>
+                  </a:solidFill>
+                  <a:latin typeface="Arial" panose="020B0604020202020204" pitchFamily="34" charset="0"/>
+                  <a:cs typeface="Arial" panose="020B0604020202020204" pitchFamily="34" charset="0"/>
+                </a:rPr>
+                <a:t>Blend</a:t>
+              </a:r>
+            </a:p>
+          </p:txBody>
+        </p:sp>
+        <p:sp>
+          <p:nvSpPr>
+            <p:cNvPr id="18" name="TextBox 17">
+              <a:extLst>
+                <a:ext uri="{FF2B5EF4-FFF2-40B4-BE49-F238E27FC236}">
+                  <a16:creationId xmlns:a16="http://schemas.microsoft.com/office/drawing/2014/main" id="{B607CDCD-2CCC-7111-0B0F-3C56C6354B35}"/>
+                </a:ext>
+              </a:extLst>
+            </p:cNvPr>
+            <p:cNvSpPr txBox="1"/>
+            <p:nvPr/>
+          </p:nvSpPr>
+          <p:spPr>
+            <a:xfrm>
+              <a:off x="5054372" y="4131564"/>
+              <a:ext cx="1652903" cy="492443"/>
+            </a:xfrm>
+            <a:prstGeom prst="rect">
+              <a:avLst/>
+            </a:prstGeom>
+            <a:noFill/>
+          </p:spPr>
+          <p:txBody>
+            <a:bodyPr wrap="square" rtlCol="0">
+              <a:spAutoFit/>
+            </a:bodyPr>
+            <a:lstStyle/>
+            <a:p>
+              <a:pPr algn="ctr"/>
+              <a:r>
+                <a:rPr lang="hr-HR" sz="2600" b="1" dirty="0">
+                  <a:solidFill>
+                    <a:schemeClr val="tx1">
+                      <a:lumMod val="65000"/>
+                      <a:lumOff val="35000"/>
+                    </a:schemeClr>
+                  </a:solidFill>
+                  <a:latin typeface="Arial" panose="020B0604020202020204" pitchFamily="34" charset="0"/>
+                  <a:cs typeface="Arial" panose="020B0604020202020204" pitchFamily="34" charset="0"/>
+                </a:rPr>
+                <a:t>WaNet</a:t>
+              </a:r>
+            </a:p>
+          </p:txBody>
+        </p:sp>
+        <p:pic>
+          <p:nvPicPr>
+            <p:cNvPr id="19" name="Picture 18">
+              <a:extLst>
+                <a:ext uri="{FF2B5EF4-FFF2-40B4-BE49-F238E27FC236}">
+                  <a16:creationId xmlns:a16="http://schemas.microsoft.com/office/drawing/2014/main" id="{CBA399A3-28C6-D9E0-7325-00D9FE7AD9FD}"/>
+                </a:ext>
+              </a:extLst>
+            </p:cNvPr>
+            <p:cNvPicPr>
+              <a:picLocks noChangeAspect="1"/>
+            </p:cNvPicPr>
+            <p:nvPr/>
+          </p:nvPicPr>
+          <p:blipFill>
+            <a:blip r:embed="rId4"/>
+            <a:srcRect t="450"/>
+            <a:stretch>
+              <a:fillRect/>
+            </a:stretch>
+          </p:blipFill>
+          <p:spPr>
+            <a:xfrm>
+              <a:off x="6231189" y="2026997"/>
+              <a:ext cx="4553585" cy="2105318"/>
+            </a:xfrm>
+            <a:prstGeom prst="rect">
+              <a:avLst/>
+            </a:prstGeom>
+          </p:spPr>
+        </p:pic>
+        <p:pic>
+          <p:nvPicPr>
+            <p:cNvPr id="25" name="Picture 24">
+              <a:extLst>
+                <a:ext uri="{FF2B5EF4-FFF2-40B4-BE49-F238E27FC236}">
+                  <a16:creationId xmlns:a16="http://schemas.microsoft.com/office/drawing/2014/main" id="{B6515943-AAEF-8966-0956-CA937860FA2C}"/>
+                </a:ext>
+              </a:extLst>
+            </p:cNvPr>
+            <p:cNvPicPr>
+              <a:picLocks noChangeAspect="1"/>
+            </p:cNvPicPr>
+            <p:nvPr/>
+          </p:nvPicPr>
+          <p:blipFill>
+            <a:blip r:embed="rId5"/>
+            <a:stretch>
+              <a:fillRect/>
+            </a:stretch>
+          </p:blipFill>
+          <p:spPr>
+            <a:xfrm>
+              <a:off x="3608793" y="4624007"/>
+              <a:ext cx="4544059" cy="2048161"/>
+            </a:xfrm>
+            <a:prstGeom prst="rect">
+              <a:avLst/>
+            </a:prstGeom>
+          </p:spPr>
+        </p:pic>
+      </p:grpSp>
     </p:spTree>
     <p:extLst>
       <p:ext uri="{BB962C8B-B14F-4D97-AF65-F5344CB8AC3E}">
@@ -9406,7 +9774,21 @@
                 <a:latin typeface="Arial" panose="020B0604020202020204" pitchFamily="34" charset="0"/>
                 <a:cs typeface="Arial" panose="020B0604020202020204" pitchFamily="34" charset="0"/>
               </a:rPr>
-              <a:t>Odluke pri učenju </a:t>
+              <a:t>Odluke pri</a:t>
+            </a:r>
+            <a:r>
+              <a:rPr lang="en-US" sz="2600" noProof="0" dirty="0">
+                <a:latin typeface="Arial" panose="020B0604020202020204" pitchFamily="34" charset="0"/>
+                <a:cs typeface="Arial" panose="020B0604020202020204" pitchFamily="34" charset="0"/>
+              </a:rPr>
+              <a:t> </a:t>
+            </a:r>
+            <a:r>
+              <a:rPr lang="hr-HR" sz="2600" noProof="0" dirty="0">
+                <a:latin typeface="Arial" panose="020B0604020202020204" pitchFamily="34" charset="0"/>
+                <a:cs typeface="Arial" panose="020B0604020202020204" pitchFamily="34" charset="0"/>
+              </a:rPr>
+              <a:t>nadziranom učenju </a:t>
             </a:r>
             <a:r>
               <a:rPr lang="hr-HR" sz="2600" b="1" noProof="0" dirty="0">
@@ -9509,6 +9891,34 @@
           </a:p>
           <a:p>
             <a:pPr lvl="1"/>
+            <a:r>
+              <a:rPr lang="hr-HR" sz="2600" dirty="0">
+                <a:latin typeface="Arial" panose="020B0604020202020204" pitchFamily="34" charset="0"/>
+                <a:cs typeface="Arial" panose="020B0604020202020204" pitchFamily="34" charset="0"/>
+              </a:rPr>
+              <a:t>pogreške označivača</a:t>
+            </a:r>
+            <a:r>
+              <a:rPr lang="en-US" sz="2600" dirty="0">
+                <a:latin typeface="Arial" panose="020B0604020202020204" pitchFamily="34" charset="0"/>
+                <a:cs typeface="Arial" panose="020B0604020202020204" pitchFamily="34" charset="0"/>
+              </a:rPr>
+              <a:t> </a:t>
+            </a:r>
+            <a:r>
+              <a:rPr lang="hr-HR" sz="2600" dirty="0">
+                <a:latin typeface="Arial" panose="020B0604020202020204" pitchFamily="34" charset="0"/>
+                <a:cs typeface="Arial" panose="020B0604020202020204" pitchFamily="34" charset="0"/>
+              </a:rPr>
+              <a:t> </a:t>
+            </a:r>
+            <a:r>
+              <a:rPr lang="en-US" sz="2600" dirty="0">
+                <a:latin typeface="Arial" panose="020B0604020202020204" pitchFamily="34" charset="0"/>
+                <a:cs typeface="Arial" panose="020B0604020202020204" pitchFamily="34" charset="0"/>
+              </a:rPr>
+              <a:t>    </a:t>
+            </a:r>
             <a:r>
               <a:rPr lang="hr-HR" sz="2600" dirty="0">
                 <a:latin typeface="Arial" panose="020B0604020202020204" pitchFamily="34" charset="0"/>
@@ -9557,6 +9967,55 @@
               <a:rPr lang="hr-HR" dirty="0"/>
               <a:t>1</a:t>
             </a:r>
+          </a:p>
+        </p:txBody>
+      </p:sp>
+      <p:sp>
+        <p:nvSpPr>
+          <p:cNvPr id="4" name="Arrow: Right 3">
+            <a:extLst>
+              <a:ext uri="{FF2B5EF4-FFF2-40B4-BE49-F238E27FC236}">
+                <a16:creationId xmlns:a16="http://schemas.microsoft.com/office/drawing/2014/main" id="{7C05C61E-BA12-0A1F-0003-1040242DC829}"/>
+              </a:ext>
+            </a:extLst>
+          </p:cNvPr>
+          <p:cNvSpPr/>
+          <p:nvPr/>
+        </p:nvSpPr>
+        <p:spPr>
+          <a:xfrm>
+            <a:off x="5043054" y="5762484"/>
+            <a:ext cx="332509" cy="194971"/>
+          </a:xfrm>
+          <a:prstGeom prst="rightArrow">
+            <a:avLst/>
+          </a:prstGeom>
+          <a:ln>
+            <a:noFill/>
+          </a:ln>
+        </p:spPr>
+        <p:style>
+          <a:lnRef idx="2">
+            <a:schemeClr val="accent1">
+              <a:shade val="15000"/>
+            </a:schemeClr>
+          </a:lnRef>
+          <a:fillRef idx="1">
+            <a:schemeClr val="accent1"/>
+          </a:fillRef>
+          <a:effectRef idx="0">
+            <a:schemeClr val="accent1"/>
+          </a:effectRef>
+          <a:fontRef idx="minor">
+            <a:schemeClr val="lt1"/>
+          </a:fontRef>
+        </p:style>
+        <p:txBody>
+          <a:bodyPr rtlCol="0" anchor="ctr"/>
+          <a:lstStyle/>
+          <a:p>
+            <a:pPr algn="ctr"/>
+            <a:endParaRPr lang="hr-HR"/>
           </a:p>
         </p:txBody>
       </p:sp>
@@ -9649,8 +10108,8 @@
         </p:nvSpPr>
         <p:spPr>
           <a:xfrm>
-            <a:off x="1261871" y="1828800"/>
-            <a:ext cx="9572383" cy="4351337"/>
+            <a:off x="1261871" y="1970844"/>
+            <a:ext cx="9572383" cy="4795082"/>
           </a:xfrm>
         </p:spPr>
         <p:txBody>
@@ -9659,9 +10118,72 @@
           </a:bodyPr>
           <a:lstStyle/>
           <a:p>
-            <a:pPr marL="0" indent="0">
-              <a:buNone/>
-            </a:pPr>
+            <a:r>
+              <a:rPr lang="hr-HR" sz="2600" b="1" dirty="0">
+                <a:latin typeface="Arial" panose="020B0604020202020204" pitchFamily="34" charset="0"/>
+                <a:cs typeface="Arial" panose="020B0604020202020204" pitchFamily="34" charset="0"/>
+              </a:rPr>
+              <a:t>zatrovani podatci </a:t>
+            </a:r>
+            <a:r>
+              <a:rPr lang="hr-HR" sz="2600" dirty="0">
+                <a:latin typeface="Arial" panose="020B0604020202020204" pitchFamily="34" charset="0"/>
+                <a:cs typeface="Arial" panose="020B0604020202020204" pitchFamily="34" charset="0"/>
+              </a:rPr>
+              <a:t>– izmijenjeni podatci za učenje koji navode optimizaciju da u model ugradi </a:t>
+            </a:r>
+            <a:r>
+              <a:rPr lang="hr-HR" sz="2600" b="1" dirty="0">
+                <a:latin typeface="Arial" panose="020B0604020202020204" pitchFamily="34" charset="0"/>
+                <a:cs typeface="Arial" panose="020B0604020202020204" pitchFamily="34" charset="0"/>
+              </a:rPr>
+              <a:t>stražnja vrata</a:t>
+            </a:r>
+          </a:p>
+          <a:p>
+            <a:r>
+              <a:rPr lang="hr-HR" sz="2600" dirty="0">
+                <a:latin typeface="Arial" panose="020B0604020202020204" pitchFamily="34" charset="0"/>
+                <a:cs typeface="Arial" panose="020B0604020202020204" pitchFamily="34" charset="0"/>
+              </a:rPr>
+              <a:t>stražnja vrata omogućavaju manipuliranje naučenim modelom</a:t>
+            </a:r>
+            <a:endParaRPr lang="hr-HR" sz="2600" b="1" dirty="0">
+              <a:latin typeface="Arial" panose="020B0604020202020204" pitchFamily="34" charset="0"/>
+              <a:cs typeface="Arial" panose="020B0604020202020204" pitchFamily="34" charset="0"/>
+            </a:endParaRPr>
+          </a:p>
+          <a:p>
+            <a:r>
+              <a:rPr lang="hr-HR" sz="2600" dirty="0">
+                <a:latin typeface="Arial" panose="020B0604020202020204" pitchFamily="34" charset="0"/>
+                <a:cs typeface="Arial" panose="020B0604020202020204" pitchFamily="34" charset="0"/>
+              </a:rPr>
+              <a:t>trovanje uvijek uključuje </a:t>
+            </a:r>
+            <a:r>
+              <a:rPr lang="hr-HR" sz="2600" b="1" dirty="0">
+                <a:latin typeface="Arial" panose="020B0604020202020204" pitchFamily="34" charset="0"/>
+                <a:cs typeface="Arial" panose="020B0604020202020204" pitchFamily="34" charset="0"/>
+              </a:rPr>
+              <a:t>dodavanje okidača u podatke</a:t>
+            </a:r>
+          </a:p>
+          <a:p>
+            <a:r>
+              <a:rPr lang="hr-HR" sz="2600" dirty="0">
+                <a:latin typeface="Arial" panose="020B0604020202020204" pitchFamily="34" charset="0"/>
+                <a:cs typeface="Arial" panose="020B0604020202020204" pitchFamily="34" charset="0"/>
+              </a:rPr>
+              <a:t>većina metoda </a:t>
+            </a:r>
+            <a:r>
+              <a:rPr lang="hr-HR" sz="2600" b="1" dirty="0">
+                <a:latin typeface="Arial" panose="020B0604020202020204" pitchFamily="34" charset="0"/>
+                <a:cs typeface="Arial" panose="020B0604020202020204" pitchFamily="34" charset="0"/>
+              </a:rPr>
+              <a:t>mijenja i oznake</a:t>
+            </a:r>
             <a:endParaRPr lang="hr-HR" sz="2600" dirty="0">
               <a:latin typeface="Arial" panose="020B0604020202020204" pitchFamily="34" charset="0"/>
               <a:cs typeface="Arial" panose="020B0604020202020204" pitchFamily="34" charset="0"/>
@@ -9669,75 +10191,11 @@
           </a:p>
           <a:p>
             <a:r>
-              <a:rPr lang="hr-HR" sz="2600" b="1" dirty="0">
-                <a:latin typeface="Arial" panose="020B0604020202020204" pitchFamily="34" charset="0"/>
-                <a:cs typeface="Arial" panose="020B0604020202020204" pitchFamily="34" charset="0"/>
-              </a:rPr>
-              <a:t>zatrovani podatci </a:t>
-            </a:r>
-            <a:r>
               <a:rPr lang="hr-HR" sz="2600" dirty="0">
                 <a:latin typeface="Arial" panose="020B0604020202020204" pitchFamily="34" charset="0"/>
                 <a:cs typeface="Arial" panose="020B0604020202020204" pitchFamily="34" charset="0"/>
               </a:rPr>
-              <a:t>– izmijenjeni podatci za učenje koji u model ugrađuju </a:t>
-            </a:r>
-            <a:r>
-              <a:rPr lang="hr-HR" sz="2600" b="1" dirty="0">
-                <a:latin typeface="Arial" panose="020B0604020202020204" pitchFamily="34" charset="0"/>
-                <a:cs typeface="Arial" panose="020B0604020202020204" pitchFamily="34" charset="0"/>
-              </a:rPr>
-              <a:t>stražnja vrata</a:t>
-            </a:r>
-          </a:p>
-          <a:p>
-            <a:r>
-              <a:rPr lang="hr-HR" sz="2600" dirty="0">
-                <a:latin typeface="Arial" panose="020B0604020202020204" pitchFamily="34" charset="0"/>
-                <a:cs typeface="Arial" panose="020B0604020202020204" pitchFamily="34" charset="0"/>
-              </a:rPr>
-              <a:t>trovanje uvijek uključuje </a:t>
-            </a:r>
-            <a:r>
-              <a:rPr lang="hr-HR" sz="2600" b="1" dirty="0">
-                <a:latin typeface="Arial" panose="020B0604020202020204" pitchFamily="34" charset="0"/>
-                <a:cs typeface="Arial" panose="020B0604020202020204" pitchFamily="34" charset="0"/>
-              </a:rPr>
-              <a:t>dodavanje okidača u podatke</a:t>
-            </a:r>
-            <a:r>
-              <a:rPr lang="hr-HR" sz="2600" dirty="0">
-                <a:latin typeface="Arial" panose="020B0604020202020204" pitchFamily="34" charset="0"/>
-                <a:cs typeface="Arial" panose="020B0604020202020204" pitchFamily="34" charset="0"/>
-              </a:rPr>
-              <a:t>, a ovisno o vrsti napada, uključuje i </a:t>
-            </a:r>
-            <a:r>
-              <a:rPr lang="hr-HR" sz="2600" b="1" dirty="0">
-                <a:latin typeface="Arial" panose="020B0604020202020204" pitchFamily="34" charset="0"/>
-                <a:cs typeface="Arial" panose="020B0604020202020204" pitchFamily="34" charset="0"/>
-              </a:rPr>
-              <a:t>izmjenu oznaka </a:t>
-            </a:r>
-            <a:r>
-              <a:rPr lang="hr-HR" sz="2600" dirty="0">
-                <a:latin typeface="Arial" panose="020B0604020202020204" pitchFamily="34" charset="0"/>
-                <a:cs typeface="Arial" panose="020B0604020202020204" pitchFamily="34" charset="0"/>
-              </a:rPr>
-              <a:t>te dodatno perturbiranje podataka</a:t>
-            </a:r>
-            <a:endParaRPr lang="hr-HR" sz="2600" b="1" dirty="0">
-              <a:latin typeface="Arial" panose="020B0604020202020204" pitchFamily="34" charset="0"/>
-              <a:cs typeface="Arial" panose="020B0604020202020204" pitchFamily="34" charset="0"/>
-            </a:endParaRPr>
-          </a:p>
-          <a:p>
-            <a:r>
-              <a:rPr lang="hr-HR" sz="2600" noProof="0" dirty="0">
-                <a:latin typeface="Arial" panose="020B0604020202020204" pitchFamily="34" charset="0"/>
-                <a:cs typeface="Arial" panose="020B0604020202020204" pitchFamily="34" charset="0"/>
-              </a:rPr>
-              <a:t>stražnja vrata omogućavaju manipuliranje naučenim modelom</a:t>
+              <a:t>neke metode ne mijenjaju oznake, već dodatno perturbiraju podatke</a:t>
             </a:r>
           </a:p>
           <a:p>
@@ -10244,10 +10702,10 @@
         </p:nvGrpSpPr>
         <p:grpSpPr>
           <a:xfrm>
-            <a:off x="917234" y="5576510"/>
-            <a:ext cx="9487394" cy="892552"/>
-            <a:chOff x="934990" y="5479702"/>
-            <a:chExt cx="9487394" cy="892552"/>
+            <a:off x="3675355" y="5576510"/>
+            <a:ext cx="6206589" cy="892552"/>
+            <a:chOff x="3693111" y="5479702"/>
+            <a:chExt cx="6206589" cy="892552"/>
           </a:xfrm>
         </p:grpSpPr>
         <p:sp>
@@ -10264,8 +10722,8 @@
           </p:nvSpPr>
           <p:spPr>
             <a:xfrm>
-              <a:off x="6526938" y="5479702"/>
-              <a:ext cx="3895446" cy="892552"/>
+              <a:off x="7220494" y="5479702"/>
+              <a:ext cx="2679206" cy="892552"/>
             </a:xfrm>
             <a:prstGeom prst="rect">
               <a:avLst/>
@@ -10290,52 +10748,7 @@
                   <a:latin typeface="Arial" panose="020B0604020202020204" pitchFamily="34" charset="0"/>
                   <a:cs typeface="Arial" panose="020B0604020202020204" pitchFamily="34" charset="0"/>
                 </a:rPr>
-                <a:t>Teško ih je primijeniti u stvarnom svijetu</a:t>
-              </a:r>
-            </a:p>
-          </p:txBody>
-        </p:sp>
-        <p:sp>
-          <p:nvSpPr>
-            <p:cNvPr id="7" name="TextBox 6">
-              <a:extLst>
-                <a:ext uri="{FF2B5EF4-FFF2-40B4-BE49-F238E27FC236}">
-                  <a16:creationId xmlns:a16="http://schemas.microsoft.com/office/drawing/2014/main" id="{37849596-BF02-8A18-7EAD-12B163D1E25F}"/>
-                </a:ext>
-              </a:extLst>
-            </p:cNvPr>
-            <p:cNvSpPr txBox="1"/>
-            <p:nvPr/>
-          </p:nvSpPr>
-          <p:spPr>
-            <a:xfrm>
-              <a:off x="934990" y="5679757"/>
-              <a:ext cx="1973625" cy="492443"/>
-            </a:xfrm>
-            <a:prstGeom prst="rect">
-              <a:avLst/>
-            </a:prstGeom>
-            <a:noFill/>
-          </p:spPr>
-          <p:txBody>
-            <a:bodyPr wrap="square" rtlCol="0">
-              <a:spAutoFit/>
-            </a:bodyPr>
-            <a:lstStyle/>
-            <a:p>
-              <a:pPr algn="ctr"/>
-              <a:r>
-                <a:rPr lang="hr-HR" sz="2600" dirty="0">
-                  <a:solidFill>
-                    <a:schemeClr val="tx1">
-                      <a:lumMod val="65000"/>
-                      <a:lumOff val="35000"/>
-                    </a:schemeClr>
-                  </a:solidFill>
-                  <a:latin typeface="Arial" panose="020B0604020202020204" pitchFamily="34" charset="0"/>
-                  <a:cs typeface="Arial" panose="020B0604020202020204" pitchFamily="34" charset="0"/>
-                </a:rPr>
-                <a:t>Nedostatak:</a:t>
+                <a:t>teže primjenjivi u stvarnom svijetu</a:t>
               </a:r>
             </a:p>
           </p:txBody>
@@ -10380,7 +10793,7 @@
                   <a:latin typeface="Arial" panose="020B0604020202020204" pitchFamily="34" charset="0"/>
                   <a:cs typeface="Arial" panose="020B0604020202020204" pitchFamily="34" charset="0"/>
                 </a:rPr>
-                <a:t>Vidljiv</a:t>
+                <a:t>vidljiv</a:t>
               </a:r>
             </a:p>
           </p:txBody>
@@ -10981,8 +11394,54 @@
                 <a:latin typeface="Arial" panose="020B0604020202020204" pitchFamily="34" charset="0"/>
                 <a:cs typeface="Arial" panose="020B0604020202020204" pitchFamily="34" charset="0"/>
               </a:rPr>
-              <a:t>, skup čistih prototipova, skup zatrovanih prototipova </a:t>
-            </a:r>
+              <a:t>, skup čistih prototipova</a:t>
+            </a:r>
+            <a:r>
+              <a:rPr lang="en-US" sz="2600" noProof="0" dirty="0">
+                <a:latin typeface="Arial" panose="020B0604020202020204" pitchFamily="34" charset="0"/>
+                <a:cs typeface="Arial" panose="020B0604020202020204" pitchFamily="34" charset="0"/>
+              </a:rPr>
+              <a:t> </a:t>
+            </a:r>
+            <a:r>
+              <a:rPr lang="el-GR" sz="2600" b="1" i="1" noProof="0" dirty="0">
+                <a:latin typeface="Arial" panose="020B0604020202020204" pitchFamily="34" charset="0"/>
+                <a:cs typeface="Arial" panose="020B0604020202020204" pitchFamily="34" charset="0"/>
+              </a:rPr>
+              <a:t>μ</a:t>
+            </a:r>
+            <a:r>
+              <a:rPr lang="en-US" sz="2600" i="1" baseline="-25000" noProof="0" dirty="0">
+                <a:latin typeface="Arial" panose="020B0604020202020204" pitchFamily="34" charset="0"/>
+                <a:cs typeface="Arial" panose="020B0604020202020204" pitchFamily="34" charset="0"/>
+              </a:rPr>
+              <a:t>l</a:t>
+            </a:r>
+            <a:r>
+              <a:rPr lang="hr-HR" sz="2600" noProof="0" dirty="0">
+                <a:latin typeface="Arial" panose="020B0604020202020204" pitchFamily="34" charset="0"/>
+                <a:cs typeface="Arial" panose="020B0604020202020204" pitchFamily="34" charset="0"/>
+              </a:rPr>
+              <a:t>, skup zatrovanih prototipova </a:t>
+            </a:r>
+            <a:r>
+              <a:rPr lang="el-GR" sz="2600" b="1" i="1" noProof="0" dirty="0">
+                <a:latin typeface="Arial" panose="020B0604020202020204" pitchFamily="34" charset="0"/>
+                <a:cs typeface="Arial" panose="020B0604020202020204" pitchFamily="34" charset="0"/>
+              </a:rPr>
+              <a:t>η</a:t>
+            </a:r>
+            <a:r>
+              <a:rPr lang="en-US" sz="2600" i="1" baseline="-25000" noProof="0" dirty="0">
+                <a:latin typeface="Arial" panose="020B0604020202020204" pitchFamily="34" charset="0"/>
+                <a:cs typeface="Arial" panose="020B0604020202020204" pitchFamily="34" charset="0"/>
+              </a:rPr>
+              <a:t>y</a:t>
+            </a:r>
+            <a:endParaRPr lang="hr-HR" sz="2600" i="1" noProof="0" dirty="0">
+              <a:latin typeface="Arial" panose="020B0604020202020204" pitchFamily="34" charset="0"/>
+              <a:cs typeface="Arial" panose="020B0604020202020204" pitchFamily="34" charset="0"/>
+            </a:endParaRPr>
           </a:p>
           <a:p>
             <a:endParaRPr lang="hr-HR" sz="2600" noProof="0" dirty="0">

--- a/Prezentacija/Varijacijsko učenje na zašumljenim oznakama.pptx
+++ b/Prezentacija/Varijacijsko učenje na zašumljenim oznakama.pptx
@@ -219,7 +219,7 @@
           <a:p>
             <a:fld id="{4EC22A23-FA0E-43FF-AD6A-5A9DC9E7A77F}" type="datetimeFigureOut">
               <a:rPr lang="hr-HR" smtClean="0"/>
-              <a:t>6.7.2025.</a:t>
+              <a:t>8.7.2025.</a:t>
             </a:fld>
             <a:endParaRPr lang="hr-HR"/>
           </a:p>
@@ -765,7 +765,7 @@
           <a:p>
             <a:fld id="{08F0DB6F-6EB1-4D7D-9BCC-E96C905FFC52}" type="datetime1">
               <a:rPr lang="hr-HR" smtClean="0"/>
-              <a:t>6.7.2025.</a:t>
+              <a:t>8.7.2025.</a:t>
             </a:fld>
             <a:endParaRPr lang="hr-HR"/>
           </a:p>
@@ -935,7 +935,7 @@
           <a:p>
             <a:fld id="{1D8897EE-C1D5-4E52-876C-358FABA2E6DD}" type="datetime1">
               <a:rPr lang="hr-HR" smtClean="0"/>
-              <a:t>6.7.2025.</a:t>
+              <a:t>8.7.2025.</a:t>
             </a:fld>
             <a:endParaRPr lang="hr-HR"/>
           </a:p>
@@ -1156,7 +1156,7 @@
           <a:p>
             <a:fld id="{846F014D-1E5A-4CE6-87B2-A696E1D2C514}" type="datetime1">
               <a:rPr lang="hr-HR" smtClean="0"/>
-              <a:t>6.7.2025.</a:t>
+              <a:t>8.7.2025.</a:t>
             </a:fld>
             <a:endParaRPr lang="hr-HR"/>
           </a:p>
@@ -1367,7 +1367,7 @@
           <a:p>
             <a:fld id="{CC657D9C-C0AF-48FA-BBAF-7CAA57C23F8E}" type="datetime1">
               <a:rPr lang="hr-HR" smtClean="0"/>
-              <a:t>6.7.2025.</a:t>
+              <a:t>8.7.2025.</a:t>
             </a:fld>
             <a:endParaRPr lang="hr-HR"/>
           </a:p>
@@ -1662,7 +1662,7 @@
           <a:p>
             <a:fld id="{70E6B098-981F-45CA-83FF-788349BDC294}" type="datetime1">
               <a:rPr lang="hr-HR" smtClean="0"/>
-              <a:t>6.7.2025.</a:t>
+              <a:t>8.7.2025.</a:t>
             </a:fld>
             <a:endParaRPr lang="hr-HR"/>
           </a:p>
@@ -1991,7 +1991,7 @@
           <a:p>
             <a:fld id="{8F06E4C2-5A97-4809-9A3F-0AD2CD797138}" type="datetime1">
               <a:rPr lang="hr-HR" smtClean="0"/>
-              <a:t>6.7.2025.</a:t>
+              <a:t>8.7.2025.</a:t>
             </a:fld>
             <a:endParaRPr lang="hr-HR"/>
           </a:p>
@@ -2483,7 +2483,7 @@
           <a:p>
             <a:fld id="{7760B546-6293-4D30-BD97-A6B6A01C90BF}" type="datetime1">
               <a:rPr lang="hr-HR" smtClean="0"/>
-              <a:t>6.7.2025.</a:t>
+              <a:t>8.7.2025.</a:t>
             </a:fld>
             <a:endParaRPr lang="hr-HR"/>
           </a:p>
@@ -2642,7 +2642,7 @@
           <a:p>
             <a:fld id="{C5F7632D-88EC-4C5E-9269-EEF5AECE77DB}" type="datetime1">
               <a:rPr lang="hr-HR" smtClean="0"/>
-              <a:t>6.7.2025.</a:t>
+              <a:t>8.7.2025.</a:t>
             </a:fld>
             <a:endParaRPr lang="hr-HR"/>
           </a:p>
@@ -2778,7 +2778,7 @@
           <a:p>
             <a:fld id="{40E43FE3-F849-413C-9C82-49701E1B3EF3}" type="datetime1">
               <a:rPr lang="hr-HR" smtClean="0"/>
-              <a:t>6.7.2025.</a:t>
+              <a:t>8.7.2025.</a:t>
             </a:fld>
             <a:endParaRPr lang="hr-HR"/>
           </a:p>
@@ -3106,7 +3106,7 @@
           <a:p>
             <a:fld id="{058D4826-6613-4A6F-B53D-11761422A9FC}" type="datetime1">
               <a:rPr lang="hr-HR" smtClean="0"/>
-              <a:t>6.7.2025.</a:t>
+              <a:t>8.7.2025.</a:t>
             </a:fld>
             <a:endParaRPr lang="hr-HR"/>
           </a:p>
@@ -3421,7 +3421,7 @@
           <a:p>
             <a:fld id="{CB3A042B-28D4-4EE9-A191-0F90C01EB3D9}" type="datetime1">
               <a:rPr lang="hr-HR" smtClean="0"/>
-              <a:t>6.7.2025.</a:t>
+              <a:t>8.7.2025.</a:t>
             </a:fld>
             <a:endParaRPr lang="hr-HR"/>
           </a:p>
@@ -3673,7 +3673,7 @@
           <a:p>
             <a:fld id="{DE49A88E-18D6-498E-8265-50D671D76CD0}" type="datetime1">
               <a:rPr lang="hr-HR" smtClean="0"/>
-              <a:t>6.7.2025.</a:t>
+              <a:t>8.7.2025.</a:t>
             </a:fld>
             <a:endParaRPr lang="hr-HR"/>
           </a:p>
@@ -4986,27 +4986,27 @@
         <p:spPr>
           <a:xfrm>
             <a:off x="1261872" y="1828800"/>
-            <a:ext cx="9267046" cy="4735002"/>
+            <a:ext cx="9267046" cy="4814455"/>
           </a:xfrm>
         </p:spPr>
         <p:txBody>
           <a:bodyPr>
-            <a:normAutofit lnSpcReduction="10000"/>
+            <a:normAutofit/>
           </a:bodyPr>
           <a:lstStyle/>
+          <a:p>
+            <a:r>
+              <a:rPr lang="hr-HR" sz="2600" dirty="0">
+                <a:latin typeface="Arial" panose="020B0604020202020204" pitchFamily="34" charset="0"/>
+                <a:cs typeface="Arial" panose="020B0604020202020204" pitchFamily="34" charset="0"/>
+              </a:rPr>
+              <a:t>3 ponavljanja pojedinih eksperimenata</a:t>
+            </a:r>
+          </a:p>
           <a:p>
             <a:pPr marL="0" indent="0">
               <a:buNone/>
             </a:pPr>
-            <a:endParaRPr lang="hr-HR" sz="2600" dirty="0">
-              <a:latin typeface="Arial" panose="020B0604020202020204" pitchFamily="34" charset="0"/>
-              <a:cs typeface="Arial" panose="020B0604020202020204" pitchFamily="34" charset="0"/>
-            </a:endParaRPr>
-          </a:p>
-          <a:p>
-            <a:pPr marL="0" indent="0">
-              <a:buNone/>
-            </a:pPr>
             <a:r>
               <a:rPr lang="hr-HR" sz="2600" dirty="0">
                 <a:latin typeface="Arial" panose="020B0604020202020204" pitchFamily="34" charset="0"/>
@@ -5128,9 +5128,6 @@
               </a:rPr>
               <a:t>na čistom skupu</a:t>
             </a:r>
-          </a:p>
-          <a:p>
-            <a:pPr lvl="1"/>
             <a:endParaRPr lang="hr-HR" sz="2600" noProof="0" dirty="0">
               <a:latin typeface="Arial" panose="020B0604020202020204" pitchFamily="34" charset="0"/>
               <a:cs typeface="Arial" panose="020B0604020202020204" pitchFamily="34" charset="0"/>
@@ -5296,7 +5293,7 @@
               </a:rPr>
               <a:t>– ASR)</a:t>
             </a:r>
-            <a:endParaRPr lang="hr-HR" sz="2600" noProof="0" dirty="0">
+            <a:endParaRPr lang="en-US" sz="2600" dirty="0">
               <a:latin typeface="Arial" panose="020B0604020202020204" pitchFamily="34" charset="0"/>
               <a:cs typeface="Arial" panose="020B0604020202020204" pitchFamily="34" charset="0"/>
             </a:endParaRPr>
@@ -5820,6 +5817,36 @@
           <a:chExt cx="0" cy="0"/>
         </a:xfrm>
       </p:grpSpPr>
+      <p:pic>
+        <p:nvPicPr>
+          <p:cNvPr id="12" name="Picture 11">
+            <a:extLst>
+              <a:ext uri="{FF2B5EF4-FFF2-40B4-BE49-F238E27FC236}">
+                <a16:creationId xmlns:a16="http://schemas.microsoft.com/office/drawing/2014/main" id="{E95A67E5-079A-6313-575A-9F9089293D4F}"/>
+              </a:ext>
+            </a:extLst>
+          </p:cNvPr>
+          <p:cNvPicPr>
+            <a:picLocks noChangeAspect="1"/>
+          </p:cNvPicPr>
+          <p:nvPr/>
+        </p:nvPicPr>
+        <p:blipFill>
+          <a:blip r:embed="rId2"/>
+          <a:stretch>
+            <a:fillRect/>
+          </a:stretch>
+        </p:blipFill>
+        <p:spPr>
+          <a:xfrm>
+            <a:off x="4120950" y="4259702"/>
+            <a:ext cx="3248478" cy="2076740"/>
+          </a:xfrm>
+          <a:prstGeom prst="rect">
+            <a:avLst/>
+          </a:prstGeom>
+        </p:spPr>
+      </p:pic>
       <p:sp>
         <p:nvSpPr>
           <p:cNvPr id="11" name="Content Placeholder 2">
@@ -6297,36 +6324,6 @@
           </a:p>
         </p:txBody>
       </p:sp>
-      <p:pic>
-        <p:nvPicPr>
-          <p:cNvPr id="9" name="Picture 8">
-            <a:extLst>
-              <a:ext uri="{FF2B5EF4-FFF2-40B4-BE49-F238E27FC236}">
-                <a16:creationId xmlns:a16="http://schemas.microsoft.com/office/drawing/2014/main" id="{6E53711F-750A-E518-B807-C09926D6886A}"/>
-              </a:ext>
-            </a:extLst>
-          </p:cNvPr>
-          <p:cNvPicPr>
-            <a:picLocks noChangeAspect="1"/>
-          </p:cNvPicPr>
-          <p:nvPr/>
-        </p:nvPicPr>
-        <p:blipFill>
-          <a:blip r:embed="rId2"/>
-          <a:stretch>
-            <a:fillRect/>
-          </a:stretch>
-        </p:blipFill>
-        <p:spPr>
-          <a:xfrm>
-            <a:off x="4130476" y="4245413"/>
-            <a:ext cx="3229426" cy="2105319"/>
-          </a:xfrm>
-          <a:prstGeom prst="rect">
-            <a:avLst/>
-          </a:prstGeom>
-        </p:spPr>
-      </p:pic>
     </p:spTree>
     <p:extLst>
       <p:ext uri="{BB962C8B-B14F-4D97-AF65-F5344CB8AC3E}">
@@ -6477,10 +6474,10 @@
       </p:sp>
       <p:grpSp>
         <p:nvGrpSpPr>
-          <p:cNvPr id="12" name="Group 11">
+          <p:cNvPr id="13" name="Group 12">
             <a:extLst>
               <a:ext uri="{FF2B5EF4-FFF2-40B4-BE49-F238E27FC236}">
-                <a16:creationId xmlns:a16="http://schemas.microsoft.com/office/drawing/2014/main" id="{FEED14FE-4F5C-3879-9E99-1854608330F2}"/>
+                <a16:creationId xmlns:a16="http://schemas.microsoft.com/office/drawing/2014/main" id="{85E2528B-CAAA-8B27-CC59-FAA7B4001872}"/>
               </a:ext>
             </a:extLst>
           </p:cNvPr>
@@ -6489,179 +6486,221 @@
         </p:nvGrpSpPr>
         <p:grpSpPr>
           <a:xfrm>
-            <a:off x="1031044" y="2507345"/>
-            <a:ext cx="9749352" cy="3750340"/>
-            <a:chOff x="1261872" y="2036830"/>
-            <a:chExt cx="9749352" cy="3750340"/>
+            <a:off x="791569" y="2505759"/>
+            <a:ext cx="10359850" cy="3751926"/>
+            <a:chOff x="877569" y="2504075"/>
+            <a:chExt cx="10359850" cy="3751926"/>
           </a:xfrm>
         </p:grpSpPr>
-        <p:sp>
-          <p:nvSpPr>
-            <p:cNvPr id="25" name="TextBox 24">
+        <p:grpSp>
+          <p:nvGrpSpPr>
+            <p:cNvPr id="10" name="Group 9">
               <a:extLst>
                 <a:ext uri="{FF2B5EF4-FFF2-40B4-BE49-F238E27FC236}">
-                  <a16:creationId xmlns:a16="http://schemas.microsoft.com/office/drawing/2014/main" id="{7C0F6ED8-F856-7668-D143-B0F3237E447B}"/>
+                  <a16:creationId xmlns:a16="http://schemas.microsoft.com/office/drawing/2014/main" id="{4924F0A2-8B55-BC04-6C9E-2F58244C3025}"/>
                 </a:ext>
               </a:extLst>
             </p:cNvPr>
-            <p:cNvSpPr txBox="1"/>
+            <p:cNvGrpSpPr/>
             <p:nvPr/>
-          </p:nvSpPr>
-          <p:spPr>
+          </p:nvGrpSpPr>
+          <p:grpSpPr>
             <a:xfrm>
-              <a:off x="1261872" y="2036831"/>
-              <a:ext cx="4541832" cy="492443"/>
+              <a:off x="877569" y="2504075"/>
+              <a:ext cx="5818018" cy="3751926"/>
+              <a:chOff x="596189" y="2504075"/>
+              <a:chExt cx="5818018" cy="3751926"/>
             </a:xfrm>
-            <a:prstGeom prst="rect">
-              <a:avLst/>
-            </a:prstGeom>
-            <a:noFill/>
-          </p:spPr>
-          <p:txBody>
-            <a:bodyPr wrap="square" rtlCol="0">
-              <a:spAutoFit/>
-            </a:bodyPr>
-            <a:lstStyle/>
-            <a:p>
-              <a:pPr algn="ctr"/>
-              <a:r>
-                <a:rPr lang="hr-HR" sz="2600" b="1" dirty="0">
-                  <a:solidFill>
-                    <a:schemeClr val="tx1">
-                      <a:lumMod val="65000"/>
-                      <a:lumOff val="35000"/>
-                    </a:schemeClr>
-                  </a:solidFill>
-                  <a:latin typeface="Arial" panose="020B0604020202020204" pitchFamily="34" charset="0"/>
-                  <a:cs typeface="Arial" panose="020B0604020202020204" pitchFamily="34" charset="0"/>
-                </a:rPr>
-                <a:t>Simetrično zašumljivanje</a:t>
-              </a:r>
-            </a:p>
-          </p:txBody>
-        </p:sp>
-        <p:sp>
-          <p:nvSpPr>
-            <p:cNvPr id="26" name="TextBox 25">
+          </p:grpSpPr>
+          <p:pic>
+            <p:nvPicPr>
+              <p:cNvPr id="4" name="Picture 3">
+                <a:extLst>
+                  <a:ext uri="{FF2B5EF4-FFF2-40B4-BE49-F238E27FC236}">
+                    <a16:creationId xmlns:a16="http://schemas.microsoft.com/office/drawing/2014/main" id="{5E83B980-F48B-E3BA-B57A-0F89DCCAC198}"/>
+                  </a:ext>
+                </a:extLst>
+              </p:cNvPr>
+              <p:cNvPicPr>
+                <a:picLocks noChangeAspect="1"/>
+              </p:cNvPicPr>
+              <p:nvPr/>
+            </p:nvPicPr>
+            <p:blipFill>
+              <a:blip r:embed="rId2"/>
+              <a:srcRect l="695"/>
+              <a:stretch>
+                <a:fillRect/>
+              </a:stretch>
+            </p:blipFill>
+            <p:spPr>
+              <a:xfrm>
+                <a:off x="596189" y="3178997"/>
+                <a:ext cx="5818018" cy="3077004"/>
+              </a:xfrm>
+              <a:prstGeom prst="rect">
+                <a:avLst/>
+              </a:prstGeom>
+            </p:spPr>
+          </p:pic>
+          <p:sp>
+            <p:nvSpPr>
+              <p:cNvPr id="25" name="TextBox 24">
+                <a:extLst>
+                  <a:ext uri="{FF2B5EF4-FFF2-40B4-BE49-F238E27FC236}">
+                    <a16:creationId xmlns:a16="http://schemas.microsoft.com/office/drawing/2014/main" id="{7C0F6ED8-F856-7668-D143-B0F3237E447B}"/>
+                  </a:ext>
+                </a:extLst>
+              </p:cNvPr>
+              <p:cNvSpPr txBox="1"/>
+              <p:nvPr/>
+            </p:nvSpPr>
+            <p:spPr>
+              <a:xfrm>
+                <a:off x="1234282" y="2504075"/>
+                <a:ext cx="4541832" cy="492443"/>
+              </a:xfrm>
+              <a:prstGeom prst="rect">
+                <a:avLst/>
+              </a:prstGeom>
+              <a:noFill/>
+            </p:spPr>
+            <p:txBody>
+              <a:bodyPr wrap="square" rtlCol="0">
+                <a:spAutoFit/>
+              </a:bodyPr>
+              <a:lstStyle/>
+              <a:p>
+                <a:pPr algn="ctr"/>
+                <a:r>
+                  <a:rPr lang="hr-HR" sz="2600" b="1" dirty="0">
+                    <a:solidFill>
+                      <a:schemeClr val="tx1">
+                        <a:lumMod val="65000"/>
+                        <a:lumOff val="35000"/>
+                      </a:schemeClr>
+                    </a:solidFill>
+                    <a:latin typeface="Arial" panose="020B0604020202020204" pitchFamily="34" charset="0"/>
+                    <a:cs typeface="Arial" panose="020B0604020202020204" pitchFamily="34" charset="0"/>
+                  </a:rPr>
+                  <a:t>Simetrično zašumljivanje</a:t>
+                </a:r>
+              </a:p>
+            </p:txBody>
+          </p:sp>
+        </p:grpSp>
+        <p:grpSp>
+          <p:nvGrpSpPr>
+            <p:cNvPr id="9" name="Group 8">
               <a:extLst>
                 <a:ext uri="{FF2B5EF4-FFF2-40B4-BE49-F238E27FC236}">
-                  <a16:creationId xmlns:a16="http://schemas.microsoft.com/office/drawing/2014/main" id="{709791A7-68A4-7211-9B53-9E5BF6FF9236}"/>
+                  <a16:creationId xmlns:a16="http://schemas.microsoft.com/office/drawing/2014/main" id="{6C949B59-3227-2718-5513-CA295B1C8C86}"/>
                 </a:ext>
               </a:extLst>
             </p:cNvPr>
-            <p:cNvSpPr txBox="1"/>
+            <p:cNvGrpSpPr/>
             <p:nvPr/>
-          </p:nvSpPr>
-          <p:spPr>
+          </p:nvGrpSpPr>
+          <p:grpSpPr>
             <a:xfrm>
-              <a:off x="6469392" y="2036830"/>
-              <a:ext cx="4541832" cy="892552"/>
+              <a:off x="6695587" y="2505661"/>
+              <a:ext cx="4541832" cy="3750340"/>
+              <a:chOff x="6245690" y="2505661"/>
+              <a:chExt cx="4541832" cy="3750340"/>
             </a:xfrm>
-            <a:prstGeom prst="rect">
-              <a:avLst/>
-            </a:prstGeom>
-            <a:noFill/>
-          </p:spPr>
-          <p:txBody>
-            <a:bodyPr wrap="square" rtlCol="0">
-              <a:spAutoFit/>
-            </a:bodyPr>
-            <a:lstStyle/>
-            <a:p>
-              <a:pPr algn="ctr"/>
-              <a:r>
-                <a:rPr lang="hr-HR" sz="2600" b="1" dirty="0">
-                  <a:solidFill>
-                    <a:schemeClr val="tx1">
-                      <a:lumMod val="65000"/>
-                      <a:lumOff val="35000"/>
-                    </a:schemeClr>
-                  </a:solidFill>
-                  <a:latin typeface="Arial" panose="020B0604020202020204" pitchFamily="34" charset="0"/>
-                  <a:cs typeface="Arial" panose="020B0604020202020204" pitchFamily="34" charset="0"/>
-                </a:rPr>
-                <a:t>Asimetrično zašumljivanje,</a:t>
-              </a:r>
-            </a:p>
-            <a:p>
-              <a:pPr algn="ctr"/>
-              <a:r>
-                <a:rPr lang="hr-HR" sz="2600" b="1" dirty="0">
-                  <a:solidFill>
-                    <a:schemeClr val="tx1">
-                      <a:lumMod val="65000"/>
-                      <a:lumOff val="35000"/>
-                    </a:schemeClr>
-                  </a:solidFill>
-                  <a:latin typeface="Arial" panose="020B0604020202020204" pitchFamily="34" charset="0"/>
-                  <a:cs typeface="Arial" panose="020B0604020202020204" pitchFamily="34" charset="0"/>
-                </a:rPr>
-                <a:t>stopa šuma 40%</a:t>
-              </a:r>
-            </a:p>
-          </p:txBody>
-        </p:sp>
-        <p:pic>
-          <p:nvPicPr>
-            <p:cNvPr id="30" name="Picture 29">
-              <a:extLst>
-                <a:ext uri="{FF2B5EF4-FFF2-40B4-BE49-F238E27FC236}">
-                  <a16:creationId xmlns:a16="http://schemas.microsoft.com/office/drawing/2014/main" id="{BA433559-7543-44F0-127F-E1396F22924D}"/>
-                </a:ext>
-              </a:extLst>
-            </p:cNvPr>
-            <p:cNvPicPr>
-              <a:picLocks noChangeAspect="1"/>
-            </p:cNvPicPr>
-            <p:nvPr/>
-          </p:nvPicPr>
-          <p:blipFill>
-            <a:blip r:embed="rId2"/>
-            <a:stretch>
-              <a:fillRect/>
-            </a:stretch>
-          </p:blipFill>
-          <p:spPr>
-            <a:xfrm>
-              <a:off x="1379837" y="2670376"/>
-              <a:ext cx="4305901" cy="3115110"/>
-            </a:xfrm>
-            <a:prstGeom prst="rect">
-              <a:avLst/>
-            </a:prstGeom>
-          </p:spPr>
-        </p:pic>
-        <p:pic>
-          <p:nvPicPr>
-            <p:cNvPr id="32" name="Picture 31">
-              <a:extLst>
-                <a:ext uri="{FF2B5EF4-FFF2-40B4-BE49-F238E27FC236}">
-                  <a16:creationId xmlns:a16="http://schemas.microsoft.com/office/drawing/2014/main" id="{C0950E4D-E91C-3DBE-DF61-6627B398A128}"/>
-                </a:ext>
-              </a:extLst>
-            </p:cNvPr>
-            <p:cNvPicPr>
-              <a:picLocks noChangeAspect="1"/>
-            </p:cNvPicPr>
-            <p:nvPr/>
-          </p:nvPicPr>
-          <p:blipFill>
-            <a:blip r:embed="rId3"/>
-            <a:srcRect t="-1" b="586"/>
-            <a:stretch>
-              <a:fillRect/>
-            </a:stretch>
-          </p:blipFill>
-          <p:spPr>
-            <a:xfrm>
-              <a:off x="7116069" y="2993390"/>
-              <a:ext cx="3248478" cy="2793780"/>
-            </a:xfrm>
-            <a:prstGeom prst="rect">
-              <a:avLst/>
-            </a:prstGeom>
-          </p:spPr>
-        </p:pic>
+          </p:grpSpPr>
+          <p:pic>
+            <p:nvPicPr>
+              <p:cNvPr id="7" name="Picture 6">
+                <a:extLst>
+                  <a:ext uri="{FF2B5EF4-FFF2-40B4-BE49-F238E27FC236}">
+                    <a16:creationId xmlns:a16="http://schemas.microsoft.com/office/drawing/2014/main" id="{F0FA2FEA-7BEA-E62A-C430-ABF611962E96}"/>
+                  </a:ext>
+                </a:extLst>
+              </p:cNvPr>
+              <p:cNvPicPr>
+                <a:picLocks noChangeAspect="1"/>
+              </p:cNvPicPr>
+              <p:nvPr/>
+            </p:nvPicPr>
+            <p:blipFill>
+              <a:blip r:embed="rId3"/>
+              <a:stretch>
+                <a:fillRect/>
+              </a:stretch>
+            </p:blipFill>
+            <p:spPr>
+              <a:xfrm>
+                <a:off x="6911419" y="3493365"/>
+                <a:ext cx="3210373" cy="2762636"/>
+              </a:xfrm>
+              <a:prstGeom prst="rect">
+                <a:avLst/>
+              </a:prstGeom>
+            </p:spPr>
+          </p:pic>
+          <p:sp>
+            <p:nvSpPr>
+              <p:cNvPr id="26" name="TextBox 25">
+                <a:extLst>
+                  <a:ext uri="{FF2B5EF4-FFF2-40B4-BE49-F238E27FC236}">
+                    <a16:creationId xmlns:a16="http://schemas.microsoft.com/office/drawing/2014/main" id="{709791A7-68A4-7211-9B53-9E5BF6FF9236}"/>
+                  </a:ext>
+                </a:extLst>
+              </p:cNvPr>
+              <p:cNvSpPr txBox="1"/>
+              <p:nvPr/>
+            </p:nvSpPr>
+            <p:spPr>
+              <a:xfrm>
+                <a:off x="6245690" y="2505661"/>
+                <a:ext cx="4541832" cy="892552"/>
+              </a:xfrm>
+              <a:prstGeom prst="rect">
+                <a:avLst/>
+              </a:prstGeom>
+              <a:noFill/>
+            </p:spPr>
+            <p:txBody>
+              <a:bodyPr wrap="square" rtlCol="0">
+                <a:spAutoFit/>
+              </a:bodyPr>
+              <a:lstStyle/>
+              <a:p>
+                <a:pPr algn="ctr"/>
+                <a:r>
+                  <a:rPr lang="hr-HR" sz="2600" b="1" dirty="0">
+                    <a:solidFill>
+                      <a:schemeClr val="tx1">
+                        <a:lumMod val="65000"/>
+                        <a:lumOff val="35000"/>
+                      </a:schemeClr>
+                    </a:solidFill>
+                    <a:latin typeface="Arial" panose="020B0604020202020204" pitchFamily="34" charset="0"/>
+                    <a:cs typeface="Arial" panose="020B0604020202020204" pitchFamily="34" charset="0"/>
+                  </a:rPr>
+                  <a:t>Asimetrično zašumljivanje,</a:t>
+                </a:r>
+              </a:p>
+              <a:p>
+                <a:pPr algn="ctr"/>
+                <a:r>
+                  <a:rPr lang="hr-HR" sz="2600" b="1" dirty="0">
+                    <a:solidFill>
+                      <a:schemeClr val="tx1">
+                        <a:lumMod val="65000"/>
+                        <a:lumOff val="35000"/>
+                      </a:schemeClr>
+                    </a:solidFill>
+                    <a:latin typeface="Arial" panose="020B0604020202020204" pitchFamily="34" charset="0"/>
+                    <a:cs typeface="Arial" panose="020B0604020202020204" pitchFamily="34" charset="0"/>
+                  </a:rPr>
+                  <a:t>stopa šuma 40%</a:t>
+                </a:r>
+              </a:p>
+            </p:txBody>
+          </p:sp>
+        </p:grpSp>
       </p:grpSp>
       <p:sp>
         <p:nvSpPr>
@@ -7447,10 +7486,10 @@
       </p:grpSpPr>
       <p:pic>
         <p:nvPicPr>
-          <p:cNvPr id="13" name="Picture 12">
+          <p:cNvPr id="12" name="Picture 11">
             <a:extLst>
               <a:ext uri="{FF2B5EF4-FFF2-40B4-BE49-F238E27FC236}">
-                <a16:creationId xmlns:a16="http://schemas.microsoft.com/office/drawing/2014/main" id="{473D17B6-8E40-5C5E-C348-EEBC0F13FE1E}"/>
+                <a16:creationId xmlns:a16="http://schemas.microsoft.com/office/drawing/2014/main" id="{39584BCB-5F06-51D3-B90B-1CDB2D646071}"/>
               </a:ext>
             </a:extLst>
           </p:cNvPr>
@@ -7467,8 +7506,8 @@
         </p:blipFill>
         <p:spPr>
           <a:xfrm>
-            <a:off x="2950133" y="5313480"/>
-            <a:ext cx="5753903" cy="1133633"/>
+            <a:off x="2973947" y="5229395"/>
+            <a:ext cx="5706271" cy="1066949"/>
           </a:xfrm>
           <a:prstGeom prst="rect">
             <a:avLst/>
@@ -7477,10 +7516,10 @@
       </p:pic>
       <p:pic>
         <p:nvPicPr>
-          <p:cNvPr id="10" name="Picture 9">
+          <p:cNvPr id="7" name="Picture 6">
             <a:extLst>
               <a:ext uri="{FF2B5EF4-FFF2-40B4-BE49-F238E27FC236}">
-                <a16:creationId xmlns:a16="http://schemas.microsoft.com/office/drawing/2014/main" id="{CDED3F8A-A4B6-FD23-E329-17555F39C9EF}"/>
+                <a16:creationId xmlns:a16="http://schemas.microsoft.com/office/drawing/2014/main" id="{86D0D81D-8C95-0230-DEE8-466204BCC512}"/>
               </a:ext>
             </a:extLst>
           </p:cNvPr>
@@ -7497,8 +7536,8 @@
         </p:blipFill>
         <p:spPr>
           <a:xfrm>
-            <a:off x="906736" y="2099630"/>
-            <a:ext cx="9840698" cy="2152950"/>
+            <a:off x="954366" y="2099630"/>
+            <a:ext cx="9745435" cy="2124371"/>
           </a:xfrm>
           <a:prstGeom prst="rect">
             <a:avLst/>
@@ -8736,10 +8775,10 @@
       </p:sp>
       <p:grpSp>
         <p:nvGrpSpPr>
-          <p:cNvPr id="26" name="Group 25">
+          <p:cNvPr id="28" name="Group 27">
             <a:extLst>
               <a:ext uri="{FF2B5EF4-FFF2-40B4-BE49-F238E27FC236}">
-                <a16:creationId xmlns:a16="http://schemas.microsoft.com/office/drawing/2014/main" id="{17C3C945-209C-6BE1-F94F-04F5637E7B61}"/>
+                <a16:creationId xmlns:a16="http://schemas.microsoft.com/office/drawing/2014/main" id="{10BB18CE-5CE4-9602-07DA-67086A27AEE8}"/>
               </a:ext>
             </a:extLst>
           </p:cNvPr>
@@ -8748,18 +8787,18 @@
         </p:nvGrpSpPr>
         <p:grpSpPr>
           <a:xfrm>
-            <a:off x="992447" y="1535306"/>
-            <a:ext cx="9792327" cy="5136862"/>
-            <a:chOff x="992447" y="1535306"/>
-            <a:chExt cx="9792327" cy="5136862"/>
+            <a:off x="949577" y="1535306"/>
+            <a:ext cx="9868538" cy="5165441"/>
+            <a:chOff x="949577" y="1535306"/>
+            <a:chExt cx="9868538" cy="5165441"/>
           </a:xfrm>
         </p:grpSpPr>
         <p:pic>
           <p:nvPicPr>
-            <p:cNvPr id="13" name="Picture 12">
+            <p:cNvPr id="22" name="Picture 21">
               <a:extLst>
                 <a:ext uri="{FF2B5EF4-FFF2-40B4-BE49-F238E27FC236}">
-                  <a16:creationId xmlns:a16="http://schemas.microsoft.com/office/drawing/2014/main" id="{02BEFB21-BD6B-5AC9-66C6-4DAA7C4B88C7}"/>
+                  <a16:creationId xmlns:a16="http://schemas.microsoft.com/office/drawing/2014/main" id="{A2243BF8-629F-44DB-0405-E099E156AD1A}"/>
                 </a:ext>
               </a:extLst>
             </p:cNvPr>
@@ -8776,8 +8815,38 @@
           </p:blipFill>
           <p:spPr>
             <a:xfrm>
-              <a:off x="992447" y="2031761"/>
-              <a:ext cx="4553585" cy="2095792"/>
+              <a:off x="3589741" y="4624007"/>
+              <a:ext cx="4582164" cy="2076740"/>
+            </a:xfrm>
+            <a:prstGeom prst="rect">
+              <a:avLst/>
+            </a:prstGeom>
+          </p:spPr>
+        </p:pic>
+        <p:pic>
+          <p:nvPicPr>
+            <p:cNvPr id="4" name="Picture 3">
+              <a:extLst>
+                <a:ext uri="{FF2B5EF4-FFF2-40B4-BE49-F238E27FC236}">
+                  <a16:creationId xmlns:a16="http://schemas.microsoft.com/office/drawing/2014/main" id="{443687AB-90A7-D788-42FE-B7F53CE37167}"/>
+                </a:ext>
+              </a:extLst>
+            </p:cNvPr>
+            <p:cNvPicPr>
+              <a:picLocks noChangeAspect="1"/>
+            </p:cNvPicPr>
+            <p:nvPr/>
+          </p:nvPicPr>
+          <p:blipFill>
+            <a:blip r:embed="rId4"/>
+            <a:stretch>
+              <a:fillRect/>
+            </a:stretch>
+          </p:blipFill>
+          <p:spPr>
+            <a:xfrm>
+              <a:off x="949577" y="2026997"/>
+              <a:ext cx="4639322" cy="2095792"/>
             </a:xfrm>
             <a:prstGeom prst="rect">
               <a:avLst/>
@@ -8921,41 +8990,10 @@
         </p:sp>
         <p:pic>
           <p:nvPicPr>
-            <p:cNvPr id="19" name="Picture 18">
+            <p:cNvPr id="20" name="Picture 19">
               <a:extLst>
                 <a:ext uri="{FF2B5EF4-FFF2-40B4-BE49-F238E27FC236}">
-                  <a16:creationId xmlns:a16="http://schemas.microsoft.com/office/drawing/2014/main" id="{CBA399A3-28C6-D9E0-7325-00D9FE7AD9FD}"/>
-                </a:ext>
-              </a:extLst>
-            </p:cNvPr>
-            <p:cNvPicPr>
-              <a:picLocks noChangeAspect="1"/>
-            </p:cNvPicPr>
-            <p:nvPr/>
-          </p:nvPicPr>
-          <p:blipFill>
-            <a:blip r:embed="rId4"/>
-            <a:srcRect t="450"/>
-            <a:stretch>
-              <a:fillRect/>
-            </a:stretch>
-          </p:blipFill>
-          <p:spPr>
-            <a:xfrm>
-              <a:off x="6231189" y="2026997"/>
-              <a:ext cx="4553585" cy="2105318"/>
-            </a:xfrm>
-            <a:prstGeom prst="rect">
-              <a:avLst/>
-            </a:prstGeom>
-          </p:spPr>
-        </p:pic>
-        <p:pic>
-          <p:nvPicPr>
-            <p:cNvPr id="25" name="Picture 24">
-              <a:extLst>
-                <a:ext uri="{FF2B5EF4-FFF2-40B4-BE49-F238E27FC236}">
-                  <a16:creationId xmlns:a16="http://schemas.microsoft.com/office/drawing/2014/main" id="{B6515943-AAEF-8966-0956-CA937860FA2C}"/>
+                  <a16:creationId xmlns:a16="http://schemas.microsoft.com/office/drawing/2014/main" id="{FC6D5ADC-1B79-4DCF-4A3A-DB02FAFDF8B1}"/>
                 </a:ext>
               </a:extLst>
             </p:cNvPr>
@@ -8972,8 +9010,8 @@
           </p:blipFill>
           <p:spPr>
             <a:xfrm>
-              <a:off x="3608793" y="4624007"/>
-              <a:ext cx="4544059" cy="2048161"/>
+              <a:off x="6197845" y="2026997"/>
+              <a:ext cx="4620270" cy="2095792"/>
             </a:xfrm>
             <a:prstGeom prst="rect">
               <a:avLst/>

--- a/Prezentacija/Varijacijsko učenje na zašumljenim oznakama.pptx
+++ b/Prezentacija/Varijacijsko učenje na zašumljenim oznakama.pptx
@@ -219,7 +219,7 @@
           <a:p>
             <a:fld id="{4EC22A23-FA0E-43FF-AD6A-5A9DC9E7A77F}" type="datetimeFigureOut">
               <a:rPr lang="hr-HR" smtClean="0"/>
-              <a:t>8.7.2025.</a:t>
+              <a:t>10.7.2025.</a:t>
             </a:fld>
             <a:endParaRPr lang="hr-HR"/>
           </a:p>
@@ -765,7 +765,7 @@
           <a:p>
             <a:fld id="{08F0DB6F-6EB1-4D7D-9BCC-E96C905FFC52}" type="datetime1">
               <a:rPr lang="hr-HR" smtClean="0"/>
-              <a:t>8.7.2025.</a:t>
+              <a:t>10.7.2025.</a:t>
             </a:fld>
             <a:endParaRPr lang="hr-HR"/>
           </a:p>
@@ -935,7 +935,7 @@
           <a:p>
             <a:fld id="{1D8897EE-C1D5-4E52-876C-358FABA2E6DD}" type="datetime1">
               <a:rPr lang="hr-HR" smtClean="0"/>
-              <a:t>8.7.2025.</a:t>
+              <a:t>10.7.2025.</a:t>
             </a:fld>
             <a:endParaRPr lang="hr-HR"/>
           </a:p>
@@ -1156,7 +1156,7 @@
           <a:p>
             <a:fld id="{846F014D-1E5A-4CE6-87B2-A696E1D2C514}" type="datetime1">
               <a:rPr lang="hr-HR" smtClean="0"/>
-              <a:t>8.7.2025.</a:t>
+              <a:t>10.7.2025.</a:t>
             </a:fld>
             <a:endParaRPr lang="hr-HR"/>
           </a:p>
@@ -1367,7 +1367,7 @@
           <a:p>
             <a:fld id="{CC657D9C-C0AF-48FA-BBAF-7CAA57C23F8E}" type="datetime1">
               <a:rPr lang="hr-HR" smtClean="0"/>
-              <a:t>8.7.2025.</a:t>
+              <a:t>10.7.2025.</a:t>
             </a:fld>
             <a:endParaRPr lang="hr-HR"/>
           </a:p>
@@ -1662,7 +1662,7 @@
           <a:p>
             <a:fld id="{70E6B098-981F-45CA-83FF-788349BDC294}" type="datetime1">
               <a:rPr lang="hr-HR" smtClean="0"/>
-              <a:t>8.7.2025.</a:t>
+              <a:t>10.7.2025.</a:t>
             </a:fld>
             <a:endParaRPr lang="hr-HR"/>
           </a:p>
@@ -1991,7 +1991,7 @@
           <a:p>
             <a:fld id="{8F06E4C2-5A97-4809-9A3F-0AD2CD797138}" type="datetime1">
               <a:rPr lang="hr-HR" smtClean="0"/>
-              <a:t>8.7.2025.</a:t>
+              <a:t>10.7.2025.</a:t>
             </a:fld>
             <a:endParaRPr lang="hr-HR"/>
           </a:p>
@@ -2483,7 +2483,7 @@
           <a:p>
             <a:fld id="{7760B546-6293-4D30-BD97-A6B6A01C90BF}" type="datetime1">
               <a:rPr lang="hr-HR" smtClean="0"/>
-              <a:t>8.7.2025.</a:t>
+              <a:t>10.7.2025.</a:t>
             </a:fld>
             <a:endParaRPr lang="hr-HR"/>
           </a:p>
@@ -2642,7 +2642,7 @@
           <a:p>
             <a:fld id="{C5F7632D-88EC-4C5E-9269-EEF5AECE77DB}" type="datetime1">
               <a:rPr lang="hr-HR" smtClean="0"/>
-              <a:t>8.7.2025.</a:t>
+              <a:t>10.7.2025.</a:t>
             </a:fld>
             <a:endParaRPr lang="hr-HR"/>
           </a:p>
@@ -2778,7 +2778,7 @@
           <a:p>
             <a:fld id="{40E43FE3-F849-413C-9C82-49701E1B3EF3}" type="datetime1">
               <a:rPr lang="hr-HR" smtClean="0"/>
-              <a:t>8.7.2025.</a:t>
+              <a:t>10.7.2025.</a:t>
             </a:fld>
             <a:endParaRPr lang="hr-HR"/>
           </a:p>
@@ -3106,7 +3106,7 @@
           <a:p>
             <a:fld id="{058D4826-6613-4A6F-B53D-11761422A9FC}" type="datetime1">
               <a:rPr lang="hr-HR" smtClean="0"/>
-              <a:t>8.7.2025.</a:t>
+              <a:t>10.7.2025.</a:t>
             </a:fld>
             <a:endParaRPr lang="hr-HR"/>
           </a:p>
@@ -3421,7 +3421,7 @@
           <a:p>
             <a:fld id="{CB3A042B-28D4-4EE9-A191-0F90C01EB3D9}" type="datetime1">
               <a:rPr lang="hr-HR" smtClean="0"/>
-              <a:t>8.7.2025.</a:t>
+              <a:t>10.7.2025.</a:t>
             </a:fld>
             <a:endParaRPr lang="hr-HR"/>
           </a:p>
@@ -3673,7 +3673,7 @@
           <a:p>
             <a:fld id="{DE49A88E-18D6-498E-8265-50D671D76CD0}" type="datetime1">
               <a:rPr lang="hr-HR" smtClean="0"/>
-              <a:t>8.7.2025.</a:t>
+              <a:t>10.7.2025.</a:t>
             </a:fld>
             <a:endParaRPr lang="hr-HR"/>
           </a:p>
@@ -11595,10 +11595,10 @@
       </p:sp>
       <p:grpSp>
         <p:nvGrpSpPr>
-          <p:cNvPr id="17" name="Group 16">
+          <p:cNvPr id="13" name="Group 12">
             <a:extLst>
               <a:ext uri="{FF2B5EF4-FFF2-40B4-BE49-F238E27FC236}">
-                <a16:creationId xmlns:a16="http://schemas.microsoft.com/office/drawing/2014/main" id="{A6A95AE8-E5A2-F3A7-87EE-70DD803B443D}"/>
+                <a16:creationId xmlns:a16="http://schemas.microsoft.com/office/drawing/2014/main" id="{C3539D21-AAAA-D0D6-FFF8-8DFAF02C3A53}"/>
               </a:ext>
             </a:extLst>
           </p:cNvPr>
@@ -11607,10 +11607,10 @@
         </p:nvGrpSpPr>
         <p:grpSpPr>
           <a:xfrm>
-            <a:off x="2752542" y="2735846"/>
-            <a:ext cx="6711300" cy="2814377"/>
-            <a:chOff x="2733205" y="2662051"/>
-            <a:chExt cx="6711300" cy="2814377"/>
+            <a:off x="2633179" y="2735846"/>
+            <a:ext cx="6925642" cy="2814376"/>
+            <a:chOff x="2633179" y="2735846"/>
+            <a:chExt cx="6925642" cy="2814376"/>
           </a:xfrm>
         </p:grpSpPr>
         <p:pic>
@@ -11636,7 +11636,7 @@
           </p:blipFill>
           <p:spPr>
             <a:xfrm>
-              <a:off x="2733205" y="2662051"/>
+              <a:off x="2752542" y="2735846"/>
               <a:ext cx="6697010" cy="1267002"/>
             </a:xfrm>
             <a:prstGeom prst="rect">
@@ -11646,10 +11646,10 @@
         </p:pic>
         <p:pic>
           <p:nvPicPr>
-            <p:cNvPr id="16" name="Picture 15">
+            <p:cNvPr id="12" name="Picture 11">
               <a:extLst>
                 <a:ext uri="{FF2B5EF4-FFF2-40B4-BE49-F238E27FC236}">
-                  <a16:creationId xmlns:a16="http://schemas.microsoft.com/office/drawing/2014/main" id="{B8B67BB9-001D-C688-03B8-384A916E52E9}"/>
+                  <a16:creationId xmlns:a16="http://schemas.microsoft.com/office/drawing/2014/main" id="{F5B42B2E-EE9B-904B-B4FD-9264CC0BBA8C}"/>
                 </a:ext>
               </a:extLst>
             </p:cNvPr>
@@ -11666,8 +11666,8 @@
           </p:blipFill>
           <p:spPr>
             <a:xfrm>
-              <a:off x="2747495" y="4066531"/>
-              <a:ext cx="6697010" cy="1409897"/>
+              <a:off x="2633179" y="4140325"/>
+              <a:ext cx="6925642" cy="1409897"/>
             </a:xfrm>
             <a:prstGeom prst="rect">
               <a:avLst/>

--- a/Prezentacija/Varijacijsko učenje na zašumljenim oznakama.pptx
+++ b/Prezentacija/Varijacijsko učenje na zašumljenim oznakama.pptx
@@ -5,7 +5,7 @@
     <p:sldMasterId id="2147483660" r:id="rId1"/>
   </p:sldMasterIdLst>
   <p:notesMasterIdLst>
-    <p:notesMasterId r:id="rId25"/>
+    <p:notesMasterId r:id="rId27"/>
   </p:notesMasterIdLst>
   <p:sldIdLst>
     <p:sldId id="256" r:id="rId2"/>
@@ -13,24 +13,26 @@
     <p:sldId id="258" r:id="rId4"/>
     <p:sldId id="263" r:id="rId5"/>
     <p:sldId id="275" r:id="rId6"/>
-    <p:sldId id="276" r:id="rId7"/>
-    <p:sldId id="265" r:id="rId8"/>
-    <p:sldId id="286" r:id="rId9"/>
-    <p:sldId id="274" r:id="rId10"/>
-    <p:sldId id="277" r:id="rId11"/>
-    <p:sldId id="266" r:id="rId12"/>
-    <p:sldId id="267" r:id="rId13"/>
-    <p:sldId id="278" r:id="rId14"/>
-    <p:sldId id="279" r:id="rId15"/>
-    <p:sldId id="287" r:id="rId16"/>
-    <p:sldId id="270" r:id="rId17"/>
-    <p:sldId id="283" r:id="rId18"/>
-    <p:sldId id="282" r:id="rId19"/>
-    <p:sldId id="284" r:id="rId20"/>
-    <p:sldId id="280" r:id="rId21"/>
-    <p:sldId id="271" r:id="rId22"/>
-    <p:sldId id="285" r:id="rId23"/>
-    <p:sldId id="273" r:id="rId24"/>
+    <p:sldId id="288" r:id="rId7"/>
+    <p:sldId id="276" r:id="rId8"/>
+    <p:sldId id="265" r:id="rId9"/>
+    <p:sldId id="289" r:id="rId10"/>
+    <p:sldId id="286" r:id="rId11"/>
+    <p:sldId id="274" r:id="rId12"/>
+    <p:sldId id="277" r:id="rId13"/>
+    <p:sldId id="266" r:id="rId14"/>
+    <p:sldId id="267" r:id="rId15"/>
+    <p:sldId id="278" r:id="rId16"/>
+    <p:sldId id="279" r:id="rId17"/>
+    <p:sldId id="287" r:id="rId18"/>
+    <p:sldId id="270" r:id="rId19"/>
+    <p:sldId id="283" r:id="rId20"/>
+    <p:sldId id="282" r:id="rId21"/>
+    <p:sldId id="284" r:id="rId22"/>
+    <p:sldId id="280" r:id="rId23"/>
+    <p:sldId id="271" r:id="rId24"/>
+    <p:sldId id="285" r:id="rId25"/>
+    <p:sldId id="273" r:id="rId26"/>
   </p:sldIdLst>
   <p:sldSz cx="12192000" cy="6858000"/>
   <p:notesSz cx="6858000" cy="9144000"/>
@@ -219,7 +221,7 @@
           <a:p>
             <a:fld id="{4EC22A23-FA0E-43FF-AD6A-5A9DC9E7A77F}" type="datetimeFigureOut">
               <a:rPr lang="hr-HR" smtClean="0"/>
-              <a:t>10.7.2025.</a:t>
+              <a:t>11.7.2025.</a:t>
             </a:fld>
             <a:endParaRPr lang="hr-HR"/>
           </a:p>
@@ -492,6 +494,114 @@
   <p:cSld>
     <p:spTree>
       <p:nvGrpSpPr>
+        <p:cNvPr id="1" name="">
+          <a:extLst>
+            <a:ext uri="{FF2B5EF4-FFF2-40B4-BE49-F238E27FC236}">
+              <a16:creationId xmlns:a16="http://schemas.microsoft.com/office/drawing/2014/main" id="{70FA3594-D166-D4D2-F3A3-9C129E149942}"/>
+            </a:ext>
+          </a:extLst>
+        </p:cNvPr>
+        <p:cNvGrpSpPr/>
+        <p:nvPr/>
+      </p:nvGrpSpPr>
+      <p:grpSpPr>
+        <a:xfrm>
+          <a:off x="0" y="0"/>
+          <a:ext cx="0" cy="0"/>
+          <a:chOff x="0" y="0"/>
+          <a:chExt cx="0" cy="0"/>
+        </a:xfrm>
+      </p:grpSpPr>
+      <p:sp>
+        <p:nvSpPr>
+          <p:cNvPr id="2" name="Slide Image Placeholder 1">
+            <a:extLst>
+              <a:ext uri="{FF2B5EF4-FFF2-40B4-BE49-F238E27FC236}">
+                <a16:creationId xmlns:a16="http://schemas.microsoft.com/office/drawing/2014/main" id="{B57D4C0A-C4CA-F5FF-D87B-10990B3FFFC1}"/>
+              </a:ext>
+            </a:extLst>
+          </p:cNvPr>
+          <p:cNvSpPr>
+            <a:spLocks noGrp="1" noRot="1" noChangeAspect="1"/>
+          </p:cNvSpPr>
+          <p:nvPr>
+            <p:ph type="sldImg"/>
+          </p:nvPr>
+        </p:nvSpPr>
+        <p:spPr/>
+      </p:sp>
+      <p:sp>
+        <p:nvSpPr>
+          <p:cNvPr id="3" name="Notes Placeholder 2">
+            <a:extLst>
+              <a:ext uri="{FF2B5EF4-FFF2-40B4-BE49-F238E27FC236}">
+                <a16:creationId xmlns:a16="http://schemas.microsoft.com/office/drawing/2014/main" id="{8CF559EC-C54B-7F0A-B51F-F3816D52698B}"/>
+              </a:ext>
+            </a:extLst>
+          </p:cNvPr>
+          <p:cNvSpPr>
+            <a:spLocks noGrp="1"/>
+          </p:cNvSpPr>
+          <p:nvPr>
+            <p:ph type="body" idx="1"/>
+          </p:nvPr>
+        </p:nvSpPr>
+        <p:spPr/>
+        <p:txBody>
+          <a:bodyPr/>
+          <a:lstStyle/>
+          <a:p>
+            <a:endParaRPr lang="hr-HR" dirty="0"/>
+          </a:p>
+        </p:txBody>
+      </p:sp>
+      <p:sp>
+        <p:nvSpPr>
+          <p:cNvPr id="4" name="Slide Number Placeholder 3">
+            <a:extLst>
+              <a:ext uri="{FF2B5EF4-FFF2-40B4-BE49-F238E27FC236}">
+                <a16:creationId xmlns:a16="http://schemas.microsoft.com/office/drawing/2014/main" id="{FC40772C-CF73-BD09-0D50-D14304D81B6F}"/>
+              </a:ext>
+            </a:extLst>
+          </p:cNvPr>
+          <p:cNvSpPr>
+            <a:spLocks noGrp="1"/>
+          </p:cNvSpPr>
+          <p:nvPr>
+            <p:ph type="sldNum" sz="quarter" idx="5"/>
+          </p:nvPr>
+        </p:nvSpPr>
+        <p:spPr/>
+        <p:txBody>
+          <a:bodyPr/>
+          <a:lstStyle/>
+          <a:p>
+            <a:fld id="{A9F8539C-3157-43D8-9A64-3BC58E37B14C}" type="slidenum">
+              <a:rPr lang="hr-HR" smtClean="0"/>
+              <a:t>6</a:t>
+            </a:fld>
+            <a:endParaRPr lang="hr-HR"/>
+          </a:p>
+        </p:txBody>
+      </p:sp>
+    </p:spTree>
+    <p:extLst>
+      <p:ext uri="{BB962C8B-B14F-4D97-AF65-F5344CB8AC3E}">
+        <p14:creationId xmlns:p14="http://schemas.microsoft.com/office/powerpoint/2010/main" val="3289950309"/>
+      </p:ext>
+    </p:extLst>
+  </p:cSld>
+  <p:clrMapOvr>
+    <a:masterClrMapping/>
+  </p:clrMapOvr>
+</p:notes>
+</file>
+
+<file path=ppt/notesSlides/notesSlide2.xml><?xml version="1.0" encoding="utf-8"?>
+<p:notes xmlns:a="http://schemas.openxmlformats.org/drawingml/2006/main" xmlns:r="http://schemas.openxmlformats.org/officeDocument/2006/relationships" xmlns:p="http://schemas.openxmlformats.org/presentationml/2006/main">
+  <p:cSld>
+    <p:spTree>
+      <p:nvGrpSpPr>
         <p:cNvPr id="1" name=""/>
         <p:cNvGrpSpPr/>
         <p:nvPr/>
@@ -552,7 +662,91 @@
           <a:p>
             <a:fld id="{A9F8539C-3157-43D8-9A64-3BC58E37B14C}" type="slidenum">
               <a:rPr lang="hr-HR" smtClean="0"/>
-              <a:t>13</a:t>
+              <a:t>7</a:t>
+            </a:fld>
+            <a:endParaRPr lang="hr-HR"/>
+          </a:p>
+        </p:txBody>
+      </p:sp>
+    </p:spTree>
+    <p:extLst>
+      <p:ext uri="{BB962C8B-B14F-4D97-AF65-F5344CB8AC3E}">
+        <p14:creationId xmlns:p14="http://schemas.microsoft.com/office/powerpoint/2010/main" val="1472753706"/>
+      </p:ext>
+    </p:extLst>
+  </p:cSld>
+  <p:clrMapOvr>
+    <a:masterClrMapping/>
+  </p:clrMapOvr>
+</p:notes>
+</file>
+
+<file path=ppt/notesSlides/notesSlide3.xml><?xml version="1.0" encoding="utf-8"?>
+<p:notes xmlns:a="http://schemas.openxmlformats.org/drawingml/2006/main" xmlns:r="http://schemas.openxmlformats.org/officeDocument/2006/relationships" xmlns:p="http://schemas.openxmlformats.org/presentationml/2006/main">
+  <p:cSld>
+    <p:spTree>
+      <p:nvGrpSpPr>
+        <p:cNvPr id="1" name=""/>
+        <p:cNvGrpSpPr/>
+        <p:nvPr/>
+      </p:nvGrpSpPr>
+      <p:grpSpPr>
+        <a:xfrm>
+          <a:off x="0" y="0"/>
+          <a:ext cx="0" cy="0"/>
+          <a:chOff x="0" y="0"/>
+          <a:chExt cx="0" cy="0"/>
+        </a:xfrm>
+      </p:grpSpPr>
+      <p:sp>
+        <p:nvSpPr>
+          <p:cNvPr id="2" name="Slide Image Placeholder 1"/>
+          <p:cNvSpPr>
+            <a:spLocks noGrp="1" noRot="1" noChangeAspect="1"/>
+          </p:cNvSpPr>
+          <p:nvPr>
+            <p:ph type="sldImg"/>
+          </p:nvPr>
+        </p:nvSpPr>
+        <p:spPr/>
+      </p:sp>
+      <p:sp>
+        <p:nvSpPr>
+          <p:cNvPr id="3" name="Notes Placeholder 2"/>
+          <p:cNvSpPr>
+            <a:spLocks noGrp="1"/>
+          </p:cNvSpPr>
+          <p:nvPr>
+            <p:ph type="body" idx="1"/>
+          </p:nvPr>
+        </p:nvSpPr>
+        <p:spPr/>
+        <p:txBody>
+          <a:bodyPr/>
+          <a:lstStyle/>
+          <a:p>
+            <a:endParaRPr lang="hr-HR" dirty="0"/>
+          </a:p>
+        </p:txBody>
+      </p:sp>
+      <p:sp>
+        <p:nvSpPr>
+          <p:cNvPr id="4" name="Slide Number Placeholder 3"/>
+          <p:cNvSpPr>
+            <a:spLocks noGrp="1"/>
+          </p:cNvSpPr>
+          <p:nvPr>
+            <p:ph type="sldNum" sz="quarter" idx="5"/>
+          </p:nvPr>
+        </p:nvSpPr>
+        <p:spPr/>
+        <p:txBody>
+          <a:bodyPr/>
+          <a:lstStyle/>
+          <a:p>
+            <a:fld id="{A9F8539C-3157-43D8-9A64-3BC58E37B14C}" type="slidenum">
+              <a:rPr lang="hr-HR" smtClean="0"/>
+              <a:t>15</a:t>
             </a:fld>
             <a:endParaRPr lang="hr-HR"/>
           </a:p>
@@ -562,6 +756,90 @@
     <p:extLst>
       <p:ext uri="{BB962C8B-B14F-4D97-AF65-F5344CB8AC3E}">
         <p14:creationId xmlns:p14="http://schemas.microsoft.com/office/powerpoint/2010/main" val="4133160232"/>
+      </p:ext>
+    </p:extLst>
+  </p:cSld>
+  <p:clrMapOvr>
+    <a:masterClrMapping/>
+  </p:clrMapOvr>
+</p:notes>
+</file>
+
+<file path=ppt/notesSlides/notesSlide4.xml><?xml version="1.0" encoding="utf-8"?>
+<p:notes xmlns:a="http://schemas.openxmlformats.org/drawingml/2006/main" xmlns:r="http://schemas.openxmlformats.org/officeDocument/2006/relationships" xmlns:p="http://schemas.openxmlformats.org/presentationml/2006/main">
+  <p:cSld>
+    <p:spTree>
+      <p:nvGrpSpPr>
+        <p:cNvPr id="1" name=""/>
+        <p:cNvGrpSpPr/>
+        <p:nvPr/>
+      </p:nvGrpSpPr>
+      <p:grpSpPr>
+        <a:xfrm>
+          <a:off x="0" y="0"/>
+          <a:ext cx="0" cy="0"/>
+          <a:chOff x="0" y="0"/>
+          <a:chExt cx="0" cy="0"/>
+        </a:xfrm>
+      </p:grpSpPr>
+      <p:sp>
+        <p:nvSpPr>
+          <p:cNvPr id="2" name="Slide Image Placeholder 1"/>
+          <p:cNvSpPr>
+            <a:spLocks noGrp="1" noRot="1" noChangeAspect="1"/>
+          </p:cNvSpPr>
+          <p:nvPr>
+            <p:ph type="sldImg"/>
+          </p:nvPr>
+        </p:nvSpPr>
+        <p:spPr/>
+      </p:sp>
+      <p:sp>
+        <p:nvSpPr>
+          <p:cNvPr id="3" name="Notes Placeholder 2"/>
+          <p:cNvSpPr>
+            <a:spLocks noGrp="1"/>
+          </p:cNvSpPr>
+          <p:nvPr>
+            <p:ph type="body" idx="1"/>
+          </p:nvPr>
+        </p:nvSpPr>
+        <p:spPr/>
+        <p:txBody>
+          <a:bodyPr/>
+          <a:lstStyle/>
+          <a:p>
+            <a:endParaRPr lang="hr-HR" dirty="0"/>
+          </a:p>
+        </p:txBody>
+      </p:sp>
+      <p:sp>
+        <p:nvSpPr>
+          <p:cNvPr id="4" name="Slide Number Placeholder 3"/>
+          <p:cNvSpPr>
+            <a:spLocks noGrp="1"/>
+          </p:cNvSpPr>
+          <p:nvPr>
+            <p:ph type="sldNum" sz="quarter" idx="5"/>
+          </p:nvPr>
+        </p:nvSpPr>
+        <p:spPr/>
+        <p:txBody>
+          <a:bodyPr/>
+          <a:lstStyle/>
+          <a:p>
+            <a:fld id="{A9F8539C-3157-43D8-9A64-3BC58E37B14C}" type="slidenum">
+              <a:rPr lang="hr-HR" smtClean="0"/>
+              <a:t>18</a:t>
+            </a:fld>
+            <a:endParaRPr lang="hr-HR"/>
+          </a:p>
+        </p:txBody>
+      </p:sp>
+    </p:spTree>
+    <p:extLst>
+      <p:ext uri="{BB962C8B-B14F-4D97-AF65-F5344CB8AC3E}">
+        <p14:creationId xmlns:p14="http://schemas.microsoft.com/office/powerpoint/2010/main" val="2541522984"/>
       </p:ext>
     </p:extLst>
   </p:cSld>
@@ -765,7 +1043,7 @@
           <a:p>
             <a:fld id="{08F0DB6F-6EB1-4D7D-9BCC-E96C905FFC52}" type="datetime1">
               <a:rPr lang="hr-HR" smtClean="0"/>
-              <a:t>10.7.2025.</a:t>
+              <a:t>11.7.2025.</a:t>
             </a:fld>
             <a:endParaRPr lang="hr-HR"/>
           </a:p>
@@ -935,7 +1213,7 @@
           <a:p>
             <a:fld id="{1D8897EE-C1D5-4E52-876C-358FABA2E6DD}" type="datetime1">
               <a:rPr lang="hr-HR" smtClean="0"/>
-              <a:t>10.7.2025.</a:t>
+              <a:t>11.7.2025.</a:t>
             </a:fld>
             <a:endParaRPr lang="hr-HR"/>
           </a:p>
@@ -1156,7 +1434,7 @@
           <a:p>
             <a:fld id="{846F014D-1E5A-4CE6-87B2-A696E1D2C514}" type="datetime1">
               <a:rPr lang="hr-HR" smtClean="0"/>
-              <a:t>10.7.2025.</a:t>
+              <a:t>11.7.2025.</a:t>
             </a:fld>
             <a:endParaRPr lang="hr-HR"/>
           </a:p>
@@ -1367,7 +1645,7 @@
           <a:p>
             <a:fld id="{CC657D9C-C0AF-48FA-BBAF-7CAA57C23F8E}" type="datetime1">
               <a:rPr lang="hr-HR" smtClean="0"/>
-              <a:t>10.7.2025.</a:t>
+              <a:t>11.7.2025.</a:t>
             </a:fld>
             <a:endParaRPr lang="hr-HR"/>
           </a:p>
@@ -1662,7 +1940,7 @@
           <a:p>
             <a:fld id="{70E6B098-981F-45CA-83FF-788349BDC294}" type="datetime1">
               <a:rPr lang="hr-HR" smtClean="0"/>
-              <a:t>10.7.2025.</a:t>
+              <a:t>11.7.2025.</a:t>
             </a:fld>
             <a:endParaRPr lang="hr-HR"/>
           </a:p>
@@ -1991,7 +2269,7 @@
           <a:p>
             <a:fld id="{8F06E4C2-5A97-4809-9A3F-0AD2CD797138}" type="datetime1">
               <a:rPr lang="hr-HR" smtClean="0"/>
-              <a:t>10.7.2025.</a:t>
+              <a:t>11.7.2025.</a:t>
             </a:fld>
             <a:endParaRPr lang="hr-HR"/>
           </a:p>
@@ -2483,7 +2761,7 @@
           <a:p>
             <a:fld id="{7760B546-6293-4D30-BD97-A6B6A01C90BF}" type="datetime1">
               <a:rPr lang="hr-HR" smtClean="0"/>
-              <a:t>10.7.2025.</a:t>
+              <a:t>11.7.2025.</a:t>
             </a:fld>
             <a:endParaRPr lang="hr-HR"/>
           </a:p>
@@ -2642,7 +2920,7 @@
           <a:p>
             <a:fld id="{C5F7632D-88EC-4C5E-9269-EEF5AECE77DB}" type="datetime1">
               <a:rPr lang="hr-HR" smtClean="0"/>
-              <a:t>10.7.2025.</a:t>
+              <a:t>11.7.2025.</a:t>
             </a:fld>
             <a:endParaRPr lang="hr-HR"/>
           </a:p>
@@ -2778,7 +3056,7 @@
           <a:p>
             <a:fld id="{40E43FE3-F849-413C-9C82-49701E1B3EF3}" type="datetime1">
               <a:rPr lang="hr-HR" smtClean="0"/>
-              <a:t>10.7.2025.</a:t>
+              <a:t>11.7.2025.</a:t>
             </a:fld>
             <a:endParaRPr lang="hr-HR"/>
           </a:p>
@@ -3106,7 +3384,7 @@
           <a:p>
             <a:fld id="{058D4826-6613-4A6F-B53D-11761422A9FC}" type="datetime1">
               <a:rPr lang="hr-HR" smtClean="0"/>
-              <a:t>10.7.2025.</a:t>
+              <a:t>11.7.2025.</a:t>
             </a:fld>
             <a:endParaRPr lang="hr-HR"/>
           </a:p>
@@ -3421,7 +3699,7 @@
           <a:p>
             <a:fld id="{CB3A042B-28D4-4EE9-A191-0F90C01EB3D9}" type="datetime1">
               <a:rPr lang="hr-HR" smtClean="0"/>
-              <a:t>10.7.2025.</a:t>
+              <a:t>11.7.2025.</a:t>
             </a:fld>
             <a:endParaRPr lang="hr-HR"/>
           </a:p>
@@ -3673,7 +3951,7 @@
           <a:p>
             <a:fld id="{DE49A88E-18D6-498E-8265-50D671D76CD0}" type="datetime1">
               <a:rPr lang="hr-HR" smtClean="0"/>
-              <a:t>10.7.2025.</a:t>
+              <a:t>11.7.2025.</a:t>
             </a:fld>
             <a:endParaRPr lang="hr-HR"/>
           </a:p>
@@ -4312,6 +4590,647 @@
         <p:cNvPr id="1" name="">
           <a:extLst>
             <a:ext uri="{FF2B5EF4-FFF2-40B4-BE49-F238E27FC236}">
+              <a16:creationId xmlns:a16="http://schemas.microsoft.com/office/drawing/2014/main" id="{4888D621-C0C9-42FB-03CD-313BB353C5BD}"/>
+            </a:ext>
+          </a:extLst>
+        </p:cNvPr>
+        <p:cNvGrpSpPr/>
+        <p:nvPr/>
+      </p:nvGrpSpPr>
+      <p:grpSpPr>
+        <a:xfrm>
+          <a:off x="0" y="0"/>
+          <a:ext cx="0" cy="0"/>
+          <a:chOff x="0" y="0"/>
+          <a:chExt cx="0" cy="0"/>
+        </a:xfrm>
+      </p:grpSpPr>
+      <p:sp>
+        <p:nvSpPr>
+          <p:cNvPr id="3" name="Content Placeholder 2">
+            <a:extLst>
+              <a:ext uri="{FF2B5EF4-FFF2-40B4-BE49-F238E27FC236}">
+                <a16:creationId xmlns:a16="http://schemas.microsoft.com/office/drawing/2014/main" id="{19FF9997-24F3-C098-A02E-FA0EFB9B656C}"/>
+              </a:ext>
+            </a:extLst>
+          </p:cNvPr>
+          <p:cNvSpPr>
+            <a:spLocks noGrp="1"/>
+          </p:cNvSpPr>
+          <p:nvPr>
+            <p:ph idx="1"/>
+          </p:nvPr>
+        </p:nvSpPr>
+        <p:spPr>
+          <a:xfrm>
+            <a:off x="1261872" y="1641764"/>
+            <a:ext cx="9692640" cy="5124161"/>
+          </a:xfrm>
+        </p:spPr>
+        <p:txBody>
+          <a:bodyPr>
+            <a:normAutofit/>
+          </a:bodyPr>
+          <a:lstStyle/>
+          <a:p>
+            <a:endParaRPr lang="hr-HR" sz="2600" noProof="0" dirty="0">
+              <a:latin typeface="Arial" panose="020B0604020202020204" pitchFamily="34" charset="0"/>
+              <a:cs typeface="Arial" panose="020B0604020202020204" pitchFamily="34" charset="0"/>
+            </a:endParaRPr>
+          </a:p>
+          <a:p>
+            <a:r>
+              <a:rPr lang="en-US" sz="2600" noProof="0" dirty="0">
+                <a:latin typeface="Arial" panose="020B0604020202020204" pitchFamily="34" charset="0"/>
+                <a:cs typeface="Arial" panose="020B0604020202020204" pitchFamily="34" charset="0"/>
+              </a:rPr>
+              <a:t>model: </a:t>
+            </a:r>
+            <a:r>
+              <a:rPr lang="hr-HR" sz="2600" b="1" noProof="0" dirty="0">
+                <a:latin typeface="Arial" panose="020B0604020202020204" pitchFamily="34" charset="0"/>
+                <a:cs typeface="Arial" panose="020B0604020202020204" pitchFamily="34" charset="0"/>
+              </a:rPr>
+              <a:t>ekstraktor značajki</a:t>
+            </a:r>
+            <a:r>
+              <a:rPr lang="en-US" sz="2600" b="1" noProof="0" dirty="0">
+                <a:latin typeface="Arial" panose="020B0604020202020204" pitchFamily="34" charset="0"/>
+                <a:cs typeface="Arial" panose="020B0604020202020204" pitchFamily="34" charset="0"/>
+              </a:rPr>
+              <a:t> </a:t>
+            </a:r>
+            <a:r>
+              <a:rPr lang="en-US" sz="2600" b="1" i="1" noProof="0" dirty="0">
+                <a:solidFill>
+                  <a:srgbClr val="AE73B1"/>
+                </a:solidFill>
+                <a:latin typeface="Arial" panose="020B0604020202020204" pitchFamily="34" charset="0"/>
+                <a:cs typeface="Arial" panose="020B0604020202020204" pitchFamily="34" charset="0"/>
+              </a:rPr>
+              <a:t>g</a:t>
+            </a:r>
+            <a:r>
+              <a:rPr lang="en-US" sz="2600" b="1" i="1" baseline="-25000" dirty="0">
+                <a:solidFill>
+                  <a:srgbClr val="AE73B1"/>
+                </a:solidFill>
+                <a:latin typeface="Arial" panose="020B0604020202020204" pitchFamily="34" charset="0"/>
+                <a:cs typeface="Arial" panose="020B0604020202020204" pitchFamily="34" charset="0"/>
+              </a:rPr>
+              <a:t>θ</a:t>
+            </a:r>
+            <a:r>
+              <a:rPr lang="hr-HR" sz="2600" noProof="0" dirty="0">
+                <a:latin typeface="Arial" panose="020B0604020202020204" pitchFamily="34" charset="0"/>
+                <a:cs typeface="Arial" panose="020B0604020202020204" pitchFamily="34" charset="0"/>
+              </a:rPr>
+              <a:t>, skup</a:t>
+            </a:r>
+            <a:r>
+              <a:rPr lang="en-US" sz="2600" noProof="0" dirty="0">
+                <a:latin typeface="Arial" panose="020B0604020202020204" pitchFamily="34" charset="0"/>
+                <a:cs typeface="Arial" panose="020B0604020202020204" pitchFamily="34" charset="0"/>
+              </a:rPr>
+              <a:t> </a:t>
+            </a:r>
+            <a:r>
+              <a:rPr lang="el-GR" sz="2600" b="1" i="1" noProof="0" dirty="0">
+                <a:solidFill>
+                  <a:srgbClr val="31B0E9"/>
+                </a:solidFill>
+                <a:latin typeface="Arial" panose="020B0604020202020204" pitchFamily="34" charset="0"/>
+                <a:cs typeface="Arial" panose="020B0604020202020204" pitchFamily="34" charset="0"/>
+              </a:rPr>
+              <a:t>ϕ</a:t>
+            </a:r>
+            <a:r>
+              <a:rPr lang="hr-HR" sz="2600" noProof="0" dirty="0">
+                <a:latin typeface="Arial" panose="020B0604020202020204" pitchFamily="34" charset="0"/>
+                <a:cs typeface="Arial" panose="020B0604020202020204" pitchFamily="34" charset="0"/>
+              </a:rPr>
+              <a:t> čistih prototipova</a:t>
+            </a:r>
+            <a:r>
+              <a:rPr lang="en-US" sz="2600" noProof="0" dirty="0">
+                <a:latin typeface="Arial" panose="020B0604020202020204" pitchFamily="34" charset="0"/>
+                <a:cs typeface="Arial" panose="020B0604020202020204" pitchFamily="34" charset="0"/>
+              </a:rPr>
+              <a:t> </a:t>
+            </a:r>
+            <a:r>
+              <a:rPr lang="el-GR" sz="2600" b="1" i="1" noProof="0" dirty="0">
+                <a:solidFill>
+                  <a:srgbClr val="31B0E9"/>
+                </a:solidFill>
+                <a:latin typeface="Arial" panose="020B0604020202020204" pitchFamily="34" charset="0"/>
+                <a:cs typeface="Arial" panose="020B0604020202020204" pitchFamily="34" charset="0"/>
+              </a:rPr>
+              <a:t>μ</a:t>
+            </a:r>
+            <a:r>
+              <a:rPr lang="en-US" sz="2600" i="1" baseline="-25000" noProof="0" dirty="0">
+                <a:solidFill>
+                  <a:srgbClr val="31B0E9"/>
+                </a:solidFill>
+                <a:latin typeface="Arial" panose="020B0604020202020204" pitchFamily="34" charset="0"/>
+                <a:cs typeface="Arial" panose="020B0604020202020204" pitchFamily="34" charset="0"/>
+              </a:rPr>
+              <a:t>l</a:t>
+            </a:r>
+            <a:r>
+              <a:rPr lang="hr-HR" sz="2600" noProof="0" dirty="0">
+                <a:latin typeface="Arial" panose="020B0604020202020204" pitchFamily="34" charset="0"/>
+                <a:cs typeface="Arial" panose="020B0604020202020204" pitchFamily="34" charset="0"/>
+              </a:rPr>
+              <a:t>, skup</a:t>
+            </a:r>
+            <a:r>
+              <a:rPr lang="en-US" sz="2600" dirty="0">
+                <a:latin typeface="Arial" panose="020B0604020202020204" pitchFamily="34" charset="0"/>
+                <a:cs typeface="Arial" panose="020B0604020202020204" pitchFamily="34" charset="0"/>
+              </a:rPr>
+              <a:t> </a:t>
+            </a:r>
+            <a:r>
+              <a:rPr lang="el-GR" sz="2600" b="1" i="1" noProof="0" dirty="0">
+                <a:solidFill>
+                  <a:srgbClr val="FCB937"/>
+                </a:solidFill>
+                <a:latin typeface="Arial" panose="020B0604020202020204" pitchFamily="34" charset="0"/>
+                <a:cs typeface="Arial" panose="020B0604020202020204" pitchFamily="34" charset="0"/>
+              </a:rPr>
+              <a:t>Ψ</a:t>
+            </a:r>
+            <a:r>
+              <a:rPr lang="hr-HR" sz="2600" noProof="0" dirty="0">
+                <a:latin typeface="Arial" panose="020B0604020202020204" pitchFamily="34" charset="0"/>
+                <a:cs typeface="Arial" panose="020B0604020202020204" pitchFamily="34" charset="0"/>
+              </a:rPr>
+              <a:t> zatrovanih prototipova </a:t>
+            </a:r>
+            <a:r>
+              <a:rPr lang="el-GR" sz="2600" b="1" i="1" noProof="0" dirty="0">
+                <a:solidFill>
+                  <a:srgbClr val="FCB937"/>
+                </a:solidFill>
+                <a:latin typeface="Arial" panose="020B0604020202020204" pitchFamily="34" charset="0"/>
+                <a:cs typeface="Arial" panose="020B0604020202020204" pitchFamily="34" charset="0"/>
+              </a:rPr>
+              <a:t>η</a:t>
+            </a:r>
+            <a:r>
+              <a:rPr lang="en-US" sz="2600" i="1" baseline="-25000" noProof="0" dirty="0">
+                <a:solidFill>
+                  <a:srgbClr val="FCB937"/>
+                </a:solidFill>
+                <a:latin typeface="Arial" panose="020B0604020202020204" pitchFamily="34" charset="0"/>
+                <a:cs typeface="Arial" panose="020B0604020202020204" pitchFamily="34" charset="0"/>
+              </a:rPr>
+              <a:t>y</a:t>
+            </a:r>
+            <a:endParaRPr lang="hr-HR" sz="2600" i="1" noProof="0" dirty="0">
+              <a:solidFill>
+                <a:srgbClr val="FCB937"/>
+              </a:solidFill>
+              <a:latin typeface="Arial" panose="020B0604020202020204" pitchFamily="34" charset="0"/>
+              <a:cs typeface="Arial" panose="020B0604020202020204" pitchFamily="34" charset="0"/>
+            </a:endParaRPr>
+          </a:p>
+          <a:p>
+            <a:endParaRPr lang="hr-HR" sz="2600" noProof="0" dirty="0">
+              <a:latin typeface="Arial" panose="020B0604020202020204" pitchFamily="34" charset="0"/>
+              <a:cs typeface="Arial" panose="020B0604020202020204" pitchFamily="34" charset="0"/>
+            </a:endParaRPr>
+          </a:p>
+          <a:p>
+            <a:endParaRPr lang="hr-HR" sz="2600" noProof="0" dirty="0">
+              <a:latin typeface="Arial" panose="020B0604020202020204" pitchFamily="34" charset="0"/>
+              <a:cs typeface="Arial" panose="020B0604020202020204" pitchFamily="34" charset="0"/>
+            </a:endParaRPr>
+          </a:p>
+          <a:p>
+            <a:endParaRPr lang="hr-HR" sz="2600" dirty="0">
+              <a:latin typeface="Arial" panose="020B0604020202020204" pitchFamily="34" charset="0"/>
+              <a:cs typeface="Arial" panose="020B0604020202020204" pitchFamily="34" charset="0"/>
+            </a:endParaRPr>
+          </a:p>
+          <a:p>
+            <a:endParaRPr lang="hr-HR" sz="2600" noProof="0" dirty="0">
+              <a:latin typeface="Arial" panose="020B0604020202020204" pitchFamily="34" charset="0"/>
+              <a:cs typeface="Arial" panose="020B0604020202020204" pitchFamily="34" charset="0"/>
+            </a:endParaRPr>
+          </a:p>
+          <a:p>
+            <a:endParaRPr lang="hr-HR" sz="2600" dirty="0">
+              <a:latin typeface="Arial" panose="020B0604020202020204" pitchFamily="34" charset="0"/>
+              <a:cs typeface="Arial" panose="020B0604020202020204" pitchFamily="34" charset="0"/>
+            </a:endParaRPr>
+          </a:p>
+        </p:txBody>
+      </p:sp>
+      <p:sp>
+        <p:nvSpPr>
+          <p:cNvPr id="2" name="Title 1">
+            <a:extLst>
+              <a:ext uri="{FF2B5EF4-FFF2-40B4-BE49-F238E27FC236}">
+                <a16:creationId xmlns:a16="http://schemas.microsoft.com/office/drawing/2014/main" id="{5C6AF7BE-BB66-8B40-08A5-681B2DEA3179}"/>
+              </a:ext>
+            </a:extLst>
+          </p:cNvPr>
+          <p:cNvSpPr>
+            <a:spLocks noGrp="1"/>
+          </p:cNvSpPr>
+          <p:nvPr>
+            <p:ph type="title"/>
+          </p:nvPr>
+        </p:nvSpPr>
+        <p:spPr/>
+        <p:txBody>
+          <a:bodyPr/>
+          <a:lstStyle/>
+          <a:p>
+            <a:r>
+              <a:rPr lang="hr-HR" noProof="0" dirty="0">
+                <a:latin typeface="Arial" panose="020B0604020202020204" pitchFamily="34" charset="0"/>
+                <a:cs typeface="Arial" panose="020B0604020202020204" pitchFamily="34" charset="0"/>
+              </a:rPr>
+              <a:t>Okvir VIBE</a:t>
+            </a:r>
+          </a:p>
+        </p:txBody>
+      </p:sp>
+      <p:sp>
+        <p:nvSpPr>
+          <p:cNvPr id="5" name="Slide Number Placeholder 4">
+            <a:extLst>
+              <a:ext uri="{FF2B5EF4-FFF2-40B4-BE49-F238E27FC236}">
+                <a16:creationId xmlns:a16="http://schemas.microsoft.com/office/drawing/2014/main" id="{166F4E7C-1CAF-80DB-BAF8-FD54241566DB}"/>
+              </a:ext>
+            </a:extLst>
+          </p:cNvPr>
+          <p:cNvSpPr>
+            <a:spLocks noGrp="1"/>
+          </p:cNvSpPr>
+          <p:nvPr>
+            <p:ph type="sldNum" sz="quarter" idx="12"/>
+          </p:nvPr>
+        </p:nvSpPr>
+        <p:spPr/>
+        <p:txBody>
+          <a:bodyPr>
+            <a:normAutofit lnSpcReduction="10000"/>
+          </a:bodyPr>
+          <a:lstStyle/>
+          <a:p>
+            <a:r>
+              <a:rPr lang="hr-HR" dirty="0"/>
+              <a:t>7</a:t>
+            </a:r>
+          </a:p>
+        </p:txBody>
+      </p:sp>
+      <p:grpSp>
+        <p:nvGrpSpPr>
+          <p:cNvPr id="11" name="Group 10">
+            <a:extLst>
+              <a:ext uri="{FF2B5EF4-FFF2-40B4-BE49-F238E27FC236}">
+                <a16:creationId xmlns:a16="http://schemas.microsoft.com/office/drawing/2014/main" id="{3E0CCB14-CB1F-7800-5D44-E0F6180C6D7F}"/>
+              </a:ext>
+            </a:extLst>
+          </p:cNvPr>
+          <p:cNvGrpSpPr/>
+          <p:nvPr/>
+        </p:nvGrpSpPr>
+        <p:grpSpPr>
+          <a:xfrm>
+            <a:off x="2617161" y="3546762"/>
+            <a:ext cx="6916115" cy="2769011"/>
+            <a:chOff x="2551921" y="2762158"/>
+            <a:chExt cx="6916115" cy="2769011"/>
+          </a:xfrm>
+        </p:grpSpPr>
+        <p:pic>
+          <p:nvPicPr>
+            <p:cNvPr id="8" name="Picture 7">
+              <a:extLst>
+                <a:ext uri="{FF2B5EF4-FFF2-40B4-BE49-F238E27FC236}">
+                  <a16:creationId xmlns:a16="http://schemas.microsoft.com/office/drawing/2014/main" id="{FE87E8C6-E15B-5F14-3F77-236DA59D9439}"/>
+                </a:ext>
+              </a:extLst>
+            </p:cNvPr>
+            <p:cNvPicPr>
+              <a:picLocks noChangeAspect="1"/>
+            </p:cNvPicPr>
+            <p:nvPr/>
+          </p:nvPicPr>
+          <p:blipFill>
+            <a:blip r:embed="rId2"/>
+            <a:stretch>
+              <a:fillRect/>
+            </a:stretch>
+          </p:blipFill>
+          <p:spPr>
+            <a:xfrm>
+              <a:off x="2580499" y="2762158"/>
+              <a:ext cx="6858957" cy="1333686"/>
+            </a:xfrm>
+            <a:prstGeom prst="rect">
+              <a:avLst/>
+            </a:prstGeom>
+          </p:spPr>
+        </p:pic>
+        <p:pic>
+          <p:nvPicPr>
+            <p:cNvPr id="10" name="Picture 9">
+              <a:extLst>
+                <a:ext uri="{FF2B5EF4-FFF2-40B4-BE49-F238E27FC236}">
+                  <a16:creationId xmlns:a16="http://schemas.microsoft.com/office/drawing/2014/main" id="{5DF43154-503A-D6FA-92AE-0B9D8F3DCC87}"/>
+                </a:ext>
+              </a:extLst>
+            </p:cNvPr>
+            <p:cNvPicPr>
+              <a:picLocks noChangeAspect="1"/>
+            </p:cNvPicPr>
+            <p:nvPr/>
+          </p:nvPicPr>
+          <p:blipFill>
+            <a:blip r:embed="rId3"/>
+            <a:stretch>
+              <a:fillRect/>
+            </a:stretch>
+          </p:blipFill>
+          <p:spPr>
+            <a:xfrm>
+              <a:off x="2551921" y="4140325"/>
+              <a:ext cx="6916115" cy="1390844"/>
+            </a:xfrm>
+            <a:prstGeom prst="rect">
+              <a:avLst/>
+            </a:prstGeom>
+          </p:spPr>
+        </p:pic>
+      </p:grpSp>
+    </p:spTree>
+    <p:extLst>
+      <p:ext uri="{BB962C8B-B14F-4D97-AF65-F5344CB8AC3E}">
+        <p14:creationId xmlns:p14="http://schemas.microsoft.com/office/powerpoint/2010/main" val="1091975325"/>
+      </p:ext>
+    </p:extLst>
+  </p:cSld>
+  <p:clrMapOvr>
+    <a:masterClrMapping/>
+  </p:clrMapOvr>
+</p:sld>
+</file>
+
+<file path=ppt/slides/slide11.xml><?xml version="1.0" encoding="utf-8"?>
+<p:sld xmlns:a="http://schemas.openxmlformats.org/drawingml/2006/main" xmlns:r="http://schemas.openxmlformats.org/officeDocument/2006/relationships" xmlns:p="http://schemas.openxmlformats.org/presentationml/2006/main">
+  <p:cSld>
+    <p:spTree>
+      <p:nvGrpSpPr>
+        <p:cNvPr id="1" name="">
+          <a:extLst>
+            <a:ext uri="{FF2B5EF4-FFF2-40B4-BE49-F238E27FC236}">
+              <a16:creationId xmlns:a16="http://schemas.microsoft.com/office/drawing/2014/main" id="{88491E6A-93E2-CEF2-7ACA-726C49939E6F}"/>
+            </a:ext>
+          </a:extLst>
+        </p:cNvPr>
+        <p:cNvGrpSpPr/>
+        <p:nvPr/>
+      </p:nvGrpSpPr>
+      <p:grpSpPr>
+        <a:xfrm>
+          <a:off x="0" y="0"/>
+          <a:ext cx="0" cy="0"/>
+          <a:chOff x="0" y="0"/>
+          <a:chExt cx="0" cy="0"/>
+        </a:xfrm>
+      </p:grpSpPr>
+      <p:sp>
+        <p:nvSpPr>
+          <p:cNvPr id="2" name="Title 1">
+            <a:extLst>
+              <a:ext uri="{FF2B5EF4-FFF2-40B4-BE49-F238E27FC236}">
+                <a16:creationId xmlns:a16="http://schemas.microsoft.com/office/drawing/2014/main" id="{47B137DB-77BF-3940-D056-CC1D48A6D047}"/>
+              </a:ext>
+            </a:extLst>
+          </p:cNvPr>
+          <p:cNvSpPr>
+            <a:spLocks noGrp="1"/>
+          </p:cNvSpPr>
+          <p:nvPr>
+            <p:ph type="title"/>
+          </p:nvPr>
+        </p:nvSpPr>
+        <p:spPr/>
+        <p:txBody>
+          <a:bodyPr/>
+          <a:lstStyle/>
+          <a:p>
+            <a:r>
+              <a:rPr lang="hr-HR" dirty="0">
+                <a:latin typeface="Arial" panose="020B0604020202020204" pitchFamily="34" charset="0"/>
+                <a:cs typeface="Arial" panose="020B0604020202020204" pitchFamily="34" charset="0"/>
+              </a:rPr>
+              <a:t>Okvir VIBE</a:t>
+            </a:r>
+            <a:endParaRPr lang="hr-HR" noProof="0" dirty="0">
+              <a:latin typeface="Arial" panose="020B0604020202020204" pitchFamily="34" charset="0"/>
+              <a:cs typeface="Arial" panose="020B0604020202020204" pitchFamily="34" charset="0"/>
+            </a:endParaRPr>
+          </a:p>
+        </p:txBody>
+      </p:sp>
+      <p:sp>
+        <p:nvSpPr>
+          <p:cNvPr id="5" name="Slide Number Placeholder 4">
+            <a:extLst>
+              <a:ext uri="{FF2B5EF4-FFF2-40B4-BE49-F238E27FC236}">
+                <a16:creationId xmlns:a16="http://schemas.microsoft.com/office/drawing/2014/main" id="{D0A7DCF3-5E34-BB41-57CB-ABCF2D70C6DF}"/>
+              </a:ext>
+            </a:extLst>
+          </p:cNvPr>
+          <p:cNvSpPr>
+            <a:spLocks noGrp="1"/>
+          </p:cNvSpPr>
+          <p:nvPr>
+            <p:ph type="sldNum" sz="quarter" idx="12"/>
+          </p:nvPr>
+        </p:nvSpPr>
+        <p:spPr/>
+        <p:txBody>
+          <a:bodyPr>
+            <a:normAutofit lnSpcReduction="10000"/>
+          </a:bodyPr>
+          <a:lstStyle/>
+          <a:p>
+            <a:r>
+              <a:rPr lang="hr-HR" dirty="0"/>
+              <a:t>8</a:t>
+            </a:r>
+          </a:p>
+        </p:txBody>
+      </p:sp>
+      <p:pic>
+        <p:nvPicPr>
+          <p:cNvPr id="8" name="Picture 7" descr="A diagram of a bird&#10;&#10;AI-generated content may be incorrect.">
+            <a:extLst>
+              <a:ext uri="{FF2B5EF4-FFF2-40B4-BE49-F238E27FC236}">
+                <a16:creationId xmlns:a16="http://schemas.microsoft.com/office/drawing/2014/main" id="{21D202AF-056A-3282-83D7-9E8DEB212C53}"/>
+              </a:ext>
+            </a:extLst>
+          </p:cNvPr>
+          <p:cNvPicPr>
+            <a:picLocks noChangeAspect="1"/>
+          </p:cNvPicPr>
+          <p:nvPr/>
+        </p:nvPicPr>
+        <p:blipFill>
+          <a:blip r:embed="rId2">
+            <a:extLst>
+              <a:ext uri="{28A0092B-C50C-407E-A947-70E740481C1C}">
+                <a14:useLocalDpi xmlns:a14="http://schemas.microsoft.com/office/drawing/2010/main" val="0"/>
+              </a:ext>
+            </a:extLst>
+          </a:blip>
+          <a:stretch>
+            <a:fillRect/>
+          </a:stretch>
+        </p:blipFill>
+        <p:spPr>
+          <a:xfrm>
+            <a:off x="501390" y="2334827"/>
+            <a:ext cx="10791450" cy="3446755"/>
+          </a:xfrm>
+          <a:prstGeom prst="rect">
+            <a:avLst/>
+          </a:prstGeom>
+        </p:spPr>
+      </p:pic>
+      <p:sp>
+        <p:nvSpPr>
+          <p:cNvPr id="4" name="TextBox 3">
+            <a:extLst>
+              <a:ext uri="{FF2B5EF4-FFF2-40B4-BE49-F238E27FC236}">
+                <a16:creationId xmlns:a16="http://schemas.microsoft.com/office/drawing/2014/main" id="{4338E3E9-19BE-142E-0026-27CB290AB2E2}"/>
+              </a:ext>
+            </a:extLst>
+          </p:cNvPr>
+          <p:cNvSpPr txBox="1"/>
+          <p:nvPr/>
+        </p:nvSpPr>
+        <p:spPr>
+          <a:xfrm>
+            <a:off x="2354555" y="5873373"/>
+            <a:ext cx="7085120" cy="492443"/>
+          </a:xfrm>
+          <a:prstGeom prst="rect">
+            <a:avLst/>
+          </a:prstGeom>
+          <a:noFill/>
+        </p:spPr>
+        <p:txBody>
+          <a:bodyPr wrap="square">
+            <a:spAutoFit/>
+          </a:bodyPr>
+          <a:lstStyle/>
+          <a:p>
+            <a:pPr algn="ctr"/>
+            <a:r>
+              <a:rPr lang="hr-HR" sz="2600" dirty="0">
+                <a:solidFill>
+                  <a:schemeClr val="tx1">
+                    <a:lumMod val="65000"/>
+                    <a:lumOff val="35000"/>
+                  </a:schemeClr>
+                </a:solidFill>
+                <a:latin typeface="Arial" panose="020B0604020202020204" pitchFamily="34" charset="0"/>
+                <a:cs typeface="Arial" panose="020B0604020202020204" pitchFamily="34" charset="0"/>
+              </a:rPr>
+              <a:t>P</a:t>
+            </a:r>
+            <a:r>
+              <a:rPr lang="hr-HR" sz="2600" noProof="0" dirty="0">
+                <a:solidFill>
+                  <a:schemeClr val="tx1">
+                    <a:lumMod val="65000"/>
+                    <a:lumOff val="35000"/>
+                  </a:schemeClr>
+                </a:solidFill>
+                <a:latin typeface="Arial" panose="020B0604020202020204" pitchFamily="34" charset="0"/>
+                <a:cs typeface="Arial" panose="020B0604020202020204" pitchFamily="34" charset="0"/>
+              </a:rPr>
+              <a:t>reuzeto iz </a:t>
+            </a:r>
+            <a:r>
+              <a:rPr lang="en-US" sz="2600" noProof="0" dirty="0">
+                <a:solidFill>
+                  <a:schemeClr val="accent1"/>
+                </a:solidFill>
+                <a:latin typeface="Arial" panose="020B0604020202020204" pitchFamily="34" charset="0"/>
+                <a:cs typeface="Arial" panose="020B0604020202020204" pitchFamily="34" charset="0"/>
+              </a:rPr>
+              <a:t>[</a:t>
+            </a:r>
+            <a:r>
+              <a:rPr lang="en-US" sz="2600" noProof="0" dirty="0">
+                <a:solidFill>
+                  <a:schemeClr val="accent1"/>
+                </a:solidFill>
+                <a:latin typeface="Arial" panose="020B0604020202020204" pitchFamily="34" charset="0"/>
+                <a:cs typeface="Arial" panose="020B0604020202020204" pitchFamily="34" charset="0"/>
+                <a:hlinkClick r:id="rId3">
+                  <a:extLst>
+                    <a:ext uri="{A12FA001-AC4F-418D-AE19-62706E023703}">
+                      <ahyp:hlinkClr xmlns:ahyp="http://schemas.microsoft.com/office/drawing/2018/hyperlinkcolor" val="tx"/>
+                    </a:ext>
+                  </a:extLst>
+                </a:hlinkClick>
+              </a:rPr>
+              <a:t>sabolic25iccv</a:t>
+            </a:r>
+            <a:r>
+              <a:rPr lang="en-US" sz="2600" noProof="0" dirty="0">
+                <a:solidFill>
+                  <a:schemeClr val="accent1"/>
+                </a:solidFill>
+                <a:latin typeface="Arial" panose="020B0604020202020204" pitchFamily="34" charset="0"/>
+                <a:cs typeface="Arial" panose="020B0604020202020204" pitchFamily="34" charset="0"/>
+              </a:rPr>
+              <a:t>]</a:t>
+            </a:r>
+            <a:endParaRPr lang="hr-HR" sz="2600" noProof="0" dirty="0">
+              <a:solidFill>
+                <a:schemeClr val="accent1"/>
+              </a:solidFill>
+              <a:latin typeface="Arial" panose="020B0604020202020204" pitchFamily="34" charset="0"/>
+              <a:cs typeface="Arial" panose="020B0604020202020204" pitchFamily="34" charset="0"/>
+            </a:endParaRPr>
+          </a:p>
+        </p:txBody>
+      </p:sp>
+    </p:spTree>
+    <p:extLst>
+      <p:ext uri="{BB962C8B-B14F-4D97-AF65-F5344CB8AC3E}">
+        <p14:creationId xmlns:p14="http://schemas.microsoft.com/office/powerpoint/2010/main" val="3243471539"/>
+      </p:ext>
+    </p:extLst>
+  </p:cSld>
+  <p:clrMapOvr>
+    <a:masterClrMapping/>
+  </p:clrMapOvr>
+</p:sld>
+</file>
+
+<file path=ppt/slides/slide12.xml><?xml version="1.0" encoding="utf-8"?>
+<p:sld xmlns:a="http://schemas.openxmlformats.org/drawingml/2006/main" xmlns:r="http://schemas.openxmlformats.org/officeDocument/2006/relationships" xmlns:p="http://schemas.openxmlformats.org/presentationml/2006/main">
+  <p:cSld>
+    <p:spTree>
+      <p:nvGrpSpPr>
+        <p:cNvPr id="1" name="">
+          <a:extLst>
+            <a:ext uri="{FF2B5EF4-FFF2-40B4-BE49-F238E27FC236}">
               <a16:creationId xmlns:a16="http://schemas.microsoft.com/office/drawing/2014/main" id="{EFD79DC0-028A-FC80-FDF1-FA8AEAD0345D}"/>
             </a:ext>
           </a:extLst>
@@ -4376,17 +5295,65 @@
         </p:nvSpPr>
         <p:spPr>
           <a:xfrm>
-            <a:off x="1261872" y="1828800"/>
-            <a:ext cx="9692640" cy="4735002"/>
+            <a:off x="1261872" y="1691322"/>
+            <a:ext cx="9692640" cy="4872480"/>
           </a:xfrm>
         </p:spPr>
         <p:txBody>
           <a:bodyPr>
-            <a:normAutofit/>
+            <a:normAutofit lnSpcReduction="10000"/>
           </a:bodyPr>
           <a:lstStyle/>
           <a:p>
             <a:endParaRPr lang="hr-HR" sz="2600" noProof="0" dirty="0">
+              <a:latin typeface="Arial" panose="020B0604020202020204" pitchFamily="34" charset="0"/>
+              <a:cs typeface="Arial" panose="020B0604020202020204" pitchFamily="34" charset="0"/>
+            </a:endParaRPr>
+          </a:p>
+          <a:p>
+            <a:r>
+              <a:rPr lang="hr-HR" sz="2600" dirty="0">
+                <a:latin typeface="Arial" panose="020B0604020202020204" pitchFamily="34" charset="0"/>
+                <a:cs typeface="Arial" panose="020B0604020202020204" pitchFamily="34" charset="0"/>
+              </a:rPr>
+              <a:t>m</a:t>
+            </a:r>
+            <a:r>
+              <a:rPr lang="hr-HR" sz="2600" noProof="0" dirty="0">
+                <a:latin typeface="Arial" panose="020B0604020202020204" pitchFamily="34" charset="0"/>
+                <a:cs typeface="Arial" panose="020B0604020202020204" pitchFamily="34" charset="0"/>
+              </a:rPr>
+              <a:t>otivacija: </a:t>
+            </a:r>
+            <a:r>
+              <a:rPr lang="hr-HR" sz="2600" dirty="0">
+                <a:latin typeface="Arial" panose="020B0604020202020204" pitchFamily="34" charset="0"/>
+                <a:cs typeface="Arial" panose="020B0604020202020204" pitchFamily="34" charset="0"/>
+              </a:rPr>
+              <a:t>samonadzirano učenje može </a:t>
+            </a:r>
+            <a:r>
+              <a:rPr lang="hr-HR" sz="2600" b="1" dirty="0">
+                <a:latin typeface="Arial" panose="020B0604020202020204" pitchFamily="34" charset="0"/>
+                <a:cs typeface="Arial" panose="020B0604020202020204" pitchFamily="34" charset="0"/>
+              </a:rPr>
+              <a:t>poboljšati performanse</a:t>
+            </a:r>
+            <a:r>
+              <a:rPr lang="hr-HR" sz="2600" dirty="0">
+                <a:latin typeface="Arial" panose="020B0604020202020204" pitchFamily="34" charset="0"/>
+                <a:cs typeface="Arial" panose="020B0604020202020204" pitchFamily="34" charset="0"/>
+              </a:rPr>
+              <a:t> modela </a:t>
+            </a:r>
+            <a:r>
+              <a:rPr lang="hr-HR" sz="2600" b="1" dirty="0">
+                <a:latin typeface="Arial" panose="020B0604020202020204" pitchFamily="34" charset="0"/>
+                <a:cs typeface="Arial" panose="020B0604020202020204" pitchFamily="34" charset="0"/>
+              </a:rPr>
+              <a:t>bez korištenja oznaka</a:t>
+            </a:r>
+            <a:endParaRPr lang="hr-HR" sz="2600" b="1" noProof="0" dirty="0">
               <a:latin typeface="Arial" panose="020B0604020202020204" pitchFamily="34" charset="0"/>
               <a:cs typeface="Arial" panose="020B0604020202020204" pitchFamily="34" charset="0"/>
             </a:endParaRPr>
@@ -4562,7 +5529,7 @@
           <a:p>
             <a:r>
               <a:rPr lang="hr-HR" dirty="0"/>
-              <a:t>8</a:t>
+              <a:t>9</a:t>
             </a:r>
           </a:p>
         </p:txBody>
@@ -4589,7 +5556,7 @@
         </p:blipFill>
         <p:spPr>
           <a:xfrm>
-            <a:off x="2484257" y="4217404"/>
+            <a:off x="2463475" y="4723097"/>
             <a:ext cx="6573167" cy="571580"/>
           </a:xfrm>
           <a:prstGeom prst="rect">
@@ -4610,7 +5577,7 @@
 </p:sld>
 </file>
 
-<file path=ppt/slides/slide11.xml><?xml version="1.0" encoding="utf-8"?>
+<file path=ppt/slides/slide13.xml><?xml version="1.0" encoding="utf-8"?>
 <p:sld xmlns:a="http://schemas.openxmlformats.org/drawingml/2006/main" xmlns:r="http://schemas.openxmlformats.org/officeDocument/2006/relationships" xmlns:p="http://schemas.openxmlformats.org/presentationml/2006/main">
   <p:cSld>
     <p:spTree>
@@ -4671,7 +5638,7 @@
 </p:sld>
 </file>
 
-<file path=ppt/slides/slide12.xml><?xml version="1.0" encoding="utf-8"?>
+<file path=ppt/slides/slide14.xml><?xml version="1.0" encoding="utf-8"?>
 <p:sld xmlns:a="http://schemas.openxmlformats.org/drawingml/2006/main" xmlns:r="http://schemas.openxmlformats.org/officeDocument/2006/relationships" xmlns:p="http://schemas.openxmlformats.org/presentationml/2006/main">
   <p:cSld>
     <p:spTree>
@@ -4858,7 +5825,7 @@
           <a:p>
             <a:r>
               <a:rPr lang="hr-HR" dirty="0"/>
-              <a:t>9</a:t>
+              <a:t>10</a:t>
             </a:r>
           </a:p>
         </p:txBody>
@@ -4913,7 +5880,7 @@
 </p:sld>
 </file>
 
-<file path=ppt/slides/slide13.xml><?xml version="1.0" encoding="utf-8"?>
+<file path=ppt/slides/slide15.xml><?xml version="1.0" encoding="utf-8"?>
 <p:sld xmlns:a="http://schemas.openxmlformats.org/drawingml/2006/main" xmlns:r="http://schemas.openxmlformats.org/officeDocument/2006/relationships" xmlns:p="http://schemas.openxmlformats.org/presentationml/2006/main">
   <p:cSld>
     <p:spTree>
@@ -5325,7 +6292,7 @@
           <a:p>
             <a:r>
               <a:rPr lang="hr-HR" dirty="0"/>
-              <a:t>10</a:t>
+              <a:t>11</a:t>
             </a:r>
           </a:p>
         </p:txBody>
@@ -5377,7 +6344,7 @@
 </p:sld>
 </file>
 
-<file path=ppt/slides/slide14.xml><?xml version="1.0" encoding="utf-8"?>
+<file path=ppt/slides/slide16.xml><?xml version="1.0" encoding="utf-8"?>
 <p:sld xmlns:a="http://schemas.openxmlformats.org/drawingml/2006/main" xmlns:r="http://schemas.openxmlformats.org/officeDocument/2006/relationships" xmlns:p="http://schemas.openxmlformats.org/presentationml/2006/main">
   <p:cSld>
     <p:spTree>
@@ -5449,13 +6416,13 @@
         </p:nvSpPr>
         <p:spPr>
           <a:xfrm>
-            <a:off x="1261871" y="1828800"/>
-            <a:ext cx="9222657" cy="4735002"/>
+            <a:off x="1261871" y="1691322"/>
+            <a:ext cx="9222657" cy="4872480"/>
           </a:xfrm>
         </p:spPr>
         <p:txBody>
           <a:bodyPr>
-            <a:normAutofit lnSpcReduction="10000"/>
+            <a:noAutofit/>
           </a:bodyPr>
           <a:lstStyle/>
           <a:p>
@@ -5511,6 +6478,63 @@
                 <a:cs typeface="Arial" panose="020B0604020202020204" pitchFamily="34" charset="0"/>
               </a:rPr>
               <a:t>centroide pripadnih razreda</a:t>
+            </a:r>
+            <a:endParaRPr lang="en-US" sz="2600" b="1" dirty="0">
+              <a:latin typeface="Arial" panose="020B0604020202020204" pitchFamily="34" charset="0"/>
+              <a:cs typeface="Arial" panose="020B0604020202020204" pitchFamily="34" charset="0"/>
+            </a:endParaRPr>
+          </a:p>
+          <a:p>
+            <a:r>
+              <a:rPr lang="hr-HR" sz="2600" dirty="0">
+                <a:latin typeface="Arial" panose="020B0604020202020204" pitchFamily="34" charset="0"/>
+                <a:cs typeface="Arial" panose="020B0604020202020204" pitchFamily="34" charset="0"/>
+              </a:rPr>
+              <a:t>provođenje </a:t>
+            </a:r>
+            <a:r>
+              <a:rPr lang="hr-HR" sz="2600" b="1" dirty="0">
+                <a:latin typeface="Arial" panose="020B0604020202020204" pitchFamily="34" charset="0"/>
+                <a:cs typeface="Arial" panose="020B0604020202020204" pitchFamily="34" charset="0"/>
+              </a:rPr>
+              <a:t>E koraka </a:t>
+            </a:r>
+            <a:r>
+              <a:rPr lang="hr-HR" sz="2600" dirty="0">
+                <a:latin typeface="Arial" panose="020B0604020202020204" pitchFamily="34" charset="0"/>
+                <a:cs typeface="Arial" panose="020B0604020202020204" pitchFamily="34" charset="0"/>
+              </a:rPr>
+              <a:t>učenja </a:t>
+            </a:r>
+            <a:r>
+              <a:rPr lang="hr-HR" sz="2600" b="1" dirty="0">
+                <a:latin typeface="Arial" panose="020B0604020202020204" pitchFamily="34" charset="0"/>
+                <a:cs typeface="Arial" panose="020B0604020202020204" pitchFamily="34" charset="0"/>
+              </a:rPr>
+              <a:t>svakih 1000 iteracija</a:t>
+            </a:r>
+          </a:p>
+          <a:p>
+            <a:r>
+              <a:rPr lang="hr-HR" sz="2600" b="1" dirty="0">
+                <a:latin typeface="Arial" panose="020B0604020202020204" pitchFamily="34" charset="0"/>
+                <a:cs typeface="Arial" panose="020B0604020202020204" pitchFamily="34" charset="0"/>
+              </a:rPr>
+              <a:t>faktor konzistencijskog gubitka </a:t>
+            </a:r>
+            <a:r>
+              <a:rPr lang="hr-HR" sz="2600" dirty="0">
+                <a:latin typeface="Arial" panose="020B0604020202020204" pitchFamily="34" charset="0"/>
+                <a:cs typeface="Arial" panose="020B0604020202020204" pitchFamily="34" charset="0"/>
+              </a:rPr>
+              <a:t>iznosa</a:t>
+            </a:r>
+            <a:r>
+              <a:rPr lang="hr-HR" sz="2600" b="1" dirty="0">
+                <a:latin typeface="Arial" panose="020B0604020202020204" pitchFamily="34" charset="0"/>
+                <a:cs typeface="Arial" panose="020B0604020202020204" pitchFamily="34" charset="0"/>
+              </a:rPr>
+              <a:t> 5</a:t>
             </a:r>
             <a:endParaRPr lang="hr-HR" sz="2600" b="1" noProof="0" dirty="0">
               <a:latin typeface="Arial" panose="020B0604020202020204" pitchFamily="34" charset="0"/>
@@ -5646,70 +6670,6 @@
               </a:rPr>
               <a:t> 256</a:t>
             </a:r>
-          </a:p>
-          <a:p>
-            <a:r>
-              <a:rPr lang="hr-HR" sz="2600" dirty="0">
-                <a:latin typeface="Arial" panose="020B0604020202020204" pitchFamily="34" charset="0"/>
-                <a:cs typeface="Arial" panose="020B0604020202020204" pitchFamily="34" charset="0"/>
-              </a:rPr>
-              <a:t>provođenje </a:t>
-            </a:r>
-            <a:r>
-              <a:rPr lang="hr-HR" sz="2600" b="1" dirty="0">
-                <a:latin typeface="Arial" panose="020B0604020202020204" pitchFamily="34" charset="0"/>
-                <a:cs typeface="Arial" panose="020B0604020202020204" pitchFamily="34" charset="0"/>
-              </a:rPr>
-              <a:t>E koraka </a:t>
-            </a:r>
-            <a:r>
-              <a:rPr lang="hr-HR" sz="2600" dirty="0">
-                <a:latin typeface="Arial" panose="020B0604020202020204" pitchFamily="34" charset="0"/>
-                <a:cs typeface="Arial" panose="020B0604020202020204" pitchFamily="34" charset="0"/>
-              </a:rPr>
-              <a:t>učenja </a:t>
-            </a:r>
-            <a:r>
-              <a:rPr lang="hr-HR" sz="2600" b="1" dirty="0">
-                <a:latin typeface="Arial" panose="020B0604020202020204" pitchFamily="34" charset="0"/>
-                <a:cs typeface="Arial" panose="020B0604020202020204" pitchFamily="34" charset="0"/>
-              </a:rPr>
-              <a:t>svakih 1000 iteracija</a:t>
-            </a:r>
-          </a:p>
-          <a:p>
-            <a:r>
-              <a:rPr lang="hr-HR" sz="2600" b="1" noProof="0" dirty="0">
-                <a:latin typeface="Arial" panose="020B0604020202020204" pitchFamily="34" charset="0"/>
-                <a:cs typeface="Arial" panose="020B0604020202020204" pitchFamily="34" charset="0"/>
-              </a:rPr>
-              <a:t>faktor konzistencijskog gubitka </a:t>
-            </a:r>
-            <a:r>
-              <a:rPr lang="hr-HR" sz="2600" noProof="0" dirty="0">
-                <a:latin typeface="Arial" panose="020B0604020202020204" pitchFamily="34" charset="0"/>
-                <a:cs typeface="Arial" panose="020B0604020202020204" pitchFamily="34" charset="0"/>
-              </a:rPr>
-              <a:t>iznosa</a:t>
-            </a:r>
-            <a:r>
-              <a:rPr lang="hr-HR" sz="2600" b="1" noProof="0" dirty="0">
-                <a:latin typeface="Arial" panose="020B0604020202020204" pitchFamily="34" charset="0"/>
-                <a:cs typeface="Arial" panose="020B0604020202020204" pitchFamily="34" charset="0"/>
-              </a:rPr>
-              <a:t> </a:t>
-            </a:r>
-            <a:r>
-              <a:rPr lang="hr-HR" sz="2600" b="1" dirty="0">
-                <a:latin typeface="Arial" panose="020B0604020202020204" pitchFamily="34" charset="0"/>
-                <a:cs typeface="Arial" panose="020B0604020202020204" pitchFamily="34" charset="0"/>
-              </a:rPr>
-              <a:t>5</a:t>
-            </a:r>
-            <a:endParaRPr lang="hr-HR" sz="2600" b="1" noProof="0" dirty="0">
-              <a:latin typeface="Arial" panose="020B0604020202020204" pitchFamily="34" charset="0"/>
-              <a:cs typeface="Arial" panose="020B0604020202020204" pitchFamily="34" charset="0"/>
-            </a:endParaRPr>
           </a:p>
         </p:txBody>
       </p:sp>
@@ -5742,7 +6702,7 @@
             </a:r>
             <a:r>
               <a:rPr lang="hr-HR" dirty="0"/>
-              <a:t>1</a:t>
+              <a:t>2</a:t>
             </a:r>
           </a:p>
         </p:txBody>
@@ -5794,7 +6754,7 @@
 </p:sld>
 </file>
 
-<file path=ppt/slides/slide15.xml><?xml version="1.0" encoding="utf-8"?>
+<file path=ppt/slides/slide17.xml><?xml version="1.0" encoding="utf-8"?>
 <p:sld xmlns:a="http://schemas.openxmlformats.org/drawingml/2006/main" xmlns:r="http://schemas.openxmlformats.org/officeDocument/2006/relationships" xmlns:p="http://schemas.openxmlformats.org/presentationml/2006/main">
   <p:cSld>
     <p:spTree>
@@ -5839,7 +6799,7 @@
         </p:blipFill>
         <p:spPr>
           <a:xfrm>
-            <a:off x="4120950" y="4259702"/>
+            <a:off x="4120950" y="3994619"/>
             <a:ext cx="3248478" cy="2076740"/>
           </a:xfrm>
           <a:prstGeom prst="rect">
@@ -6285,7 +7245,7 @@
           <a:p>
             <a:r>
               <a:rPr lang="hr-HR" dirty="0"/>
-              <a:t>12</a:t>
+              <a:t>13</a:t>
             </a:r>
           </a:p>
         </p:txBody>
@@ -6321,6 +7281,86 @@
           <a:lstStyle/>
           <a:p>
             <a:endParaRPr lang="hr-HR" dirty="0"/>
+          </a:p>
+        </p:txBody>
+      </p:sp>
+      <p:sp>
+        <p:nvSpPr>
+          <p:cNvPr id="3" name="TextBox 2">
+            <a:extLst>
+              <a:ext uri="{FF2B5EF4-FFF2-40B4-BE49-F238E27FC236}">
+                <a16:creationId xmlns:a16="http://schemas.microsoft.com/office/drawing/2014/main" id="{26F71E68-1B09-DEC0-43AE-F23FFEEE52AB}"/>
+              </a:ext>
+            </a:extLst>
+          </p:cNvPr>
+          <p:cNvSpPr txBox="1"/>
+          <p:nvPr/>
+        </p:nvSpPr>
+        <p:spPr>
+          <a:xfrm>
+            <a:off x="2211681" y="6363747"/>
+            <a:ext cx="7067017" cy="400110"/>
+          </a:xfrm>
+          <a:prstGeom prst="rect">
+            <a:avLst/>
+          </a:prstGeom>
+          <a:noFill/>
+        </p:spPr>
+        <p:txBody>
+          <a:bodyPr wrap="square" rtlCol="0">
+            <a:spAutoFit/>
+          </a:bodyPr>
+          <a:lstStyle/>
+          <a:p>
+            <a:pPr algn="ctr"/>
+            <a:r>
+              <a:rPr lang="hr-HR" sz="2000" b="1" dirty="0">
+                <a:solidFill>
+                  <a:schemeClr val="bg1">
+                    <a:lumMod val="65000"/>
+                  </a:schemeClr>
+                </a:solidFill>
+                <a:latin typeface="Arial" panose="020B0604020202020204" pitchFamily="34" charset="0"/>
+                <a:cs typeface="Arial" panose="020B0604020202020204" pitchFamily="34" charset="0"/>
+              </a:rPr>
+              <a:t>CE</a:t>
+            </a:r>
+            <a:r>
+              <a:rPr lang="hr-HR" sz="2000" dirty="0">
+                <a:solidFill>
+                  <a:schemeClr val="bg1">
+                    <a:lumMod val="65000"/>
+                  </a:schemeClr>
+                </a:solidFill>
+                <a:latin typeface="Arial" panose="020B0604020202020204" pitchFamily="34" charset="0"/>
+                <a:cs typeface="Arial" panose="020B0604020202020204" pitchFamily="34" charset="0"/>
+              </a:rPr>
+              <a:t> – nadzirano učenje		</a:t>
+            </a:r>
+            <a:r>
+              <a:rPr lang="hr-HR" sz="2000" b="1" dirty="0">
+                <a:solidFill>
+                  <a:schemeClr val="bg1">
+                    <a:lumMod val="65000"/>
+                  </a:schemeClr>
+                </a:solidFill>
+                <a:latin typeface="Arial" panose="020B0604020202020204" pitchFamily="34" charset="0"/>
+                <a:cs typeface="Arial" panose="020B0604020202020204" pitchFamily="34" charset="0"/>
+              </a:rPr>
+              <a:t>CL</a:t>
+            </a:r>
+            <a:r>
+              <a:rPr lang="hr-HR" sz="2000" dirty="0">
+                <a:solidFill>
+                  <a:schemeClr val="bg1">
+                    <a:lumMod val="65000"/>
+                  </a:schemeClr>
+                </a:solidFill>
+                <a:latin typeface="Arial" panose="020B0604020202020204" pitchFamily="34" charset="0"/>
+                <a:cs typeface="Arial" panose="020B0604020202020204" pitchFamily="34" charset="0"/>
+              </a:rPr>
+              <a:t> – konzistencijski gubitak</a:t>
+            </a:r>
           </a:p>
         </p:txBody>
       </p:sp>
@@ -6337,7 +7377,7 @@
 </p:sld>
 </file>
 
-<file path=ppt/slides/slide16.xml><?xml version="1.0" encoding="utf-8"?>
+<file path=ppt/slides/slide18.xml><?xml version="1.0" encoding="utf-8"?>
 <p:sld xmlns:a="http://schemas.openxmlformats.org/drawingml/2006/main" xmlns:r="http://schemas.openxmlformats.org/officeDocument/2006/relationships" xmlns:p="http://schemas.openxmlformats.org/presentationml/2006/main">
   <p:cSld>
     <p:spTree>
@@ -6433,7 +7473,7 @@
           <a:p>
             <a:r>
               <a:rPr lang="hr-HR" dirty="0"/>
-              <a:t>13</a:t>
+              <a:t>14</a:t>
             </a:r>
           </a:p>
         </p:txBody>
@@ -6527,7 +7567,7 @@
               <p:nvPr/>
             </p:nvPicPr>
             <p:blipFill>
-              <a:blip r:embed="rId2"/>
+              <a:blip r:embed="rId3"/>
               <a:srcRect l="695"/>
               <a:stretch>
                 <a:fillRect/>
@@ -6624,7 +7664,7 @@
               <p:nvPr/>
             </p:nvPicPr>
             <p:blipFill>
-              <a:blip r:embed="rId3"/>
+              <a:blip r:embed="rId4"/>
               <a:stretch>
                 <a:fillRect/>
               </a:stretch>
@@ -7021,7 +8061,7 @@
                 </a:solidFill>
                 <a:latin typeface="Arial" panose="020B0604020202020204" pitchFamily="34" charset="0"/>
                 <a:cs typeface="Arial" panose="020B0604020202020204" pitchFamily="34" charset="0"/>
-                <a:hlinkClick r:id="rId4">
+                <a:hlinkClick r:id="rId5">
                   <a:extLst>
                     <a:ext uri="{A12FA001-AC4F-418D-AE19-62706E023703}">
                       <ahyp:hlinkClr xmlns:ahyp="http://schemas.microsoft.com/office/drawing/2018/hyperlinkcolor" val="tx"/>
@@ -7057,6 +8097,86 @@
               <a:latin typeface="Arial" panose="020B0604020202020204" pitchFamily="34" charset="0"/>
               <a:cs typeface="Arial" panose="020B0604020202020204" pitchFamily="34" charset="0"/>
             </a:endParaRPr>
+          </a:p>
+        </p:txBody>
+      </p:sp>
+      <p:sp>
+        <p:nvSpPr>
+          <p:cNvPr id="3" name="TextBox 2">
+            <a:extLst>
+              <a:ext uri="{FF2B5EF4-FFF2-40B4-BE49-F238E27FC236}">
+                <a16:creationId xmlns:a16="http://schemas.microsoft.com/office/drawing/2014/main" id="{7B9E71DF-F153-ABD2-5A72-D94908C9E0AA}"/>
+              </a:ext>
+            </a:extLst>
+          </p:cNvPr>
+          <p:cNvSpPr txBox="1"/>
+          <p:nvPr/>
+        </p:nvSpPr>
+        <p:spPr>
+          <a:xfrm>
+            <a:off x="2211681" y="6363747"/>
+            <a:ext cx="7067017" cy="400110"/>
+          </a:xfrm>
+          <a:prstGeom prst="rect">
+            <a:avLst/>
+          </a:prstGeom>
+          <a:noFill/>
+        </p:spPr>
+        <p:txBody>
+          <a:bodyPr wrap="square" rtlCol="0">
+            <a:spAutoFit/>
+          </a:bodyPr>
+          <a:lstStyle/>
+          <a:p>
+            <a:pPr algn="ctr"/>
+            <a:r>
+              <a:rPr lang="hr-HR" sz="2000" b="1" dirty="0">
+                <a:solidFill>
+                  <a:schemeClr val="bg1">
+                    <a:lumMod val="65000"/>
+                  </a:schemeClr>
+                </a:solidFill>
+                <a:latin typeface="Arial" panose="020B0604020202020204" pitchFamily="34" charset="0"/>
+                <a:cs typeface="Arial" panose="020B0604020202020204" pitchFamily="34" charset="0"/>
+              </a:rPr>
+              <a:t>CE</a:t>
+            </a:r>
+            <a:r>
+              <a:rPr lang="hr-HR" sz="2000" dirty="0">
+                <a:solidFill>
+                  <a:schemeClr val="bg1">
+                    <a:lumMod val="65000"/>
+                  </a:schemeClr>
+                </a:solidFill>
+                <a:latin typeface="Arial" panose="020B0604020202020204" pitchFamily="34" charset="0"/>
+                <a:cs typeface="Arial" panose="020B0604020202020204" pitchFamily="34" charset="0"/>
+              </a:rPr>
+              <a:t> – nadzirano učenje		</a:t>
+            </a:r>
+            <a:r>
+              <a:rPr lang="hr-HR" sz="2000" b="1" dirty="0">
+                <a:solidFill>
+                  <a:schemeClr val="bg1">
+                    <a:lumMod val="65000"/>
+                  </a:schemeClr>
+                </a:solidFill>
+                <a:latin typeface="Arial" panose="020B0604020202020204" pitchFamily="34" charset="0"/>
+                <a:cs typeface="Arial" panose="020B0604020202020204" pitchFamily="34" charset="0"/>
+              </a:rPr>
+              <a:t>CL</a:t>
+            </a:r>
+            <a:r>
+              <a:rPr lang="hr-HR" sz="2000" dirty="0">
+                <a:solidFill>
+                  <a:schemeClr val="bg1">
+                    <a:lumMod val="65000"/>
+                  </a:schemeClr>
+                </a:solidFill>
+                <a:latin typeface="Arial" panose="020B0604020202020204" pitchFamily="34" charset="0"/>
+                <a:cs typeface="Arial" panose="020B0604020202020204" pitchFamily="34" charset="0"/>
+              </a:rPr>
+              <a:t> – konzistencijski gubitak</a:t>
+            </a:r>
           </a:p>
         </p:txBody>
       </p:sp>
@@ -7073,7 +8193,7 @@
 </p:sld>
 </file>
 
-<file path=ppt/slides/slide17.xml><?xml version="1.0" encoding="utf-8"?>
+<file path=ppt/slides/slide19.xml><?xml version="1.0" encoding="utf-8"?>
 <p:sld xmlns:a="http://schemas.openxmlformats.org/drawingml/2006/main" xmlns:r="http://schemas.openxmlformats.org/officeDocument/2006/relationships" xmlns:p="http://schemas.openxmlformats.org/presentationml/2006/main">
   <p:cSld>
     <p:spTree>
@@ -7169,7 +8289,7 @@
           <a:p>
             <a:r>
               <a:rPr lang="hr-HR" dirty="0"/>
-              <a:t>14</a:t>
+              <a:t>15</a:t>
             </a:r>
           </a:p>
         </p:txBody>
@@ -7230,7 +8350,7 @@
         </p:blipFill>
         <p:spPr>
           <a:xfrm>
-            <a:off x="3007348" y="1988413"/>
+            <a:off x="3007348" y="2108420"/>
             <a:ext cx="5553850" cy="2105319"/>
           </a:xfrm>
           <a:prstGeom prst="rect">
@@ -7252,8 +8372,8 @@
         </p:nvSpPr>
         <p:spPr>
           <a:xfrm>
-            <a:off x="2697721" y="4564914"/>
-            <a:ext cx="6173104" cy="1692771"/>
+            <a:off x="3357770" y="4749580"/>
+            <a:ext cx="4853006" cy="1323439"/>
           </a:xfrm>
           <a:prstGeom prst="rect">
             <a:avLst/>
@@ -7267,11 +8387,10 @@
           <a:lstStyle/>
           <a:p>
             <a:r>
-              <a:rPr lang="hr-HR" sz="2600" b="1" dirty="0">
+              <a:rPr lang="hr-HR" sz="2000" b="1" dirty="0">
                 <a:solidFill>
-                  <a:schemeClr val="tx1">
+                  <a:schemeClr val="bg1">
                     <a:lumMod val="65000"/>
-                    <a:lumOff val="35000"/>
                   </a:schemeClr>
                 </a:solidFill>
                 <a:latin typeface="Arial" panose="020B0604020202020204" pitchFamily="34" charset="0"/>
@@ -7280,11 +8399,10 @@
               <a:t>CA</a:t>
             </a:r>
             <a:r>
-              <a:rPr lang="hr-HR" sz="2600" dirty="0">
+              <a:rPr lang="hr-HR" sz="2000" dirty="0">
                 <a:solidFill>
-                  <a:schemeClr val="tx1">
+                  <a:schemeClr val="bg1">
                     <a:lumMod val="65000"/>
-                    <a:lumOff val="35000"/>
                   </a:schemeClr>
                 </a:solidFill>
                 <a:latin typeface="Arial" panose="020B0604020202020204" pitchFamily="34" charset="0"/>
@@ -7292,21 +8410,13 @@
               </a:rPr>
               <a:t> – kosinusno kaljenje</a:t>
             </a:r>
-            <a:endParaRPr lang="hr-HR" sz="2600" dirty="0">
-              <a:solidFill>
-                <a:schemeClr val="accent1"/>
-              </a:solidFill>
-              <a:latin typeface="Arial" panose="020B0604020202020204" pitchFamily="34" charset="0"/>
-              <a:cs typeface="Arial" panose="020B0604020202020204" pitchFamily="34" charset="0"/>
-            </a:endParaRPr>
-          </a:p>
-          <a:p>
-            <a:r>
-              <a:rPr lang="hr-HR" sz="2600" b="1" dirty="0">
+          </a:p>
+          <a:p>
+            <a:r>
+              <a:rPr lang="hr-HR" sz="2000" b="1" dirty="0">
                 <a:solidFill>
-                  <a:schemeClr val="tx1">
+                  <a:schemeClr val="bg1">
                     <a:lumMod val="65000"/>
-                    <a:lumOff val="35000"/>
                   </a:schemeClr>
                 </a:solidFill>
                 <a:latin typeface="Arial" panose="020B0604020202020204" pitchFamily="34" charset="0"/>
@@ -7315,11 +8425,10 @@
               <a:t>CL</a:t>
             </a:r>
             <a:r>
-              <a:rPr lang="hr-HR" sz="2600" dirty="0">
+              <a:rPr lang="hr-HR" sz="2000" dirty="0">
                 <a:solidFill>
-                  <a:schemeClr val="tx1">
+                  <a:schemeClr val="bg1">
                     <a:lumMod val="65000"/>
-                    <a:lumOff val="35000"/>
                   </a:schemeClr>
                 </a:solidFill>
                 <a:latin typeface="Arial" panose="020B0604020202020204" pitchFamily="34" charset="0"/>
@@ -7330,11 +8439,10 @@
           </a:p>
           <a:p>
             <a:r>
-              <a:rPr lang="hr-HR" sz="2600" b="1" dirty="0">
+              <a:rPr lang="hr-HR" sz="2000" b="1" dirty="0">
                 <a:solidFill>
-                  <a:schemeClr val="tx1">
+                  <a:schemeClr val="bg1">
                     <a:lumMod val="65000"/>
-                    <a:lumOff val="35000"/>
                   </a:schemeClr>
                 </a:solidFill>
                 <a:latin typeface="Arial" panose="020B0604020202020204" pitchFamily="34" charset="0"/>
@@ -7343,11 +8451,10 @@
               <a:t>CR</a:t>
             </a:r>
             <a:r>
-              <a:rPr lang="hr-HR" sz="2600" dirty="0">
+              <a:rPr lang="hr-HR" sz="2000" dirty="0">
                 <a:solidFill>
-                  <a:schemeClr val="tx1">
+                  <a:schemeClr val="bg1">
                     <a:lumMod val="65000"/>
-                    <a:lumOff val="35000"/>
                   </a:schemeClr>
                 </a:solidFill>
                 <a:latin typeface="Arial" panose="020B0604020202020204" pitchFamily="34" charset="0"/>
@@ -7356,11 +8463,10 @@
               <a:t> – </a:t>
             </a:r>
             <a:r>
-              <a:rPr lang="en-US" sz="2600" dirty="0">
+              <a:rPr lang="en-US" sz="2000" dirty="0">
                 <a:solidFill>
-                  <a:schemeClr val="tx1">
+                  <a:schemeClr val="bg1">
                     <a:lumMod val="65000"/>
-                    <a:lumOff val="35000"/>
                   </a:schemeClr>
                 </a:solidFill>
                 <a:latin typeface="Arial" panose="020B0604020202020204" pitchFamily="34" charset="0"/>
@@ -7369,11 +8475,10 @@
               <a:t>fa</a:t>
             </a:r>
             <a:r>
-              <a:rPr lang="hr-HR" sz="2600" dirty="0">
+              <a:rPr lang="hr-HR" sz="2000" dirty="0">
                 <a:solidFill>
-                  <a:schemeClr val="tx1">
+                  <a:schemeClr val="bg1">
                     <a:lumMod val="65000"/>
-                    <a:lumOff val="35000"/>
                   </a:schemeClr>
                 </a:solidFill>
                 <a:latin typeface="Arial" panose="020B0604020202020204" pitchFamily="34" charset="0"/>
@@ -7382,11 +8487,10 @@
               <a:t>k</a:t>
             </a:r>
             <a:r>
-              <a:rPr lang="en-US" sz="2600" dirty="0">
+              <a:rPr lang="en-US" sz="2000" dirty="0">
                 <a:solidFill>
-                  <a:schemeClr val="tx1">
+                  <a:schemeClr val="bg1">
                     <a:lumMod val="65000"/>
-                    <a:lumOff val="35000"/>
                   </a:schemeClr>
                 </a:solidFill>
                 <a:latin typeface="Arial" panose="020B0604020202020204" pitchFamily="34" charset="0"/>
@@ -7395,11 +8499,10 @@
               <a:t>tor </a:t>
             </a:r>
             <a:r>
-              <a:rPr lang="hr-HR" sz="2600" dirty="0">
+              <a:rPr lang="hr-HR" sz="2000" dirty="0">
                 <a:solidFill>
-                  <a:schemeClr val="tx1">
+                  <a:schemeClr val="bg1">
                     <a:lumMod val="65000"/>
-                    <a:lumOff val="35000"/>
                   </a:schemeClr>
                 </a:solidFill>
                 <a:latin typeface="Arial" panose="020B0604020202020204" pitchFamily="34" charset="0"/>
@@ -7410,11 +8513,10 @@
           </a:p>
           <a:p>
             <a:r>
-              <a:rPr lang="hr-HR" sz="2600" b="1" dirty="0">
+              <a:rPr lang="hr-HR" sz="2000" b="1" dirty="0">
                 <a:solidFill>
-                  <a:schemeClr val="tx1">
+                  <a:schemeClr val="bg1">
                     <a:lumMod val="65000"/>
-                    <a:lumOff val="35000"/>
                   </a:schemeClr>
                 </a:solidFill>
                 <a:latin typeface="Arial" panose="020B0604020202020204" pitchFamily="34" charset="0"/>
@@ -7423,11 +8525,10 @@
               <a:t>RE</a:t>
             </a:r>
             <a:r>
-              <a:rPr lang="hr-HR" sz="2600" dirty="0">
+              <a:rPr lang="hr-HR" sz="2000" dirty="0">
                 <a:solidFill>
-                  <a:schemeClr val="tx1">
+                  <a:schemeClr val="bg1">
                     <a:lumMod val="65000"/>
-                    <a:lumOff val="35000"/>
                   </a:schemeClr>
                 </a:solidFill>
                 <a:latin typeface="Arial" panose="020B0604020202020204" pitchFamily="34" charset="0"/>
@@ -7435,11 +8536,10 @@
               </a:rPr>
               <a:t> – augmentacija nasumičnog brisanja</a:t>
             </a:r>
-            <a:endParaRPr lang="en-US" sz="2600" dirty="0">
+            <a:endParaRPr lang="en-US" sz="2000" dirty="0">
               <a:solidFill>
-                <a:schemeClr val="tx1">
+                <a:schemeClr val="bg1">
                   <a:lumMod val="65000"/>
-                  <a:lumOff val="35000"/>
                 </a:schemeClr>
               </a:solidFill>
               <a:latin typeface="Arial" panose="020B0604020202020204" pitchFamily="34" charset="0"/>
@@ -7461,7 +8561,211 @@
 </p:sld>
 </file>
 
-<file path=ppt/slides/slide18.xml><?xml version="1.0" encoding="utf-8"?>
+<file path=ppt/slides/slide2.xml><?xml version="1.0" encoding="utf-8"?>
+<p:sld xmlns:a="http://schemas.openxmlformats.org/drawingml/2006/main" xmlns:r="http://schemas.openxmlformats.org/officeDocument/2006/relationships" xmlns:p="http://schemas.openxmlformats.org/presentationml/2006/main">
+  <p:cSld>
+    <p:spTree>
+      <p:nvGrpSpPr>
+        <p:cNvPr id="1" name=""/>
+        <p:cNvGrpSpPr/>
+        <p:nvPr/>
+      </p:nvGrpSpPr>
+      <p:grpSpPr>
+        <a:xfrm>
+          <a:off x="0" y="0"/>
+          <a:ext cx="0" cy="0"/>
+          <a:chOff x="0" y="0"/>
+          <a:chExt cx="0" cy="0"/>
+        </a:xfrm>
+      </p:grpSpPr>
+      <p:sp>
+        <p:nvSpPr>
+          <p:cNvPr id="2" name="Title 1">
+            <a:extLst>
+              <a:ext uri="{FF2B5EF4-FFF2-40B4-BE49-F238E27FC236}">
+                <a16:creationId xmlns:a16="http://schemas.microsoft.com/office/drawing/2014/main" id="{52C517BC-F7BD-0701-56EA-D6A1FE21631B}"/>
+              </a:ext>
+            </a:extLst>
+          </p:cNvPr>
+          <p:cNvSpPr>
+            <a:spLocks noGrp="1"/>
+          </p:cNvSpPr>
+          <p:nvPr>
+            <p:ph type="title"/>
+          </p:nvPr>
+        </p:nvSpPr>
+        <p:spPr/>
+        <p:txBody>
+          <a:bodyPr/>
+          <a:lstStyle/>
+          <a:p>
+            <a:r>
+              <a:rPr lang="hr-HR" dirty="0">
+                <a:latin typeface="Arial" panose="020B0604020202020204" pitchFamily="34" charset="0"/>
+                <a:cs typeface="Arial" panose="020B0604020202020204" pitchFamily="34" charset="0"/>
+              </a:rPr>
+              <a:t>Sadržaj</a:t>
+            </a:r>
+          </a:p>
+        </p:txBody>
+      </p:sp>
+      <p:sp>
+        <p:nvSpPr>
+          <p:cNvPr id="3" name="Content Placeholder 2">
+            <a:extLst>
+              <a:ext uri="{FF2B5EF4-FFF2-40B4-BE49-F238E27FC236}">
+                <a16:creationId xmlns:a16="http://schemas.microsoft.com/office/drawing/2014/main" id="{C14F33C4-ED8A-1EB1-D91E-FFB64A9A2C11}"/>
+              </a:ext>
+            </a:extLst>
+          </p:cNvPr>
+          <p:cNvSpPr>
+            <a:spLocks noGrp="1"/>
+          </p:cNvSpPr>
+          <p:nvPr>
+            <p:ph idx="1"/>
+          </p:nvPr>
+        </p:nvSpPr>
+        <p:spPr>
+          <a:xfrm>
+            <a:off x="1261872" y="1593668"/>
+            <a:ext cx="8595360" cy="4735002"/>
+          </a:xfrm>
+        </p:spPr>
+        <p:txBody>
+          <a:bodyPr>
+            <a:normAutofit fontScale="92500" lnSpcReduction="10000"/>
+          </a:bodyPr>
+          <a:lstStyle/>
+          <a:p>
+            <a:pPr marL="514350" indent="-514350">
+              <a:buFont typeface="+mj-lt"/>
+              <a:buAutoNum type="arabicPeriod"/>
+            </a:pPr>
+            <a:endParaRPr lang="hr-HR" sz="2600" dirty="0">
+              <a:latin typeface="Arial" panose="020B0604020202020204" pitchFamily="34" charset="0"/>
+              <a:cs typeface="Arial" panose="020B0604020202020204" pitchFamily="34" charset="0"/>
+            </a:endParaRPr>
+          </a:p>
+          <a:p>
+            <a:pPr marL="514350" indent="-514350">
+              <a:buFont typeface="+mj-lt"/>
+              <a:buAutoNum type="arabicPeriod"/>
+            </a:pPr>
+            <a:r>
+              <a:rPr lang="hr-HR" sz="2800" dirty="0">
+                <a:latin typeface="Arial" panose="020B0604020202020204" pitchFamily="34" charset="0"/>
+                <a:cs typeface="Arial" panose="020B0604020202020204" pitchFamily="34" charset="0"/>
+              </a:rPr>
+              <a:t>Uvod</a:t>
+            </a:r>
+          </a:p>
+          <a:p>
+            <a:pPr marL="514350" indent="-514350">
+              <a:buFont typeface="+mj-lt"/>
+              <a:buAutoNum type="arabicPeriod"/>
+            </a:pPr>
+            <a:r>
+              <a:rPr lang="hr-HR" sz="2800" dirty="0">
+                <a:latin typeface="Arial" panose="020B0604020202020204" pitchFamily="34" charset="0"/>
+                <a:cs typeface="Arial" panose="020B0604020202020204" pitchFamily="34" charset="0"/>
+              </a:rPr>
+              <a:t>Napadi umetanjem stražnjih vrata</a:t>
+            </a:r>
+          </a:p>
+          <a:p>
+            <a:pPr marL="514350" indent="-514350">
+              <a:buFont typeface="+mj-lt"/>
+              <a:buAutoNum type="arabicPeriod"/>
+            </a:pPr>
+            <a:r>
+              <a:rPr lang="hr-HR" sz="2800" dirty="0">
+                <a:latin typeface="Arial" panose="020B0604020202020204" pitchFamily="34" charset="0"/>
+                <a:cs typeface="Arial" panose="020B0604020202020204" pitchFamily="34" charset="0"/>
+              </a:rPr>
+              <a:t>Zašumljene oznake</a:t>
+            </a:r>
+          </a:p>
+          <a:p>
+            <a:pPr marL="514350" indent="-514350">
+              <a:buFont typeface="+mj-lt"/>
+              <a:buAutoNum type="arabicPeriod"/>
+            </a:pPr>
+            <a:r>
+              <a:rPr lang="hr-HR" sz="2800" noProof="0" dirty="0">
+                <a:latin typeface="Arial" panose="020B0604020202020204" pitchFamily="34" charset="0"/>
+                <a:cs typeface="Arial" panose="020B0604020202020204" pitchFamily="34" charset="0"/>
+              </a:rPr>
+              <a:t>Okvir VIBE</a:t>
+            </a:r>
+          </a:p>
+          <a:p>
+            <a:pPr marL="514350" indent="-514350">
+              <a:buFont typeface="+mj-lt"/>
+              <a:buAutoNum type="arabicPeriod"/>
+            </a:pPr>
+            <a:r>
+              <a:rPr lang="hr-HR" sz="2800" noProof="0" dirty="0">
+                <a:latin typeface="Arial" panose="020B0604020202020204" pitchFamily="34" charset="0"/>
+                <a:cs typeface="Arial" panose="020B0604020202020204" pitchFamily="34" charset="0"/>
+              </a:rPr>
+              <a:t>Konzistencijski gubitak</a:t>
+            </a:r>
+          </a:p>
+          <a:p>
+            <a:pPr marL="514350" indent="-514350">
+              <a:buFont typeface="+mj-lt"/>
+              <a:buAutoNum type="arabicPeriod"/>
+            </a:pPr>
+            <a:r>
+              <a:rPr lang="hr-HR" sz="2800" dirty="0">
+                <a:latin typeface="Arial" panose="020B0604020202020204" pitchFamily="34" charset="0"/>
+                <a:cs typeface="Arial" panose="020B0604020202020204" pitchFamily="34" charset="0"/>
+              </a:rPr>
+              <a:t>Eksperimenti</a:t>
+            </a:r>
+          </a:p>
+          <a:p>
+            <a:pPr marL="514350" indent="-514350">
+              <a:buFont typeface="+mj-lt"/>
+              <a:buAutoNum type="arabicPeriod"/>
+            </a:pPr>
+            <a:r>
+              <a:rPr lang="hr-HR" sz="2800" dirty="0">
+                <a:latin typeface="Arial" panose="020B0604020202020204" pitchFamily="34" charset="0"/>
+                <a:cs typeface="Arial" panose="020B0604020202020204" pitchFamily="34" charset="0"/>
+              </a:rPr>
+              <a:t>Zaključak i budući rad</a:t>
+            </a:r>
+          </a:p>
+          <a:p>
+            <a:pPr marL="514350" indent="-514350">
+              <a:buFont typeface="+mj-lt"/>
+              <a:buAutoNum type="arabicPeriod"/>
+            </a:pPr>
+            <a:r>
+              <a:rPr lang="hr-HR" sz="2800" dirty="0">
+                <a:latin typeface="Arial" panose="020B0604020202020204" pitchFamily="34" charset="0"/>
+                <a:cs typeface="Arial" panose="020B0604020202020204" pitchFamily="34" charset="0"/>
+              </a:rPr>
+              <a:t>Diskusija</a:t>
+            </a:r>
+          </a:p>
+        </p:txBody>
+      </p:sp>
+    </p:spTree>
+    <p:extLst>
+      <p:ext uri="{BB962C8B-B14F-4D97-AF65-F5344CB8AC3E}">
+        <p14:creationId xmlns:p14="http://schemas.microsoft.com/office/powerpoint/2010/main" val="888114086"/>
+      </p:ext>
+    </p:extLst>
+  </p:cSld>
+  <p:clrMapOvr>
+    <a:masterClrMapping/>
+  </p:clrMapOvr>
+</p:sld>
+</file>
+
+<file path=ppt/slides/slide20.xml><?xml version="1.0" encoding="utf-8"?>
 <p:sld xmlns:a="http://schemas.openxmlformats.org/drawingml/2006/main" xmlns:r="http://schemas.openxmlformats.org/officeDocument/2006/relationships" xmlns:p="http://schemas.openxmlformats.org/presentationml/2006/main">
   <p:cSld>
     <p:spTree>
@@ -7623,7 +8927,7 @@
           <a:p>
             <a:r>
               <a:rPr lang="hr-HR" dirty="0"/>
-              <a:t>15</a:t>
+              <a:t>16</a:t>
             </a:r>
           </a:p>
         </p:txBody>
@@ -7765,7 +9069,7 @@
 </p:sld>
 </file>
 
-<file path=ppt/slides/slide19.xml><?xml version="1.0" encoding="utf-8"?>
+<file path=ppt/slides/slide21.xml><?xml version="1.0" encoding="utf-8"?>
 <p:sld xmlns:a="http://schemas.openxmlformats.org/drawingml/2006/main" xmlns:r="http://schemas.openxmlformats.org/officeDocument/2006/relationships" xmlns:p="http://schemas.openxmlformats.org/presentationml/2006/main">
   <p:cSld>
     <p:spTree>
@@ -7867,7 +9171,7 @@
           <a:p>
             <a:r>
               <a:rPr lang="hr-HR" dirty="0"/>
-              <a:t>16</a:t>
+              <a:t>17</a:t>
             </a:r>
           </a:p>
         </p:txBody>
@@ -8082,211 +9386,7 @@
 </p:sld>
 </file>
 
-<file path=ppt/slides/slide2.xml><?xml version="1.0" encoding="utf-8"?>
-<p:sld xmlns:a="http://schemas.openxmlformats.org/drawingml/2006/main" xmlns:r="http://schemas.openxmlformats.org/officeDocument/2006/relationships" xmlns:p="http://schemas.openxmlformats.org/presentationml/2006/main">
-  <p:cSld>
-    <p:spTree>
-      <p:nvGrpSpPr>
-        <p:cNvPr id="1" name=""/>
-        <p:cNvGrpSpPr/>
-        <p:nvPr/>
-      </p:nvGrpSpPr>
-      <p:grpSpPr>
-        <a:xfrm>
-          <a:off x="0" y="0"/>
-          <a:ext cx="0" cy="0"/>
-          <a:chOff x="0" y="0"/>
-          <a:chExt cx="0" cy="0"/>
-        </a:xfrm>
-      </p:grpSpPr>
-      <p:sp>
-        <p:nvSpPr>
-          <p:cNvPr id="2" name="Title 1">
-            <a:extLst>
-              <a:ext uri="{FF2B5EF4-FFF2-40B4-BE49-F238E27FC236}">
-                <a16:creationId xmlns:a16="http://schemas.microsoft.com/office/drawing/2014/main" id="{52C517BC-F7BD-0701-56EA-D6A1FE21631B}"/>
-              </a:ext>
-            </a:extLst>
-          </p:cNvPr>
-          <p:cNvSpPr>
-            <a:spLocks noGrp="1"/>
-          </p:cNvSpPr>
-          <p:nvPr>
-            <p:ph type="title"/>
-          </p:nvPr>
-        </p:nvSpPr>
-        <p:spPr/>
-        <p:txBody>
-          <a:bodyPr/>
-          <a:lstStyle/>
-          <a:p>
-            <a:r>
-              <a:rPr lang="hr-HR" dirty="0">
-                <a:latin typeface="Arial" panose="020B0604020202020204" pitchFamily="34" charset="0"/>
-                <a:cs typeface="Arial" panose="020B0604020202020204" pitchFamily="34" charset="0"/>
-              </a:rPr>
-              <a:t>Sadržaj</a:t>
-            </a:r>
-          </a:p>
-        </p:txBody>
-      </p:sp>
-      <p:sp>
-        <p:nvSpPr>
-          <p:cNvPr id="3" name="Content Placeholder 2">
-            <a:extLst>
-              <a:ext uri="{FF2B5EF4-FFF2-40B4-BE49-F238E27FC236}">
-                <a16:creationId xmlns:a16="http://schemas.microsoft.com/office/drawing/2014/main" id="{C14F33C4-ED8A-1EB1-D91E-FFB64A9A2C11}"/>
-              </a:ext>
-            </a:extLst>
-          </p:cNvPr>
-          <p:cNvSpPr>
-            <a:spLocks noGrp="1"/>
-          </p:cNvSpPr>
-          <p:nvPr>
-            <p:ph idx="1"/>
-          </p:nvPr>
-        </p:nvSpPr>
-        <p:spPr>
-          <a:xfrm>
-            <a:off x="1261872" y="1593668"/>
-            <a:ext cx="8595360" cy="4735002"/>
-          </a:xfrm>
-        </p:spPr>
-        <p:txBody>
-          <a:bodyPr>
-            <a:normAutofit fontScale="92500" lnSpcReduction="10000"/>
-          </a:bodyPr>
-          <a:lstStyle/>
-          <a:p>
-            <a:pPr marL="514350" indent="-514350">
-              <a:buFont typeface="+mj-lt"/>
-              <a:buAutoNum type="arabicPeriod"/>
-            </a:pPr>
-            <a:endParaRPr lang="hr-HR" sz="2600" dirty="0">
-              <a:latin typeface="Arial" panose="020B0604020202020204" pitchFamily="34" charset="0"/>
-              <a:cs typeface="Arial" panose="020B0604020202020204" pitchFamily="34" charset="0"/>
-            </a:endParaRPr>
-          </a:p>
-          <a:p>
-            <a:pPr marL="514350" indent="-514350">
-              <a:buFont typeface="+mj-lt"/>
-              <a:buAutoNum type="arabicPeriod"/>
-            </a:pPr>
-            <a:r>
-              <a:rPr lang="hr-HR" sz="2800" dirty="0">
-                <a:latin typeface="Arial" panose="020B0604020202020204" pitchFamily="34" charset="0"/>
-                <a:cs typeface="Arial" panose="020B0604020202020204" pitchFamily="34" charset="0"/>
-              </a:rPr>
-              <a:t>Uvod</a:t>
-            </a:r>
-          </a:p>
-          <a:p>
-            <a:pPr marL="514350" indent="-514350">
-              <a:buFont typeface="+mj-lt"/>
-              <a:buAutoNum type="arabicPeriod"/>
-            </a:pPr>
-            <a:r>
-              <a:rPr lang="hr-HR" sz="2800" dirty="0">
-                <a:latin typeface="Arial" panose="020B0604020202020204" pitchFamily="34" charset="0"/>
-                <a:cs typeface="Arial" panose="020B0604020202020204" pitchFamily="34" charset="0"/>
-              </a:rPr>
-              <a:t>Napadi umetanjem stražnjih vrata</a:t>
-            </a:r>
-          </a:p>
-          <a:p>
-            <a:pPr marL="514350" indent="-514350">
-              <a:buFont typeface="+mj-lt"/>
-              <a:buAutoNum type="arabicPeriod"/>
-            </a:pPr>
-            <a:r>
-              <a:rPr lang="hr-HR" sz="2800" dirty="0">
-                <a:latin typeface="Arial" panose="020B0604020202020204" pitchFamily="34" charset="0"/>
-                <a:cs typeface="Arial" panose="020B0604020202020204" pitchFamily="34" charset="0"/>
-              </a:rPr>
-              <a:t>Zašumljene oznake</a:t>
-            </a:r>
-          </a:p>
-          <a:p>
-            <a:pPr marL="514350" indent="-514350">
-              <a:buFont typeface="+mj-lt"/>
-              <a:buAutoNum type="arabicPeriod"/>
-            </a:pPr>
-            <a:r>
-              <a:rPr lang="hr-HR" sz="2800" noProof="0" dirty="0">
-                <a:latin typeface="Arial" panose="020B0604020202020204" pitchFamily="34" charset="0"/>
-                <a:cs typeface="Arial" panose="020B0604020202020204" pitchFamily="34" charset="0"/>
-              </a:rPr>
-              <a:t>Okvir VIBE</a:t>
-            </a:r>
-          </a:p>
-          <a:p>
-            <a:pPr marL="514350" indent="-514350">
-              <a:buFont typeface="+mj-lt"/>
-              <a:buAutoNum type="arabicPeriod"/>
-            </a:pPr>
-            <a:r>
-              <a:rPr lang="hr-HR" sz="2800" noProof="0" dirty="0">
-                <a:latin typeface="Arial" panose="020B0604020202020204" pitchFamily="34" charset="0"/>
-                <a:cs typeface="Arial" panose="020B0604020202020204" pitchFamily="34" charset="0"/>
-              </a:rPr>
-              <a:t>Konzistencijski gubitak</a:t>
-            </a:r>
-          </a:p>
-          <a:p>
-            <a:pPr marL="514350" indent="-514350">
-              <a:buFont typeface="+mj-lt"/>
-              <a:buAutoNum type="arabicPeriod"/>
-            </a:pPr>
-            <a:r>
-              <a:rPr lang="hr-HR" sz="2800" dirty="0">
-                <a:latin typeface="Arial" panose="020B0604020202020204" pitchFamily="34" charset="0"/>
-                <a:cs typeface="Arial" panose="020B0604020202020204" pitchFamily="34" charset="0"/>
-              </a:rPr>
-              <a:t>Eksperimenti</a:t>
-            </a:r>
-          </a:p>
-          <a:p>
-            <a:pPr marL="514350" indent="-514350">
-              <a:buFont typeface="+mj-lt"/>
-              <a:buAutoNum type="arabicPeriod"/>
-            </a:pPr>
-            <a:r>
-              <a:rPr lang="hr-HR" sz="2800" dirty="0">
-                <a:latin typeface="Arial" panose="020B0604020202020204" pitchFamily="34" charset="0"/>
-                <a:cs typeface="Arial" panose="020B0604020202020204" pitchFamily="34" charset="0"/>
-              </a:rPr>
-              <a:t>Zaključak i budući rad</a:t>
-            </a:r>
-          </a:p>
-          <a:p>
-            <a:pPr marL="514350" indent="-514350">
-              <a:buFont typeface="+mj-lt"/>
-              <a:buAutoNum type="arabicPeriod"/>
-            </a:pPr>
-            <a:r>
-              <a:rPr lang="hr-HR" sz="2800" dirty="0">
-                <a:latin typeface="Arial" panose="020B0604020202020204" pitchFamily="34" charset="0"/>
-                <a:cs typeface="Arial" panose="020B0604020202020204" pitchFamily="34" charset="0"/>
-              </a:rPr>
-              <a:t>Diskusija</a:t>
-            </a:r>
-          </a:p>
-        </p:txBody>
-      </p:sp>
-    </p:spTree>
-    <p:extLst>
-      <p:ext uri="{BB962C8B-B14F-4D97-AF65-F5344CB8AC3E}">
-        <p14:creationId xmlns:p14="http://schemas.microsoft.com/office/powerpoint/2010/main" val="888114086"/>
-      </p:ext>
-    </p:extLst>
-  </p:cSld>
-  <p:clrMapOvr>
-    <a:masterClrMapping/>
-  </p:clrMapOvr>
-</p:sld>
-</file>
-
-<file path=ppt/slides/slide20.xml><?xml version="1.0" encoding="utf-8"?>
+<file path=ppt/slides/slide22.xml><?xml version="1.0" encoding="utf-8"?>
 <p:sld xmlns:a="http://schemas.openxmlformats.org/drawingml/2006/main" xmlns:r="http://schemas.openxmlformats.org/officeDocument/2006/relationships" xmlns:p="http://schemas.openxmlformats.org/presentationml/2006/main">
   <p:cSld>
     <p:spTree>
@@ -8388,7 +9488,7 @@
           <a:p>
             <a:r>
               <a:rPr lang="hr-HR" dirty="0"/>
-              <a:t>17</a:t>
+              <a:t>18</a:t>
             </a:r>
           </a:p>
         </p:txBody>
@@ -9032,7 +10132,7 @@
 </p:sld>
 </file>
 
-<file path=ppt/slides/slide21.xml><?xml version="1.0" encoding="utf-8"?>
+<file path=ppt/slides/slide23.xml><?xml version="1.0" encoding="utf-8"?>
 <p:sld xmlns:a="http://schemas.openxmlformats.org/drawingml/2006/main" xmlns:r="http://schemas.openxmlformats.org/officeDocument/2006/relationships" xmlns:p="http://schemas.openxmlformats.org/presentationml/2006/main">
   <p:cSld>
     <p:spTree>
@@ -9104,21 +10204,15 @@
         </p:nvSpPr>
         <p:spPr>
           <a:xfrm>
-            <a:off x="1261871" y="1828800"/>
-            <a:ext cx="8966635" cy="4735002"/>
+            <a:off x="1261871" y="1691323"/>
+            <a:ext cx="8966635" cy="5540750"/>
           </a:xfrm>
         </p:spPr>
         <p:txBody>
           <a:bodyPr>
-            <a:normAutofit lnSpcReduction="10000"/>
+            <a:normAutofit/>
           </a:bodyPr>
           <a:lstStyle/>
-          <a:p>
-            <a:endParaRPr lang="hr-HR" sz="2600" dirty="0">
-              <a:latin typeface="Arial" panose="020B0604020202020204" pitchFamily="34" charset="0"/>
-              <a:cs typeface="Arial" panose="020B0604020202020204" pitchFamily="34" charset="0"/>
-            </a:endParaRPr>
-          </a:p>
           <a:p>
             <a:r>
               <a:rPr lang="hr-HR" sz="2600" dirty="0">
@@ -9196,6 +10290,52 @@
               </a:rPr>
               <a:t>najbolje rezultate u teškim postavima</a:t>
             </a:r>
+            <a:r>
+              <a:rPr lang="hr-HR" sz="2600" dirty="0">
+                <a:latin typeface="Arial" panose="020B0604020202020204" pitchFamily="34" charset="0"/>
+                <a:cs typeface="Arial" panose="020B0604020202020204" pitchFamily="34" charset="0"/>
+              </a:rPr>
+              <a:t>, ali i bolje rezultate u lakšim postavima</a:t>
+            </a:r>
+            <a:r>
+              <a:rPr lang="en-US" sz="2600" b="1" dirty="0">
+                <a:latin typeface="Arial" panose="020B0604020202020204" pitchFamily="34" charset="0"/>
+                <a:cs typeface="Arial" panose="020B0604020202020204" pitchFamily="34" charset="0"/>
+              </a:rPr>
+              <a:t> </a:t>
+            </a:r>
+            <a:r>
+              <a:rPr lang="en-US" sz="2600" dirty="0">
+                <a:latin typeface="Arial" panose="020B0604020202020204" pitchFamily="34" charset="0"/>
+                <a:cs typeface="Arial" panose="020B0604020202020204" pitchFamily="34" charset="0"/>
+              </a:rPr>
+              <a:t>(+2.1pp ACC</a:t>
+            </a:r>
+            <a:r>
+              <a:rPr lang="hr-HR" sz="2600" dirty="0">
+                <a:latin typeface="Arial" panose="020B0604020202020204" pitchFamily="34" charset="0"/>
+                <a:cs typeface="Arial" panose="020B0604020202020204" pitchFamily="34" charset="0"/>
+              </a:rPr>
+              <a:t> </a:t>
+            </a:r>
+            <a:r>
+              <a:rPr lang="en-US" sz="2600" dirty="0">
+                <a:latin typeface="Arial" panose="020B0604020202020204" pitchFamily="34" charset="0"/>
+                <a:cs typeface="Arial" panose="020B0604020202020204" pitchFamily="34" charset="0"/>
+              </a:rPr>
+              <a:t>@ 20% sim. </a:t>
+            </a:r>
+            <a:r>
+              <a:rPr lang="hr-HR" sz="2600" dirty="0">
+                <a:latin typeface="Arial" panose="020B0604020202020204" pitchFamily="34" charset="0"/>
+                <a:cs typeface="Arial" panose="020B0604020202020204" pitchFamily="34" charset="0"/>
+              </a:rPr>
+              <a:t>zaš.)</a:t>
+            </a:r>
+            <a:endParaRPr lang="hr-HR" sz="2600" b="1" dirty="0">
+              <a:latin typeface="Arial" panose="020B0604020202020204" pitchFamily="34" charset="0"/>
+              <a:cs typeface="Arial" panose="020B0604020202020204" pitchFamily="34" charset="0"/>
+            </a:endParaRPr>
           </a:p>
           <a:p>
             <a:pPr lvl="1"/>
@@ -9218,7 +10358,35 @@
                 <a:latin typeface="Arial" panose="020B0604020202020204" pitchFamily="34" charset="0"/>
                 <a:cs typeface="Arial" panose="020B0604020202020204" pitchFamily="34" charset="0"/>
               </a:rPr>
-              <a:t>naučenih modela</a:t>
+              <a:t>naučenih modela (+11.</a:t>
+            </a:r>
+            <a:r>
+              <a:rPr lang="en-US" sz="2600" dirty="0">
+                <a:latin typeface="Arial" panose="020B0604020202020204" pitchFamily="34" charset="0"/>
+                <a:cs typeface="Arial" panose="020B0604020202020204" pitchFamily="34" charset="0"/>
+              </a:rPr>
+              <a:t>6pp</a:t>
+            </a:r>
+            <a:r>
+              <a:rPr lang="hr-HR" sz="2600" dirty="0">
+                <a:latin typeface="Arial" panose="020B0604020202020204" pitchFamily="34" charset="0"/>
+                <a:cs typeface="Arial" panose="020B0604020202020204" pitchFamily="34" charset="0"/>
+              </a:rPr>
+              <a:t> ACC</a:t>
+            </a:r>
+            <a:r>
+              <a:rPr lang="en-US" sz="2600" dirty="0">
+                <a:latin typeface="Arial" panose="020B0604020202020204" pitchFamily="34" charset="0"/>
+                <a:cs typeface="Arial" panose="020B0604020202020204" pitchFamily="34" charset="0"/>
+              </a:rPr>
+              <a:t> @</a:t>
+            </a:r>
+            <a:r>
+              <a:rPr lang="hr-HR" sz="2600" dirty="0">
+                <a:latin typeface="Arial" panose="020B0604020202020204" pitchFamily="34" charset="0"/>
+                <a:cs typeface="Arial" panose="020B0604020202020204" pitchFamily="34" charset="0"/>
+              </a:rPr>
+              <a:t> 20% sim. zaš.)</a:t>
             </a:r>
           </a:p>
         </p:txBody>
@@ -9248,7 +10416,7 @@
           <a:p>
             <a:r>
               <a:rPr lang="hr-HR" dirty="0"/>
-              <a:t>18</a:t>
+              <a:t>19</a:t>
             </a:r>
           </a:p>
         </p:txBody>
@@ -9300,7 +10468,7 @@
 </p:sld>
 </file>
 
-<file path=ppt/slides/slide22.xml><?xml version="1.0" encoding="utf-8"?>
+<file path=ppt/slides/slide24.xml><?xml version="1.0" encoding="utf-8"?>
 <p:sld xmlns:a="http://schemas.openxmlformats.org/drawingml/2006/main" xmlns:r="http://schemas.openxmlformats.org/officeDocument/2006/relationships" xmlns:p="http://schemas.openxmlformats.org/presentationml/2006/main">
   <p:cSld>
     <p:spTree>
@@ -9489,8 +10657,47 @@
                 <a:latin typeface="Arial" panose="020B0604020202020204" pitchFamily="34" charset="0"/>
                 <a:cs typeface="Arial" panose="020B0604020202020204" pitchFamily="34" charset="0"/>
               </a:rPr>
-              <a:t>azličita napada</a:t>
-            </a:r>
+              <a:t>azličita napada </a:t>
+            </a:r>
+            <a:r>
+              <a:rPr lang="hr-HR" sz="2600" dirty="0">
+                <a:latin typeface="Arial" panose="020B0604020202020204" pitchFamily="34" charset="0"/>
+                <a:cs typeface="Arial" panose="020B0604020202020204" pitchFamily="34" charset="0"/>
+              </a:rPr>
+              <a:t>(-2.8</a:t>
+            </a:r>
+            <a:r>
+              <a:rPr lang="en-US" sz="2600" dirty="0">
+                <a:latin typeface="Arial" panose="020B0604020202020204" pitchFamily="34" charset="0"/>
+                <a:cs typeface="Arial" panose="020B0604020202020204" pitchFamily="34" charset="0"/>
+              </a:rPr>
+              <a:t>pp</a:t>
+            </a:r>
+            <a:r>
+              <a:rPr lang="hr-HR" sz="2600" dirty="0">
+                <a:latin typeface="Arial" panose="020B0604020202020204" pitchFamily="34" charset="0"/>
+                <a:cs typeface="Arial" panose="020B0604020202020204" pitchFamily="34" charset="0"/>
+              </a:rPr>
+              <a:t> ASR</a:t>
+            </a:r>
+            <a:r>
+              <a:rPr lang="en-US" sz="2600" dirty="0">
+                <a:latin typeface="Arial" panose="020B0604020202020204" pitchFamily="34" charset="0"/>
+                <a:cs typeface="Arial" panose="020B0604020202020204" pitchFamily="34" charset="0"/>
+              </a:rPr>
+              <a:t> @ 10%</a:t>
+            </a:r>
+            <a:r>
+              <a:rPr lang="hr-HR" sz="2600" dirty="0">
+                <a:latin typeface="Arial" panose="020B0604020202020204" pitchFamily="34" charset="0"/>
+                <a:cs typeface="Arial" panose="020B0604020202020204" pitchFamily="34" charset="0"/>
+              </a:rPr>
+              <a:t> Blend)</a:t>
+            </a:r>
+            <a:endParaRPr lang="hr-HR" sz="2600" b="1" dirty="0">
+              <a:latin typeface="Arial" panose="020B0604020202020204" pitchFamily="34" charset="0"/>
+              <a:cs typeface="Arial" panose="020B0604020202020204" pitchFamily="34" charset="0"/>
+            </a:endParaRPr>
           </a:p>
           <a:p>
             <a:pPr lvl="1"/>
@@ -9599,7 +10806,7 @@
           <a:p>
             <a:r>
               <a:rPr lang="hr-HR" dirty="0"/>
-              <a:t>19</a:t>
+              <a:t>20</a:t>
             </a:r>
           </a:p>
         </p:txBody>
@@ -9651,7 +10858,7 @@
 </p:sld>
 </file>
 
-<file path=ppt/slides/slide23.xml><?xml version="1.0" encoding="utf-8"?>
+<file path=ppt/slides/slide25.xml><?xml version="1.0" encoding="utf-8"?>
 <p:sld xmlns:a="http://schemas.openxmlformats.org/drawingml/2006/main" xmlns:r="http://schemas.openxmlformats.org/officeDocument/2006/relationships" xmlns:p="http://schemas.openxmlformats.org/presentationml/2006/main">
   <p:cSld>
     <p:spTree>
@@ -10057,6 +11264,321 @@
           </a:p>
         </p:txBody>
       </p:sp>
+      <p:grpSp>
+        <p:nvGrpSpPr>
+          <p:cNvPr id="18" name="Group 17">
+            <a:extLst>
+              <a:ext uri="{FF2B5EF4-FFF2-40B4-BE49-F238E27FC236}">
+                <a16:creationId xmlns:a16="http://schemas.microsoft.com/office/drawing/2014/main" id="{F59CC490-5A2B-CD99-4C5B-6CA557D31CE8}"/>
+              </a:ext>
+            </a:extLst>
+          </p:cNvPr>
+          <p:cNvGrpSpPr/>
+          <p:nvPr/>
+        </p:nvGrpSpPr>
+        <p:grpSpPr>
+          <a:xfrm>
+            <a:off x="8835507" y="292040"/>
+            <a:ext cx="2274918" cy="6271763"/>
+            <a:chOff x="8835507" y="292040"/>
+            <a:chExt cx="2274918" cy="6271763"/>
+          </a:xfrm>
+        </p:grpSpPr>
+        <p:grpSp>
+          <p:nvGrpSpPr>
+            <p:cNvPr id="16" name="Group 15">
+              <a:extLst>
+                <a:ext uri="{FF2B5EF4-FFF2-40B4-BE49-F238E27FC236}">
+                  <a16:creationId xmlns:a16="http://schemas.microsoft.com/office/drawing/2014/main" id="{C36B0E66-67A3-4D69-77BC-5C0C2C3501A9}"/>
+                </a:ext>
+              </a:extLst>
+            </p:cNvPr>
+            <p:cNvGrpSpPr/>
+            <p:nvPr/>
+          </p:nvGrpSpPr>
+          <p:grpSpPr>
+            <a:xfrm>
+              <a:off x="8835507" y="292040"/>
+              <a:ext cx="2274918" cy="6271763"/>
+              <a:chOff x="8835507" y="292040"/>
+              <a:chExt cx="2274918" cy="6271763"/>
+            </a:xfrm>
+          </p:grpSpPr>
+          <p:grpSp>
+            <p:nvGrpSpPr>
+              <p:cNvPr id="14" name="Group 13">
+                <a:extLst>
+                  <a:ext uri="{FF2B5EF4-FFF2-40B4-BE49-F238E27FC236}">
+                    <a16:creationId xmlns:a16="http://schemas.microsoft.com/office/drawing/2014/main" id="{349323C5-A5B5-FB34-A9F0-E140754BA5F0}"/>
+                  </a:ext>
+                </a:extLst>
+              </p:cNvPr>
+              <p:cNvGrpSpPr/>
+              <p:nvPr/>
+            </p:nvGrpSpPr>
+            <p:grpSpPr>
+              <a:xfrm>
+                <a:off x="8835507" y="292040"/>
+                <a:ext cx="2274918" cy="2849543"/>
+                <a:chOff x="8835507" y="236779"/>
+                <a:chExt cx="2274918" cy="2849543"/>
+              </a:xfrm>
+            </p:grpSpPr>
+            <p:pic>
+              <p:nvPicPr>
+                <p:cNvPr id="7" name="Picture 6" descr="A red and white sign with black numbers&#10;&#10;AI-generated content may be incorrect.">
+                  <a:extLst>
+                    <a:ext uri="{FF2B5EF4-FFF2-40B4-BE49-F238E27FC236}">
+                      <a16:creationId xmlns:a16="http://schemas.microsoft.com/office/drawing/2014/main" id="{3BA65250-7AF4-B6B3-4FC4-2DA30F9E7FBF}"/>
+                    </a:ext>
+                  </a:extLst>
+                </p:cNvPr>
+                <p:cNvPicPr>
+                  <a:picLocks noChangeAspect="1"/>
+                </p:cNvPicPr>
+                <p:nvPr/>
+              </p:nvPicPr>
+              <p:blipFill>
+                <a:blip r:embed="rId2">
+                  <a:extLst>
+                    <a:ext uri="{28A0092B-C50C-407E-A947-70E740481C1C}">
+                      <a14:useLocalDpi xmlns:a14="http://schemas.microsoft.com/office/drawing/2010/main" val="0"/>
+                    </a:ext>
+                  </a:extLst>
+                </a:blip>
+                <a:stretch>
+                  <a:fillRect/>
+                </a:stretch>
+              </p:blipFill>
+              <p:spPr>
+                <a:xfrm>
+                  <a:off x="8835507" y="236779"/>
+                  <a:ext cx="2274918" cy="2274918"/>
+                </a:xfrm>
+                <a:prstGeom prst="rect">
+                  <a:avLst/>
+                </a:prstGeom>
+              </p:spPr>
+            </p:pic>
+            <p:sp>
+              <p:nvSpPr>
+                <p:cNvPr id="10" name="TextBox 9">
+                  <a:extLst>
+                    <a:ext uri="{FF2B5EF4-FFF2-40B4-BE49-F238E27FC236}">
+                      <a16:creationId xmlns:a16="http://schemas.microsoft.com/office/drawing/2014/main" id="{89A66E9C-5D94-EDC8-9AFF-BF658C2A8036}"/>
+                    </a:ext>
+                  </a:extLst>
+                </p:cNvPr>
+                <p:cNvSpPr txBox="1"/>
+                <p:nvPr/>
+              </p:nvSpPr>
+              <p:spPr>
+                <a:xfrm>
+                  <a:off x="8951245" y="2593879"/>
+                  <a:ext cx="2043443" cy="492443"/>
+                </a:xfrm>
+                <a:prstGeom prst="rect">
+                  <a:avLst/>
+                </a:prstGeom>
+                <a:noFill/>
+              </p:spPr>
+              <p:txBody>
+                <a:bodyPr wrap="square" rtlCol="0">
+                  <a:spAutoFit/>
+                </a:bodyPr>
+                <a:lstStyle/>
+                <a:p>
+                  <a:pPr algn="ctr"/>
+                  <a:r>
+                    <a:rPr lang="en-US" sz="2600" dirty="0">
+                      <a:solidFill>
+                        <a:schemeClr val="tx1">
+                          <a:lumMod val="65000"/>
+                          <a:lumOff val="35000"/>
+                        </a:schemeClr>
+                      </a:solidFill>
+                      <a:latin typeface="Arial" panose="020B0604020202020204" pitchFamily="34" charset="0"/>
+                      <a:cs typeface="Arial" panose="020B0604020202020204" pitchFamily="34" charset="0"/>
+                    </a:rPr>
+                    <a:t>20 km/h</a:t>
+                  </a:r>
+                  <a:endParaRPr lang="hr-HR" sz="2600" dirty="0">
+                    <a:solidFill>
+                      <a:schemeClr val="tx1">
+                        <a:lumMod val="65000"/>
+                        <a:lumOff val="35000"/>
+                      </a:schemeClr>
+                    </a:solidFill>
+                    <a:latin typeface="Arial" panose="020B0604020202020204" pitchFamily="34" charset="0"/>
+                    <a:cs typeface="Arial" panose="020B0604020202020204" pitchFamily="34" charset="0"/>
+                  </a:endParaRPr>
+                </a:p>
+              </p:txBody>
+            </p:sp>
+          </p:grpSp>
+          <p:grpSp>
+            <p:nvGrpSpPr>
+              <p:cNvPr id="15" name="Group 14">
+                <a:extLst>
+                  <a:ext uri="{FF2B5EF4-FFF2-40B4-BE49-F238E27FC236}">
+                    <a16:creationId xmlns:a16="http://schemas.microsoft.com/office/drawing/2014/main" id="{FB277D70-9095-1555-79CC-8B87BE8BF8E5}"/>
+                  </a:ext>
+                </a:extLst>
+              </p:cNvPr>
+              <p:cNvGrpSpPr/>
+              <p:nvPr/>
+            </p:nvGrpSpPr>
+            <p:grpSpPr>
+              <a:xfrm>
+                <a:off x="8835507" y="3716418"/>
+                <a:ext cx="2274918" cy="2847385"/>
+                <a:chOff x="8835507" y="3602514"/>
+                <a:chExt cx="2274918" cy="2847385"/>
+              </a:xfrm>
+            </p:grpSpPr>
+            <p:pic>
+              <p:nvPicPr>
+                <p:cNvPr id="9" name="Picture 8" descr="A red circle with black numbers and a spider-person's head on it&#10;&#10;AI-generated content may be incorrect.">
+                  <a:extLst>
+                    <a:ext uri="{FF2B5EF4-FFF2-40B4-BE49-F238E27FC236}">
+                      <a16:creationId xmlns:a16="http://schemas.microsoft.com/office/drawing/2014/main" id="{8763FC55-191C-12D3-6D65-2BF25ACA9EFA}"/>
+                    </a:ext>
+                  </a:extLst>
+                </p:cNvPr>
+                <p:cNvPicPr>
+                  <a:picLocks noChangeAspect="1"/>
+                </p:cNvPicPr>
+                <p:nvPr/>
+              </p:nvPicPr>
+              <p:blipFill>
+                <a:blip r:embed="rId3">
+                  <a:extLst>
+                    <a:ext uri="{28A0092B-C50C-407E-A947-70E740481C1C}">
+                      <a14:useLocalDpi xmlns:a14="http://schemas.microsoft.com/office/drawing/2010/main" val="0"/>
+                    </a:ext>
+                  </a:extLst>
+                </a:blip>
+                <a:stretch>
+                  <a:fillRect/>
+                </a:stretch>
+              </p:blipFill>
+              <p:spPr>
+                <a:xfrm>
+                  <a:off x="8835507" y="3602514"/>
+                  <a:ext cx="2274918" cy="2274918"/>
+                </a:xfrm>
+                <a:prstGeom prst="rect">
+                  <a:avLst/>
+                </a:prstGeom>
+              </p:spPr>
+            </p:pic>
+            <p:sp>
+              <p:nvSpPr>
+                <p:cNvPr id="13" name="TextBox 12">
+                  <a:extLst>
+                    <a:ext uri="{FF2B5EF4-FFF2-40B4-BE49-F238E27FC236}">
+                      <a16:creationId xmlns:a16="http://schemas.microsoft.com/office/drawing/2014/main" id="{FDED9361-2DFC-5CE0-8E4C-A6C99C53330E}"/>
+                    </a:ext>
+                  </a:extLst>
+                </p:cNvPr>
+                <p:cNvSpPr txBox="1"/>
+                <p:nvPr/>
+              </p:nvSpPr>
+              <p:spPr>
+                <a:xfrm>
+                  <a:off x="8951245" y="5957456"/>
+                  <a:ext cx="2043443" cy="492443"/>
+                </a:xfrm>
+                <a:prstGeom prst="rect">
+                  <a:avLst/>
+                </a:prstGeom>
+                <a:noFill/>
+              </p:spPr>
+              <p:txBody>
+                <a:bodyPr wrap="square" rtlCol="0">
+                  <a:spAutoFit/>
+                </a:bodyPr>
+                <a:lstStyle/>
+                <a:p>
+                  <a:pPr algn="ctr"/>
+                  <a:r>
+                    <a:rPr lang="en-US" sz="2600" dirty="0">
+                      <a:solidFill>
+                        <a:schemeClr val="tx1">
+                          <a:lumMod val="65000"/>
+                          <a:lumOff val="35000"/>
+                        </a:schemeClr>
+                      </a:solidFill>
+                      <a:latin typeface="Arial" panose="020B0604020202020204" pitchFamily="34" charset="0"/>
+                      <a:cs typeface="Arial" panose="020B0604020202020204" pitchFamily="34" charset="0"/>
+                    </a:rPr>
+                    <a:t>100 km/h</a:t>
+                  </a:r>
+                  <a:endParaRPr lang="hr-HR" sz="2600" dirty="0">
+                    <a:solidFill>
+                      <a:schemeClr val="tx1">
+                        <a:lumMod val="65000"/>
+                        <a:lumOff val="35000"/>
+                      </a:schemeClr>
+                    </a:solidFill>
+                    <a:latin typeface="Arial" panose="020B0604020202020204" pitchFamily="34" charset="0"/>
+                    <a:cs typeface="Arial" panose="020B0604020202020204" pitchFamily="34" charset="0"/>
+                  </a:endParaRPr>
+                </a:p>
+              </p:txBody>
+            </p:sp>
+          </p:grpSp>
+        </p:grpSp>
+        <p:sp>
+          <p:nvSpPr>
+            <p:cNvPr id="17" name="Arrow: Right 16">
+              <a:extLst>
+                <a:ext uri="{FF2B5EF4-FFF2-40B4-BE49-F238E27FC236}">
+                  <a16:creationId xmlns:a16="http://schemas.microsoft.com/office/drawing/2014/main" id="{3A4D28DA-9AAE-AD35-16D9-7BD04D0DB1E6}"/>
+                </a:ext>
+              </a:extLst>
+            </p:cNvPr>
+            <p:cNvSpPr/>
+            <p:nvPr/>
+          </p:nvSpPr>
+          <p:spPr>
+            <a:xfrm rot="5400000">
+              <a:off x="9806711" y="3290376"/>
+              <a:ext cx="332509" cy="194971"/>
+            </a:xfrm>
+            <a:prstGeom prst="rightArrow">
+              <a:avLst/>
+            </a:prstGeom>
+            <a:ln>
+              <a:noFill/>
+            </a:ln>
+          </p:spPr>
+          <p:style>
+            <a:lnRef idx="2">
+              <a:schemeClr val="accent1">
+                <a:shade val="15000"/>
+              </a:schemeClr>
+            </a:lnRef>
+            <a:fillRef idx="1">
+              <a:schemeClr val="accent1"/>
+            </a:fillRef>
+            <a:effectRef idx="0">
+              <a:schemeClr val="accent1"/>
+            </a:effectRef>
+            <a:fontRef idx="minor">
+              <a:schemeClr val="lt1"/>
+            </a:fontRef>
+          </p:style>
+          <p:txBody>
+            <a:bodyPr rtlCol="0" anchor="ctr"/>
+            <a:lstStyle/>
+            <a:p>
+              <a:pPr algn="ctr"/>
+              <a:endParaRPr lang="hr-HR"/>
+            </a:p>
+          </p:txBody>
+        </p:sp>
+      </p:grpSp>
     </p:spTree>
     <p:extLst>
       <p:ext uri="{BB962C8B-B14F-4D97-AF65-F5344CB8AC3E}">
@@ -10858,6 +12380,289 @@
         <p:cNvPr id="1" name="">
           <a:extLst>
             <a:ext uri="{FF2B5EF4-FFF2-40B4-BE49-F238E27FC236}">
+              <a16:creationId xmlns:a16="http://schemas.microsoft.com/office/drawing/2014/main" id="{A9A62D88-F735-0A72-5B13-4D9F9E86F657}"/>
+            </a:ext>
+          </a:extLst>
+        </p:cNvPr>
+        <p:cNvGrpSpPr/>
+        <p:nvPr/>
+      </p:nvGrpSpPr>
+      <p:grpSpPr>
+        <a:xfrm>
+          <a:off x="0" y="0"/>
+          <a:ext cx="0" cy="0"/>
+          <a:chOff x="0" y="0"/>
+          <a:chExt cx="0" cy="0"/>
+        </a:xfrm>
+      </p:grpSpPr>
+      <p:sp>
+        <p:nvSpPr>
+          <p:cNvPr id="2" name="Title 1">
+            <a:extLst>
+              <a:ext uri="{FF2B5EF4-FFF2-40B4-BE49-F238E27FC236}">
+                <a16:creationId xmlns:a16="http://schemas.microsoft.com/office/drawing/2014/main" id="{D668A173-6C0A-A0AF-B45F-D3616DF9D157}"/>
+              </a:ext>
+            </a:extLst>
+          </p:cNvPr>
+          <p:cNvSpPr>
+            <a:spLocks noGrp="1"/>
+          </p:cNvSpPr>
+          <p:nvPr>
+            <p:ph type="title"/>
+          </p:nvPr>
+        </p:nvSpPr>
+        <p:spPr/>
+        <p:txBody>
+          <a:bodyPr/>
+          <a:lstStyle/>
+          <a:p>
+            <a:r>
+              <a:rPr lang="hr-HR" dirty="0">
+                <a:latin typeface="Arial" panose="020B0604020202020204" pitchFamily="34" charset="0"/>
+                <a:cs typeface="Arial" panose="020B0604020202020204" pitchFamily="34" charset="0"/>
+              </a:rPr>
+              <a:t>Zašumljene oznake</a:t>
+            </a:r>
+            <a:endParaRPr lang="hr-HR" noProof="0" dirty="0">
+              <a:latin typeface="Arial" panose="020B0604020202020204" pitchFamily="34" charset="0"/>
+              <a:cs typeface="Arial" panose="020B0604020202020204" pitchFamily="34" charset="0"/>
+            </a:endParaRPr>
+          </a:p>
+        </p:txBody>
+      </p:sp>
+      <p:sp>
+        <p:nvSpPr>
+          <p:cNvPr id="3" name="Content Placeholder 2">
+            <a:extLst>
+              <a:ext uri="{FF2B5EF4-FFF2-40B4-BE49-F238E27FC236}">
+                <a16:creationId xmlns:a16="http://schemas.microsoft.com/office/drawing/2014/main" id="{ED787326-0161-8597-96C4-E8C2DDB694F9}"/>
+              </a:ext>
+            </a:extLst>
+          </p:cNvPr>
+          <p:cNvSpPr>
+            <a:spLocks noGrp="1"/>
+          </p:cNvSpPr>
+          <p:nvPr>
+            <p:ph idx="1"/>
+          </p:nvPr>
+        </p:nvSpPr>
+        <p:spPr>
+          <a:xfrm>
+            <a:off x="1261871" y="1593274"/>
+            <a:ext cx="9692639" cy="4586864"/>
+          </a:xfrm>
+        </p:spPr>
+        <p:txBody>
+          <a:bodyPr>
+            <a:normAutofit/>
+          </a:bodyPr>
+          <a:lstStyle/>
+          <a:p>
+            <a:endParaRPr lang="hr-HR" sz="2600" dirty="0">
+              <a:latin typeface="Arial" panose="020B0604020202020204" pitchFamily="34" charset="0"/>
+              <a:cs typeface="Arial" panose="020B0604020202020204" pitchFamily="34" charset="0"/>
+            </a:endParaRPr>
+          </a:p>
+          <a:p>
+            <a:r>
+              <a:rPr lang="hr-HR" sz="2600" dirty="0">
+                <a:latin typeface="Arial" panose="020B0604020202020204" pitchFamily="34" charset="0"/>
+                <a:cs typeface="Arial" panose="020B0604020202020204" pitchFamily="34" charset="0"/>
+              </a:rPr>
+              <a:t>posljedica </a:t>
+            </a:r>
+            <a:r>
+              <a:rPr lang="hr-HR" sz="2600" b="1" dirty="0">
+                <a:latin typeface="Arial" panose="020B0604020202020204" pitchFamily="34" charset="0"/>
+                <a:cs typeface="Arial" panose="020B0604020202020204" pitchFamily="34" charset="0"/>
+              </a:rPr>
+              <a:t>netočnog označavanja </a:t>
+            </a:r>
+            <a:r>
+              <a:rPr lang="hr-HR" sz="2600" dirty="0">
+                <a:latin typeface="Arial" panose="020B0604020202020204" pitchFamily="34" charset="0"/>
+                <a:cs typeface="Arial" panose="020B0604020202020204" pitchFamily="34" charset="0"/>
+              </a:rPr>
+              <a:t>podataka</a:t>
+            </a:r>
+          </a:p>
+          <a:p>
+            <a:r>
+              <a:rPr lang="hr-HR" sz="2600" dirty="0">
+                <a:latin typeface="Arial" panose="020B0604020202020204" pitchFamily="34" charset="0"/>
+                <a:cs typeface="Arial" panose="020B0604020202020204" pitchFamily="34" charset="0"/>
+              </a:rPr>
+              <a:t>razlikujemo</a:t>
+            </a:r>
+            <a:r>
+              <a:rPr lang="hr-HR" sz="2600" b="1" dirty="0">
+                <a:latin typeface="Arial" panose="020B0604020202020204" pitchFamily="34" charset="0"/>
+                <a:cs typeface="Arial" panose="020B0604020202020204" pitchFamily="34" charset="0"/>
+              </a:rPr>
+              <a:t> simetrično</a:t>
+            </a:r>
+            <a:r>
+              <a:rPr lang="hr-HR" sz="2600" dirty="0">
+                <a:latin typeface="Arial" panose="020B0604020202020204" pitchFamily="34" charset="0"/>
+                <a:cs typeface="Arial" panose="020B0604020202020204" pitchFamily="34" charset="0"/>
+              </a:rPr>
+              <a:t> (gore) i </a:t>
+            </a:r>
+            <a:r>
+              <a:rPr lang="hr-HR" sz="2600" b="1" dirty="0">
+                <a:latin typeface="Arial" panose="020B0604020202020204" pitchFamily="34" charset="0"/>
+                <a:cs typeface="Arial" panose="020B0604020202020204" pitchFamily="34" charset="0"/>
+              </a:rPr>
+              <a:t>asimetrično</a:t>
+            </a:r>
+            <a:r>
+              <a:rPr lang="hr-HR" sz="2600" dirty="0">
+                <a:latin typeface="Arial" panose="020B0604020202020204" pitchFamily="34" charset="0"/>
+                <a:cs typeface="Arial" panose="020B0604020202020204" pitchFamily="34" charset="0"/>
+              </a:rPr>
+              <a:t> (dolje) zašumljivanje</a:t>
+            </a:r>
+          </a:p>
+          <a:p>
+            <a:endParaRPr lang="hr-HR" sz="2600" dirty="0">
+              <a:latin typeface="Arial" panose="020B0604020202020204" pitchFamily="34" charset="0"/>
+              <a:cs typeface="Arial" panose="020B0604020202020204" pitchFamily="34" charset="0"/>
+            </a:endParaRPr>
+          </a:p>
+        </p:txBody>
+      </p:sp>
+      <p:sp>
+        <p:nvSpPr>
+          <p:cNvPr id="5" name="Slide Number Placeholder 4">
+            <a:extLst>
+              <a:ext uri="{FF2B5EF4-FFF2-40B4-BE49-F238E27FC236}">
+                <a16:creationId xmlns:a16="http://schemas.microsoft.com/office/drawing/2014/main" id="{ECCA5E71-1363-CC3F-C9A5-B347620C81E0}"/>
+              </a:ext>
+            </a:extLst>
+          </p:cNvPr>
+          <p:cNvSpPr>
+            <a:spLocks noGrp="1"/>
+          </p:cNvSpPr>
+          <p:nvPr>
+            <p:ph type="sldNum" sz="quarter" idx="12"/>
+          </p:nvPr>
+        </p:nvSpPr>
+        <p:spPr/>
+        <p:txBody>
+          <a:bodyPr>
+            <a:normAutofit lnSpcReduction="10000"/>
+          </a:bodyPr>
+          <a:lstStyle/>
+          <a:p>
+            <a:r>
+              <a:rPr lang="hr-HR" dirty="0"/>
+              <a:t>4</a:t>
+            </a:r>
+          </a:p>
+        </p:txBody>
+      </p:sp>
+      <p:grpSp>
+        <p:nvGrpSpPr>
+          <p:cNvPr id="21" name="Group 20">
+            <a:extLst>
+              <a:ext uri="{FF2B5EF4-FFF2-40B4-BE49-F238E27FC236}">
+                <a16:creationId xmlns:a16="http://schemas.microsoft.com/office/drawing/2014/main" id="{00A3F132-5972-DCEA-4E2E-CF8FF7EFEE9A}"/>
+              </a:ext>
+            </a:extLst>
+          </p:cNvPr>
+          <p:cNvGrpSpPr/>
+          <p:nvPr/>
+        </p:nvGrpSpPr>
+        <p:grpSpPr>
+          <a:xfrm>
+            <a:off x="1268796" y="4034407"/>
+            <a:ext cx="9184404" cy="2200582"/>
+            <a:chOff x="1268796" y="4034407"/>
+            <a:chExt cx="9184404" cy="2200582"/>
+          </a:xfrm>
+        </p:grpSpPr>
+        <p:pic>
+          <p:nvPicPr>
+            <p:cNvPr id="20" name="Picture 19">
+              <a:extLst>
+                <a:ext uri="{FF2B5EF4-FFF2-40B4-BE49-F238E27FC236}">
+                  <a16:creationId xmlns:a16="http://schemas.microsoft.com/office/drawing/2014/main" id="{6A6CCD26-D81E-8563-89FC-7412B7A60EBF}"/>
+                </a:ext>
+              </a:extLst>
+            </p:cNvPr>
+            <p:cNvPicPr>
+              <a:picLocks noChangeAspect="1"/>
+            </p:cNvPicPr>
+            <p:nvPr/>
+          </p:nvPicPr>
+          <p:blipFill>
+            <a:blip r:embed="rId3"/>
+            <a:stretch>
+              <a:fillRect/>
+            </a:stretch>
+          </p:blipFill>
+          <p:spPr>
+            <a:xfrm>
+              <a:off x="6890353" y="4034407"/>
+              <a:ext cx="3562847" cy="2200582"/>
+            </a:xfrm>
+            <a:prstGeom prst="rect">
+              <a:avLst/>
+            </a:prstGeom>
+          </p:spPr>
+        </p:pic>
+        <p:pic>
+          <p:nvPicPr>
+            <p:cNvPr id="6" name="Picture 5">
+              <a:extLst>
+                <a:ext uri="{FF2B5EF4-FFF2-40B4-BE49-F238E27FC236}">
+                  <a16:creationId xmlns:a16="http://schemas.microsoft.com/office/drawing/2014/main" id="{E6135454-1FE9-7786-EDCF-10A0C05C5BD9}"/>
+                </a:ext>
+              </a:extLst>
+            </p:cNvPr>
+            <p:cNvPicPr>
+              <a:picLocks noChangeAspect="1"/>
+            </p:cNvPicPr>
+            <p:nvPr/>
+          </p:nvPicPr>
+          <p:blipFill>
+            <a:blip r:embed="rId4"/>
+            <a:stretch>
+              <a:fillRect/>
+            </a:stretch>
+          </p:blipFill>
+          <p:spPr>
+            <a:xfrm>
+              <a:off x="1268796" y="4434611"/>
+              <a:ext cx="4581525" cy="1400175"/>
+            </a:xfrm>
+            <a:prstGeom prst="rect">
+              <a:avLst/>
+            </a:prstGeom>
+          </p:spPr>
+        </p:pic>
+      </p:grpSp>
+    </p:spTree>
+    <p:extLst>
+      <p:ext uri="{BB962C8B-B14F-4D97-AF65-F5344CB8AC3E}">
+        <p14:creationId xmlns:p14="http://schemas.microsoft.com/office/powerpoint/2010/main" val="3623465065"/>
+      </p:ext>
+    </p:extLst>
+  </p:cSld>
+  <p:clrMapOvr>
+    <a:masterClrMapping/>
+  </p:clrMapOvr>
+</p:sld>
+</file>
+
+<file path=ppt/slides/slide7.xml><?xml version="1.0" encoding="utf-8"?>
+<p:sld xmlns:a="http://schemas.openxmlformats.org/drawingml/2006/main" xmlns:r="http://schemas.openxmlformats.org/officeDocument/2006/relationships" xmlns:p="http://schemas.openxmlformats.org/presentationml/2006/main">
+  <p:cSld>
+    <p:spTree>
+      <p:nvGrpSpPr>
+        <p:cNvPr id="1" name="">
+          <a:extLst>
+            <a:ext uri="{FF2B5EF4-FFF2-40B4-BE49-F238E27FC236}">
               <a16:creationId xmlns:a16="http://schemas.microsoft.com/office/drawing/2014/main" id="{D3A9D117-7D22-8750-1092-9150437546BB}"/>
             </a:ext>
           </a:extLst>
@@ -10873,178 +12678,12 @@
           <a:chExt cx="0" cy="0"/>
         </a:xfrm>
       </p:grpSpPr>
-      <p:sp>
-        <p:nvSpPr>
-          <p:cNvPr id="2" name="Title 1">
+      <p:pic>
+        <p:nvPicPr>
+          <p:cNvPr id="8" name="Picture 7">
             <a:extLst>
               <a:ext uri="{FF2B5EF4-FFF2-40B4-BE49-F238E27FC236}">
-                <a16:creationId xmlns:a16="http://schemas.microsoft.com/office/drawing/2014/main" id="{0F57F1AA-F26C-3A7E-4BDD-34358BB4E736}"/>
-              </a:ext>
-            </a:extLst>
-          </p:cNvPr>
-          <p:cNvSpPr>
-            <a:spLocks noGrp="1"/>
-          </p:cNvSpPr>
-          <p:nvPr>
-            <p:ph type="title"/>
-          </p:nvPr>
-        </p:nvSpPr>
-        <p:spPr/>
-        <p:txBody>
-          <a:bodyPr/>
-          <a:lstStyle/>
-          <a:p>
-            <a:r>
-              <a:rPr lang="hr-HR" dirty="0">
-                <a:latin typeface="Arial" panose="020B0604020202020204" pitchFamily="34" charset="0"/>
-                <a:cs typeface="Arial" panose="020B0604020202020204" pitchFamily="34" charset="0"/>
-              </a:rPr>
-              <a:t>Zašumljene oznake</a:t>
-            </a:r>
-            <a:endParaRPr lang="hr-HR" noProof="0" dirty="0">
-              <a:latin typeface="Arial" panose="020B0604020202020204" pitchFamily="34" charset="0"/>
-              <a:cs typeface="Arial" panose="020B0604020202020204" pitchFamily="34" charset="0"/>
-            </a:endParaRPr>
-          </a:p>
-        </p:txBody>
-      </p:sp>
-      <p:sp>
-        <p:nvSpPr>
-          <p:cNvPr id="3" name="Content Placeholder 2">
-            <a:extLst>
-              <a:ext uri="{FF2B5EF4-FFF2-40B4-BE49-F238E27FC236}">
-                <a16:creationId xmlns:a16="http://schemas.microsoft.com/office/drawing/2014/main" id="{AC430A64-8E96-6C8E-3459-65E1BE2C3DCB}"/>
-              </a:ext>
-            </a:extLst>
-          </p:cNvPr>
-          <p:cNvSpPr>
-            <a:spLocks noGrp="1"/>
-          </p:cNvSpPr>
-          <p:nvPr>
-            <p:ph idx="1"/>
-          </p:nvPr>
-        </p:nvSpPr>
-        <p:spPr>
-          <a:xfrm>
-            <a:off x="1261871" y="1593274"/>
-            <a:ext cx="9692639" cy="4586864"/>
-          </a:xfrm>
-        </p:spPr>
-        <p:txBody>
-          <a:bodyPr>
-            <a:normAutofit/>
-          </a:bodyPr>
-          <a:lstStyle/>
-          <a:p>
-            <a:endParaRPr lang="hr-HR" sz="2600" dirty="0">
-              <a:latin typeface="Arial" panose="020B0604020202020204" pitchFamily="34" charset="0"/>
-              <a:cs typeface="Arial" panose="020B0604020202020204" pitchFamily="34" charset="0"/>
-            </a:endParaRPr>
-          </a:p>
-          <a:p>
-            <a:r>
-              <a:rPr lang="hr-HR" sz="2600" dirty="0">
-                <a:latin typeface="Arial" panose="020B0604020202020204" pitchFamily="34" charset="0"/>
-                <a:cs typeface="Arial" panose="020B0604020202020204" pitchFamily="34" charset="0"/>
-              </a:rPr>
-              <a:t>posljedica </a:t>
-            </a:r>
-            <a:r>
-              <a:rPr lang="hr-HR" sz="2600" b="1" dirty="0">
-                <a:latin typeface="Arial" panose="020B0604020202020204" pitchFamily="34" charset="0"/>
-                <a:cs typeface="Arial" panose="020B0604020202020204" pitchFamily="34" charset="0"/>
-              </a:rPr>
-              <a:t>netočnog označavanja </a:t>
-            </a:r>
-            <a:r>
-              <a:rPr lang="hr-HR" sz="2600" dirty="0">
-                <a:latin typeface="Arial" panose="020B0604020202020204" pitchFamily="34" charset="0"/>
-                <a:cs typeface="Arial" panose="020B0604020202020204" pitchFamily="34" charset="0"/>
-              </a:rPr>
-              <a:t>podataka</a:t>
-            </a:r>
-          </a:p>
-          <a:p>
-            <a:r>
-              <a:rPr lang="hr-HR" sz="2600" dirty="0">
-                <a:latin typeface="Arial" panose="020B0604020202020204" pitchFamily="34" charset="0"/>
-                <a:cs typeface="Arial" panose="020B0604020202020204" pitchFamily="34" charset="0"/>
-              </a:rPr>
-              <a:t>razlikujemo</a:t>
-            </a:r>
-            <a:r>
-              <a:rPr lang="hr-HR" sz="2600" b="1" dirty="0">
-                <a:latin typeface="Arial" panose="020B0604020202020204" pitchFamily="34" charset="0"/>
-                <a:cs typeface="Arial" panose="020B0604020202020204" pitchFamily="34" charset="0"/>
-              </a:rPr>
-              <a:t> simetrično</a:t>
-            </a:r>
-            <a:r>
-              <a:rPr lang="hr-HR" sz="2600" dirty="0">
-                <a:latin typeface="Arial" panose="020B0604020202020204" pitchFamily="34" charset="0"/>
-                <a:cs typeface="Arial" panose="020B0604020202020204" pitchFamily="34" charset="0"/>
-              </a:rPr>
-              <a:t> (gore) i </a:t>
-            </a:r>
-            <a:r>
-              <a:rPr lang="hr-HR" sz="2600" b="1" dirty="0">
-                <a:latin typeface="Arial" panose="020B0604020202020204" pitchFamily="34" charset="0"/>
-                <a:cs typeface="Arial" panose="020B0604020202020204" pitchFamily="34" charset="0"/>
-              </a:rPr>
-              <a:t>asimetrično</a:t>
-            </a:r>
-            <a:r>
-              <a:rPr lang="hr-HR" sz="2600" dirty="0">
-                <a:latin typeface="Arial" panose="020B0604020202020204" pitchFamily="34" charset="0"/>
-                <a:cs typeface="Arial" panose="020B0604020202020204" pitchFamily="34" charset="0"/>
-              </a:rPr>
-              <a:t> (dolje) zašumljivanje</a:t>
-            </a:r>
-          </a:p>
-          <a:p>
-            <a:endParaRPr lang="hr-HR" sz="2600" dirty="0">
-              <a:latin typeface="Arial" panose="020B0604020202020204" pitchFamily="34" charset="0"/>
-              <a:cs typeface="Arial" panose="020B0604020202020204" pitchFamily="34" charset="0"/>
-            </a:endParaRPr>
-          </a:p>
-        </p:txBody>
-      </p:sp>
-      <p:sp>
-        <p:nvSpPr>
-          <p:cNvPr id="5" name="Slide Number Placeholder 4">
-            <a:extLst>
-              <a:ext uri="{FF2B5EF4-FFF2-40B4-BE49-F238E27FC236}">
-                <a16:creationId xmlns:a16="http://schemas.microsoft.com/office/drawing/2014/main" id="{749CEE37-3FD2-7B31-A0A9-1C19FBC24C33}"/>
-              </a:ext>
-            </a:extLst>
-          </p:cNvPr>
-          <p:cNvSpPr>
-            <a:spLocks noGrp="1"/>
-          </p:cNvSpPr>
-          <p:nvPr>
-            <p:ph type="sldNum" sz="quarter" idx="12"/>
-          </p:nvPr>
-        </p:nvSpPr>
-        <p:spPr/>
-        <p:txBody>
-          <a:bodyPr>
-            <a:normAutofit lnSpcReduction="10000"/>
-          </a:bodyPr>
-          <a:lstStyle/>
-          <a:p>
-            <a:r>
-              <a:rPr lang="hr-HR" dirty="0"/>
-              <a:t>4</a:t>
-            </a:r>
-          </a:p>
-        </p:txBody>
-      </p:sp>
-      <p:pic>
-        <p:nvPicPr>
-          <p:cNvPr id="15" name="Picture 14">
-            <a:extLst>
-              <a:ext uri="{FF2B5EF4-FFF2-40B4-BE49-F238E27FC236}">
-                <a16:creationId xmlns:a16="http://schemas.microsoft.com/office/drawing/2014/main" id="{81D22B6A-8919-1AB5-09B6-61F879B02762}"/>
+                <a16:creationId xmlns:a16="http://schemas.microsoft.com/office/drawing/2014/main" id="{B2BC3D2F-E58C-3601-066F-41AACCEE71F4}"/>
               </a:ext>
             </a:extLst>
           </p:cNvPr>
@@ -11054,21 +12693,187 @@
           <p:nvPr/>
         </p:nvPicPr>
         <p:blipFill>
-          <a:blip r:embed="rId2"/>
+          <a:blip r:embed="rId3"/>
           <a:stretch>
             <a:fillRect/>
           </a:stretch>
         </p:blipFill>
         <p:spPr>
           <a:xfrm>
-            <a:off x="1027695" y="3841624"/>
-            <a:ext cx="9667782" cy="2698750"/>
+            <a:off x="1015266" y="3803412"/>
+            <a:ext cx="9692639" cy="2775173"/>
           </a:xfrm>
           <a:prstGeom prst="rect">
             <a:avLst/>
           </a:prstGeom>
         </p:spPr>
       </p:pic>
+      <p:sp>
+        <p:nvSpPr>
+          <p:cNvPr id="2" name="Title 1">
+            <a:extLst>
+              <a:ext uri="{FF2B5EF4-FFF2-40B4-BE49-F238E27FC236}">
+                <a16:creationId xmlns:a16="http://schemas.microsoft.com/office/drawing/2014/main" id="{0F57F1AA-F26C-3A7E-4BDD-34358BB4E736}"/>
+              </a:ext>
+            </a:extLst>
+          </p:cNvPr>
+          <p:cNvSpPr>
+            <a:spLocks noGrp="1"/>
+          </p:cNvSpPr>
+          <p:nvPr>
+            <p:ph type="title"/>
+          </p:nvPr>
+        </p:nvSpPr>
+        <p:spPr/>
+        <p:txBody>
+          <a:bodyPr/>
+          <a:lstStyle/>
+          <a:p>
+            <a:r>
+              <a:rPr lang="hr-HR" dirty="0">
+                <a:latin typeface="Arial" panose="020B0604020202020204" pitchFamily="34" charset="0"/>
+                <a:cs typeface="Arial" panose="020B0604020202020204" pitchFamily="34" charset="0"/>
+              </a:rPr>
+              <a:t>Zašumljene oznake</a:t>
+            </a:r>
+            <a:endParaRPr lang="hr-HR" noProof="0" dirty="0">
+              <a:latin typeface="Arial" panose="020B0604020202020204" pitchFamily="34" charset="0"/>
+              <a:cs typeface="Arial" panose="020B0604020202020204" pitchFamily="34" charset="0"/>
+            </a:endParaRPr>
+          </a:p>
+        </p:txBody>
+      </p:sp>
+      <p:sp>
+        <p:nvSpPr>
+          <p:cNvPr id="3" name="Content Placeholder 2">
+            <a:extLst>
+              <a:ext uri="{FF2B5EF4-FFF2-40B4-BE49-F238E27FC236}">
+                <a16:creationId xmlns:a16="http://schemas.microsoft.com/office/drawing/2014/main" id="{AC430A64-8E96-6C8E-3459-65E1BE2C3DCB}"/>
+              </a:ext>
+            </a:extLst>
+          </p:cNvPr>
+          <p:cNvSpPr>
+            <a:spLocks noGrp="1"/>
+          </p:cNvSpPr>
+          <p:nvPr>
+            <p:ph idx="1"/>
+          </p:nvPr>
+        </p:nvSpPr>
+        <p:spPr>
+          <a:xfrm>
+            <a:off x="1261871" y="1593274"/>
+            <a:ext cx="9692639" cy="4586864"/>
+          </a:xfrm>
+        </p:spPr>
+        <p:txBody>
+          <a:bodyPr>
+            <a:normAutofit/>
+          </a:bodyPr>
+          <a:lstStyle/>
+          <a:p>
+            <a:endParaRPr lang="hr-HR" sz="2600" dirty="0">
+              <a:latin typeface="Arial" panose="020B0604020202020204" pitchFamily="34" charset="0"/>
+              <a:cs typeface="Arial" panose="020B0604020202020204" pitchFamily="34" charset="0"/>
+            </a:endParaRPr>
+          </a:p>
+          <a:p>
+            <a:r>
+              <a:rPr lang="hr-HR" sz="2600" dirty="0">
+                <a:latin typeface="Arial" panose="020B0604020202020204" pitchFamily="34" charset="0"/>
+                <a:cs typeface="Arial" panose="020B0604020202020204" pitchFamily="34" charset="0"/>
+              </a:rPr>
+              <a:t>posljedica </a:t>
+            </a:r>
+            <a:r>
+              <a:rPr lang="hr-HR" sz="2600" b="1" dirty="0">
+                <a:latin typeface="Arial" panose="020B0604020202020204" pitchFamily="34" charset="0"/>
+                <a:cs typeface="Arial" panose="020B0604020202020204" pitchFamily="34" charset="0"/>
+              </a:rPr>
+              <a:t>netočnog označavanja </a:t>
+            </a:r>
+            <a:r>
+              <a:rPr lang="hr-HR" sz="2600" dirty="0">
+                <a:latin typeface="Arial" panose="020B0604020202020204" pitchFamily="34" charset="0"/>
+                <a:cs typeface="Arial" panose="020B0604020202020204" pitchFamily="34" charset="0"/>
+              </a:rPr>
+              <a:t>podataka</a:t>
+            </a:r>
+          </a:p>
+          <a:p>
+            <a:r>
+              <a:rPr lang="hr-HR" sz="2600" dirty="0">
+                <a:latin typeface="Arial" panose="020B0604020202020204" pitchFamily="34" charset="0"/>
+                <a:cs typeface="Arial" panose="020B0604020202020204" pitchFamily="34" charset="0"/>
+              </a:rPr>
+              <a:t>razlikujemo</a:t>
+            </a:r>
+            <a:r>
+              <a:rPr lang="hr-HR" sz="2600" b="1" dirty="0">
+                <a:latin typeface="Arial" panose="020B0604020202020204" pitchFamily="34" charset="0"/>
+                <a:cs typeface="Arial" panose="020B0604020202020204" pitchFamily="34" charset="0"/>
+              </a:rPr>
+              <a:t> simetrično</a:t>
+            </a:r>
+            <a:r>
+              <a:rPr lang="hr-HR" sz="2600" dirty="0">
+                <a:latin typeface="Arial" panose="020B0604020202020204" pitchFamily="34" charset="0"/>
+                <a:cs typeface="Arial" panose="020B0604020202020204" pitchFamily="34" charset="0"/>
+              </a:rPr>
+              <a:t> (gore) i </a:t>
+            </a:r>
+            <a:r>
+              <a:rPr lang="hr-HR" sz="2600" b="1" dirty="0">
+                <a:latin typeface="Arial" panose="020B0604020202020204" pitchFamily="34" charset="0"/>
+                <a:cs typeface="Arial" panose="020B0604020202020204" pitchFamily="34" charset="0"/>
+              </a:rPr>
+              <a:t>asimetrično</a:t>
+            </a:r>
+            <a:r>
+              <a:rPr lang="hr-HR" sz="2600" dirty="0">
+                <a:latin typeface="Arial" panose="020B0604020202020204" pitchFamily="34" charset="0"/>
+                <a:cs typeface="Arial" panose="020B0604020202020204" pitchFamily="34" charset="0"/>
+              </a:rPr>
+              <a:t> (dolje) zašumljivanje</a:t>
+            </a:r>
+          </a:p>
+          <a:p>
+            <a:endParaRPr lang="hr-HR" sz="2600" dirty="0">
+              <a:latin typeface="Arial" panose="020B0604020202020204" pitchFamily="34" charset="0"/>
+              <a:cs typeface="Arial" panose="020B0604020202020204" pitchFamily="34" charset="0"/>
+            </a:endParaRPr>
+          </a:p>
+        </p:txBody>
+      </p:sp>
+      <p:sp>
+        <p:nvSpPr>
+          <p:cNvPr id="5" name="Slide Number Placeholder 4">
+            <a:extLst>
+              <a:ext uri="{FF2B5EF4-FFF2-40B4-BE49-F238E27FC236}">
+                <a16:creationId xmlns:a16="http://schemas.microsoft.com/office/drawing/2014/main" id="{749CEE37-3FD2-7B31-A0A9-1C19FBC24C33}"/>
+              </a:ext>
+            </a:extLst>
+          </p:cNvPr>
+          <p:cNvSpPr>
+            <a:spLocks noGrp="1"/>
+          </p:cNvSpPr>
+          <p:nvPr>
+            <p:ph type="sldNum" sz="quarter" idx="12"/>
+          </p:nvPr>
+        </p:nvSpPr>
+        <p:spPr/>
+        <p:txBody>
+          <a:bodyPr>
+            <a:normAutofit lnSpcReduction="10000"/>
+          </a:bodyPr>
+          <a:lstStyle/>
+          <a:p>
+            <a:r>
+              <a:rPr lang="hr-HR" dirty="0"/>
+              <a:t>4</a:t>
+            </a:r>
+          </a:p>
+        </p:txBody>
+      </p:sp>
     </p:spTree>
     <p:extLst>
       <p:ext uri="{BB962C8B-B14F-4D97-AF65-F5344CB8AC3E}">
@@ -11082,7 +12887,7 @@
 </p:sld>
 </file>
 
-<file path=ppt/slides/slide7.xml><?xml version="1.0" encoding="utf-8"?>
+<file path=ppt/slides/slide8.xml><?xml version="1.0" encoding="utf-8"?>
 <p:sld xmlns:a="http://schemas.openxmlformats.org/drawingml/2006/main" xmlns:r="http://schemas.openxmlformats.org/officeDocument/2006/relationships" xmlns:p="http://schemas.openxmlformats.org/presentationml/2006/main">
   <p:cSld>
     <p:spTree>
@@ -11331,7 +13136,7 @@
 </p:sld>
 </file>
 
-<file path=ppt/slides/slide8.xml><?xml version="1.0" encoding="utf-8"?>
+<file path=ppt/slides/slide9.xml><?xml version="1.0" encoding="utf-8"?>
 <p:sld xmlns:a="http://schemas.openxmlformats.org/drawingml/2006/main" xmlns:r="http://schemas.openxmlformats.org/officeDocument/2006/relationships" xmlns:p="http://schemas.openxmlformats.org/presentationml/2006/main">
   <p:cSld>
     <p:spTree>
@@ -11339,7 +13144,7 @@
         <p:cNvPr id="1" name="">
           <a:extLst>
             <a:ext uri="{FF2B5EF4-FFF2-40B4-BE49-F238E27FC236}">
-              <a16:creationId xmlns:a16="http://schemas.microsoft.com/office/drawing/2014/main" id="{4888D621-C0C9-42FB-03CD-313BB353C5BD}"/>
+              <a16:creationId xmlns:a16="http://schemas.microsoft.com/office/drawing/2014/main" id="{C32FB05E-7C65-84C2-ADAF-4D88B897A3E8}"/>
             </a:ext>
           </a:extLst>
         </p:cNvPr>
@@ -11359,7 +13164,7 @@
           <p:cNvPr id="2" name="Title 1">
             <a:extLst>
               <a:ext uri="{FF2B5EF4-FFF2-40B4-BE49-F238E27FC236}">
-                <a16:creationId xmlns:a16="http://schemas.microsoft.com/office/drawing/2014/main" id="{5C6AF7BE-BB66-8B40-08A5-681B2DEA3179}"/>
+                <a16:creationId xmlns:a16="http://schemas.microsoft.com/office/drawing/2014/main" id="{20BF32F2-366D-A638-ABAC-A39EB1B268C5}"/>
               </a:ext>
             </a:extLst>
           </p:cNvPr>
@@ -11382,6 +13187,17 @@
               </a:rPr>
               <a:t>Okvir VIBE</a:t>
             </a:r>
+            <a:r>
+              <a:rPr lang="hr-HR" dirty="0">
+                <a:latin typeface="Arial" panose="020B0604020202020204" pitchFamily="34" charset="0"/>
+                <a:cs typeface="Arial" panose="020B0604020202020204" pitchFamily="34" charset="0"/>
+              </a:rPr>
+              <a:t>, algoritam EM</a:t>
+            </a:r>
+            <a:endParaRPr lang="hr-HR" noProof="0" dirty="0">
+              <a:latin typeface="Arial" panose="020B0604020202020204" pitchFamily="34" charset="0"/>
+              <a:cs typeface="Arial" panose="020B0604020202020204" pitchFamily="34" charset="0"/>
+            </a:endParaRPr>
           </a:p>
         </p:txBody>
       </p:sp>
@@ -11390,7 +13206,7 @@
           <p:cNvPr id="3" name="Content Placeholder 2">
             <a:extLst>
               <a:ext uri="{FF2B5EF4-FFF2-40B4-BE49-F238E27FC236}">
-                <a16:creationId xmlns:a16="http://schemas.microsoft.com/office/drawing/2014/main" id="{19FF9997-24F3-C098-A02E-FA0EFB9B656C}"/>
+                <a16:creationId xmlns:a16="http://schemas.microsoft.com/office/drawing/2014/main" id="{1B168722-F2C2-6B8C-38F4-A172A46699B9}"/>
               </a:ext>
             </a:extLst>
           </p:cNvPr>
@@ -11403,96 +13219,15 @@
         </p:nvSpPr>
         <p:spPr>
           <a:xfrm>
-            <a:off x="1261872" y="1828799"/>
-            <a:ext cx="9692640" cy="4937125"/>
+            <a:off x="1261872" y="1828800"/>
+            <a:ext cx="9692640" cy="4675909"/>
           </a:xfrm>
         </p:spPr>
         <p:txBody>
           <a:bodyPr>
-            <a:normAutofit/>
+            <a:normAutofit lnSpcReduction="10000"/>
           </a:bodyPr>
           <a:lstStyle/>
-          <a:p>
-            <a:r>
-              <a:rPr lang="en-US" sz="2600" noProof="0" dirty="0">
-                <a:latin typeface="Arial" panose="020B0604020202020204" pitchFamily="34" charset="0"/>
-                <a:cs typeface="Arial" panose="020B0604020202020204" pitchFamily="34" charset="0"/>
-              </a:rPr>
-              <a:t>model: </a:t>
-            </a:r>
-            <a:r>
-              <a:rPr lang="hr-HR" sz="2600" b="1" noProof="0" dirty="0">
-                <a:latin typeface="Arial" panose="020B0604020202020204" pitchFamily="34" charset="0"/>
-                <a:cs typeface="Arial" panose="020B0604020202020204" pitchFamily="34" charset="0"/>
-              </a:rPr>
-              <a:t>ekstraktor značajki</a:t>
-            </a:r>
-            <a:r>
-              <a:rPr lang="hr-HR" sz="2600" noProof="0" dirty="0">
-                <a:latin typeface="Arial" panose="020B0604020202020204" pitchFamily="34" charset="0"/>
-                <a:cs typeface="Arial" panose="020B0604020202020204" pitchFamily="34" charset="0"/>
-              </a:rPr>
-              <a:t>, skup čistih prototipova</a:t>
-            </a:r>
-            <a:r>
-              <a:rPr lang="en-US" sz="2600" noProof="0" dirty="0">
-                <a:latin typeface="Arial" panose="020B0604020202020204" pitchFamily="34" charset="0"/>
-                <a:cs typeface="Arial" panose="020B0604020202020204" pitchFamily="34" charset="0"/>
-              </a:rPr>
-              <a:t> </a:t>
-            </a:r>
-            <a:r>
-              <a:rPr lang="el-GR" sz="2600" b="1" i="1" noProof="0" dirty="0">
-                <a:latin typeface="Arial" panose="020B0604020202020204" pitchFamily="34" charset="0"/>
-                <a:cs typeface="Arial" panose="020B0604020202020204" pitchFamily="34" charset="0"/>
-              </a:rPr>
-              <a:t>μ</a:t>
-            </a:r>
-            <a:r>
-              <a:rPr lang="en-US" sz="2600" i="1" baseline="-25000" noProof="0" dirty="0">
-                <a:latin typeface="Arial" panose="020B0604020202020204" pitchFamily="34" charset="0"/>
-                <a:cs typeface="Arial" panose="020B0604020202020204" pitchFamily="34" charset="0"/>
-              </a:rPr>
-              <a:t>l</a:t>
-            </a:r>
-            <a:r>
-              <a:rPr lang="hr-HR" sz="2600" noProof="0" dirty="0">
-                <a:latin typeface="Arial" panose="020B0604020202020204" pitchFamily="34" charset="0"/>
-                <a:cs typeface="Arial" panose="020B0604020202020204" pitchFamily="34" charset="0"/>
-              </a:rPr>
-              <a:t>, skup zatrovanih prototipova </a:t>
-            </a:r>
-            <a:r>
-              <a:rPr lang="el-GR" sz="2600" b="1" i="1" noProof="0" dirty="0">
-                <a:latin typeface="Arial" panose="020B0604020202020204" pitchFamily="34" charset="0"/>
-                <a:cs typeface="Arial" panose="020B0604020202020204" pitchFamily="34" charset="0"/>
-              </a:rPr>
-              <a:t>η</a:t>
-            </a:r>
-            <a:r>
-              <a:rPr lang="en-US" sz="2600" i="1" baseline="-25000" noProof="0" dirty="0">
-                <a:latin typeface="Arial" panose="020B0604020202020204" pitchFamily="34" charset="0"/>
-                <a:cs typeface="Arial" panose="020B0604020202020204" pitchFamily="34" charset="0"/>
-              </a:rPr>
-              <a:t>y</a:t>
-            </a:r>
-            <a:endParaRPr lang="hr-HR" sz="2600" i="1" noProof="0" dirty="0">
-              <a:latin typeface="Arial" panose="020B0604020202020204" pitchFamily="34" charset="0"/>
-              <a:cs typeface="Arial" panose="020B0604020202020204" pitchFamily="34" charset="0"/>
-            </a:endParaRPr>
-          </a:p>
-          <a:p>
-            <a:endParaRPr lang="hr-HR" sz="2600" noProof="0" dirty="0">
-              <a:latin typeface="Arial" panose="020B0604020202020204" pitchFamily="34" charset="0"/>
-              <a:cs typeface="Arial" panose="020B0604020202020204" pitchFamily="34" charset="0"/>
-            </a:endParaRPr>
-          </a:p>
-          <a:p>
-            <a:endParaRPr lang="hr-HR" sz="2600" noProof="0" dirty="0">
-              <a:latin typeface="Arial" panose="020B0604020202020204" pitchFamily="34" charset="0"/>
-              <a:cs typeface="Arial" panose="020B0604020202020204" pitchFamily="34" charset="0"/>
-            </a:endParaRPr>
-          </a:p>
           <a:p>
             <a:endParaRPr lang="hr-HR" sz="2600" dirty="0">
               <a:latin typeface="Arial" panose="020B0604020202020204" pitchFamily="34" charset="0"/>
@@ -11500,12 +13235,50 @@
             </a:endParaRPr>
           </a:p>
           <a:p>
-            <a:endParaRPr lang="hr-HR" sz="2600" noProof="0" dirty="0">
-              <a:latin typeface="Arial" panose="020B0604020202020204" pitchFamily="34" charset="0"/>
-              <a:cs typeface="Arial" panose="020B0604020202020204" pitchFamily="34" charset="0"/>
-            </a:endParaRPr>
-          </a:p>
-          <a:p>
+            <a:r>
+              <a:rPr lang="hr-HR" sz="2600" dirty="0">
+                <a:latin typeface="Arial" panose="020B0604020202020204" pitchFamily="34" charset="0"/>
+                <a:cs typeface="Arial" panose="020B0604020202020204" pitchFamily="34" charset="0"/>
+              </a:rPr>
+              <a:t>iterativan algoritam za učenje uz </a:t>
+            </a:r>
+            <a:r>
+              <a:rPr lang="hr-HR" sz="2600" b="1" dirty="0">
+                <a:latin typeface="Arial" panose="020B0604020202020204" pitchFamily="34" charset="0"/>
+                <a:cs typeface="Arial" panose="020B0604020202020204" pitchFamily="34" charset="0"/>
+              </a:rPr>
+              <a:t>prisutnost skrivenih varijabli </a:t>
+            </a:r>
+          </a:p>
+          <a:p>
+            <a:r>
+              <a:rPr lang="hr-HR" sz="2600" dirty="0">
+                <a:latin typeface="Arial" panose="020B0604020202020204" pitchFamily="34" charset="0"/>
+                <a:cs typeface="Arial" panose="020B0604020202020204" pitchFamily="34" charset="0"/>
+              </a:rPr>
+              <a:t>naizmjenično provođenje </a:t>
+            </a:r>
+            <a:r>
+              <a:rPr lang="hr-HR" sz="2600" b="1" dirty="0">
+                <a:latin typeface="Arial" panose="020B0604020202020204" pitchFamily="34" charset="0"/>
+                <a:cs typeface="Arial" panose="020B0604020202020204" pitchFamily="34" charset="0"/>
+              </a:rPr>
+              <a:t>E koraka </a:t>
+            </a:r>
+            <a:r>
+              <a:rPr lang="hr-HR" sz="2600" dirty="0">
+                <a:latin typeface="Arial" panose="020B0604020202020204" pitchFamily="34" charset="0"/>
+                <a:cs typeface="Arial" panose="020B0604020202020204" pitchFamily="34" charset="0"/>
+              </a:rPr>
+              <a:t>i </a:t>
+            </a:r>
+            <a:r>
+              <a:rPr lang="hr-HR" sz="2600" b="1" dirty="0">
+                <a:latin typeface="Arial" panose="020B0604020202020204" pitchFamily="34" charset="0"/>
+                <a:cs typeface="Arial" panose="020B0604020202020204" pitchFamily="34" charset="0"/>
+              </a:rPr>
+              <a:t>M koraka </a:t>
+            </a:r>
             <a:endParaRPr lang="hr-HR" sz="2600" dirty="0">
               <a:latin typeface="Arial" panose="020B0604020202020204" pitchFamily="34" charset="0"/>
               <a:cs typeface="Arial" panose="020B0604020202020204" pitchFamily="34" charset="0"/>
@@ -11513,54 +13286,80 @@
           </a:p>
           <a:p>
             <a:r>
-              <a:rPr lang="hr-HR" sz="2600" noProof="0" dirty="0">
-                <a:latin typeface="Arial" panose="020B0604020202020204" pitchFamily="34" charset="0"/>
-                <a:cs typeface="Arial" panose="020B0604020202020204" pitchFamily="34" charset="0"/>
-              </a:rPr>
-              <a:t>E korak: </a:t>
-            </a:r>
-            <a:r>
-              <a:rPr lang="hr-HR" sz="2600" b="1" noProof="0" dirty="0">
-                <a:latin typeface="Arial" panose="020B0604020202020204" pitchFamily="34" charset="0"/>
-                <a:cs typeface="Arial" panose="020B0604020202020204" pitchFamily="34" charset="0"/>
-              </a:rPr>
-              <a:t>aproksimacija čistih pseudooznaka </a:t>
-            </a:r>
-            <a:r>
-              <a:rPr lang="hr-HR" sz="2600" noProof="0" dirty="0">
-                <a:latin typeface="Arial" panose="020B0604020202020204" pitchFamily="34" charset="0"/>
-                <a:cs typeface="Arial" panose="020B0604020202020204" pitchFamily="34" charset="0"/>
-              </a:rPr>
-              <a:t>(algoritam SK)</a:t>
-            </a:r>
-          </a:p>
-          <a:p>
-            <a:r>
               <a:rPr lang="hr-HR" sz="2600" dirty="0">
                 <a:latin typeface="Arial" panose="020B0604020202020204" pitchFamily="34" charset="0"/>
                 <a:cs typeface="Arial" panose="020B0604020202020204" pitchFamily="34" charset="0"/>
               </a:rPr>
-              <a:t>M korak: </a:t>
-            </a:r>
-            <a:r>
-              <a:rPr lang="hr-HR" sz="2600" b="1" dirty="0">
-                <a:latin typeface="Arial" panose="020B0604020202020204" pitchFamily="34" charset="0"/>
-                <a:cs typeface="Arial" panose="020B0604020202020204" pitchFamily="34" charset="0"/>
-              </a:rPr>
-              <a:t>ažuriranje parametara modela</a:t>
-            </a:r>
-            <a:r>
-              <a:rPr lang="hr-HR" sz="2600" dirty="0">
-                <a:latin typeface="Arial" panose="020B0604020202020204" pitchFamily="34" charset="0"/>
-                <a:cs typeface="Arial" panose="020B0604020202020204" pitchFamily="34" charset="0"/>
-              </a:rPr>
-              <a:t> (gradijentni spust)</a:t>
-            </a:r>
-            <a:endParaRPr lang="hr-HR" sz="2600" noProof="0" dirty="0">
+              <a:t>M korak se može provoditi više puta zaredom</a:t>
+            </a:r>
+          </a:p>
+          <a:p>
+            <a:endParaRPr lang="hr-HR" sz="2600" dirty="0">
               <a:latin typeface="Arial" panose="020B0604020202020204" pitchFamily="34" charset="0"/>
               <a:cs typeface="Arial" panose="020B0604020202020204" pitchFamily="34" charset="0"/>
             </a:endParaRPr>
           </a:p>
+          <a:p>
+            <a:endParaRPr lang="hr-HR" sz="2600" dirty="0">
+              <a:latin typeface="Arial" panose="020B0604020202020204" pitchFamily="34" charset="0"/>
+              <a:cs typeface="Arial" panose="020B0604020202020204" pitchFamily="34" charset="0"/>
+            </a:endParaRPr>
+          </a:p>
+          <a:p>
+            <a:r>
+              <a:rPr lang="hr-HR" sz="2600" dirty="0">
+                <a:latin typeface="Arial" panose="020B0604020202020204" pitchFamily="34" charset="0"/>
+                <a:cs typeface="Arial" panose="020B0604020202020204" pitchFamily="34" charset="0"/>
+              </a:rPr>
+              <a:t>E korak: </a:t>
+            </a:r>
+            <a:r>
+              <a:rPr lang="hr-HR" sz="2600" b="1" dirty="0">
+                <a:latin typeface="Arial" panose="020B0604020202020204" pitchFamily="34" charset="0"/>
+                <a:cs typeface="Arial" panose="020B0604020202020204" pitchFamily="34" charset="0"/>
+              </a:rPr>
+              <a:t>aproksimacija čistih pseudooznaka </a:t>
+            </a:r>
+            <a:r>
+              <a:rPr lang="hr-HR" sz="2600" dirty="0">
+                <a:latin typeface="Arial" panose="020B0604020202020204" pitchFamily="34" charset="0"/>
+                <a:cs typeface="Arial" panose="020B0604020202020204" pitchFamily="34" charset="0"/>
+              </a:rPr>
+              <a:t>(algoritam SK)</a:t>
+            </a:r>
+          </a:p>
+          <a:p>
+            <a:r>
+              <a:rPr lang="hr-HR" sz="2600" dirty="0">
+                <a:latin typeface="Arial" panose="020B0604020202020204" pitchFamily="34" charset="0"/>
+                <a:cs typeface="Arial" panose="020B0604020202020204" pitchFamily="34" charset="0"/>
+              </a:rPr>
+              <a:t>M korak: </a:t>
+            </a:r>
+            <a:r>
+              <a:rPr lang="hr-HR" sz="2600" b="1" dirty="0">
+                <a:latin typeface="Arial" panose="020B0604020202020204" pitchFamily="34" charset="0"/>
+                <a:cs typeface="Arial" panose="020B0604020202020204" pitchFamily="34" charset="0"/>
+              </a:rPr>
+              <a:t>ažuriranje parametara modela</a:t>
+            </a:r>
+            <a:r>
+              <a:rPr lang="hr-HR" sz="2600" dirty="0">
+                <a:latin typeface="Arial" panose="020B0604020202020204" pitchFamily="34" charset="0"/>
+                <a:cs typeface="Arial" panose="020B0604020202020204" pitchFamily="34" charset="0"/>
+              </a:rPr>
+              <a:t> (gradijentni spust)</a:t>
+            </a:r>
+          </a:p>
+          <a:p>
+            <a:pPr marL="0" indent="0">
+              <a:buNone/>
+            </a:pPr>
+            <a:endParaRPr lang="hr-HR" sz="2800" noProof="0" dirty="0">
+              <a:latin typeface="Arial" panose="020B0604020202020204" pitchFamily="34" charset="0"/>
+              <a:cs typeface="Arial" panose="020B0604020202020204" pitchFamily="34" charset="0"/>
+            </a:endParaRPr>
+          </a:p>
         </p:txBody>
       </p:sp>
       <p:sp>
@@ -11568,7 +13367,7 @@
           <p:cNvPr id="5" name="Slide Number Placeholder 4">
             <a:extLst>
               <a:ext uri="{FF2B5EF4-FFF2-40B4-BE49-F238E27FC236}">
-                <a16:creationId xmlns:a16="http://schemas.microsoft.com/office/drawing/2014/main" id="{166F4E7C-1CAF-80DB-BAF8-FD54241566DB}"/>
+                <a16:creationId xmlns:a16="http://schemas.microsoft.com/office/drawing/2014/main" id="{870290D0-B6F6-1491-D341-87C4703651BD}"/>
               </a:ext>
             </a:extLst>
           </p:cNvPr>
@@ -11593,195 +13392,12 @@
           </a:p>
         </p:txBody>
       </p:sp>
-      <p:grpSp>
-        <p:nvGrpSpPr>
-          <p:cNvPr id="13" name="Group 12">
+      <p:pic>
+        <p:nvPicPr>
+          <p:cNvPr id="7" name="Picture 6">
             <a:extLst>
               <a:ext uri="{FF2B5EF4-FFF2-40B4-BE49-F238E27FC236}">
-                <a16:creationId xmlns:a16="http://schemas.microsoft.com/office/drawing/2014/main" id="{C3539D21-AAAA-D0D6-FFF8-8DFAF02C3A53}"/>
-              </a:ext>
-            </a:extLst>
-          </p:cNvPr>
-          <p:cNvGrpSpPr/>
-          <p:nvPr/>
-        </p:nvGrpSpPr>
-        <p:grpSpPr>
-          <a:xfrm>
-            <a:off x="2633179" y="2735846"/>
-            <a:ext cx="6925642" cy="2814376"/>
-            <a:chOff x="2633179" y="2735846"/>
-            <a:chExt cx="6925642" cy="2814376"/>
-          </a:xfrm>
-        </p:grpSpPr>
-        <p:pic>
-          <p:nvPicPr>
-            <p:cNvPr id="14" name="Picture 13">
-              <a:extLst>
-                <a:ext uri="{FF2B5EF4-FFF2-40B4-BE49-F238E27FC236}">
-                  <a16:creationId xmlns:a16="http://schemas.microsoft.com/office/drawing/2014/main" id="{200F0D49-A854-E309-B1DF-462B0242CCE9}"/>
-                </a:ext>
-              </a:extLst>
-            </p:cNvPr>
-            <p:cNvPicPr>
-              <a:picLocks noChangeAspect="1"/>
-            </p:cNvPicPr>
-            <p:nvPr/>
-          </p:nvPicPr>
-          <p:blipFill>
-            <a:blip r:embed="rId2"/>
-            <a:srcRect r="425"/>
-            <a:stretch>
-              <a:fillRect/>
-            </a:stretch>
-          </p:blipFill>
-          <p:spPr>
-            <a:xfrm>
-              <a:off x="2752542" y="2735846"/>
-              <a:ext cx="6697010" cy="1267002"/>
-            </a:xfrm>
-            <a:prstGeom prst="rect">
-              <a:avLst/>
-            </a:prstGeom>
-          </p:spPr>
-        </p:pic>
-        <p:pic>
-          <p:nvPicPr>
-            <p:cNvPr id="12" name="Picture 11">
-              <a:extLst>
-                <a:ext uri="{FF2B5EF4-FFF2-40B4-BE49-F238E27FC236}">
-                  <a16:creationId xmlns:a16="http://schemas.microsoft.com/office/drawing/2014/main" id="{F5B42B2E-EE9B-904B-B4FD-9264CC0BBA8C}"/>
-                </a:ext>
-              </a:extLst>
-            </p:cNvPr>
-            <p:cNvPicPr>
-              <a:picLocks noChangeAspect="1"/>
-            </p:cNvPicPr>
-            <p:nvPr/>
-          </p:nvPicPr>
-          <p:blipFill>
-            <a:blip r:embed="rId3"/>
-            <a:stretch>
-              <a:fillRect/>
-            </a:stretch>
-          </p:blipFill>
-          <p:spPr>
-            <a:xfrm>
-              <a:off x="2633179" y="4140325"/>
-              <a:ext cx="6925642" cy="1409897"/>
-            </a:xfrm>
-            <a:prstGeom prst="rect">
-              <a:avLst/>
-            </a:prstGeom>
-          </p:spPr>
-        </p:pic>
-      </p:grpSp>
-    </p:spTree>
-    <p:extLst>
-      <p:ext uri="{BB962C8B-B14F-4D97-AF65-F5344CB8AC3E}">
-        <p14:creationId xmlns:p14="http://schemas.microsoft.com/office/powerpoint/2010/main" val="1091975325"/>
-      </p:ext>
-    </p:extLst>
-  </p:cSld>
-  <p:clrMapOvr>
-    <a:masterClrMapping/>
-  </p:clrMapOvr>
-</p:sld>
-</file>
-
-<file path=ppt/slides/slide9.xml><?xml version="1.0" encoding="utf-8"?>
-<p:sld xmlns:a="http://schemas.openxmlformats.org/drawingml/2006/main" xmlns:r="http://schemas.openxmlformats.org/officeDocument/2006/relationships" xmlns:p="http://schemas.openxmlformats.org/presentationml/2006/main">
-  <p:cSld>
-    <p:spTree>
-      <p:nvGrpSpPr>
-        <p:cNvPr id="1" name="">
-          <a:extLst>
-            <a:ext uri="{FF2B5EF4-FFF2-40B4-BE49-F238E27FC236}">
-              <a16:creationId xmlns:a16="http://schemas.microsoft.com/office/drawing/2014/main" id="{88491E6A-93E2-CEF2-7ACA-726C49939E6F}"/>
-            </a:ext>
-          </a:extLst>
-        </p:cNvPr>
-        <p:cNvGrpSpPr/>
-        <p:nvPr/>
-      </p:nvGrpSpPr>
-      <p:grpSpPr>
-        <a:xfrm>
-          <a:off x="0" y="0"/>
-          <a:ext cx="0" cy="0"/>
-          <a:chOff x="0" y="0"/>
-          <a:chExt cx="0" cy="0"/>
-        </a:xfrm>
-      </p:grpSpPr>
-      <p:sp>
-        <p:nvSpPr>
-          <p:cNvPr id="2" name="Title 1">
-            <a:extLst>
-              <a:ext uri="{FF2B5EF4-FFF2-40B4-BE49-F238E27FC236}">
-                <a16:creationId xmlns:a16="http://schemas.microsoft.com/office/drawing/2014/main" id="{47B137DB-77BF-3940-D056-CC1D48A6D047}"/>
-              </a:ext>
-            </a:extLst>
-          </p:cNvPr>
-          <p:cNvSpPr>
-            <a:spLocks noGrp="1"/>
-          </p:cNvSpPr>
-          <p:nvPr>
-            <p:ph type="title"/>
-          </p:nvPr>
-        </p:nvSpPr>
-        <p:spPr/>
-        <p:txBody>
-          <a:bodyPr/>
-          <a:lstStyle/>
-          <a:p>
-            <a:r>
-              <a:rPr lang="hr-HR" dirty="0">
-                <a:latin typeface="Arial" panose="020B0604020202020204" pitchFamily="34" charset="0"/>
-                <a:cs typeface="Arial" panose="020B0604020202020204" pitchFamily="34" charset="0"/>
-              </a:rPr>
-              <a:t>Okvir VIBE</a:t>
-            </a:r>
-            <a:endParaRPr lang="hr-HR" noProof="0" dirty="0">
-              <a:latin typeface="Arial" panose="020B0604020202020204" pitchFamily="34" charset="0"/>
-              <a:cs typeface="Arial" panose="020B0604020202020204" pitchFamily="34" charset="0"/>
-            </a:endParaRPr>
-          </a:p>
-        </p:txBody>
-      </p:sp>
-      <p:sp>
-        <p:nvSpPr>
-          <p:cNvPr id="5" name="Slide Number Placeholder 4">
-            <a:extLst>
-              <a:ext uri="{FF2B5EF4-FFF2-40B4-BE49-F238E27FC236}">
-                <a16:creationId xmlns:a16="http://schemas.microsoft.com/office/drawing/2014/main" id="{D0A7DCF3-5E34-BB41-57CB-ABCF2D70C6DF}"/>
-              </a:ext>
-            </a:extLst>
-          </p:cNvPr>
-          <p:cNvSpPr>
-            <a:spLocks noGrp="1"/>
-          </p:cNvSpPr>
-          <p:nvPr>
-            <p:ph type="sldNum" sz="quarter" idx="12"/>
-          </p:nvPr>
-        </p:nvSpPr>
-        <p:spPr/>
-        <p:txBody>
-          <a:bodyPr>
-            <a:normAutofit lnSpcReduction="10000"/>
-          </a:bodyPr>
-          <a:lstStyle/>
-          <a:p>
-            <a:r>
-              <a:rPr lang="hr-HR" dirty="0"/>
-              <a:t>7</a:t>
-            </a:r>
-          </a:p>
-        </p:txBody>
-      </p:sp>
-      <p:pic>
-        <p:nvPicPr>
-          <p:cNvPr id="8" name="Picture 7" descr="A diagram of a bird&#10;&#10;AI-generated content may be incorrect.">
-            <a:extLst>
-              <a:ext uri="{FF2B5EF4-FFF2-40B4-BE49-F238E27FC236}">
-                <a16:creationId xmlns:a16="http://schemas.microsoft.com/office/drawing/2014/main" id="{21D202AF-056A-3282-83D7-9E8DEB212C53}"/>
+                <a16:creationId xmlns:a16="http://schemas.microsoft.com/office/drawing/2014/main" id="{D482D868-98EC-393A-81F4-F3375AD394C9}"/>
               </a:ext>
             </a:extLst>
           </p:cNvPr>
@@ -11791,133 +13407,25 @@
           <p:nvPr/>
         </p:nvPicPr>
         <p:blipFill>
-          <a:blip r:embed="rId2">
-            <a:extLst>
-              <a:ext uri="{28A0092B-C50C-407E-A947-70E740481C1C}">
-                <a14:useLocalDpi xmlns:a14="http://schemas.microsoft.com/office/drawing/2010/main" val="0"/>
-              </a:ext>
-            </a:extLst>
-          </a:blip>
+          <a:blip r:embed="rId2"/>
           <a:stretch>
             <a:fillRect/>
           </a:stretch>
         </p:blipFill>
         <p:spPr>
           <a:xfrm>
-            <a:off x="501390" y="2334827"/>
-            <a:ext cx="10791450" cy="3446755"/>
+            <a:off x="2348696" y="4451583"/>
+            <a:ext cx="7411484" cy="781159"/>
           </a:xfrm>
           <a:prstGeom prst="rect">
             <a:avLst/>
           </a:prstGeom>
         </p:spPr>
       </p:pic>
-      <p:sp>
-        <p:nvSpPr>
-          <p:cNvPr id="4" name="TextBox 3">
-            <a:extLst>
-              <a:ext uri="{FF2B5EF4-FFF2-40B4-BE49-F238E27FC236}">
-                <a16:creationId xmlns:a16="http://schemas.microsoft.com/office/drawing/2014/main" id="{4338E3E9-19BE-142E-0026-27CB290AB2E2}"/>
-              </a:ext>
-            </a:extLst>
-          </p:cNvPr>
-          <p:cNvSpPr txBox="1"/>
-          <p:nvPr/>
-        </p:nvSpPr>
-        <p:spPr>
-          <a:xfrm>
-            <a:off x="2354555" y="5873373"/>
-            <a:ext cx="7085120" cy="492443"/>
-          </a:xfrm>
-          <a:prstGeom prst="rect">
-            <a:avLst/>
-          </a:prstGeom>
-          <a:noFill/>
-        </p:spPr>
-        <p:txBody>
-          <a:bodyPr wrap="square">
-            <a:spAutoFit/>
-          </a:bodyPr>
-          <a:lstStyle/>
-          <a:p>
-            <a:pPr algn="ctr"/>
-            <a:r>
-              <a:rPr lang="hr-HR" sz="2600" dirty="0">
-                <a:solidFill>
-                  <a:schemeClr val="tx1">
-                    <a:lumMod val="65000"/>
-                    <a:lumOff val="35000"/>
-                  </a:schemeClr>
-                </a:solidFill>
-                <a:latin typeface="Arial" panose="020B0604020202020204" pitchFamily="34" charset="0"/>
-                <a:cs typeface="Arial" panose="020B0604020202020204" pitchFamily="34" charset="0"/>
-              </a:rPr>
-              <a:t>P</a:t>
-            </a:r>
-            <a:r>
-              <a:rPr lang="hr-HR" sz="2600" noProof="0" dirty="0">
-                <a:solidFill>
-                  <a:schemeClr val="tx1">
-                    <a:lumMod val="65000"/>
-                    <a:lumOff val="35000"/>
-                  </a:schemeClr>
-                </a:solidFill>
-                <a:latin typeface="Arial" panose="020B0604020202020204" pitchFamily="34" charset="0"/>
-                <a:cs typeface="Arial" panose="020B0604020202020204" pitchFamily="34" charset="0"/>
-              </a:rPr>
-              <a:t>reuzeto iz </a:t>
-            </a:r>
-            <a:r>
-              <a:rPr lang="en-US" sz="2600" noProof="0" dirty="0">
-                <a:solidFill>
-                  <a:schemeClr val="accent1"/>
-                </a:solidFill>
-                <a:latin typeface="Arial" panose="020B0604020202020204" pitchFamily="34" charset="0"/>
-                <a:cs typeface="Arial" panose="020B0604020202020204" pitchFamily="34" charset="0"/>
-              </a:rPr>
-              <a:t>[</a:t>
-            </a:r>
-            <a:r>
-              <a:rPr lang="en-US" sz="2600" noProof="0" dirty="0">
-                <a:solidFill>
-                  <a:schemeClr val="accent1"/>
-                </a:solidFill>
-                <a:latin typeface="Arial" panose="020B0604020202020204" pitchFamily="34" charset="0"/>
-                <a:cs typeface="Arial" panose="020B0604020202020204" pitchFamily="34" charset="0"/>
-                <a:hlinkClick r:id="rId3">
-                  <a:extLst>
-                    <a:ext uri="{A12FA001-AC4F-418D-AE19-62706E023703}">
-                      <ahyp:hlinkClr xmlns:ahyp="http://schemas.microsoft.com/office/drawing/2018/hyperlinkcolor" val="tx"/>
-                    </a:ext>
-                  </a:extLst>
-                </a:hlinkClick>
-              </a:rPr>
-              <a:t>sabolic25iccv</a:t>
-            </a:r>
-            <a:r>
-              <a:rPr lang="en-US" sz="2600" noProof="0" dirty="0">
-                <a:solidFill>
-                  <a:schemeClr val="accent1"/>
-                </a:solidFill>
-                <a:latin typeface="Arial" panose="020B0604020202020204" pitchFamily="34" charset="0"/>
-                <a:cs typeface="Arial" panose="020B0604020202020204" pitchFamily="34" charset="0"/>
-              </a:rPr>
-              <a:t>]</a:t>
-            </a:r>
-            <a:endParaRPr lang="hr-HR" sz="2600" noProof="0" dirty="0">
-              <a:solidFill>
-                <a:schemeClr val="accent1"/>
-              </a:solidFill>
-              <a:latin typeface="Arial" panose="020B0604020202020204" pitchFamily="34" charset="0"/>
-              <a:cs typeface="Arial" panose="020B0604020202020204" pitchFamily="34" charset="0"/>
-            </a:endParaRPr>
-          </a:p>
-        </p:txBody>
-      </p:sp>
     </p:spTree>
     <p:extLst>
       <p:ext uri="{BB962C8B-B14F-4D97-AF65-F5344CB8AC3E}">
-        <p14:creationId xmlns:p14="http://schemas.microsoft.com/office/powerpoint/2010/main" val="3243471539"/>
+        <p14:creationId xmlns:p14="http://schemas.microsoft.com/office/powerpoint/2010/main" val="1143524220"/>
       </p:ext>
     </p:extLst>
   </p:cSld>

--- a/Prezentacija/Varijacijsko učenje na zašumljenim oznakama.pptx
+++ b/Prezentacija/Varijacijsko učenje na zašumljenim oznakama.pptx
@@ -13219,132 +13219,152 @@
         </p:nvSpPr>
         <p:spPr>
           <a:xfrm>
-            <a:off x="1261872" y="1828800"/>
-            <a:ext cx="9692640" cy="4675909"/>
+            <a:off x="1261871" y="1925782"/>
+            <a:ext cx="9925674" cy="4724399"/>
           </a:xfrm>
         </p:spPr>
         <p:txBody>
           <a:bodyPr>
-            <a:normAutofit lnSpcReduction="10000"/>
+            <a:normAutofit fontScale="92500"/>
           </a:bodyPr>
           <a:lstStyle/>
           <a:p>
-            <a:endParaRPr lang="hr-HR" sz="2600" dirty="0">
+            <a:r>
+              <a:rPr lang="hr-HR" sz="2800" dirty="0">
+                <a:latin typeface="Arial" panose="020B0604020202020204" pitchFamily="34" charset="0"/>
+                <a:cs typeface="Arial" panose="020B0604020202020204" pitchFamily="34" charset="0"/>
+              </a:rPr>
+              <a:t>iterativan algoritam za učenje uz </a:t>
+            </a:r>
+            <a:r>
+              <a:rPr lang="hr-HR" sz="2800" b="1" dirty="0">
+                <a:latin typeface="Arial" panose="020B0604020202020204" pitchFamily="34" charset="0"/>
+                <a:cs typeface="Arial" panose="020B0604020202020204" pitchFamily="34" charset="0"/>
+              </a:rPr>
+              <a:t>prisutnost skrivenih varijabli </a:t>
+            </a:r>
+          </a:p>
+          <a:p>
+            <a:r>
+              <a:rPr lang="hr-HR" sz="2800" dirty="0">
+                <a:latin typeface="Arial" panose="020B0604020202020204" pitchFamily="34" charset="0"/>
+                <a:cs typeface="Arial" panose="020B0604020202020204" pitchFamily="34" charset="0"/>
+              </a:rPr>
+              <a:t>naizmjenično provođenje </a:t>
+            </a:r>
+            <a:r>
+              <a:rPr lang="hr-HR" sz="2800" b="1" dirty="0">
+                <a:latin typeface="Arial" panose="020B0604020202020204" pitchFamily="34" charset="0"/>
+                <a:cs typeface="Arial" panose="020B0604020202020204" pitchFamily="34" charset="0"/>
+              </a:rPr>
+              <a:t>E koraka </a:t>
+            </a:r>
+            <a:r>
+              <a:rPr lang="hr-HR" sz="2800" dirty="0">
+                <a:latin typeface="Arial" panose="020B0604020202020204" pitchFamily="34" charset="0"/>
+                <a:cs typeface="Arial" panose="020B0604020202020204" pitchFamily="34" charset="0"/>
+              </a:rPr>
+              <a:t>i </a:t>
+            </a:r>
+            <a:r>
+              <a:rPr lang="hr-HR" sz="2800" b="1" dirty="0">
+                <a:latin typeface="Arial" panose="020B0604020202020204" pitchFamily="34" charset="0"/>
+                <a:cs typeface="Arial" panose="020B0604020202020204" pitchFamily="34" charset="0"/>
+              </a:rPr>
+              <a:t>M koraka </a:t>
+            </a:r>
+            <a:endParaRPr lang="hr-HR" sz="2800" dirty="0">
               <a:latin typeface="Arial" panose="020B0604020202020204" pitchFamily="34" charset="0"/>
               <a:cs typeface="Arial" panose="020B0604020202020204" pitchFamily="34" charset="0"/>
             </a:endParaRPr>
           </a:p>
           <a:p>
             <a:r>
-              <a:rPr lang="hr-HR" sz="2600" dirty="0">
-                <a:latin typeface="Arial" panose="020B0604020202020204" pitchFamily="34" charset="0"/>
-                <a:cs typeface="Arial" panose="020B0604020202020204" pitchFamily="34" charset="0"/>
-              </a:rPr>
-              <a:t>iterativan algoritam za učenje uz </a:t>
-            </a:r>
-            <a:r>
-              <a:rPr lang="hr-HR" sz="2600" b="1" dirty="0">
-                <a:latin typeface="Arial" panose="020B0604020202020204" pitchFamily="34" charset="0"/>
-                <a:cs typeface="Arial" panose="020B0604020202020204" pitchFamily="34" charset="0"/>
-              </a:rPr>
-              <a:t>prisutnost skrivenih varijabli </a:t>
-            </a:r>
-          </a:p>
-          <a:p>
-            <a:r>
-              <a:rPr lang="hr-HR" sz="2600" dirty="0">
-                <a:latin typeface="Arial" panose="020B0604020202020204" pitchFamily="34" charset="0"/>
-                <a:cs typeface="Arial" panose="020B0604020202020204" pitchFamily="34" charset="0"/>
-              </a:rPr>
-              <a:t>naizmjenično provođenje </a:t>
-            </a:r>
-            <a:r>
-              <a:rPr lang="hr-HR" sz="2600" b="1" dirty="0">
-                <a:latin typeface="Arial" panose="020B0604020202020204" pitchFamily="34" charset="0"/>
-                <a:cs typeface="Arial" panose="020B0604020202020204" pitchFamily="34" charset="0"/>
-              </a:rPr>
-              <a:t>E koraka </a:t>
-            </a:r>
-            <a:r>
-              <a:rPr lang="hr-HR" sz="2600" dirty="0">
-                <a:latin typeface="Arial" panose="020B0604020202020204" pitchFamily="34" charset="0"/>
-                <a:cs typeface="Arial" panose="020B0604020202020204" pitchFamily="34" charset="0"/>
-              </a:rPr>
-              <a:t>i </a:t>
-            </a:r>
-            <a:r>
-              <a:rPr lang="hr-HR" sz="2600" b="1" dirty="0">
-                <a:latin typeface="Arial" panose="020B0604020202020204" pitchFamily="34" charset="0"/>
-                <a:cs typeface="Arial" panose="020B0604020202020204" pitchFamily="34" charset="0"/>
-              </a:rPr>
-              <a:t>M koraka </a:t>
-            </a:r>
-            <a:endParaRPr lang="hr-HR" sz="2600" dirty="0">
+              <a:rPr lang="hr-HR" sz="2800" dirty="0">
+                <a:latin typeface="Arial" panose="020B0604020202020204" pitchFamily="34" charset="0"/>
+                <a:cs typeface="Arial" panose="020B0604020202020204" pitchFamily="34" charset="0"/>
+              </a:rPr>
+              <a:t>M korak se može provoditi više puta zaredom</a:t>
+            </a:r>
+          </a:p>
+          <a:p>
+            <a:endParaRPr lang="hr-HR" sz="2800" dirty="0">
               <a:latin typeface="Arial" panose="020B0604020202020204" pitchFamily="34" charset="0"/>
               <a:cs typeface="Arial" panose="020B0604020202020204" pitchFamily="34" charset="0"/>
             </a:endParaRPr>
           </a:p>
           <a:p>
-            <a:r>
-              <a:rPr lang="hr-HR" sz="2600" dirty="0">
-                <a:latin typeface="Arial" panose="020B0604020202020204" pitchFamily="34" charset="0"/>
-                <a:cs typeface="Arial" panose="020B0604020202020204" pitchFamily="34" charset="0"/>
-              </a:rPr>
-              <a:t>M korak se može provoditi više puta zaredom</a:t>
-            </a:r>
-          </a:p>
-          <a:p>
-            <a:endParaRPr lang="hr-HR" sz="2600" dirty="0">
+            <a:endParaRPr lang="hr-HR" sz="2800" dirty="0">
               <a:latin typeface="Arial" panose="020B0604020202020204" pitchFamily="34" charset="0"/>
               <a:cs typeface="Arial" panose="020B0604020202020204" pitchFamily="34" charset="0"/>
             </a:endParaRPr>
           </a:p>
           <a:p>
-            <a:endParaRPr lang="hr-HR" sz="2600" dirty="0">
-              <a:latin typeface="Arial" panose="020B0604020202020204" pitchFamily="34" charset="0"/>
-              <a:cs typeface="Arial" panose="020B0604020202020204" pitchFamily="34" charset="0"/>
-            </a:endParaRPr>
-          </a:p>
-          <a:p>
-            <a:r>
-              <a:rPr lang="hr-HR" sz="2600" dirty="0">
+            <a:r>
+              <a:rPr lang="hr-HR" sz="2800" dirty="0">
                 <a:latin typeface="Arial" panose="020B0604020202020204" pitchFamily="34" charset="0"/>
                 <a:cs typeface="Arial" panose="020B0604020202020204" pitchFamily="34" charset="0"/>
               </a:rPr>
               <a:t>E korak: </a:t>
             </a:r>
             <a:r>
-              <a:rPr lang="hr-HR" sz="2600" b="1" dirty="0">
+              <a:rPr lang="hr-HR" sz="2800" b="1" dirty="0">
                 <a:latin typeface="Arial" panose="020B0604020202020204" pitchFamily="34" charset="0"/>
                 <a:cs typeface="Arial" panose="020B0604020202020204" pitchFamily="34" charset="0"/>
               </a:rPr>
               <a:t>aproksimacija čistih pseudooznaka </a:t>
             </a:r>
             <a:r>
-              <a:rPr lang="hr-HR" sz="2600" dirty="0">
-                <a:latin typeface="Arial" panose="020B0604020202020204" pitchFamily="34" charset="0"/>
-                <a:cs typeface="Arial" panose="020B0604020202020204" pitchFamily="34" charset="0"/>
-              </a:rPr>
-              <a:t>(algoritam SK)</a:t>
-            </a:r>
-          </a:p>
-          <a:p>
-            <a:r>
-              <a:rPr lang="hr-HR" sz="2600" dirty="0">
+              <a:rPr lang="hr-HR" sz="2800" dirty="0">
+                <a:latin typeface="Arial" panose="020B0604020202020204" pitchFamily="34" charset="0"/>
+                <a:cs typeface="Arial" panose="020B0604020202020204" pitchFamily="34" charset="0"/>
+              </a:rPr>
+              <a:t>(algoritam SK</a:t>
+            </a:r>
+            <a:r>
+              <a:rPr lang="en-US" sz="2800" dirty="0">
+                <a:latin typeface="Arial" panose="020B0604020202020204" pitchFamily="34" charset="0"/>
+                <a:cs typeface="Arial" panose="020B0604020202020204" pitchFamily="34" charset="0"/>
+              </a:rPr>
+              <a:t>)</a:t>
+            </a:r>
+          </a:p>
+          <a:p>
+            <a:pPr marL="0" indent="0">
+              <a:buNone/>
+            </a:pPr>
+            <a:r>
+              <a:rPr lang="en-US" sz="2800" dirty="0">
+                <a:latin typeface="Arial" panose="020B0604020202020204" pitchFamily="34" charset="0"/>
+                <a:cs typeface="Arial" panose="020B0604020202020204" pitchFamily="34" charset="0"/>
+              </a:rPr>
+              <a:t>                </a:t>
+            </a:r>
+            <a:r>
+              <a:rPr lang="hr-HR" sz="2800" dirty="0">
+                <a:latin typeface="Arial" panose="020B0604020202020204" pitchFamily="34" charset="0"/>
+                <a:cs typeface="Arial" panose="020B0604020202020204" pitchFamily="34" charset="0"/>
+              </a:rPr>
+              <a:t>alternativno, korištenje modela iz prethodne iteracije</a:t>
+            </a:r>
+          </a:p>
+          <a:p>
+            <a:r>
+              <a:rPr lang="hr-HR" sz="2800" dirty="0">
                 <a:latin typeface="Arial" panose="020B0604020202020204" pitchFamily="34" charset="0"/>
                 <a:cs typeface="Arial" panose="020B0604020202020204" pitchFamily="34" charset="0"/>
               </a:rPr>
               <a:t>M korak: </a:t>
             </a:r>
             <a:r>
-              <a:rPr lang="hr-HR" sz="2600" b="1" dirty="0">
+              <a:rPr lang="hr-HR" sz="2800" b="1" dirty="0">
                 <a:latin typeface="Arial" panose="020B0604020202020204" pitchFamily="34" charset="0"/>
                 <a:cs typeface="Arial" panose="020B0604020202020204" pitchFamily="34" charset="0"/>
               </a:rPr>
               <a:t>ažuriranje parametara modela</a:t>
             </a:r>
             <a:r>
-              <a:rPr lang="hr-HR" sz="2600" dirty="0">
+              <a:rPr lang="hr-HR" sz="2800" dirty="0">
                 <a:latin typeface="Arial" panose="020B0604020202020204" pitchFamily="34" charset="0"/>
                 <a:cs typeface="Arial" panose="020B0604020202020204" pitchFamily="34" charset="0"/>
               </a:rPr>
@@ -13414,7 +13434,7 @@
         </p:blipFill>
         <p:spPr>
           <a:xfrm>
-            <a:off x="2348696" y="4451583"/>
+            <a:off x="2348696" y="3800425"/>
             <a:ext cx="7411484" cy="781159"/>
           </a:xfrm>
           <a:prstGeom prst="rect">

--- a/Prezentacija/Varijacijsko učenje na zašumljenim oznakama.pptx
+++ b/Prezentacija/Varijacijsko učenje na zašumljenim oznakama.pptx
@@ -7298,8 +7298,8 @@
         </p:nvSpPr>
         <p:spPr>
           <a:xfrm>
-            <a:off x="2211681" y="6363747"/>
-            <a:ext cx="7067017" cy="400110"/>
+            <a:off x="1864786" y="6363747"/>
+            <a:ext cx="8016825" cy="400110"/>
           </a:xfrm>
           <a:prstGeom prst="rect">
             <a:avLst/>
@@ -7335,7 +7335,7 @@
                 <a:latin typeface="Arial" panose="020B0604020202020204" pitchFamily="34" charset="0"/>
                 <a:cs typeface="Arial" panose="020B0604020202020204" pitchFamily="34" charset="0"/>
               </a:rPr>
-              <a:t> – nadzirano učenje		</a:t>
+              <a:t> – standardno nadzirano učenje		</a:t>
             </a:r>
             <a:r>
               <a:rPr lang="hr-HR" sz="2000" b="1" dirty="0">
@@ -8102,10 +8102,10 @@
       </p:sp>
       <p:sp>
         <p:nvSpPr>
-          <p:cNvPr id="3" name="TextBox 2">
+          <p:cNvPr id="6" name="TextBox 5">
             <a:extLst>
               <a:ext uri="{FF2B5EF4-FFF2-40B4-BE49-F238E27FC236}">
-                <a16:creationId xmlns:a16="http://schemas.microsoft.com/office/drawing/2014/main" id="{7B9E71DF-F153-ABD2-5A72-D94908C9E0AA}"/>
+                <a16:creationId xmlns:a16="http://schemas.microsoft.com/office/drawing/2014/main" id="{0FD9892C-FC9D-3C06-88BF-CCCFE4D703F3}"/>
               </a:ext>
             </a:extLst>
           </p:cNvPr>
@@ -8114,8 +8114,8 @@
         </p:nvSpPr>
         <p:spPr>
           <a:xfrm>
-            <a:off x="2211681" y="6363747"/>
-            <a:ext cx="7067017" cy="400110"/>
+            <a:off x="1864786" y="6363747"/>
+            <a:ext cx="8016825" cy="400110"/>
           </a:xfrm>
           <a:prstGeom prst="rect">
             <a:avLst/>
@@ -8151,7 +8151,7 @@
                 <a:latin typeface="Arial" panose="020B0604020202020204" pitchFamily="34" charset="0"/>
                 <a:cs typeface="Arial" panose="020B0604020202020204" pitchFamily="34" charset="0"/>
               </a:rPr>
-              <a:t> – nadzirano učenje		</a:t>
+              <a:t> – standardno nadzirano učenje		</a:t>
             </a:r>
             <a:r>
               <a:rPr lang="hr-HR" sz="2000" b="1" dirty="0">
@@ -13003,6 +13003,43 @@
               </a:rPr>
               <a:t>na zatrovanim podatcima</a:t>
             </a:r>
+          </a:p>
+          <a:p>
+            <a:r>
+              <a:rPr lang="hr-HR" sz="2600" i="1" noProof="0" dirty="0">
+                <a:latin typeface="Arial" panose="020B0604020202020204" pitchFamily="34" charset="0"/>
+                <a:cs typeface="Arial" panose="020B0604020202020204" pitchFamily="34" charset="0"/>
+              </a:rPr>
+              <a:t>y</a:t>
+            </a:r>
+            <a:r>
+              <a:rPr lang="hr-HR" sz="2600" noProof="0" dirty="0">
+                <a:latin typeface="Arial" panose="020B0604020202020204" pitchFamily="34" charset="0"/>
+                <a:cs typeface="Arial" panose="020B0604020202020204" pitchFamily="34" charset="0"/>
+              </a:rPr>
+              <a:t> – </a:t>
+            </a:r>
+            <a:r>
+              <a:rPr lang="hr-HR" sz="2600" dirty="0">
+                <a:latin typeface="Arial" panose="020B0604020202020204" pitchFamily="34" charset="0"/>
+                <a:cs typeface="Arial" panose="020B0604020202020204" pitchFamily="34" charset="0"/>
+              </a:rPr>
+              <a:t>zatrovana oznaka, </a:t>
+            </a:r>
+            <a:r>
+              <a:rPr lang="hr-HR" sz="2600" i="1" dirty="0">
+                <a:latin typeface="Arial" panose="020B0604020202020204" pitchFamily="34" charset="0"/>
+                <a:cs typeface="Arial" panose="020B0604020202020204" pitchFamily="34" charset="0"/>
+              </a:rPr>
+              <a:t>l</a:t>
+            </a:r>
+            <a:r>
+              <a:rPr lang="hr-HR" sz="2600" dirty="0">
+                <a:latin typeface="Arial" panose="020B0604020202020204" pitchFamily="34" charset="0"/>
+                <a:cs typeface="Arial" panose="020B0604020202020204" pitchFamily="34" charset="0"/>
+              </a:rPr>
+              <a:t> – skrivena čista oznaka</a:t>
+            </a:r>
             <a:endParaRPr lang="hr-HR" sz="2600" noProof="0" dirty="0">
               <a:latin typeface="Arial" panose="020B0604020202020204" pitchFamily="34" charset="0"/>
               <a:cs typeface="Arial" panose="020B0604020202020204" pitchFamily="34" charset="0"/>
@@ -13115,7 +13152,7 @@
         </p:blipFill>
         <p:spPr>
           <a:xfrm>
-            <a:off x="979528" y="3517221"/>
+            <a:off x="979528" y="4112969"/>
             <a:ext cx="9842352" cy="1358159"/>
           </a:xfrm>
           <a:prstGeom prst="rect">
